--- a/연구코드/aec/results/신촌_TAMA_연구보고서.pptx
+++ b/연구코드/aec/results/신촌_TAMA_연구보고서.pptx
@@ -3329,7 +3329,7 @@
                   <a:srgbClr val="2E75B6"/>
                 </a:solidFill>
               </a:rPr>
-              <a:t>데이터셋: 강남 CT  |  N=1,673명  |  Python (statsmodels · scikit-learn)</a:t>
+              <a:t>데이터셋: 신촌 CT  |  N=1,265명  |  Python (statsmodels · scikit-learn)</a:t>
             </a:r>
           </a:p>
         </p:txBody>
@@ -3646,7 +3646,7 @@
                   <a:srgbClr val="FFFFFF"/>
                 </a:solidFill>
               </a:rPr>
-              <a:t>0.7522</a:t>
+              <a:t>0.7230</a:t>
             </a:r>
           </a:p>
         </p:txBody>
@@ -3757,7 +3757,7 @@
                   <a:srgbClr val="FFFFFF"/>
                 </a:solidFill>
               </a:rPr>
-              <a:t>[0.726 – 0.777]</a:t>
+              <a:t>[0.6916 – 0.7542]</a:t>
             </a:r>
           </a:p>
         </p:txBody>
@@ -3868,7 +3868,7 @@
                   <a:srgbClr val="FFFFFF"/>
                 </a:solidFill>
               </a:rPr>
-              <a:t>0.708</a:t>
+              <a:t>0.6975</a:t>
             </a:r>
           </a:p>
         </p:txBody>
@@ -3979,7 +3979,7 @@
                   <a:srgbClr val="FFFFFF"/>
                 </a:solidFill>
               </a:rPr>
-              <a:t>0.680</a:t>
+              <a:t>0.6477</a:t>
             </a:r>
           </a:p>
         </p:txBody>
@@ -4090,7 +4090,7 @@
                   <a:srgbClr val="FFFFFF"/>
                 </a:solidFill>
               </a:rPr>
-              <a:t>0.410 / 0.881</a:t>
+              <a:t>0.3953 / 0.8664</a:t>
             </a:r>
           </a:p>
         </p:txBody>
@@ -4201,7 +4201,7 @@
                   <a:srgbClr val="FFFFFF"/>
                 </a:solidFill>
               </a:rPr>
-              <a:t>0.2145</a:t>
+              <a:t>0.1755</a:t>
             </a:r>
           </a:p>
         </p:txBody>
@@ -4366,7 +4366,7 @@
                             <a:srgbClr val="1A1A2E"/>
                           </a:solidFill>
                         </a:rPr>
-                        <a:t>4.346</a:t>
+                        <a:t>6.354</a:t>
                       </a:r>
                     </a:p>
                   </a:txBody>
@@ -4388,7 +4388,7 @@
                             <a:srgbClr val="1A1A2E"/>
                           </a:solidFill>
                         </a:rPr>
-                        <a:t>p=0.825 → 보정도 양호 ✔</a:t>
+                        <a:t>p=0.608 → 보정도 양호 ✔</a:t>
                       </a:r>
                     </a:p>
                   </a:txBody>
@@ -4434,7 +4434,7 @@
                             <a:srgbClr val="1A1A2E"/>
                           </a:solidFill>
                         </a:rPr>
-                        <a:t>0.1556</a:t>
+                        <a:t>0.1625</a:t>
                       </a:r>
                     </a:p>
                   </a:txBody>
@@ -4502,7 +4502,7 @@
                             <a:srgbClr val="1A1A2E"/>
                           </a:solidFill>
                         </a:rPr>
-                        <a:t>1,658.03</a:t>
+                        <a:t>1,364.49</a:t>
                       </a:r>
                     </a:p>
                   </a:txBody>
@@ -5037,7 +5037,7 @@
                             <a:srgbClr val="1A1A2E"/>
                           </a:solidFill>
                         </a:rPr>
-                        <a:t>0.5507</a:t>
+                        <a:t>0.5139</a:t>
                       </a:r>
                     </a:p>
                   </a:txBody>
@@ -5059,7 +5059,7 @@
                             <a:srgbClr val="1A1A2E"/>
                           </a:solidFill>
                         </a:rPr>
-                        <a:t>0.6358</a:t>
+                        <a:t>0.5437</a:t>
                       </a:r>
                     </a:p>
                   </a:txBody>
@@ -5081,7 +5081,7 @@
                             <a:srgbClr val="1A1A2E"/>
                           </a:solidFill>
                         </a:rPr>
-                        <a:t>0.6579</a:t>
+                        <a:t>0.584</a:t>
                       </a:r>
                     </a:p>
                   </a:txBody>
@@ -5103,7 +5103,7 @@
                             <a:srgbClr val="1A1A2E"/>
                           </a:solidFill>
                         </a:rPr>
-                        <a:t>+0.0851 ▲</a:t>
+                        <a:t>+0.0298 ▲</a:t>
                       </a:r>
                     </a:p>
                   </a:txBody>
@@ -5125,7 +5125,7 @@
                             <a:srgbClr val="1A1A2E"/>
                           </a:solidFill>
                         </a:rPr>
-                        <a:t>+0.0221 ▲</a:t>
+                        <a:t>+0.0403 ▲</a:t>
                       </a:r>
                     </a:p>
                   </a:txBody>
@@ -5171,7 +5171,7 @@
                             <a:srgbClr val="1A1A2E"/>
                           </a:solidFill>
                         </a:rPr>
-                        <a:t>0.5502</a:t>
+                        <a:t>0.5132</a:t>
                       </a:r>
                     </a:p>
                   </a:txBody>
@@ -5193,7 +5193,7 @@
                             <a:srgbClr val="1A1A2E"/>
                           </a:solidFill>
                         </a:rPr>
-                        <a:t>0.6343</a:t>
+                        <a:t>0.5411</a:t>
                       </a:r>
                     </a:p>
                   </a:txBody>
@@ -5215,7 +5215,7 @@
                             <a:srgbClr val="1A1A2E"/>
                           </a:solidFill>
                         </a:rPr>
-                        <a:t>0.6502</a:t>
+                        <a:t>0.5661</a:t>
                       </a:r>
                     </a:p>
                   </a:txBody>
@@ -5237,7 +5237,7 @@
                             <a:srgbClr val="1A1A2E"/>
                           </a:solidFill>
                         </a:rPr>
-                        <a:t>+0.0841 ▲</a:t>
+                        <a:t>+0.0279 ▲</a:t>
                       </a:r>
                     </a:p>
                   </a:txBody>
@@ -5259,7 +5259,7 @@
                             <a:srgbClr val="1A1A2E"/>
                           </a:solidFill>
                         </a:rPr>
-                        <a:t>+0.0159 ▲</a:t>
+                        <a:t>+0.0250 ▲</a:t>
                       </a:r>
                     </a:p>
                   </a:txBody>
@@ -5305,7 +5305,7 @@
                             <a:srgbClr val="1A1A2E"/>
                           </a:solidFill>
                         </a:rPr>
-                        <a:t>20.43</a:t>
+                        <a:t>21.5585</a:t>
                       </a:r>
                     </a:p>
                   </a:txBody>
@@ -5327,7 +5327,7 @@
                             <a:srgbClr val="1A1A2E"/>
                           </a:solidFill>
                         </a:rPr>
-                        <a:t>18.40</a:t>
+                        <a:t>20.8889</a:t>
                       </a:r>
                     </a:p>
                   </a:txBody>
@@ -5349,7 +5349,7 @@
                             <a:srgbClr val="1A1A2E"/>
                           </a:solidFill>
                         </a:rPr>
-                        <a:t>17.83</a:t>
+                        <a:t>19.9457</a:t>
                       </a:r>
                     </a:p>
                   </a:txBody>
@@ -5371,7 +5371,7 @@
                             <a:srgbClr val="1A1A2E"/>
                           </a:solidFill>
                         </a:rPr>
-                        <a:t>-2.04 ▼</a:t>
+                        <a:t>-0.67 ▼</a:t>
                       </a:r>
                     </a:p>
                   </a:txBody>
@@ -5393,7 +5393,7 @@
                             <a:srgbClr val="1A1A2E"/>
                           </a:solidFill>
                         </a:rPr>
-                        <a:t>-0.57 ▼</a:t>
+                        <a:t>-0.94 ▼</a:t>
                       </a:r>
                     </a:p>
                   </a:txBody>
@@ -5439,7 +5439,7 @@
                             <a:srgbClr val="1A1A2E"/>
                           </a:solidFill>
                         </a:rPr>
-                        <a:t>14,849</a:t>
+                        <a:t>11364.96</a:t>
                       </a:r>
                     </a:p>
                   </a:txBody>
@@ -5461,7 +5461,7 @@
                             <a:srgbClr val="1A1A2E"/>
                           </a:solidFill>
                         </a:rPr>
-                        <a:t>14,508</a:t>
+                        <a:t>11295.14</a:t>
                       </a:r>
                     </a:p>
                   </a:txBody>
@@ -5483,7 +5483,7 @@
                             <a:srgbClr val="1A1A2E"/>
                           </a:solidFill>
                         </a:rPr>
-                        <a:t>14,463</a:t>
+                        <a:t>11268.24</a:t>
                       </a:r>
                     </a:p>
                   </a:txBody>
@@ -5505,7 +5505,7 @@
                             <a:srgbClr val="1A1A2E"/>
                           </a:solidFill>
                         </a:rPr>
-                        <a:t>-341 ▼</a:t>
+                        <a:t>-70 ▼</a:t>
                       </a:r>
                     </a:p>
                   </a:txBody>
@@ -5527,7 +5527,7 @@
                             <a:srgbClr val="1A1A2E"/>
                           </a:solidFill>
                         </a:rPr>
-                        <a:t>-45 ▼</a:t>
+                        <a:t>-27 ▼</a:t>
                       </a:r>
                     </a:p>
                   </a:txBody>
@@ -5571,7 +5571,7 @@
                   <a:srgbClr val="2E75B6"/>
                 </a:solidFill>
               </a:rPr>
-              <a:t>AEC 특징 추가(Case1→2)로 R² +8.5%p 향상  |  CT 모델명 추가(Case2→3)로 추가 +2.2%p</a:t>
+              <a:t>AEC 특징 추가(Case1→2)로 R² +3.0%p 향상  |  CT 모델명 추가(Case2→3)로 추가 +4.0%p</a:t>
             </a:r>
           </a:p>
         </p:txBody>
@@ -6074,7 +6074,7 @@
                             <a:srgbClr val="1A1A2E"/>
                           </a:solidFill>
                         </a:rPr>
-                        <a:t>0.624</a:t>
+                        <a:t>0.6151</a:t>
                       </a:r>
                     </a:p>
                   </a:txBody>
@@ -6096,7 +6096,7 @@
                             <a:srgbClr val="1A1A2E"/>
                           </a:solidFill>
                         </a:rPr>
-                        <a:t>0.720</a:t>
+                        <a:t>0.6567</a:t>
                       </a:r>
                     </a:p>
                   </a:txBody>
@@ -6118,7 +6118,7 @@
                             <a:srgbClr val="1A1A2E"/>
                           </a:solidFill>
                         </a:rPr>
-                        <a:t>0.7522</a:t>
+                        <a:t>0.723</a:t>
                       </a:r>
                     </a:p>
                   </a:txBody>
@@ -6140,7 +6140,7 @@
                             <a:srgbClr val="1A1A2E"/>
                           </a:solidFill>
                         </a:rPr>
-                        <a:t>+0.096 ▲▲</a:t>
+                        <a:t>+0.042 ▲▲</a:t>
                       </a:r>
                     </a:p>
                   </a:txBody>
@@ -6162,7 +6162,7 @@
                             <a:srgbClr val="1A1A2E"/>
                           </a:solidFill>
                         </a:rPr>
-                        <a:t>+0.032 ▲</a:t>
+                        <a:t>+0.066 ▲</a:t>
                       </a:r>
                     </a:p>
                   </a:txBody>
@@ -6208,7 +6208,7 @@
                             <a:srgbClr val="1A1A2E"/>
                           </a:solidFill>
                         </a:rPr>
-                        <a:t>0.0516</a:t>
+                        <a:t>0.0321</a:t>
                       </a:r>
                     </a:p>
                   </a:txBody>
@@ -6230,7 +6230,7 @@
                             <a:srgbClr val="1A1A2E"/>
                           </a:solidFill>
                         </a:rPr>
-                        <a:t>0.1596</a:t>
+                        <a:t>0.0792</a:t>
                       </a:r>
                     </a:p>
                   </a:txBody>
@@ -6252,7 +6252,7 @@
                             <a:srgbClr val="1A1A2E"/>
                           </a:solidFill>
                         </a:rPr>
-                        <a:t>0.2145</a:t>
+                        <a:t>0.1755</a:t>
                       </a:r>
                     </a:p>
                   </a:txBody>
@@ -6274,7 +6274,7 @@
                             <a:srgbClr val="1A1A2E"/>
                           </a:solidFill>
                         </a:rPr>
-                        <a:t>+0.108 ▲▲</a:t>
+                        <a:t>+0.047 ▲▲</a:t>
                       </a:r>
                     </a:p>
                   </a:txBody>
@@ -6296,7 +6296,7 @@
                             <a:srgbClr val="1A1A2E"/>
                           </a:solidFill>
                         </a:rPr>
-                        <a:t>+0.055 ▲</a:t>
+                        <a:t>+0.096 ▲</a:t>
                       </a:r>
                     </a:p>
                   </a:txBody>
@@ -6342,7 +6342,7 @@
                             <a:srgbClr val="1A1A2E"/>
                           </a:solidFill>
                         </a:rPr>
-                        <a:t>1,788</a:t>
+                        <a:t>1396.11</a:t>
                       </a:r>
                     </a:p>
                   </a:txBody>
@@ -6364,7 +6364,7 @@
                             <a:srgbClr val="1A1A2E"/>
                           </a:solidFill>
                         </a:rPr>
-                        <a:t>1,668</a:t>
+                        <a:t>1364.37</a:t>
                       </a:r>
                     </a:p>
                   </a:txBody>
@@ -6386,7 +6386,7 @@
                             <a:srgbClr val="1A1A2E"/>
                           </a:solidFill>
                         </a:rPr>
-                        <a:t>1,658</a:t>
+                        <a:t>1364.49</a:t>
                       </a:r>
                     </a:p>
                   </a:txBody>
@@ -6408,7 +6408,7 @@
                             <a:srgbClr val="1A1A2E"/>
                           </a:solidFill>
                         </a:rPr>
-                        <a:t>-120 ▼▼</a:t>
+                        <a:t>-32 ▼▼</a:t>
                       </a:r>
                     </a:p>
                   </a:txBody>
@@ -6430,7 +6430,7 @@
                             <a:srgbClr val="1A1A2E"/>
                           </a:solidFill>
                         </a:rPr>
-                        <a:t>-10 ▼</a:t>
+                        <a:t>0 ▼</a:t>
                       </a:r>
                     </a:p>
                   </a:txBody>
@@ -6476,7 +6476,7 @@
                             <a:srgbClr val="1A1A2E"/>
                           </a:solidFill>
                         </a:rPr>
-                        <a:t>1.26e-03</a:t>
+                        <a:t>1.52e-03</a:t>
                       </a:r>
                     </a:p>
                   </a:txBody>
@@ -6498,7 +6498,7 @@
                             <a:srgbClr val="1A1A2E"/>
                           </a:solidFill>
                         </a:rPr>
-                        <a:t>0.816</a:t>
+                        <a:t>0.090</a:t>
                       </a:r>
                     </a:p>
                   </a:txBody>
@@ -6520,7 +6520,7 @@
                             <a:srgbClr val="1A1A2E"/>
                           </a:solidFill>
                         </a:rPr>
-                        <a:t>0.825</a:t>
+                        <a:t>0.608</a:t>
                       </a:r>
                     </a:p>
                   </a:txBody>
@@ -6608,7 +6608,7 @@
                   <a:srgbClr val="2E75B6"/>
                 </a:solidFill>
               </a:rPr>
-              <a:t>AEC 추가(Case1→2)로 AUC +9.6%p 대폭 향상  |  CT 모델명 추가(Case2→3)로 +3.2%p 추가 개선</a:t>
+              <a:t>AEC 추가(Case1→2)로 AUC +4.2%p 대폭 향상  |  CT 모델명 추가(Case2→3)로 +6.6%p 추가 개선</a:t>
             </a:r>
           </a:p>
         </p:txBody>
@@ -7050,7 +7050,7 @@
                   <a:srgbClr val="FFFFFF"/>
                 </a:solidFill>
               </a:rPr>
-              <a:t>선형 단변량: Sex 단독 R²=0.518  |  남성 TAMA가 여성 대비 평균 +44.8 cm²</a:t>
+              <a:t>선형 단변량: Sex 단독 R²=0.495  |  남성 TAMA가 여성 대비 평균 +43.5 cm²</a:t>
             </a:r>
           </a:p>
         </p:txBody>
@@ -7204,8 +7204,8 @@
                   <a:srgbClr val="FFFFFF"/>
                 </a:solidFill>
               </a:rPr>
-              <a:t>Case1→2  선형 R²  +0.085 (0.551→0.636)
-Case1→2  로지스틱 AUC  +0.096 (0.624→0.720)</a:t>
+              <a:t>Case1→2  선형 R²  +0.030 (0.514→0.544)
+Case1→2  로지스틱 AUC  +0.042 (0.615→0.657)</a:t>
             </a:r>
           </a:p>
         </p:txBody>
@@ -7359,7 +7359,7 @@
                   <a:srgbClr val="FFFFFF"/>
                 </a:solidFill>
               </a:rPr>
-              <a:t>Case2→3  선형 R²  +0.022  |  로지스틱 AUC  +0.032
+              <a:t>Case2→3  선형 R²  +0.040  |  로지스틱 AUC  +0.066
 AIC 추가 감소 → 모델 적합도 개선 확인</a:t>
             </a:r>
           </a:p>
@@ -7514,8 +7514,8 @@
                   <a:srgbClr val="FFFFFF"/>
                 </a:solidFill>
               </a:rPr>
-              <a:t>선형: R²=0.6579, RMSE=17.83 cm²
-로지스틱: AUC=0.7522 [0.726–0.777]  |  HL p=0.825 (보정도 양호)</a:t>
+              <a:t>선형: R²=0.5840, RMSE=19.95 cm²
+로지스틱: AUC=0.7230 [0.6916 – 0.7542]  |  HL p=0.608 (보정도 양호)</a:t>
             </a:r>
           </a:p>
         </p:txBody>
@@ -7902,7 +7902,7 @@
                   <a:srgbClr val="1A1A2E"/>
                 </a:solidFill>
               </a:rPr>
-              <a:t>• 단일 기관(강남) 데이터 → 외부 검증(신촌 데이터) 필요</a:t>
+              <a:t>• 단일 기관(신촌) 데이터 → 외부 검증(강남 데이터) 필요</a:t>
             </a:r>
           </a:p>
         </p:txBody>
@@ -8049,7 +8049,7 @@
                   <a:srgbClr val="1A1A2E"/>
                 </a:solidFill>
               </a:rPr>
-              <a:t>• 신촌 데이터를 이용한 외부 검증 (External Validation)</a:t>
+              <a:t>• 강남 데이터를 이용한 외부 검증 (External Validation)</a:t>
             </a:r>
           </a:p>
         </p:txBody>
@@ -10445,7 +10445,7 @@
                             <a:srgbClr val="1A1A2E"/>
                           </a:solidFill>
                         </a:rPr>
-                        <a:t>Case 2 + CT 모델명 (ManufacturerModelName — 30개 dummy) + KVP</a:t>
+                        <a:t>Case 2 + CT 모델명 (ManufacturerModelName — 45개 dummy) + KVP</a:t>
                       </a:r>
                     </a:p>
                   </a:txBody>
@@ -10740,7 +10740,7 @@
                   <a:srgbClr val="1A355E"/>
                 </a:solidFill>
               </a:rPr>
-              <a:t>1,673명</a:t>
+              <a:t>1,265명</a:t>
             </a:r>
           </a:p>
         </p:txBody>
@@ -10853,7 +10853,7 @@
                   <a:srgbClr val="1A355E"/>
                 </a:solidFill>
               </a:rPr>
-              <a:t>665명 (39.7%)</a:t>
+              <a:t>637명 (50.4%)</a:t>
             </a:r>
           </a:p>
         </p:txBody>
@@ -10966,7 +10966,7 @@
                   <a:srgbClr val="1A355E"/>
                 </a:solidFill>
               </a:rPr>
-              <a:t>1,008명 (60.3%)</a:t>
+              <a:t>628명 (49.6%)</a:t>
             </a:r>
           </a:p>
         </p:txBody>
@@ -11079,7 +11079,7 @@
                   <a:srgbClr val="1A355E"/>
                 </a:solidFill>
               </a:rPr>
-              <a:t>31종</a:t>
+              <a:t>46종</a:t>
             </a:r>
           </a:p>
         </p:txBody>
@@ -11192,7 +11192,7 @@
                   <a:srgbClr val="1A355E"/>
                 </a:solidFill>
               </a:rPr>
-              <a:t>14 ~ 299 cm²</a:t>
+              <a:t>1 ~ 279 cm²</a:t>
             </a:r>
           </a:p>
         </p:txBody>
@@ -11305,7 +11305,7 @@
                   <a:srgbClr val="1A355E"/>
                 </a:solidFill>
               </a:rPr>
-              <a:t>122.51 (±30.49) cm²</a:t>
+              <a:t>126.32 (±30.93) cm²</a:t>
             </a:r>
           </a:p>
         </p:txBody>
@@ -11562,7 +11562,7 @@
                             <a:srgbClr val="1A1A2E"/>
                           </a:solidFill>
                         </a:rPr>
-                        <a:t>665</a:t>
+                        <a:t>637</a:t>
                       </a:r>
                     </a:p>
                   </a:txBody>
@@ -11584,7 +11584,7 @@
                             <a:srgbClr val="1A1A2E"/>
                           </a:solidFill>
                         </a:rPr>
-                        <a:t>149.52</a:t>
+                        <a:t>147.92</a:t>
                       </a:r>
                     </a:p>
                   </a:txBody>
@@ -11606,7 +11606,7 @@
                             <a:srgbClr val="1A1A2E"/>
                           </a:solidFill>
                         </a:rPr>
-                        <a:t>27.46</a:t>
+                        <a:t>26.92</a:t>
                       </a:r>
                     </a:p>
                   </a:txBody>
@@ -11628,7 +11628,7 @@
                             <a:srgbClr val="1A1A2E"/>
                           </a:solidFill>
                         </a:rPr>
-                        <a:t>150.00</a:t>
+                        <a:t>147.00</a:t>
                       </a:r>
                     </a:p>
                   </a:txBody>
@@ -11650,7 +11650,7 @@
                             <a:srgbClr val="1A1A2E"/>
                           </a:solidFill>
                         </a:rPr>
-                        <a:t>132.00</a:t>
+                        <a:t>131.00</a:t>
                       </a:r>
                     </a:p>
                   </a:txBody>
@@ -11672,7 +11672,7 @@
                             <a:srgbClr val="1A1A2E"/>
                           </a:solidFill>
                         </a:rPr>
-                        <a:t>166.00</a:t>
+                        <a:t>165.00</a:t>
                       </a:r>
                     </a:p>
                   </a:txBody>
@@ -11718,7 +11718,7 @@
                             <a:srgbClr val="1A1A2E"/>
                           </a:solidFill>
                         </a:rPr>
-                        <a:t>1,008</a:t>
+                        <a:t>628</a:t>
                       </a:r>
                     </a:p>
                   </a:txBody>
@@ -11740,7 +11740,7 @@
                             <a:srgbClr val="1A1A2E"/>
                           </a:solidFill>
                         </a:rPr>
-                        <a:t>104.69</a:t>
+                        <a:t>104.41</a:t>
                       </a:r>
                     </a:p>
                   </a:txBody>
@@ -11762,7 +11762,7 @@
                             <a:srgbClr val="1A1A2E"/>
                           </a:solidFill>
                         </a:rPr>
-                        <a:t>15.71</a:t>
+                        <a:t>15.47</a:t>
                       </a:r>
                     </a:p>
                   </a:txBody>
@@ -11784,7 +11784,7 @@
                             <a:srgbClr val="1A1A2E"/>
                           </a:solidFill>
                         </a:rPr>
-                        <a:t>103.00</a:t>
+                        <a:t>103.50</a:t>
                       </a:r>
                     </a:p>
                   </a:txBody>
@@ -11951,7 +11951,7 @@
               </a:rPr>
               <a:t>• 남성: TAMA &lt; 132 cm²  →  Low Muscle (1)
 • 여성: TAMA &lt; 95 cm²  →  Low Muscle (1)
-• 양성 비율: 400 / 1,673 = 23.9 %</a:t>
+• 양성 비율: 314 / 1,265 = 24.8 %</a:t>
             </a:r>
           </a:p>
         </p:txBody>
@@ -13688,7 +13688,7 @@
                             <a:srgbClr val="1A1A2E"/>
                           </a:solidFill>
                         </a:rPr>
-                        <a:t>One-hot encoding (drop_first=True) → 30개 더미</a:t>
+                        <a:t>One-hot encoding (drop_first=True) → 45개 더미</a:t>
                       </a:r>
                     </a:p>
                   </a:txBody>
@@ -14633,7 +14633,7 @@
                             <a:srgbClr val="1A1A2E"/>
                           </a:solidFill>
                         </a:rPr>
-                        <a:t>44.84 *</a:t>
+                        <a:t>43.51 *</a:t>
                       </a:r>
                     </a:p>
                   </a:txBody>
@@ -14655,7 +14655,7 @@
                             <a:srgbClr val="1A1A2E"/>
                           </a:solidFill>
                         </a:rPr>
-                        <a:t>[42.76, 46.91]</a:t>
+                        <a:t>[41.08, 45.93]</a:t>
                       </a:r>
                     </a:p>
                   </a:txBody>
@@ -14699,7 +14699,7 @@
                             <a:srgbClr val="1A1A2E"/>
                           </a:solidFill>
                         </a:rPr>
-                        <a:t>0.518</a:t>
+                        <a:t>0.495</a:t>
                       </a:r>
                     </a:p>
                   </a:txBody>
@@ -14745,7 +14745,7 @@
                             <a:srgbClr val="1A1A2E"/>
                           </a:solidFill>
                         </a:rPr>
-                        <a:t>-2.99 *</a:t>
+                        <a:t>-2.54 *</a:t>
                       </a:r>
                     </a:p>
                   </a:txBody>
@@ -14767,7 +14767,7 @@
                             <a:srgbClr val="1A1A2E"/>
                           </a:solidFill>
                         </a:rPr>
-                        <a:t>[-4.45, -1.54]</a:t>
+                        <a:t>[-4.24, -0.84]</a:t>
                       </a:r>
                     </a:p>
                   </a:txBody>
@@ -14789,7 +14789,7 @@
                             <a:srgbClr val="1A1A2E"/>
                           </a:solidFill>
                         </a:rPr>
-                        <a:t>&lt; 0.001</a:t>
+                        <a:t>0.0034</a:t>
                       </a:r>
                     </a:p>
                   </a:txBody>
@@ -14811,7 +14811,7 @@
                             <a:srgbClr val="1A1A2E"/>
                           </a:solidFill>
                         </a:rPr>
-                        <a:t>0.010</a:t>
+                        <a:t>0.007</a:t>
                       </a:r>
                     </a:p>
                   </a:txBody>
@@ -14857,7 +14857,7 @@
                             <a:srgbClr val="1A1A2E"/>
                           </a:solidFill>
                         </a:rPr>
-                        <a:t>11.17 *</a:t>
+                        <a:t>7.72 *</a:t>
                       </a:r>
                     </a:p>
                   </a:txBody>
@@ -14879,7 +14879,7 @@
                             <a:srgbClr val="1A1A2E"/>
                           </a:solidFill>
                         </a:rPr>
-                        <a:t>[9.81, 12.53]</a:t>
+                        <a:t>[6.07, 9.37]</a:t>
                       </a:r>
                     </a:p>
                   </a:txBody>
@@ -14923,7 +14923,7 @@
                             <a:srgbClr val="1A1A2E"/>
                           </a:solidFill>
                         </a:rPr>
-                        <a:t>0.134</a:t>
+                        <a:t>0.062</a:t>
                       </a:r>
                     </a:p>
                   </a:txBody>
@@ -14969,7 +14969,7 @@
                             <a:srgbClr val="1A1A2E"/>
                           </a:solidFill>
                         </a:rPr>
-                        <a:t>-10.64 *</a:t>
+                        <a:t>-3.89 *</a:t>
                       </a:r>
                     </a:p>
                   </a:txBody>
@@ -14991,7 +14991,7 @@
                             <a:srgbClr val="1A1A2E"/>
                           </a:solidFill>
                         </a:rPr>
-                        <a:t>[-12.01, -9.27]</a:t>
+                        <a:t>[-5.58, -2.19]</a:t>
                       </a:r>
                     </a:p>
                   </a:txBody>
@@ -15035,7 +15035,7 @@
                             <a:srgbClr val="1A1A2E"/>
                           </a:solidFill>
                         </a:rPr>
-                        <a:t>0.122</a:t>
+                        <a:t>0.016</a:t>
                       </a:r>
                     </a:p>
                   </a:txBody>
@@ -15081,7 +15081,7 @@
                             <a:srgbClr val="1A1A2E"/>
                           </a:solidFill>
                         </a:rPr>
-                        <a:t>-10.47 *</a:t>
+                        <a:t>-1.57</a:t>
                       </a:r>
                     </a:p>
                   </a:txBody>
@@ -15103,7 +15103,7 @@
                             <a:srgbClr val="1A1A2E"/>
                           </a:solidFill>
                         </a:rPr>
-                        <a:t>[-11.84, -9.09]</a:t>
+                        <a:t>[-3.28, 0.13]</a:t>
                       </a:r>
                     </a:p>
                   </a:txBody>
@@ -15125,7 +15125,7 @@
                             <a:srgbClr val="1A1A2E"/>
                           </a:solidFill>
                         </a:rPr>
-                        <a:t>&lt; 0.001</a:t>
+                        <a:t>0.070</a:t>
                       </a:r>
                     </a:p>
                   </a:txBody>
@@ -15147,7 +15147,7 @@
                             <a:srgbClr val="1A1A2E"/>
                           </a:solidFill>
                         </a:rPr>
-                        <a:t>0.118</a:t>
+                        <a:t>0.003</a:t>
                       </a:r>
                     </a:p>
                   </a:txBody>
@@ -15193,7 +15193,7 @@
                             <a:srgbClr val="1A1A2E"/>
                           </a:solidFill>
                         </a:rPr>
-                        <a:t>1.28</a:t>
+                        <a:t>3.13 *</a:t>
                       </a:r>
                     </a:p>
                   </a:txBody>
@@ -15215,7 +15215,7 @@
                             <a:srgbClr val="1A1A2E"/>
                           </a:solidFill>
                         </a:rPr>
-                        <a:t>[-0.19, 2.74]</a:t>
+                        <a:t>[1.43, 4.83]</a:t>
                       </a:r>
                     </a:p>
                   </a:txBody>
@@ -15237,7 +15237,7 @@
                             <a:srgbClr val="1A1A2E"/>
                           </a:solidFill>
                         </a:rPr>
-                        <a:t>0.087</a:t>
+                        <a:t>&lt; 0.001</a:t>
                       </a:r>
                     </a:p>
                   </a:txBody>
@@ -15259,7 +15259,7 @@
                             <a:srgbClr val="1A1A2E"/>
                           </a:solidFill>
                         </a:rPr>
-                        <a:t>0.002</a:t>
+                        <a:t>0.010</a:t>
                       </a:r>
                     </a:p>
                   </a:txBody>
@@ -15305,7 +15305,7 @@
                             <a:srgbClr val="1A1A2E"/>
                           </a:solidFill>
                         </a:rPr>
-                        <a:t>9.05 *</a:t>
+                        <a:t>7.39 *</a:t>
                       </a:r>
                     </a:p>
                   </a:txBody>
@@ -15327,7 +15327,7 @@
                             <a:srgbClr val="1A1A2E"/>
                           </a:solidFill>
                         </a:rPr>
-                        <a:t>[7.65, 10.45]</a:t>
+                        <a:t>[5.74, 9.05]</a:t>
                       </a:r>
                     </a:p>
                   </a:txBody>
@@ -15371,7 +15371,7 @@
                             <a:srgbClr val="1A1A2E"/>
                           </a:solidFill>
                         </a:rPr>
-                        <a:t>0.088</a:t>
+                        <a:t>0.057</a:t>
                       </a:r>
                     </a:p>
                   </a:txBody>
@@ -15417,7 +15417,7 @@
                             <a:srgbClr val="1A1A2E"/>
                           </a:solidFill>
                         </a:rPr>
-                        <a:t>N/A (범주형)*</a:t>
+                        <a:t>N/A (범주형) *</a:t>
                       </a:r>
                     </a:p>
                   </a:txBody>
@@ -15461,7 +15461,7 @@
                             <a:srgbClr val="1A1A2E"/>
                           </a:solidFill>
                         </a:rPr>
-                        <a:t>6.0e-06</a:t>
+                        <a:t>0.0036</a:t>
                       </a:r>
                     </a:p>
                   </a:txBody>
@@ -15483,7 +15483,7 @@
                             <a:srgbClr val="1A1A2E"/>
                           </a:solidFill>
                         </a:rPr>
-                        <a:t>0.045</a:t>
+                        <a:t>0.058</a:t>
                       </a:r>
                     </a:p>
                   </a:txBody>
@@ -15926,7 +15926,7 @@
                   <a:srgbClr val="FFFFFF"/>
                 </a:solidFill>
               </a:rPr>
-              <a:t>0.6579</a:t>
+              <a:t>0.5840</a:t>
             </a:r>
           </a:p>
         </p:txBody>
@@ -16037,7 +16037,7 @@
                   <a:srgbClr val="FFFFFF"/>
                 </a:solidFill>
               </a:rPr>
-              <a:t>0.6502</a:t>
+              <a:t>0.5661</a:t>
             </a:r>
           </a:p>
         </p:txBody>
@@ -16148,7 +16148,7 @@
                   <a:srgbClr val="FFFFFF"/>
                 </a:solidFill>
               </a:rPr>
-              <a:t>17.83 cm²</a:t>
+              <a:t>19.95 cm²</a:t>
             </a:r>
           </a:p>
         </p:txBody>
@@ -16259,7 +16259,7 @@
                   <a:srgbClr val="FFFFFF"/>
                 </a:solidFill>
               </a:rPr>
-              <a:t>13.20 cm²</a:t>
+              <a:t>14.66 cm²</a:t>
             </a:r>
           </a:p>
         </p:txBody>
@@ -16370,7 +16370,7 @@
                   <a:srgbClr val="FFFFFF"/>
                 </a:solidFill>
               </a:rPr>
-              <a:t>85.00
+              <a:t>32.71
 (p &lt; 0.001)</a:t>
             </a:r>
           </a:p>
@@ -16482,8 +16482,8 @@
                   <a:srgbClr val="FFFFFF"/>
                 </a:solidFill>
               </a:rPr>
-              <a:t>14,463
-/ 14,669</a:t>
+              <a:t>11,268
+/ 11,540</a:t>
             </a:r>
           </a:p>
         </p:txBody>
@@ -16671,7 +16671,7 @@
                             <a:srgbClr val="1A1A2E"/>
                           </a:solidFill>
                         </a:rPr>
-                        <a:t>0.936</a:t>
+                        <a:t>0.9691</a:t>
                       </a:r>
                     </a:p>
                   </a:txBody>
@@ -16693,7 +16693,7 @@
                             <a:srgbClr val="1A1A2E"/>
                           </a:solidFill>
                         </a:rPr>
-                        <a:t>&lt; 0.001</a:t>
+                        <a:t>0.00e+00</a:t>
                       </a:r>
                     </a:p>
                   </a:txBody>
@@ -16715,7 +16715,7 @@
                             <a:srgbClr val="1A1A2E"/>
                           </a:solidFill>
                         </a:rPr>
-                        <a:t>비정규 ⚠</a:t>
+                        <a:t>비정규</a:t>
                       </a:r>
                     </a:p>
                   </a:txBody>
@@ -16761,7 +16761,7 @@
                             <a:srgbClr val="1A1A2E"/>
                           </a:solidFill>
                         </a:rPr>
-                        <a:t>123.41</a:t>
+                        <a:t>98.15</a:t>
                       </a:r>
                     </a:p>
                   </a:txBody>
@@ -16783,7 +16783,7 @@
                             <a:srgbClr val="1A1A2E"/>
                           </a:solidFill>
                         </a:rPr>
-                        <a:t>&lt; 0.001</a:t>
+                        <a:t>1.15e-04</a:t>
                       </a:r>
                     </a:p>
                   </a:txBody>
@@ -16805,7 +16805,7 @@
                             <a:srgbClr val="1A1A2E"/>
                           </a:solidFill>
                         </a:rPr>
-                        <a:t>이분산 ⚠</a:t>
+                        <a:t>이분산</a:t>
                       </a:r>
                     </a:p>
                   </a:txBody>
@@ -16851,7 +16851,7 @@
                             <a:srgbClr val="1A1A2E"/>
                           </a:solidFill>
                         </a:rPr>
-                        <a:t>1.9456</a:t>
+                        <a:t>1.9552</a:t>
                       </a:r>
                     </a:p>
                   </a:txBody>
@@ -16895,7 +16895,7 @@
                             <a:srgbClr val="1A1A2E"/>
                           </a:solidFill>
                         </a:rPr>
-                        <a:t>정상 ✔</a:t>
+                        <a:t>정상</a:t>
                       </a:r>
                     </a:p>
                   </a:txBody>
@@ -16941,7 +16941,7 @@
                             <a:srgbClr val="1A1A2E"/>
                           </a:solidFill>
                         </a:rPr>
-                        <a:t>164.57</a:t>
+                        <a:t>366.96</a:t>
                       </a:r>
                     </a:p>
                   </a:txBody>
@@ -16985,7 +16985,7 @@
                             <a:srgbClr val="1A1A2E"/>
                           </a:solidFill>
                         </a:rPr>
-                        <a:t>주의(κ&lt;1,000) ✔</a:t>
+                        <a:t>주의(κ&lt;1000)</a:t>
                       </a:r>
                     </a:p>
                   </a:txBody>
@@ -17461,7 +17461,7 @@
                             <a:srgbClr val="1A1A2E"/>
                           </a:solidFill>
                         </a:rPr>
-                        <a:t>1.056</a:t>
+                        <a:t>1.068</a:t>
                       </a:r>
                     </a:p>
                   </a:txBody>
@@ -17483,7 +17483,7 @@
                             <a:srgbClr val="1A1A2E"/>
                           </a:solidFill>
                         </a:rPr>
-                        <a:t>[0.840, 1.328]</a:t>
+                        <a:t>[0.828, 1.379]</a:t>
                       </a:r>
                     </a:p>
                   </a:txBody>
@@ -17505,7 +17505,7 @@
                             <a:srgbClr val="1A1A2E"/>
                           </a:solidFill>
                         </a:rPr>
-                        <a:t>0.639</a:t>
+                        <a:t>0.613</a:t>
                       </a:r>
                     </a:p>
                   </a:txBody>
@@ -17527,7 +17527,7 @@
                             <a:srgbClr val="1A1A2E"/>
                           </a:solidFill>
                         </a:rPr>
-                        <a:t>0.507</a:t>
+                        <a:t>0.508</a:t>
                       </a:r>
                     </a:p>
                   </a:txBody>
@@ -17573,7 +17573,7 @@
                             <a:srgbClr val="1A1A2E"/>
                           </a:solidFill>
                         </a:rPr>
-                        <a:t>1.585 *</a:t>
+                        <a:t>1.441 *</a:t>
                       </a:r>
                     </a:p>
                   </a:txBody>
@@ -17595,7 +17595,7 @@
                             <a:srgbClr val="1A1A2E"/>
                           </a:solidFill>
                         </a:rPr>
-                        <a:t>[1.402, 1.792]</a:t>
+                        <a:t>[1.251, 1.661]</a:t>
                       </a:r>
                     </a:p>
                   </a:txBody>
@@ -17639,7 +17639,7 @@
                             <a:srgbClr val="1A1A2E"/>
                           </a:solidFill>
                         </a:rPr>
-                        <a:t>0.623</a:t>
+                        <a:t>0.615</a:t>
                       </a:r>
                     </a:p>
                   </a:txBody>
@@ -17685,7 +17685,7 @@
                             <a:srgbClr val="1A1A2E"/>
                           </a:solidFill>
                         </a:rPr>
-                        <a:t>0.588 *</a:t>
+                        <a:t>0.703 *</a:t>
                       </a:r>
                     </a:p>
                   </a:txBody>
@@ -17707,7 +17707,7 @@
                             <a:srgbClr val="1A1A2E"/>
                           </a:solidFill>
                         </a:rPr>
-                        <a:t>[0.519, 0.666]</a:t>
+                        <a:t>[0.604, 0.819]</a:t>
                       </a:r>
                     </a:p>
                   </a:txBody>
@@ -17751,7 +17751,7 @@
                             <a:srgbClr val="1A1A2E"/>
                           </a:solidFill>
                         </a:rPr>
-                        <a:t>0.645</a:t>
+                        <a:t>0.594</a:t>
                       </a:r>
                     </a:p>
                   </a:txBody>
@@ -17797,7 +17797,7 @@
                             <a:srgbClr val="1A1A2E"/>
                           </a:solidFill>
                         </a:rPr>
-                        <a:t>1.118 *</a:t>
+                        <a:t>1.096</a:t>
                       </a:r>
                     </a:p>
                   </a:txBody>
@@ -17819,7 +17819,7 @@
                             <a:srgbClr val="1A1A2E"/>
                           </a:solidFill>
                         </a:rPr>
-                        <a:t>[1.000, 1.249]</a:t>
+                        <a:t>[0.967, 1.242]</a:t>
                       </a:r>
                     </a:p>
                   </a:txBody>
@@ -17841,7 +17841,7 @@
                             <a:srgbClr val="1A1A2E"/>
                           </a:solidFill>
                         </a:rPr>
-                        <a:t>0.050</a:t>
+                        <a:t>0.150</a:t>
                       </a:r>
                     </a:p>
                   </a:txBody>
@@ -17863,7 +17863,7 @@
                             <a:srgbClr val="1A1A2E"/>
                           </a:solidFill>
                         </a:rPr>
-                        <a:t>0.541</a:t>
+                        <a:t>0.536</a:t>
                       </a:r>
                     </a:p>
                   </a:txBody>
@@ -17909,7 +17909,7 @@
                             <a:srgbClr val="1A1A2E"/>
                           </a:solidFill>
                         </a:rPr>
-                        <a:t>1.173 *</a:t>
+                        <a:t>0.947</a:t>
                       </a:r>
                     </a:p>
                   </a:txBody>
@@ -17931,7 +17931,7 @@
                             <a:srgbClr val="1A1A2E"/>
                           </a:solidFill>
                         </a:rPr>
-                        <a:t>[1.044, 1.319]</a:t>
+                        <a:t>[0.835, 1.075]</a:t>
                       </a:r>
                     </a:p>
                   </a:txBody>
@@ -17953,7 +17953,7 @@
                             <a:srgbClr val="1A1A2E"/>
                           </a:solidFill>
                         </a:rPr>
-                        <a:t>0.0074</a:t>
+                        <a:t>0.401</a:t>
                       </a:r>
                     </a:p>
                   </a:txBody>
@@ -17975,7 +17975,7 @@
                             <a:srgbClr val="1A1A2E"/>
                           </a:solidFill>
                         </a:rPr>
-                        <a:t>0.544</a:t>
+                        <a:t>0.517</a:t>
                       </a:r>
                     </a:p>
                   </a:txBody>
@@ -18021,7 +18021,7 @@
                             <a:srgbClr val="1A1A2E"/>
                           </a:solidFill>
                         </a:rPr>
-                        <a:t>1.029</a:t>
+                        <a:t>0.722</a:t>
                       </a:r>
                     </a:p>
                   </a:txBody>
@@ -18043,7 +18043,7 @@
                             <a:srgbClr val="1A1A2E"/>
                           </a:solidFill>
                         </a:rPr>
-                        <a:t>[0.920, 1.150]</a:t>
+                        <a:t>[0.503, 1.037]</a:t>
                       </a:r>
                     </a:p>
                   </a:txBody>
@@ -18065,7 +18065,7 @@
                             <a:srgbClr val="1A1A2E"/>
                           </a:solidFill>
                         </a:rPr>
-                        <a:t>0.618</a:t>
+                        <a:t>0.078</a:t>
                       </a:r>
                     </a:p>
                   </a:txBody>
@@ -18087,7 +18087,7 @@
                             <a:srgbClr val="1A1A2E"/>
                           </a:solidFill>
                         </a:rPr>
-                        <a:t>0.495</a:t>
+                        <a:t>0.558</a:t>
                       </a:r>
                     </a:p>
                   </a:txBody>
@@ -18133,7 +18133,7 @@
                             <a:srgbClr val="1A1A2E"/>
                           </a:solidFill>
                         </a:rPr>
-                        <a:t>0.586 *</a:t>
+                        <a:t>0.694 *</a:t>
                       </a:r>
                     </a:p>
                   </a:txBody>
@@ -18155,7 +18155,7 @@
                             <a:srgbClr val="1A1A2E"/>
                           </a:solidFill>
                         </a:rPr>
-                        <a:t>[0.520, 0.662]</a:t>
+                        <a:t>[0.597, 0.805]</a:t>
                       </a:r>
                     </a:p>
                   </a:txBody>
@@ -18199,7 +18199,7 @@
                             <a:srgbClr val="1A1A2E"/>
                           </a:solidFill>
                         </a:rPr>
-                        <a:t>0.653</a:t>
+                        <a:t>0.599</a:t>
                       </a:r>
                     </a:p>
                   </a:txBody>
@@ -18245,7 +18245,7 @@
                             <a:srgbClr val="1A1A2E"/>
                           </a:solidFill>
                         </a:rPr>
-                        <a:t>LR χ²=50.59 *</a:t>
+                        <a:t>LR_χ²=69.56 *</a:t>
                       </a:r>
                     </a:p>
                   </a:txBody>
@@ -18311,7 +18311,7 @@
                             <a:srgbClr val="1A1A2E"/>
                           </a:solidFill>
                         </a:rPr>
-                        <a:t>0.581</a:t>
+                        <a:t>0.602</a:t>
                       </a:r>
                     </a:p>
                   </a:txBody>

--- a/연구코드/aec/results/신촌_TAMA_연구보고서.pptx
+++ b/연구코드/aec/results/신촌_TAMA_연구보고서.pptx
@@ -5,29 +5,29 @@
     <p:sldMasterId id="2147483648" r:id="rId1"/>
   </p:sldMasterIdLst>
   <p:sldIdLst>
-    <p:sldId id="256" r:id="rId7"/>
-    <p:sldId id="257" r:id="rId8"/>
-    <p:sldId id="258" r:id="rId9"/>
-    <p:sldId id="259" r:id="rId10"/>
-    <p:sldId id="260" r:id="rId11"/>
-    <p:sldId id="261" r:id="rId12"/>
-    <p:sldId id="262" r:id="rId13"/>
-    <p:sldId id="263" r:id="rId14"/>
-    <p:sldId id="264" r:id="rId15"/>
-    <p:sldId id="265" r:id="rId16"/>
-    <p:sldId id="266" r:id="rId17"/>
-    <p:sldId id="267" r:id="rId18"/>
-    <p:sldId id="268" r:id="rId19"/>
-    <p:sldId id="269" r:id="rId20"/>
-    <p:sldId id="270" r:id="rId21"/>
-    <p:sldId id="271" r:id="rId22"/>
-    <p:sldId id="272" r:id="rId23"/>
-    <p:sldId id="273" r:id="rId24"/>
-    <p:sldId id="274" r:id="rId25"/>
-    <p:sldId id="275" r:id="rId26"/>
-    <p:sldId id="276" r:id="rId27"/>
+    <p:sldId id="256" r:id="rId2"/>
+    <p:sldId id="257" r:id="rId3"/>
+    <p:sldId id="258" r:id="rId4"/>
+    <p:sldId id="259" r:id="rId5"/>
+    <p:sldId id="260" r:id="rId6"/>
+    <p:sldId id="261" r:id="rId7"/>
+    <p:sldId id="262" r:id="rId8"/>
+    <p:sldId id="263" r:id="rId9"/>
+    <p:sldId id="264" r:id="rId10"/>
+    <p:sldId id="265" r:id="rId11"/>
+    <p:sldId id="266" r:id="rId12"/>
+    <p:sldId id="267" r:id="rId13"/>
+    <p:sldId id="268" r:id="rId14"/>
+    <p:sldId id="269" r:id="rId15"/>
+    <p:sldId id="270" r:id="rId16"/>
+    <p:sldId id="271" r:id="rId17"/>
+    <p:sldId id="272" r:id="rId18"/>
+    <p:sldId id="273" r:id="rId19"/>
+    <p:sldId id="274" r:id="rId20"/>
+    <p:sldId id="275" r:id="rId21"/>
+    <p:sldId id="276" r:id="rId22"/>
   </p:sldIdLst>
-  <p:sldSz cx="12188952" cy="6858000" type="screen4x3"/>
+  <p:sldSz cx="12188825" cy="6858000"/>
   <p:notesSz cx="6858000" cy="9144000"/>
   <p:defaultTextStyle>
     <a:defPPr>
@@ -124,7 +124,91 @@
       </a:defRPr>
     </a:lvl9pPr>
   </p:defaultTextStyle>
+  <p:extLst>
+    <p:ext uri="{EFAFB233-063F-42B5-8137-9DF3F51BA10A}">
+      <p15:sldGuideLst xmlns:p15="http://schemas.microsoft.com/office/powerpoint/2012/main">
+        <p15:guide id="1" orient="horz" pos="2160">
+          <p15:clr>
+            <a:srgbClr val="A4A3A4"/>
+          </p15:clr>
+        </p15:guide>
+        <p15:guide id="2" pos="2880">
+          <p15:clr>
+            <a:srgbClr val="A4A3A4"/>
+          </p15:clr>
+        </p15:guide>
+      </p15:sldGuideLst>
+    </p:ext>
+  </p:extLst>
 </p:presentation>
+</file>
+
+<file path=ppt/revisionInfo.xml><?xml version="1.0" encoding="utf-8"?>
+<p1510:revInfo xmlns:a="http://schemas.openxmlformats.org/drawingml/2006/main" xmlns:r="http://schemas.openxmlformats.org/officeDocument/2006/relationships" xmlns:p1510="http://schemas.microsoft.com/office/powerpoint/2015/10/main">
+  <p1510:revLst>
+    <p1510:client id="{58252FE0-1131-419E-A5FC-13DB22D3BB3D}" v="4" dt="2026-04-23T05:47:30.475"/>
+  </p1510:revLst>
+</p1510:revInfo>
+</file>
+
+<file path=ppt/changesInfos/changesInfo1.xml><?xml version="1.0" encoding="utf-8"?>
+<pc:chgInfo xmlns:a="http://schemas.openxmlformats.org/drawingml/2006/main" xmlns:r="http://schemas.openxmlformats.org/officeDocument/2006/relationships" xmlns:ac="http://schemas.microsoft.com/office/drawing/2013/main/command" xmlns:pc="http://schemas.microsoft.com/office/powerpoint/2013/main/command">
+  <pc:docChgLst>
+    <pc:chgData name="janghoon jun" userId="056a5883350c2f5e" providerId="LiveId" clId="{74AFAB52-6487-4651-9B79-2F181DBD8D0A}"/>
+    <pc:docChg chg="modSld">
+      <pc:chgData name="janghoon jun" userId="056a5883350c2f5e" providerId="LiveId" clId="{74AFAB52-6487-4651-9B79-2F181DBD8D0A}" dt="2026-04-23T05:47:29.594" v="3"/>
+      <pc:docMkLst>
+        <pc:docMk/>
+      </pc:docMkLst>
+      <pc:sldChg chg="modSp mod">
+        <pc:chgData name="janghoon jun" userId="056a5883350c2f5e" providerId="LiveId" clId="{74AFAB52-6487-4651-9B79-2F181DBD8D0A}" dt="2026-04-23T05:38:02.457" v="1" actId="1076"/>
+        <pc:sldMkLst>
+          <pc:docMk/>
+          <pc:sldMk cId="0" sldId="270"/>
+        </pc:sldMkLst>
+        <pc:spChg chg="mod">
+          <ac:chgData name="janghoon jun" userId="056a5883350c2f5e" providerId="LiveId" clId="{74AFAB52-6487-4651-9B79-2F181DBD8D0A}" dt="2026-04-23T05:38:02.457" v="1" actId="1076"/>
+          <ac:spMkLst>
+            <pc:docMk/>
+            <pc:sldMk cId="0" sldId="270"/>
+            <ac:spMk id="2" creationId="{00000000-0000-0000-0000-000000000000}"/>
+          </ac:spMkLst>
+        </pc:spChg>
+        <pc:picChg chg="mod">
+          <ac:chgData name="janghoon jun" userId="056a5883350c2f5e" providerId="LiveId" clId="{74AFAB52-6487-4651-9B79-2F181DBD8D0A}" dt="2026-04-23T05:38:01.602" v="0" actId="14100"/>
+          <ac:picMkLst>
+            <pc:docMk/>
+            <pc:sldMk cId="0" sldId="270"/>
+            <ac:picMk id="9" creationId="{00000000-0000-0000-0000-000000000000}"/>
+          </ac:picMkLst>
+        </pc:picChg>
+      </pc:sldChg>
+      <pc:sldChg chg="addSp modSp">
+        <pc:chgData name="janghoon jun" userId="056a5883350c2f5e" providerId="LiveId" clId="{74AFAB52-6487-4651-9B79-2F181DBD8D0A}" dt="2026-04-23T05:47:29.594" v="3"/>
+        <pc:sldMkLst>
+          <pc:docMk/>
+          <pc:sldMk cId="0" sldId="272"/>
+        </pc:sldMkLst>
+        <pc:picChg chg="add mod">
+          <ac:chgData name="janghoon jun" userId="056a5883350c2f5e" providerId="LiveId" clId="{74AFAB52-6487-4651-9B79-2F181DBD8D0A}" dt="2026-04-23T05:46:51.361" v="2"/>
+          <ac:picMkLst>
+            <pc:docMk/>
+            <pc:sldMk cId="0" sldId="272"/>
+            <ac:picMk id="12" creationId="{F30E5905-F65D-B701-7DBD-2BD811FF458C}"/>
+          </ac:picMkLst>
+        </pc:picChg>
+        <pc:picChg chg="add mod">
+          <ac:chgData name="janghoon jun" userId="056a5883350c2f5e" providerId="LiveId" clId="{74AFAB52-6487-4651-9B79-2F181DBD8D0A}" dt="2026-04-23T05:47:29.594" v="3"/>
+          <ac:picMkLst>
+            <pc:docMk/>
+            <pc:sldMk cId="0" sldId="272"/>
+            <ac:picMk id="13" creationId="{5939FC40-11A8-82FE-BA4F-149640085874}"/>
+          </ac:picMkLst>
+        </pc:picChg>
+      </pc:sldChg>
+    </pc:docChg>
+  </pc:docChgLst>
+</pc:chgInfo>
 </file>
 
 <file path=ppt/slideLayouts/slideLayout1.xml><?xml version="1.0" encoding="utf-8"?>
@@ -165,10 +249,9 @@
           <a:lstStyle/>
           <a:p>
             <a:r>
-              <a:rPr lang="en-US" smtClean="0"/>
+              <a:rPr lang="en-US"/>
               <a:t>Click to edit Master title style</a:t>
             </a:r>
-            <a:endParaRPr lang="en-US"/>
           </a:p>
         </p:txBody>
       </p:sp>
@@ -284,10 +367,9 @@
           </a:lstStyle>
           <a:p>
             <a:r>
-              <a:rPr lang="en-US" smtClean="0"/>
+              <a:rPr lang="en-US"/>
               <a:t>Click to edit Master subtitle style</a:t>
             </a:r>
-            <a:endParaRPr lang="en-US"/>
           </a:p>
         </p:txBody>
       </p:sp>
@@ -308,7 +390,7 @@
           <a:p>
             <a:fld id="{5BCAD085-E8A6-8845-BD4E-CB4CCA059FC4}" type="datetimeFigureOut">
               <a:rPr lang="en-US" smtClean="0"/>
-              <a:t>1/27/13</a:t>
+              <a:t>4/23/2026</a:t>
             </a:fld>
             <a:endParaRPr lang="en-US"/>
           </a:p>
@@ -402,10 +484,9 @@
           <a:lstStyle/>
           <a:p>
             <a:r>
-              <a:rPr lang="en-US" smtClean="0"/>
+              <a:rPr lang="en-US"/>
               <a:t>Click to edit Master title style</a:t>
             </a:r>
-            <a:endParaRPr lang="en-US"/>
           </a:p>
         </p:txBody>
       </p:sp>
@@ -426,38 +507,37 @@
           <a:p>
             <a:pPr lvl="0"/>
             <a:r>
-              <a:rPr lang="en-US" smtClean="0"/>
+              <a:rPr lang="en-US"/>
               <a:t>Click to edit Master text styles</a:t>
             </a:r>
           </a:p>
           <a:p>
             <a:pPr lvl="1"/>
             <a:r>
-              <a:rPr lang="en-US" smtClean="0"/>
+              <a:rPr lang="en-US"/>
               <a:t>Second level</a:t>
             </a:r>
           </a:p>
           <a:p>
             <a:pPr lvl="2"/>
             <a:r>
-              <a:rPr lang="en-US" smtClean="0"/>
+              <a:rPr lang="en-US"/>
               <a:t>Third level</a:t>
             </a:r>
           </a:p>
           <a:p>
             <a:pPr lvl="3"/>
             <a:r>
-              <a:rPr lang="en-US" smtClean="0"/>
+              <a:rPr lang="en-US"/>
               <a:t>Fourth level</a:t>
             </a:r>
           </a:p>
           <a:p>
             <a:pPr lvl="4"/>
             <a:r>
-              <a:rPr lang="en-US" smtClean="0"/>
+              <a:rPr lang="en-US"/>
               <a:t>Fifth level</a:t>
             </a:r>
-            <a:endParaRPr lang="en-US"/>
           </a:p>
         </p:txBody>
       </p:sp>
@@ -478,7 +558,7 @@
           <a:p>
             <a:fld id="{5BCAD085-E8A6-8845-BD4E-CB4CCA059FC4}" type="datetimeFigureOut">
               <a:rPr lang="en-US" smtClean="0"/>
-              <a:t>1/27/13</a:t>
+              <a:t>4/23/2026</a:t>
             </a:fld>
             <a:endParaRPr lang="en-US"/>
           </a:p>
@@ -577,10 +657,9 @@
           <a:lstStyle/>
           <a:p>
             <a:r>
-              <a:rPr lang="en-US" smtClean="0"/>
+              <a:rPr lang="en-US"/>
               <a:t>Click to edit Master title style</a:t>
             </a:r>
-            <a:endParaRPr lang="en-US"/>
           </a:p>
         </p:txBody>
       </p:sp>
@@ -606,38 +685,37 @@
           <a:p>
             <a:pPr lvl="0"/>
             <a:r>
-              <a:rPr lang="en-US" smtClean="0"/>
+              <a:rPr lang="en-US"/>
               <a:t>Click to edit Master text styles</a:t>
             </a:r>
           </a:p>
           <a:p>
             <a:pPr lvl="1"/>
             <a:r>
-              <a:rPr lang="en-US" smtClean="0"/>
+              <a:rPr lang="en-US"/>
               <a:t>Second level</a:t>
             </a:r>
           </a:p>
           <a:p>
             <a:pPr lvl="2"/>
             <a:r>
-              <a:rPr lang="en-US" smtClean="0"/>
+              <a:rPr lang="en-US"/>
               <a:t>Third level</a:t>
             </a:r>
           </a:p>
           <a:p>
             <a:pPr lvl="3"/>
             <a:r>
-              <a:rPr lang="en-US" smtClean="0"/>
+              <a:rPr lang="en-US"/>
               <a:t>Fourth level</a:t>
             </a:r>
           </a:p>
           <a:p>
             <a:pPr lvl="4"/>
             <a:r>
-              <a:rPr lang="en-US" smtClean="0"/>
+              <a:rPr lang="en-US"/>
               <a:t>Fifth level</a:t>
             </a:r>
-            <a:endParaRPr lang="en-US"/>
           </a:p>
         </p:txBody>
       </p:sp>
@@ -658,7 +736,7 @@
           <a:p>
             <a:fld id="{5BCAD085-E8A6-8845-BD4E-CB4CCA059FC4}" type="datetimeFigureOut">
               <a:rPr lang="en-US" smtClean="0"/>
-              <a:t>1/27/13</a:t>
+              <a:t>4/23/2026</a:t>
             </a:fld>
             <a:endParaRPr lang="en-US"/>
           </a:p>
@@ -752,10 +830,9 @@
           <a:lstStyle/>
           <a:p>
             <a:r>
-              <a:rPr lang="en-US" smtClean="0"/>
+              <a:rPr lang="en-US"/>
               <a:t>Click to edit Master title style</a:t>
             </a:r>
-            <a:endParaRPr lang="en-US"/>
           </a:p>
         </p:txBody>
       </p:sp>
@@ -776,38 +853,37 @@
           <a:p>
             <a:pPr lvl="0"/>
             <a:r>
-              <a:rPr lang="en-US" smtClean="0"/>
+              <a:rPr lang="en-US"/>
               <a:t>Click to edit Master text styles</a:t>
             </a:r>
           </a:p>
           <a:p>
             <a:pPr lvl="1"/>
             <a:r>
-              <a:rPr lang="en-US" smtClean="0"/>
+              <a:rPr lang="en-US"/>
               <a:t>Second level</a:t>
             </a:r>
           </a:p>
           <a:p>
             <a:pPr lvl="2"/>
             <a:r>
-              <a:rPr lang="en-US" smtClean="0"/>
+              <a:rPr lang="en-US"/>
               <a:t>Third level</a:t>
             </a:r>
           </a:p>
           <a:p>
             <a:pPr lvl="3"/>
             <a:r>
-              <a:rPr lang="en-US" smtClean="0"/>
+              <a:rPr lang="en-US"/>
               <a:t>Fourth level</a:t>
             </a:r>
           </a:p>
           <a:p>
             <a:pPr lvl="4"/>
             <a:r>
-              <a:rPr lang="en-US" smtClean="0"/>
+              <a:rPr lang="en-US"/>
               <a:t>Fifth level</a:t>
             </a:r>
-            <a:endParaRPr lang="en-US"/>
           </a:p>
         </p:txBody>
       </p:sp>
@@ -828,7 +904,7 @@
           <a:p>
             <a:fld id="{5BCAD085-E8A6-8845-BD4E-CB4CCA059FC4}" type="datetimeFigureOut">
               <a:rPr lang="en-US" smtClean="0"/>
-              <a:t>1/27/13</a:t>
+              <a:t>4/23/2026</a:t>
             </a:fld>
             <a:endParaRPr lang="en-US"/>
           </a:p>
@@ -931,10 +1007,9 @@
           </a:lstStyle>
           <a:p>
             <a:r>
-              <a:rPr lang="en-US" smtClean="0"/>
+              <a:rPr lang="en-US"/>
               <a:t>Click to edit Master title style</a:t>
             </a:r>
-            <a:endParaRPr lang="en-US"/>
           </a:p>
         </p:txBody>
       </p:sp>
@@ -1051,7 +1126,7 @@
           <a:p>
             <a:pPr lvl="0"/>
             <a:r>
-              <a:rPr lang="en-US" smtClean="0"/>
+              <a:rPr lang="en-US"/>
               <a:t>Click to edit Master text styles</a:t>
             </a:r>
           </a:p>
@@ -1074,7 +1149,7 @@
           <a:p>
             <a:fld id="{5BCAD085-E8A6-8845-BD4E-CB4CCA059FC4}" type="datetimeFigureOut">
               <a:rPr lang="en-US" smtClean="0"/>
-              <a:t>1/27/13</a:t>
+              <a:t>4/23/2026</a:t>
             </a:fld>
             <a:endParaRPr lang="en-US"/>
           </a:p>
@@ -1168,10 +1243,9 @@
           <a:lstStyle/>
           <a:p>
             <a:r>
-              <a:rPr lang="en-US" smtClean="0"/>
+              <a:rPr lang="en-US"/>
               <a:t>Click to edit Master title style</a:t>
             </a:r>
-            <a:endParaRPr lang="en-US"/>
           </a:p>
         </p:txBody>
       </p:sp>
@@ -1225,38 +1299,37 @@
           <a:p>
             <a:pPr lvl="0"/>
             <a:r>
-              <a:rPr lang="en-US" smtClean="0"/>
+              <a:rPr lang="en-US"/>
               <a:t>Click to edit Master text styles</a:t>
             </a:r>
           </a:p>
           <a:p>
             <a:pPr lvl="1"/>
             <a:r>
-              <a:rPr lang="en-US" smtClean="0"/>
+              <a:rPr lang="en-US"/>
               <a:t>Second level</a:t>
             </a:r>
           </a:p>
           <a:p>
             <a:pPr lvl="2"/>
             <a:r>
-              <a:rPr lang="en-US" smtClean="0"/>
+              <a:rPr lang="en-US"/>
               <a:t>Third level</a:t>
             </a:r>
           </a:p>
           <a:p>
             <a:pPr lvl="3"/>
             <a:r>
-              <a:rPr lang="en-US" smtClean="0"/>
+              <a:rPr lang="en-US"/>
               <a:t>Fourth level</a:t>
             </a:r>
           </a:p>
           <a:p>
             <a:pPr lvl="4"/>
             <a:r>
-              <a:rPr lang="en-US" smtClean="0"/>
+              <a:rPr lang="en-US"/>
               <a:t>Fifth level</a:t>
             </a:r>
-            <a:endParaRPr lang="en-US"/>
           </a:p>
         </p:txBody>
       </p:sp>
@@ -1310,38 +1383,37 @@
           <a:p>
             <a:pPr lvl="0"/>
             <a:r>
-              <a:rPr lang="en-US" smtClean="0"/>
+              <a:rPr lang="en-US"/>
               <a:t>Click to edit Master text styles</a:t>
             </a:r>
           </a:p>
           <a:p>
             <a:pPr lvl="1"/>
             <a:r>
-              <a:rPr lang="en-US" smtClean="0"/>
+              <a:rPr lang="en-US"/>
               <a:t>Second level</a:t>
             </a:r>
           </a:p>
           <a:p>
             <a:pPr lvl="2"/>
             <a:r>
-              <a:rPr lang="en-US" smtClean="0"/>
+              <a:rPr lang="en-US"/>
               <a:t>Third level</a:t>
             </a:r>
           </a:p>
           <a:p>
             <a:pPr lvl="3"/>
             <a:r>
-              <a:rPr lang="en-US" smtClean="0"/>
+              <a:rPr lang="en-US"/>
               <a:t>Fourth level</a:t>
             </a:r>
           </a:p>
           <a:p>
             <a:pPr lvl="4"/>
             <a:r>
-              <a:rPr lang="en-US" smtClean="0"/>
+              <a:rPr lang="en-US"/>
               <a:t>Fifth level</a:t>
             </a:r>
-            <a:endParaRPr lang="en-US"/>
           </a:p>
         </p:txBody>
       </p:sp>
@@ -1362,7 +1434,7 @@
           <a:p>
             <a:fld id="{5BCAD085-E8A6-8845-BD4E-CB4CCA059FC4}" type="datetimeFigureOut">
               <a:rPr lang="en-US" smtClean="0"/>
-              <a:t>1/27/13</a:t>
+              <a:t>4/23/2026</a:t>
             </a:fld>
             <a:endParaRPr lang="en-US"/>
           </a:p>
@@ -1460,10 +1532,9 @@
           </a:lstStyle>
           <a:p>
             <a:r>
-              <a:rPr lang="en-US" smtClean="0"/>
+              <a:rPr lang="en-US"/>
               <a:t>Click to edit Master title style</a:t>
             </a:r>
-            <a:endParaRPr lang="en-US"/>
           </a:p>
         </p:txBody>
       </p:sp>
@@ -1526,7 +1597,7 @@
           <a:p>
             <a:pPr lvl="0"/>
             <a:r>
-              <a:rPr lang="en-US" smtClean="0"/>
+              <a:rPr lang="en-US"/>
               <a:t>Click to edit Master text styles</a:t>
             </a:r>
           </a:p>
@@ -1582,38 +1653,37 @@
           <a:p>
             <a:pPr lvl="0"/>
             <a:r>
-              <a:rPr lang="en-US" smtClean="0"/>
+              <a:rPr lang="en-US"/>
               <a:t>Click to edit Master text styles</a:t>
             </a:r>
           </a:p>
           <a:p>
             <a:pPr lvl="1"/>
             <a:r>
-              <a:rPr lang="en-US" smtClean="0"/>
+              <a:rPr lang="en-US"/>
               <a:t>Second level</a:t>
             </a:r>
           </a:p>
           <a:p>
             <a:pPr lvl="2"/>
             <a:r>
-              <a:rPr lang="en-US" smtClean="0"/>
+              <a:rPr lang="en-US"/>
               <a:t>Third level</a:t>
             </a:r>
           </a:p>
           <a:p>
             <a:pPr lvl="3"/>
             <a:r>
-              <a:rPr lang="en-US" smtClean="0"/>
+              <a:rPr lang="en-US"/>
               <a:t>Fourth level</a:t>
             </a:r>
           </a:p>
           <a:p>
             <a:pPr lvl="4"/>
             <a:r>
-              <a:rPr lang="en-US" smtClean="0"/>
+              <a:rPr lang="en-US"/>
               <a:t>Fifth level</a:t>
             </a:r>
-            <a:endParaRPr lang="en-US"/>
           </a:p>
         </p:txBody>
       </p:sp>
@@ -1676,7 +1746,7 @@
           <a:p>
             <a:pPr lvl="0"/>
             <a:r>
-              <a:rPr lang="en-US" smtClean="0"/>
+              <a:rPr lang="en-US"/>
               <a:t>Click to edit Master text styles</a:t>
             </a:r>
           </a:p>
@@ -1732,38 +1802,37 @@
           <a:p>
             <a:pPr lvl="0"/>
             <a:r>
-              <a:rPr lang="en-US" smtClean="0"/>
+              <a:rPr lang="en-US"/>
               <a:t>Click to edit Master text styles</a:t>
             </a:r>
           </a:p>
           <a:p>
             <a:pPr lvl="1"/>
             <a:r>
-              <a:rPr lang="en-US" smtClean="0"/>
+              <a:rPr lang="en-US"/>
               <a:t>Second level</a:t>
             </a:r>
           </a:p>
           <a:p>
             <a:pPr lvl="2"/>
             <a:r>
-              <a:rPr lang="en-US" smtClean="0"/>
+              <a:rPr lang="en-US"/>
               <a:t>Third level</a:t>
             </a:r>
           </a:p>
           <a:p>
             <a:pPr lvl="3"/>
             <a:r>
-              <a:rPr lang="en-US" smtClean="0"/>
+              <a:rPr lang="en-US"/>
               <a:t>Fourth level</a:t>
             </a:r>
           </a:p>
           <a:p>
             <a:pPr lvl="4"/>
             <a:r>
-              <a:rPr lang="en-US" smtClean="0"/>
+              <a:rPr lang="en-US"/>
               <a:t>Fifth level</a:t>
             </a:r>
-            <a:endParaRPr lang="en-US"/>
           </a:p>
         </p:txBody>
       </p:sp>
@@ -1784,7 +1853,7 @@
           <a:p>
             <a:fld id="{5BCAD085-E8A6-8845-BD4E-CB4CCA059FC4}" type="datetimeFigureOut">
               <a:rPr lang="en-US" smtClean="0"/>
-              <a:t>1/27/13</a:t>
+              <a:t>4/23/2026</a:t>
             </a:fld>
             <a:endParaRPr lang="en-US"/>
           </a:p>
@@ -1878,10 +1947,9 @@
           <a:lstStyle/>
           <a:p>
             <a:r>
-              <a:rPr lang="en-US" smtClean="0"/>
+              <a:rPr lang="en-US"/>
               <a:t>Click to edit Master title style</a:t>
             </a:r>
-            <a:endParaRPr lang="en-US"/>
           </a:p>
         </p:txBody>
       </p:sp>
@@ -1902,7 +1970,7 @@
           <a:p>
             <a:fld id="{5BCAD085-E8A6-8845-BD4E-CB4CCA059FC4}" type="datetimeFigureOut">
               <a:rPr lang="en-US" smtClean="0"/>
-              <a:t>1/27/13</a:t>
+              <a:t>4/23/2026</a:t>
             </a:fld>
             <a:endParaRPr lang="en-US"/>
           </a:p>
@@ -1997,7 +2065,7 @@
           <a:p>
             <a:fld id="{5BCAD085-E8A6-8845-BD4E-CB4CCA059FC4}" type="datetimeFigureOut">
               <a:rPr lang="en-US" smtClean="0"/>
-              <a:t>1/27/13</a:t>
+              <a:t>4/23/2026</a:t>
             </a:fld>
             <a:endParaRPr lang="en-US"/>
           </a:p>
@@ -2100,10 +2168,9 @@
           </a:lstStyle>
           <a:p>
             <a:r>
-              <a:rPr lang="en-US" smtClean="0"/>
+              <a:rPr lang="en-US"/>
               <a:t>Click to edit Master title style</a:t>
             </a:r>
-            <a:endParaRPr lang="en-US"/>
           </a:p>
         </p:txBody>
       </p:sp>
@@ -2157,38 +2224,37 @@
           <a:p>
             <a:pPr lvl="0"/>
             <a:r>
-              <a:rPr lang="en-US" smtClean="0"/>
+              <a:rPr lang="en-US"/>
               <a:t>Click to edit Master text styles</a:t>
             </a:r>
           </a:p>
           <a:p>
             <a:pPr lvl="1"/>
             <a:r>
-              <a:rPr lang="en-US" smtClean="0"/>
+              <a:rPr lang="en-US"/>
               <a:t>Second level</a:t>
             </a:r>
           </a:p>
           <a:p>
             <a:pPr lvl="2"/>
             <a:r>
-              <a:rPr lang="en-US" smtClean="0"/>
+              <a:rPr lang="en-US"/>
               <a:t>Third level</a:t>
             </a:r>
           </a:p>
           <a:p>
             <a:pPr lvl="3"/>
             <a:r>
-              <a:rPr lang="en-US" smtClean="0"/>
+              <a:rPr lang="en-US"/>
               <a:t>Fourth level</a:t>
             </a:r>
           </a:p>
           <a:p>
             <a:pPr lvl="4"/>
             <a:r>
-              <a:rPr lang="en-US" smtClean="0"/>
+              <a:rPr lang="en-US"/>
               <a:t>Fifth level</a:t>
             </a:r>
-            <a:endParaRPr lang="en-US"/>
           </a:p>
         </p:txBody>
       </p:sp>
@@ -2251,7 +2317,7 @@
           <a:p>
             <a:pPr lvl="0"/>
             <a:r>
-              <a:rPr lang="en-US" smtClean="0"/>
+              <a:rPr lang="en-US"/>
               <a:t>Click to edit Master text styles</a:t>
             </a:r>
           </a:p>
@@ -2274,7 +2340,7 @@
           <a:p>
             <a:fld id="{5BCAD085-E8A6-8845-BD4E-CB4CCA059FC4}" type="datetimeFigureOut">
               <a:rPr lang="en-US" smtClean="0"/>
-              <a:t>1/27/13</a:t>
+              <a:t>4/23/2026</a:t>
             </a:fld>
             <a:endParaRPr lang="en-US"/>
           </a:p>
@@ -2377,10 +2443,9 @@
           </a:lstStyle>
           <a:p>
             <a:r>
-              <a:rPr lang="en-US" smtClean="0"/>
+              <a:rPr lang="en-US"/>
               <a:t>Click to edit Master title style</a:t>
             </a:r>
-            <a:endParaRPr lang="en-US"/>
           </a:p>
         </p:txBody>
       </p:sp>
@@ -2504,7 +2569,7 @@
           <a:p>
             <a:pPr lvl="0"/>
             <a:r>
-              <a:rPr lang="en-US" smtClean="0"/>
+              <a:rPr lang="en-US"/>
               <a:t>Click to edit Master text styles</a:t>
             </a:r>
           </a:p>
@@ -2527,7 +2592,7 @@
           <a:p>
             <a:fld id="{5BCAD085-E8A6-8845-BD4E-CB4CCA059FC4}" type="datetimeFigureOut">
               <a:rPr lang="en-US" smtClean="0"/>
-              <a:t>1/27/13</a:t>
+              <a:t>4/23/2026</a:t>
             </a:fld>
             <a:endParaRPr lang="en-US"/>
           </a:p>
@@ -2636,10 +2701,9 @@
           <a:lstStyle/>
           <a:p>
             <a:r>
-              <a:rPr lang="en-US" smtClean="0"/>
+              <a:rPr lang="en-US"/>
               <a:t>Click to edit Master title style</a:t>
             </a:r>
-            <a:endParaRPr lang="en-US"/>
           </a:p>
         </p:txBody>
       </p:sp>
@@ -2670,38 +2734,37 @@
           <a:p>
             <a:pPr lvl="0"/>
             <a:r>
-              <a:rPr lang="en-US" smtClean="0"/>
+              <a:rPr lang="en-US"/>
               <a:t>Click to edit Master text styles</a:t>
             </a:r>
           </a:p>
           <a:p>
             <a:pPr lvl="1"/>
             <a:r>
-              <a:rPr lang="en-US" smtClean="0"/>
+              <a:rPr lang="en-US"/>
               <a:t>Second level</a:t>
             </a:r>
           </a:p>
           <a:p>
             <a:pPr lvl="2"/>
             <a:r>
-              <a:rPr lang="en-US" smtClean="0"/>
+              <a:rPr lang="en-US"/>
               <a:t>Third level</a:t>
             </a:r>
           </a:p>
           <a:p>
             <a:pPr lvl="3"/>
             <a:r>
-              <a:rPr lang="en-US" smtClean="0"/>
+              <a:rPr lang="en-US"/>
               <a:t>Fourth level</a:t>
             </a:r>
           </a:p>
           <a:p>
             <a:pPr lvl="4"/>
             <a:r>
-              <a:rPr lang="en-US" smtClean="0"/>
+              <a:rPr lang="en-US"/>
               <a:t>Fifth level</a:t>
             </a:r>
-            <a:endParaRPr lang="en-US"/>
           </a:p>
         </p:txBody>
       </p:sp>
@@ -2740,7 +2803,7 @@
           <a:p>
             <a:fld id="{5BCAD085-E8A6-8845-BD4E-CB4CCA059FC4}" type="datetimeFigureOut">
               <a:rPr lang="en-US" smtClean="0"/>
-              <a:t>1/27/13</a:t>
+              <a:t>4/23/2026</a:t>
             </a:fld>
             <a:endParaRPr lang="en-US"/>
           </a:p>
@@ -3099,7 +3162,7 @@
 </file>
 
 <file path=ppt/slides/slide1.xml><?xml version="1.0" encoding="utf-8"?>
-<p:sld xmlns:a="http://schemas.openxmlformats.org/drawingml/2006/main" xmlns:p="http://schemas.openxmlformats.org/presentationml/2006/main" xmlns:r="http://schemas.openxmlformats.org/officeDocument/2006/relationships">
+<p:sld xmlns:a="http://schemas.openxmlformats.org/drawingml/2006/main" xmlns:r="http://schemas.openxmlformats.org/officeDocument/2006/relationships" xmlns:p="http://schemas.openxmlformats.org/presentationml/2006/main">
   <p:cSld>
     <p:spTree>
       <p:nvGrpSpPr>
@@ -3107,7 +3170,14 @@
         <p:cNvGrpSpPr/>
         <p:nvPr/>
       </p:nvGrpSpPr>
-      <p:grpSpPr/>
+      <p:grpSpPr>
+        <a:xfrm>
+          <a:off x="0" y="0"/>
+          <a:ext cx="0" cy="0"/>
+          <a:chOff x="0" y="0"/>
+          <a:chExt cx="0" cy="0"/>
+        </a:xfrm>
+      </p:grpSpPr>
       <p:sp>
         <p:nvSpPr>
           <p:cNvPr id="2" name="Rectangle 1"/>
@@ -3148,6 +3218,7 @@
           <a:lstStyle/>
           <a:p>
             <a:pPr algn="ctr"/>
+            <a:endParaRPr/>
           </a:p>
         </p:txBody>
       </p:sp>
@@ -3191,6 +3262,7 @@
           <a:lstStyle/>
           <a:p>
             <a:pPr algn="ctr"/>
+            <a:endParaRPr/>
           </a:p>
         </p:txBody>
       </p:sp>
@@ -3234,6 +3306,7 @@
           <a:lstStyle/>
           <a:p>
             <a:pPr algn="ctr"/>
+            <a:endParaRPr/>
           </a:p>
         </p:txBody>
       </p:sp>
@@ -3384,7 +3457,7 @@
 </file>
 
 <file path=ppt/slides/slide10.xml><?xml version="1.0" encoding="utf-8"?>
-<p:sld xmlns:a="http://schemas.openxmlformats.org/drawingml/2006/main" xmlns:p="http://schemas.openxmlformats.org/presentationml/2006/main" xmlns:r="http://schemas.openxmlformats.org/officeDocument/2006/relationships">
+<p:sld xmlns:a="http://schemas.openxmlformats.org/drawingml/2006/main" xmlns:r="http://schemas.openxmlformats.org/officeDocument/2006/relationships" xmlns:p="http://schemas.openxmlformats.org/presentationml/2006/main">
   <p:cSld>
     <p:spTree>
       <p:nvGrpSpPr>
@@ -3392,7 +3465,14 @@
         <p:cNvGrpSpPr/>
         <p:nvPr/>
       </p:nvGrpSpPr>
-      <p:grpSpPr/>
+      <p:grpSpPr>
+        <a:xfrm>
+          <a:off x="0" y="0"/>
+          <a:ext cx="0" cy="0"/>
+          <a:chOff x="0" y="0"/>
+          <a:chExt cx="0" cy="0"/>
+        </a:xfrm>
+      </p:grpSpPr>
       <p:sp>
         <p:nvSpPr>
           <p:cNvPr id="2" name="Rectangle 1"/>
@@ -3433,6 +3513,7 @@
           <a:lstStyle/>
           <a:p>
             <a:pPr algn="ctr"/>
+            <a:endParaRPr/>
           </a:p>
         </p:txBody>
       </p:sp>
@@ -3476,6 +3557,7 @@
           <a:lstStyle/>
           <a:p>
             <a:pPr algn="ctr"/>
+            <a:endParaRPr/>
           </a:p>
         </p:txBody>
       </p:sp>
@@ -3566,11 +3648,41 @@
                 <a:tableStyleId>{5C22544A-7EE6-4342-B048-85BDC9FD1C3A}</a:tableStyleId>
               </a:tblPr>
               <a:tblGrid>
-                <a:gridCol w="2304288"/>
-                <a:gridCol w="2304288"/>
-                <a:gridCol w="2304288"/>
-                <a:gridCol w="2304288"/>
-                <a:gridCol w="2304288"/>
+                <a:gridCol w="2304288">
+                  <a:extLst>
+                    <a:ext uri="{9D8B030D-6E8A-4147-A177-3AD203B41FA5}">
+                      <a16:colId xmlns:a16="http://schemas.microsoft.com/office/drawing/2014/main" val="20000"/>
+                    </a:ext>
+                  </a:extLst>
+                </a:gridCol>
+                <a:gridCol w="2304288">
+                  <a:extLst>
+                    <a:ext uri="{9D8B030D-6E8A-4147-A177-3AD203B41FA5}">
+                      <a16:colId xmlns:a16="http://schemas.microsoft.com/office/drawing/2014/main" val="20001"/>
+                    </a:ext>
+                  </a:extLst>
+                </a:gridCol>
+                <a:gridCol w="2304288">
+                  <a:extLst>
+                    <a:ext uri="{9D8B030D-6E8A-4147-A177-3AD203B41FA5}">
+                      <a16:colId xmlns:a16="http://schemas.microsoft.com/office/drawing/2014/main" val="20002"/>
+                    </a:ext>
+                  </a:extLst>
+                </a:gridCol>
+                <a:gridCol w="2304288">
+                  <a:extLst>
+                    <a:ext uri="{9D8B030D-6E8A-4147-A177-3AD203B41FA5}">
+                      <a16:colId xmlns:a16="http://schemas.microsoft.com/office/drawing/2014/main" val="20003"/>
+                    </a:ext>
+                  </a:extLst>
+                </a:gridCol>
+                <a:gridCol w="2304288">
+                  <a:extLst>
+                    <a:ext uri="{9D8B030D-6E8A-4147-A177-3AD203B41FA5}">
+                      <a16:colId xmlns:a16="http://schemas.microsoft.com/office/drawing/2014/main" val="20004"/>
+                    </a:ext>
+                  </a:extLst>
+                </a:gridCol>
               </a:tblGrid>
               <a:tr h="377190">
                 <a:tc>
@@ -3580,7 +3692,7 @@
                     <a:p>
                       <a:pPr algn="ctr"/>
                       <a:r>
-                        <a:rPr b="1" sz="1100">
+                        <a:rPr sz="1100" b="1">
                           <a:solidFill>
                             <a:srgbClr val="FFFFFF"/>
                           </a:solidFill>
@@ -3602,7 +3714,7 @@
                     <a:p>
                       <a:pPr algn="ctr"/>
                       <a:r>
-                        <a:rPr b="1" sz="1100">
+                        <a:rPr sz="1100" b="1">
                           <a:solidFill>
                             <a:srgbClr val="FFFFFF"/>
                           </a:solidFill>
@@ -3624,7 +3736,7 @@
                     <a:p>
                       <a:pPr algn="ctr"/>
                       <a:r>
-                        <a:rPr b="1" sz="1100">
+                        <a:rPr sz="1100" b="1">
                           <a:solidFill>
                             <a:srgbClr val="FFFFFF"/>
                           </a:solidFill>
@@ -3646,7 +3758,7 @@
                     <a:p>
                       <a:pPr algn="ctr"/>
                       <a:r>
-                        <a:rPr b="1" sz="1100">
+                        <a:rPr sz="1100" b="1">
                           <a:solidFill>
                             <a:srgbClr val="FFFFFF"/>
                           </a:solidFill>
@@ -3668,7 +3780,7 @@
                     <a:p>
                       <a:pPr algn="ctr"/>
                       <a:r>
-                        <a:rPr b="1" sz="1100">
+                        <a:rPr sz="1100" b="1">
                           <a:solidFill>
                             <a:srgbClr val="FFFFFF"/>
                           </a:solidFill>
@@ -3683,6 +3795,11 @@
                     </a:solidFill>
                   </a:tcPr>
                 </a:tc>
+                <a:extLst>
+                  <a:ext uri="{0D108BD9-81ED-4DB2-BD59-A6C34878D82A}">
+                    <a16:rowId xmlns:a16="http://schemas.microsoft.com/office/drawing/2014/main" val="10000"/>
+                  </a:ext>
+                </a:extLst>
               </a:tr>
               <a:tr h="377190">
                 <a:tc>
@@ -3692,12 +3809,56 @@
                     <a:p>
                       <a:pPr algn="ctr"/>
                       <a:r>
+                        <a:rPr sz="1100" dirty="0">
+                          <a:solidFill>
+                            <a:srgbClr val="1A1A2E"/>
+                          </a:solidFill>
+                        </a:rPr>
+                        <a:t>Sex (M=1, F=0)</a:t>
+                      </a:r>
+                    </a:p>
+                  </a:txBody>
+                  <a:tcPr>
+                    <a:solidFill>
+                      <a:srgbClr val="F2F2F2"/>
+                    </a:solidFill>
+                  </a:tcPr>
+                </a:tc>
+                <a:tc>
+                  <a:txBody>
+                    <a:bodyPr/>
+                    <a:lstStyle/>
+                    <a:p>
+                      <a:pPr algn="ctr"/>
+                      <a:r>
+                        <a:rPr sz="1100" dirty="0">
+                          <a:solidFill>
+                            <a:srgbClr val="1A1A2E"/>
+                          </a:solidFill>
+                        </a:rPr>
+                        <a:t>43.67 *</a:t>
+                      </a:r>
+                    </a:p>
+                  </a:txBody>
+                  <a:tcPr>
+                    <a:solidFill>
+                      <a:srgbClr val="F2F2F2"/>
+                    </a:solidFill>
+                  </a:tcPr>
+                </a:tc>
+                <a:tc>
+                  <a:txBody>
+                    <a:bodyPr/>
+                    <a:lstStyle/>
+                    <a:p>
+                      <a:pPr algn="ctr"/>
+                      <a:r>
                         <a:rPr sz="1100">
                           <a:solidFill>
                             <a:srgbClr val="1A1A2E"/>
                           </a:solidFill>
                         </a:rPr>
-                        <a:t>Sex (M=1, F=0)</a:t>
+                        <a:t>[41.27, 46.07]</a:t>
                       </a:r>
                     </a:p>
                   </a:txBody>
@@ -3719,7 +3880,7 @@
                             <a:srgbClr val="1A1A2E"/>
                           </a:solidFill>
                         </a:rPr>
-                        <a:t>43.67 *</a:t>
+                        <a:t>&lt; 0.001</a:t>
                       </a:r>
                     </a:p>
                   </a:txBody>
@@ -3741,7 +3902,7 @@
                             <a:srgbClr val="1A1A2E"/>
                           </a:solidFill>
                         </a:rPr>
-                        <a:t>[41.27, 46.07]</a:t>
+                        <a:t>0.502</a:t>
                       </a:r>
                     </a:p>
                   </a:txBody>
@@ -3751,50 +3912,11 @@
                     </a:solidFill>
                   </a:tcPr>
                 </a:tc>
-                <a:tc>
-                  <a:txBody>
-                    <a:bodyPr/>
-                    <a:lstStyle/>
-                    <a:p>
-                      <a:pPr algn="ctr"/>
-                      <a:r>
-                        <a:rPr sz="1100">
-                          <a:solidFill>
-                            <a:srgbClr val="1A1A2E"/>
-                          </a:solidFill>
-                        </a:rPr>
-                        <a:t>&lt; 0.001</a:t>
-                      </a:r>
-                    </a:p>
-                  </a:txBody>
-                  <a:tcPr>
-                    <a:solidFill>
-                      <a:srgbClr val="F2F2F2"/>
-                    </a:solidFill>
-                  </a:tcPr>
-                </a:tc>
-                <a:tc>
-                  <a:txBody>
-                    <a:bodyPr/>
-                    <a:lstStyle/>
-                    <a:p>
-                      <a:pPr algn="ctr"/>
-                      <a:r>
-                        <a:rPr sz="1100">
-                          <a:solidFill>
-                            <a:srgbClr val="1A1A2E"/>
-                          </a:solidFill>
-                        </a:rPr>
-                        <a:t>0.502</a:t>
-                      </a:r>
-                    </a:p>
-                  </a:txBody>
-                  <a:tcPr>
-                    <a:solidFill>
-                      <a:srgbClr val="F2F2F2"/>
-                    </a:solidFill>
-                  </a:tcPr>
-                </a:tc>
+                <a:extLst>
+                  <a:ext uri="{0D108BD9-81ED-4DB2-BD59-A6C34878D82A}">
+                    <a16:rowId xmlns:a16="http://schemas.microsoft.com/office/drawing/2014/main" val="10001"/>
+                  </a:ext>
+                </a:extLst>
               </a:tr>
               <a:tr h="377190">
                 <a:tc>
@@ -3826,12 +3948,34 @@
                     <a:p>
                       <a:pPr algn="ctr"/>
                       <a:r>
+                        <a:rPr sz="1100" dirty="0">
+                          <a:solidFill>
+                            <a:srgbClr val="1A1A2E"/>
+                          </a:solidFill>
+                        </a:rPr>
+                        <a:t>-2.31 *</a:t>
+                      </a:r>
+                    </a:p>
+                  </a:txBody>
+                  <a:tcPr>
+                    <a:solidFill>
+                      <a:srgbClr val="FFFFFF"/>
+                    </a:solidFill>
+                  </a:tcPr>
+                </a:tc>
+                <a:tc>
+                  <a:txBody>
+                    <a:bodyPr/>
+                    <a:lstStyle/>
+                    <a:p>
+                      <a:pPr algn="ctr"/>
+                      <a:r>
                         <a:rPr sz="1100">
                           <a:solidFill>
                             <a:srgbClr val="1A1A2E"/>
                           </a:solidFill>
                         </a:rPr>
-                        <a:t>-2.31 *</a:t>
+                        <a:t>[-4.00, -0.61]</a:t>
                       </a:r>
                     </a:p>
                   </a:txBody>
@@ -3853,7 +3997,7 @@
                             <a:srgbClr val="1A1A2E"/>
                           </a:solidFill>
                         </a:rPr>
-                        <a:t>[-4.00, -0.61]</a:t>
+                        <a:t>0.0076</a:t>
                       </a:r>
                     </a:p>
                   </a:txBody>
@@ -3875,7 +4019,7 @@
                             <a:srgbClr val="1A1A2E"/>
                           </a:solidFill>
                         </a:rPr>
-                        <a:t>0.0076</a:t>
+                        <a:t>0.006</a:t>
                       </a:r>
                     </a:p>
                   </a:txBody>
@@ -3885,28 +4029,11 @@
                     </a:solidFill>
                   </a:tcPr>
                 </a:tc>
-                <a:tc>
-                  <a:txBody>
-                    <a:bodyPr/>
-                    <a:lstStyle/>
-                    <a:p>
-                      <a:pPr algn="ctr"/>
-                      <a:r>
-                        <a:rPr sz="1100">
-                          <a:solidFill>
-                            <a:srgbClr val="1A1A2E"/>
-                          </a:solidFill>
-                        </a:rPr>
-                        <a:t>0.006</a:t>
-                      </a:r>
-                    </a:p>
-                  </a:txBody>
-                  <a:tcPr>
-                    <a:solidFill>
-                      <a:srgbClr val="FFFFFF"/>
-                    </a:solidFill>
-                  </a:tcPr>
-                </a:tc>
+                <a:extLst>
+                  <a:ext uri="{0D108BD9-81ED-4DB2-BD59-A6C34878D82A}">
+                    <a16:rowId xmlns:a16="http://schemas.microsoft.com/office/drawing/2014/main" val="10002"/>
+                  </a:ext>
+                </a:extLst>
               </a:tr>
               <a:tr h="377190">
                 <a:tc>
@@ -3938,12 +4065,56 @@
                     <a:p>
                       <a:pPr algn="ctr"/>
                       <a:r>
+                        <a:rPr sz="1100" dirty="0">
+                          <a:solidFill>
+                            <a:srgbClr val="1A1A2E"/>
+                          </a:solidFill>
+                        </a:rPr>
+                        <a:t>7.20 *</a:t>
+                      </a:r>
+                    </a:p>
+                  </a:txBody>
+                  <a:tcPr>
+                    <a:solidFill>
+                      <a:srgbClr val="F2F2F2"/>
+                    </a:solidFill>
+                  </a:tcPr>
+                </a:tc>
+                <a:tc>
+                  <a:txBody>
+                    <a:bodyPr/>
+                    <a:lstStyle/>
+                    <a:p>
+                      <a:pPr algn="ctr"/>
+                      <a:r>
+                        <a:rPr sz="1100" dirty="0">
+                          <a:solidFill>
+                            <a:srgbClr val="1A1A2E"/>
+                          </a:solidFill>
+                        </a:rPr>
+                        <a:t>[5.55, 8.85]</a:t>
+                      </a:r>
+                    </a:p>
+                  </a:txBody>
+                  <a:tcPr>
+                    <a:solidFill>
+                      <a:srgbClr val="F2F2F2"/>
+                    </a:solidFill>
+                  </a:tcPr>
+                </a:tc>
+                <a:tc>
+                  <a:txBody>
+                    <a:bodyPr/>
+                    <a:lstStyle/>
+                    <a:p>
+                      <a:pPr algn="ctr"/>
+                      <a:r>
                         <a:rPr sz="1100">
                           <a:solidFill>
                             <a:srgbClr val="1A1A2E"/>
                           </a:solidFill>
                         </a:rPr>
-                        <a:t>7.20 *</a:t>
+                        <a:t>&lt; 0.001</a:t>
                       </a:r>
                     </a:p>
                   </a:txBody>
@@ -3965,7 +4136,7 @@
                             <a:srgbClr val="1A1A2E"/>
                           </a:solidFill>
                         </a:rPr>
-                        <a:t>[5.55, 8.85]</a:t>
+                        <a:t>0.055</a:t>
                       </a:r>
                     </a:p>
                   </a:txBody>
@@ -3975,50 +4146,11 @@
                     </a:solidFill>
                   </a:tcPr>
                 </a:tc>
-                <a:tc>
-                  <a:txBody>
-                    <a:bodyPr/>
-                    <a:lstStyle/>
-                    <a:p>
-                      <a:pPr algn="ctr"/>
-                      <a:r>
-                        <a:rPr sz="1100">
-                          <a:solidFill>
-                            <a:srgbClr val="1A1A2E"/>
-                          </a:solidFill>
-                        </a:rPr>
-                        <a:t>&lt; 0.001</a:t>
-                      </a:r>
-                    </a:p>
-                  </a:txBody>
-                  <a:tcPr>
-                    <a:solidFill>
-                      <a:srgbClr val="F2F2F2"/>
-                    </a:solidFill>
-                  </a:tcPr>
-                </a:tc>
-                <a:tc>
-                  <a:txBody>
-                    <a:bodyPr/>
-                    <a:lstStyle/>
-                    <a:p>
-                      <a:pPr algn="ctr"/>
-                      <a:r>
-                        <a:rPr sz="1100">
-                          <a:solidFill>
-                            <a:srgbClr val="1A1A2E"/>
-                          </a:solidFill>
-                        </a:rPr>
-                        <a:t>0.055</a:t>
-                      </a:r>
-                    </a:p>
-                  </a:txBody>
-                  <a:tcPr>
-                    <a:solidFill>
-                      <a:srgbClr val="F2F2F2"/>
-                    </a:solidFill>
-                  </a:tcPr>
-                </a:tc>
+                <a:extLst>
+                  <a:ext uri="{0D108BD9-81ED-4DB2-BD59-A6C34878D82A}">
+                    <a16:rowId xmlns:a16="http://schemas.microsoft.com/office/drawing/2014/main" val="10003"/>
+                  </a:ext>
+                </a:extLst>
               </a:tr>
               <a:tr h="377190">
                 <a:tc>
@@ -4072,12 +4204,56 @@
                     <a:p>
                       <a:pPr algn="ctr"/>
                       <a:r>
+                        <a:rPr sz="1100" dirty="0">
+                          <a:solidFill>
+                            <a:srgbClr val="1A1A2E"/>
+                          </a:solidFill>
+                        </a:rPr>
+                        <a:t>[-5.56, -2.19]</a:t>
+                      </a:r>
+                    </a:p>
+                  </a:txBody>
+                  <a:tcPr>
+                    <a:solidFill>
+                      <a:srgbClr val="FFFFFF"/>
+                    </a:solidFill>
+                  </a:tcPr>
+                </a:tc>
+                <a:tc>
+                  <a:txBody>
+                    <a:bodyPr/>
+                    <a:lstStyle/>
+                    <a:p>
+                      <a:pPr algn="ctr"/>
+                      <a:r>
+                        <a:rPr sz="1100" dirty="0">
+                          <a:solidFill>
+                            <a:srgbClr val="1A1A2E"/>
+                          </a:solidFill>
+                        </a:rPr>
+                        <a:t>&lt; 0.001</a:t>
+                      </a:r>
+                    </a:p>
+                  </a:txBody>
+                  <a:tcPr>
+                    <a:solidFill>
+                      <a:srgbClr val="FFFFFF"/>
+                    </a:solidFill>
+                  </a:tcPr>
+                </a:tc>
+                <a:tc>
+                  <a:txBody>
+                    <a:bodyPr/>
+                    <a:lstStyle/>
+                    <a:p>
+                      <a:pPr algn="ctr"/>
+                      <a:r>
                         <a:rPr sz="1100">
                           <a:solidFill>
                             <a:srgbClr val="1A1A2E"/>
                           </a:solidFill>
                         </a:rPr>
-                        <a:t>[-5.56, -2.19]</a:t>
+                        <a:t>0.016</a:t>
                       </a:r>
                     </a:p>
                   </a:txBody>
@@ -4087,50 +4263,11 @@
                     </a:solidFill>
                   </a:tcPr>
                 </a:tc>
-                <a:tc>
-                  <a:txBody>
-                    <a:bodyPr/>
-                    <a:lstStyle/>
-                    <a:p>
-                      <a:pPr algn="ctr"/>
-                      <a:r>
-                        <a:rPr sz="1100">
-                          <a:solidFill>
-                            <a:srgbClr val="1A1A2E"/>
-                          </a:solidFill>
-                        </a:rPr>
-                        <a:t>&lt; 0.001</a:t>
-                      </a:r>
-                    </a:p>
-                  </a:txBody>
-                  <a:tcPr>
-                    <a:solidFill>
-                      <a:srgbClr val="FFFFFF"/>
-                    </a:solidFill>
-                  </a:tcPr>
-                </a:tc>
-                <a:tc>
-                  <a:txBody>
-                    <a:bodyPr/>
-                    <a:lstStyle/>
-                    <a:p>
-                      <a:pPr algn="ctr"/>
-                      <a:r>
-                        <a:rPr sz="1100">
-                          <a:solidFill>
-                            <a:srgbClr val="1A1A2E"/>
-                          </a:solidFill>
-                        </a:rPr>
-                        <a:t>0.016</a:t>
-                      </a:r>
-                    </a:p>
-                  </a:txBody>
-                  <a:tcPr>
-                    <a:solidFill>
-                      <a:srgbClr val="FFFFFF"/>
-                    </a:solidFill>
-                  </a:tcPr>
-                </a:tc>
+                <a:extLst>
+                  <a:ext uri="{0D108BD9-81ED-4DB2-BD59-A6C34878D82A}">
+                    <a16:rowId xmlns:a16="http://schemas.microsoft.com/office/drawing/2014/main" val="10004"/>
+                  </a:ext>
+                </a:extLst>
               </a:tr>
               <a:tr h="377190">
                 <a:tc>
@@ -4206,7 +4343,7 @@
                     <a:p>
                       <a:pPr algn="ctr"/>
                       <a:r>
-                        <a:rPr sz="1100">
+                        <a:rPr sz="1100" dirty="0">
                           <a:solidFill>
                             <a:srgbClr val="1A1A2E"/>
                           </a:solidFill>
@@ -4228,7 +4365,7 @@
                     <a:p>
                       <a:pPr algn="ctr"/>
                       <a:r>
-                        <a:rPr sz="1100">
+                        <a:rPr sz="1100" dirty="0">
                           <a:solidFill>
                             <a:srgbClr val="1A1A2E"/>
                           </a:solidFill>
@@ -4243,6 +4380,11 @@
                     </a:solidFill>
                   </a:tcPr>
                 </a:tc>
+                <a:extLst>
+                  <a:ext uri="{0D108BD9-81ED-4DB2-BD59-A6C34878D82A}">
+                    <a16:rowId xmlns:a16="http://schemas.microsoft.com/office/drawing/2014/main" val="10005"/>
+                  </a:ext>
+                </a:extLst>
               </a:tr>
               <a:tr h="377190">
                 <a:tc>
@@ -4340,7 +4482,7 @@
                     <a:p>
                       <a:pPr algn="ctr"/>
                       <a:r>
-                        <a:rPr sz="1100">
+                        <a:rPr sz="1100" dirty="0">
                           <a:solidFill>
                             <a:srgbClr val="1A1A2E"/>
                           </a:solidFill>
@@ -4355,6 +4497,11 @@
                     </a:solidFill>
                   </a:tcPr>
                 </a:tc>
+                <a:extLst>
+                  <a:ext uri="{0D108BD9-81ED-4DB2-BD59-A6C34878D82A}">
+                    <a16:rowId xmlns:a16="http://schemas.microsoft.com/office/drawing/2014/main" val="10006"/>
+                  </a:ext>
+                </a:extLst>
               </a:tr>
               <a:tr h="377190">
                 <a:tc>
@@ -4452,7 +4599,7 @@
                     <a:p>
                       <a:pPr algn="ctr"/>
                       <a:r>
-                        <a:rPr sz="1100">
+                        <a:rPr sz="1100" dirty="0">
                           <a:solidFill>
                             <a:srgbClr val="1A1A2E"/>
                           </a:solidFill>
@@ -4467,6 +4614,11 @@
                     </a:solidFill>
                   </a:tcPr>
                 </a:tc>
+                <a:extLst>
+                  <a:ext uri="{0D108BD9-81ED-4DB2-BD59-A6C34878D82A}">
+                    <a16:rowId xmlns:a16="http://schemas.microsoft.com/office/drawing/2014/main" val="10007"/>
+                  </a:ext>
+                </a:extLst>
               </a:tr>
             </a:tbl>
           </a:graphicData>
@@ -4631,7 +4783,7 @@
 </file>
 
 <file path=ppt/slides/slide11.xml><?xml version="1.0" encoding="utf-8"?>
-<p:sld xmlns:a="http://schemas.openxmlformats.org/drawingml/2006/main" xmlns:p="http://schemas.openxmlformats.org/presentationml/2006/main" xmlns:r="http://schemas.openxmlformats.org/officeDocument/2006/relationships">
+<p:sld xmlns:a="http://schemas.openxmlformats.org/drawingml/2006/main" xmlns:r="http://schemas.openxmlformats.org/officeDocument/2006/relationships" xmlns:p="http://schemas.openxmlformats.org/presentationml/2006/main">
   <p:cSld>
     <p:spTree>
       <p:nvGrpSpPr>
@@ -4639,7 +4791,14 @@
         <p:cNvGrpSpPr/>
         <p:nvPr/>
       </p:nvGrpSpPr>
-      <p:grpSpPr/>
+      <p:grpSpPr>
+        <a:xfrm>
+          <a:off x="0" y="0"/>
+          <a:ext cx="0" cy="0"/>
+          <a:chOff x="0" y="0"/>
+          <a:chExt cx="0" cy="0"/>
+        </a:xfrm>
+      </p:grpSpPr>
       <p:sp>
         <p:nvSpPr>
           <p:cNvPr id="2" name="Rectangle 1"/>
@@ -4680,6 +4839,7 @@
           <a:lstStyle/>
           <a:p>
             <a:pPr algn="ctr"/>
+            <a:endParaRPr/>
           </a:p>
         </p:txBody>
       </p:sp>
@@ -4723,6 +4883,7 @@
           <a:lstStyle/>
           <a:p>
             <a:pPr algn="ctr"/>
+            <a:endParaRPr/>
           </a:p>
         </p:txBody>
       </p:sp>
@@ -4834,6 +4995,7 @@
           <a:lstStyle/>
           <a:p>
             <a:pPr algn="ctr"/>
+            <a:endParaRPr/>
           </a:p>
         </p:txBody>
       </p:sp>
@@ -4945,6 +5107,7 @@
           <a:lstStyle/>
           <a:p>
             <a:pPr algn="ctr"/>
+            <a:endParaRPr/>
           </a:p>
         </p:txBody>
       </p:sp>
@@ -5056,6 +5219,7 @@
           <a:lstStyle/>
           <a:p>
             <a:pPr algn="ctr"/>
+            <a:endParaRPr/>
           </a:p>
         </p:txBody>
       </p:sp>
@@ -5167,6 +5331,7 @@
           <a:lstStyle/>
           <a:p>
             <a:pPr algn="ctr"/>
+            <a:endParaRPr/>
           </a:p>
         </p:txBody>
       </p:sp>
@@ -5278,6 +5443,7 @@
           <a:lstStyle/>
           <a:p>
             <a:pPr algn="ctr"/>
+            <a:endParaRPr/>
           </a:p>
         </p:txBody>
       </p:sp>
@@ -5390,6 +5556,7 @@
           <a:lstStyle/>
           <a:p>
             <a:pPr algn="ctr"/>
+            <a:endParaRPr/>
           </a:p>
         </p:txBody>
       </p:sp>
@@ -5515,10 +5682,34 @@
                 <a:tableStyleId>{5C22544A-7EE6-4342-B048-85BDC9FD1C3A}</a:tableStyleId>
               </a:tblPr>
               <a:tblGrid>
-                <a:gridCol w="1485900"/>
-                <a:gridCol w="1485900"/>
-                <a:gridCol w="1485900"/>
-                <a:gridCol w="1485900"/>
+                <a:gridCol w="1485900">
+                  <a:extLst>
+                    <a:ext uri="{9D8B030D-6E8A-4147-A177-3AD203B41FA5}">
+                      <a16:colId xmlns:a16="http://schemas.microsoft.com/office/drawing/2014/main" val="20000"/>
+                    </a:ext>
+                  </a:extLst>
+                </a:gridCol>
+                <a:gridCol w="1485900">
+                  <a:extLst>
+                    <a:ext uri="{9D8B030D-6E8A-4147-A177-3AD203B41FA5}">
+                      <a16:colId xmlns:a16="http://schemas.microsoft.com/office/drawing/2014/main" val="20001"/>
+                    </a:ext>
+                  </a:extLst>
+                </a:gridCol>
+                <a:gridCol w="1485900">
+                  <a:extLst>
+                    <a:ext uri="{9D8B030D-6E8A-4147-A177-3AD203B41FA5}">
+                      <a16:colId xmlns:a16="http://schemas.microsoft.com/office/drawing/2014/main" val="20002"/>
+                    </a:ext>
+                  </a:extLst>
+                </a:gridCol>
+                <a:gridCol w="1485900">
+                  <a:extLst>
+                    <a:ext uri="{9D8B030D-6E8A-4147-A177-3AD203B41FA5}">
+                      <a16:colId xmlns:a16="http://schemas.microsoft.com/office/drawing/2014/main" val="20003"/>
+                    </a:ext>
+                  </a:extLst>
+                </a:gridCol>
               </a:tblGrid>
               <a:tr h="365760">
                 <a:tc>
@@ -5528,7 +5719,7 @@
                     <a:p>
                       <a:pPr algn="ctr"/>
                       <a:r>
-                        <a:rPr b="1" sz="1100">
+                        <a:rPr sz="1100" b="1">
                           <a:solidFill>
                             <a:srgbClr val="FFFFFF"/>
                           </a:solidFill>
@@ -5550,7 +5741,7 @@
                     <a:p>
                       <a:pPr algn="ctr"/>
                       <a:r>
-                        <a:rPr b="1" sz="1100">
+                        <a:rPr sz="1100" b="1">
                           <a:solidFill>
                             <a:srgbClr val="FFFFFF"/>
                           </a:solidFill>
@@ -5572,7 +5763,7 @@
                     <a:p>
                       <a:pPr algn="ctr"/>
                       <a:r>
-                        <a:rPr b="1" sz="1100">
+                        <a:rPr sz="1100" b="1">
                           <a:solidFill>
                             <a:srgbClr val="FFFFFF"/>
                           </a:solidFill>
@@ -5594,7 +5785,7 @@
                     <a:p>
                       <a:pPr algn="ctr"/>
                       <a:r>
-                        <a:rPr b="1" sz="1100">
+                        <a:rPr sz="1100" b="1">
                           <a:solidFill>
                             <a:srgbClr val="FFFFFF"/>
                           </a:solidFill>
@@ -5609,6 +5800,11 @@
                     </a:solidFill>
                   </a:tcPr>
                 </a:tc>
+                <a:extLst>
+                  <a:ext uri="{0D108BD9-81ED-4DB2-BD59-A6C34878D82A}">
+                    <a16:rowId xmlns:a16="http://schemas.microsoft.com/office/drawing/2014/main" val="10000"/>
+                  </a:ext>
+                </a:extLst>
               </a:tr>
               <a:tr h="365760">
                 <a:tc>
@@ -5699,6 +5895,11 @@
                     </a:solidFill>
                   </a:tcPr>
                 </a:tc>
+                <a:extLst>
+                  <a:ext uri="{0D108BD9-81ED-4DB2-BD59-A6C34878D82A}">
+                    <a16:rowId xmlns:a16="http://schemas.microsoft.com/office/drawing/2014/main" val="10001"/>
+                  </a:ext>
+                </a:extLst>
               </a:tr>
               <a:tr h="365760">
                 <a:tc>
@@ -5789,6 +5990,11 @@
                     </a:solidFill>
                   </a:tcPr>
                 </a:tc>
+                <a:extLst>
+                  <a:ext uri="{0D108BD9-81ED-4DB2-BD59-A6C34878D82A}">
+                    <a16:rowId xmlns:a16="http://schemas.microsoft.com/office/drawing/2014/main" val="10002"/>
+                  </a:ext>
+                </a:extLst>
               </a:tr>
               <a:tr h="365760">
                 <a:tc>
@@ -5879,6 +6085,11 @@
                     </a:solidFill>
                   </a:tcPr>
                 </a:tc>
+                <a:extLst>
+                  <a:ext uri="{0D108BD9-81ED-4DB2-BD59-A6C34878D82A}">
+                    <a16:rowId xmlns:a16="http://schemas.microsoft.com/office/drawing/2014/main" val="10003"/>
+                  </a:ext>
+                </a:extLst>
               </a:tr>
               <a:tr h="365760">
                 <a:tc>
@@ -5969,6 +6180,11 @@
                     </a:solidFill>
                   </a:tcPr>
                 </a:tc>
+                <a:extLst>
+                  <a:ext uri="{0D108BD9-81ED-4DB2-BD59-A6C34878D82A}">
+                    <a16:rowId xmlns:a16="http://schemas.microsoft.com/office/drawing/2014/main" val="10004"/>
+                  </a:ext>
+                </a:extLst>
               </a:tr>
             </a:tbl>
           </a:graphicData>
@@ -6100,7 +6316,7 @@
 </file>
 
 <file path=ppt/slides/slide12.xml><?xml version="1.0" encoding="utf-8"?>
-<p:sld xmlns:a="http://schemas.openxmlformats.org/drawingml/2006/main" xmlns:p="http://schemas.openxmlformats.org/presentationml/2006/main" xmlns:r="http://schemas.openxmlformats.org/officeDocument/2006/relationships">
+<p:sld xmlns:a="http://schemas.openxmlformats.org/drawingml/2006/main" xmlns:r="http://schemas.openxmlformats.org/officeDocument/2006/relationships" xmlns:p="http://schemas.openxmlformats.org/presentationml/2006/main">
   <p:cSld>
     <p:spTree>
       <p:nvGrpSpPr>
@@ -6108,7 +6324,14 @@
         <p:cNvGrpSpPr/>
         <p:nvPr/>
       </p:nvGrpSpPr>
-      <p:grpSpPr/>
+      <p:grpSpPr>
+        <a:xfrm>
+          <a:off x="0" y="0"/>
+          <a:ext cx="0" cy="0"/>
+          <a:chOff x="0" y="0"/>
+          <a:chExt cx="0" cy="0"/>
+        </a:xfrm>
+      </p:grpSpPr>
       <p:sp>
         <p:nvSpPr>
           <p:cNvPr id="2" name="Rectangle 1"/>
@@ -6149,6 +6372,7 @@
           <a:lstStyle/>
           <a:p>
             <a:pPr algn="ctr"/>
+            <a:endParaRPr/>
           </a:p>
         </p:txBody>
       </p:sp>
@@ -6192,6 +6416,7 @@
           <a:lstStyle/>
           <a:p>
             <a:pPr algn="ctr"/>
+            <a:endParaRPr/>
           </a:p>
         </p:txBody>
       </p:sp>
@@ -6282,12 +6507,48 @@
                 <a:tableStyleId>{5C22544A-7EE6-4342-B048-85BDC9FD1C3A}</a:tableStyleId>
               </a:tblPr>
               <a:tblGrid>
-                <a:gridCol w="1920240"/>
-                <a:gridCol w="1920240"/>
-                <a:gridCol w="1920240"/>
-                <a:gridCol w="1920240"/>
-                <a:gridCol w="1920240"/>
-                <a:gridCol w="1920240"/>
+                <a:gridCol w="1920240">
+                  <a:extLst>
+                    <a:ext uri="{9D8B030D-6E8A-4147-A177-3AD203B41FA5}">
+                      <a16:colId xmlns:a16="http://schemas.microsoft.com/office/drawing/2014/main" val="20000"/>
+                    </a:ext>
+                  </a:extLst>
+                </a:gridCol>
+                <a:gridCol w="1920240">
+                  <a:extLst>
+                    <a:ext uri="{9D8B030D-6E8A-4147-A177-3AD203B41FA5}">
+                      <a16:colId xmlns:a16="http://schemas.microsoft.com/office/drawing/2014/main" val="20001"/>
+                    </a:ext>
+                  </a:extLst>
+                </a:gridCol>
+                <a:gridCol w="1920240">
+                  <a:extLst>
+                    <a:ext uri="{9D8B030D-6E8A-4147-A177-3AD203B41FA5}">
+                      <a16:colId xmlns:a16="http://schemas.microsoft.com/office/drawing/2014/main" val="20002"/>
+                    </a:ext>
+                  </a:extLst>
+                </a:gridCol>
+                <a:gridCol w="1920240">
+                  <a:extLst>
+                    <a:ext uri="{9D8B030D-6E8A-4147-A177-3AD203B41FA5}">
+                      <a16:colId xmlns:a16="http://schemas.microsoft.com/office/drawing/2014/main" val="20003"/>
+                    </a:ext>
+                  </a:extLst>
+                </a:gridCol>
+                <a:gridCol w="1920240">
+                  <a:extLst>
+                    <a:ext uri="{9D8B030D-6E8A-4147-A177-3AD203B41FA5}">
+                      <a16:colId xmlns:a16="http://schemas.microsoft.com/office/drawing/2014/main" val="20004"/>
+                    </a:ext>
+                  </a:extLst>
+                </a:gridCol>
+                <a:gridCol w="1920240">
+                  <a:extLst>
+                    <a:ext uri="{9D8B030D-6E8A-4147-A177-3AD203B41FA5}">
+                      <a16:colId xmlns:a16="http://schemas.microsoft.com/office/drawing/2014/main" val="20005"/>
+                    </a:ext>
+                  </a:extLst>
+                </a:gridCol>
               </a:tblGrid>
               <a:tr h="489857">
                 <a:tc>
@@ -6297,7 +6558,7 @@
                     <a:p>
                       <a:pPr algn="ctr"/>
                       <a:r>
-                        <a:rPr b="1" sz="1100">
+                        <a:rPr sz="1100" b="1">
                           <a:solidFill>
                             <a:srgbClr val="FFFFFF"/>
                           </a:solidFill>
@@ -6319,7 +6580,7 @@
                     <a:p>
                       <a:pPr algn="ctr"/>
                       <a:r>
-                        <a:rPr b="1" sz="1100">
+                        <a:rPr sz="1100" b="1">
                           <a:solidFill>
                             <a:srgbClr val="FFFFFF"/>
                           </a:solidFill>
@@ -6341,7 +6602,7 @@
                     <a:p>
                       <a:pPr algn="ctr"/>
                       <a:r>
-                        <a:rPr b="1" sz="1100">
+                        <a:rPr sz="1100" b="1">
                           <a:solidFill>
                             <a:srgbClr val="FFFFFF"/>
                           </a:solidFill>
@@ -6363,7 +6624,7 @@
                     <a:p>
                       <a:pPr algn="ctr"/>
                       <a:r>
-                        <a:rPr b="1" sz="1100">
+                        <a:rPr sz="1100" b="1">
                           <a:solidFill>
                             <a:srgbClr val="FFFFFF"/>
                           </a:solidFill>
@@ -6385,7 +6646,7 @@
                     <a:p>
                       <a:pPr algn="ctr"/>
                       <a:r>
-                        <a:rPr b="1" sz="1100">
+                        <a:rPr sz="1100" b="1">
                           <a:solidFill>
                             <a:srgbClr val="FFFFFF"/>
                           </a:solidFill>
@@ -6407,7 +6668,7 @@
                     <a:p>
                       <a:pPr algn="ctr"/>
                       <a:r>
-                        <a:rPr b="1" sz="1100">
+                        <a:rPr sz="1100" b="1">
                           <a:solidFill>
                             <a:srgbClr val="FFFFFF"/>
                           </a:solidFill>
@@ -6422,6 +6683,11 @@
                     </a:solidFill>
                   </a:tcPr>
                 </a:tc>
+                <a:extLst>
+                  <a:ext uri="{0D108BD9-81ED-4DB2-BD59-A6C34878D82A}">
+                    <a16:rowId xmlns:a16="http://schemas.microsoft.com/office/drawing/2014/main" val="10000"/>
+                  </a:ext>
+                </a:extLst>
               </a:tr>
               <a:tr h="489857">
                 <a:tc>
@@ -6431,12 +6697,56 @@
                     <a:p>
                       <a:pPr algn="ctr"/>
                       <a:r>
+                        <a:rPr sz="1100" dirty="0">
+                          <a:solidFill>
+                            <a:srgbClr val="1A1A2E"/>
+                          </a:solidFill>
+                        </a:rPr>
+                        <a:t>Sex</a:t>
+                      </a:r>
+                    </a:p>
+                  </a:txBody>
+                  <a:tcPr>
+                    <a:solidFill>
+                      <a:srgbClr val="F2F2F2"/>
+                    </a:solidFill>
+                  </a:tcPr>
+                </a:tc>
+                <a:tc>
+                  <a:txBody>
+                    <a:bodyPr/>
+                    <a:lstStyle/>
+                    <a:p>
+                      <a:pPr algn="ctr"/>
+                      <a:r>
+                        <a:rPr sz="1100" dirty="0">
+                          <a:solidFill>
+                            <a:srgbClr val="1A1A2E"/>
+                          </a:solidFill>
+                        </a:rPr>
+                        <a:t>42.0461 *</a:t>
+                      </a:r>
+                    </a:p>
+                  </a:txBody>
+                  <a:tcPr>
+                    <a:solidFill>
+                      <a:srgbClr val="F2F2F2"/>
+                    </a:solidFill>
+                  </a:tcPr>
+                </a:tc>
+                <a:tc>
+                  <a:txBody>
+                    <a:bodyPr/>
+                    <a:lstStyle/>
+                    <a:p>
+                      <a:pPr algn="ctr"/>
+                      <a:r>
                         <a:rPr sz="1100">
                           <a:solidFill>
                             <a:srgbClr val="1A1A2E"/>
                           </a:solidFill>
                         </a:rPr>
-                        <a:t>Sex</a:t>
+                        <a:t>[39.703, 44.389]</a:t>
                       </a:r>
                     </a:p>
                   </a:txBody>
@@ -6458,7 +6768,7 @@
                             <a:srgbClr val="1A1A2E"/>
                           </a:solidFill>
                         </a:rPr>
-                        <a:t>42.0461 *</a:t>
+                        <a:t>1.1941</a:t>
                       </a:r>
                     </a:p>
                   </a:txBody>
@@ -6480,7 +6790,7 @@
                             <a:srgbClr val="1A1A2E"/>
                           </a:solidFill>
                         </a:rPr>
-                        <a:t>[39.703, 44.389]</a:t>
+                        <a:t>35.210</a:t>
                       </a:r>
                     </a:p>
                   </a:txBody>
@@ -6502,7 +6812,7 @@
                             <a:srgbClr val="1A1A2E"/>
                           </a:solidFill>
                         </a:rPr>
-                        <a:t>1.1941</a:t>
+                        <a:t>0.0000e+00</a:t>
                       </a:r>
                     </a:p>
                   </a:txBody>
@@ -6512,50 +6822,11 @@
                     </a:solidFill>
                   </a:tcPr>
                 </a:tc>
-                <a:tc>
-                  <a:txBody>
-                    <a:bodyPr/>
-                    <a:lstStyle/>
-                    <a:p>
-                      <a:pPr algn="ctr"/>
-                      <a:r>
-                        <a:rPr sz="1100">
-                          <a:solidFill>
-                            <a:srgbClr val="1A1A2E"/>
-                          </a:solidFill>
-                        </a:rPr>
-                        <a:t>35.210</a:t>
-                      </a:r>
-                    </a:p>
-                  </a:txBody>
-                  <a:tcPr>
-                    <a:solidFill>
-                      <a:srgbClr val="F2F2F2"/>
-                    </a:solidFill>
-                  </a:tcPr>
-                </a:tc>
-                <a:tc>
-                  <a:txBody>
-                    <a:bodyPr/>
-                    <a:lstStyle/>
-                    <a:p>
-                      <a:pPr algn="ctr"/>
-                      <a:r>
-                        <a:rPr sz="1100">
-                          <a:solidFill>
-                            <a:srgbClr val="1A1A2E"/>
-                          </a:solidFill>
-                        </a:rPr>
-                        <a:t>0.0000e+00</a:t>
-                      </a:r>
-                    </a:p>
-                  </a:txBody>
-                  <a:tcPr>
-                    <a:solidFill>
-                      <a:srgbClr val="F2F2F2"/>
-                    </a:solidFill>
-                  </a:tcPr>
-                </a:tc>
+                <a:extLst>
+                  <a:ext uri="{0D108BD9-81ED-4DB2-BD59-A6C34878D82A}">
+                    <a16:rowId xmlns:a16="http://schemas.microsoft.com/office/drawing/2014/main" val="10001"/>
+                  </a:ext>
+                </a:extLst>
               </a:tr>
               <a:tr h="489857">
                 <a:tc>
@@ -6587,12 +6858,56 @@
                     <a:p>
                       <a:pPr algn="ctr"/>
                       <a:r>
+                        <a:rPr sz="1100" dirty="0">
+                          <a:solidFill>
+                            <a:srgbClr val="1A1A2E"/>
+                          </a:solidFill>
+                        </a:rPr>
+                        <a:t>-4.4900 *</a:t>
+                      </a:r>
+                    </a:p>
+                  </a:txBody>
+                  <a:tcPr>
+                    <a:solidFill>
+                      <a:srgbClr val="FFFFFF"/>
+                    </a:solidFill>
+                  </a:tcPr>
+                </a:tc>
+                <a:tc>
+                  <a:txBody>
+                    <a:bodyPr/>
+                    <a:lstStyle/>
+                    <a:p>
+                      <a:pPr algn="ctr"/>
+                      <a:r>
+                        <a:rPr sz="1100" dirty="0">
+                          <a:solidFill>
+                            <a:srgbClr val="1A1A2E"/>
+                          </a:solidFill>
+                        </a:rPr>
+                        <a:t>[-5.676, -3.304]</a:t>
+                      </a:r>
+                    </a:p>
+                  </a:txBody>
+                  <a:tcPr>
+                    <a:solidFill>
+                      <a:srgbClr val="FFFFFF"/>
+                    </a:solidFill>
+                  </a:tcPr>
+                </a:tc>
+                <a:tc>
+                  <a:txBody>
+                    <a:bodyPr/>
+                    <a:lstStyle/>
+                    <a:p>
+                      <a:pPr algn="ctr"/>
+                      <a:r>
                         <a:rPr sz="1100">
                           <a:solidFill>
                             <a:srgbClr val="1A1A2E"/>
                           </a:solidFill>
                         </a:rPr>
-                        <a:t>-4.4900 *</a:t>
+                        <a:t>0.6043</a:t>
                       </a:r>
                     </a:p>
                   </a:txBody>
@@ -6614,7 +6929,7 @@
                             <a:srgbClr val="1A1A2E"/>
                           </a:solidFill>
                         </a:rPr>
-                        <a:t>[-5.676, -3.304]</a:t>
+                        <a:t>-7.430</a:t>
                       </a:r>
                     </a:p>
                   </a:txBody>
@@ -6636,7 +6951,7 @@
                             <a:srgbClr val="1A1A2E"/>
                           </a:solidFill>
                         </a:rPr>
-                        <a:t>0.6043</a:t>
+                        <a:t>0.0000e+00</a:t>
                       </a:r>
                     </a:p>
                   </a:txBody>
@@ -6646,50 +6961,11 @@
                     </a:solidFill>
                   </a:tcPr>
                 </a:tc>
-                <a:tc>
-                  <a:txBody>
-                    <a:bodyPr/>
-                    <a:lstStyle/>
-                    <a:p>
-                      <a:pPr algn="ctr"/>
-                      <a:r>
-                        <a:rPr sz="1100">
-                          <a:solidFill>
-                            <a:srgbClr val="1A1A2E"/>
-                          </a:solidFill>
-                        </a:rPr>
-                        <a:t>-7.430</a:t>
-                      </a:r>
-                    </a:p>
-                  </a:txBody>
-                  <a:tcPr>
-                    <a:solidFill>
-                      <a:srgbClr val="FFFFFF"/>
-                    </a:solidFill>
-                  </a:tcPr>
-                </a:tc>
-                <a:tc>
-                  <a:txBody>
-                    <a:bodyPr/>
-                    <a:lstStyle/>
-                    <a:p>
-                      <a:pPr algn="ctr"/>
-                      <a:r>
-                        <a:rPr sz="1100">
-                          <a:solidFill>
-                            <a:srgbClr val="1A1A2E"/>
-                          </a:solidFill>
-                        </a:rPr>
-                        <a:t>0.0000e+00</a:t>
-                      </a:r>
-                    </a:p>
-                  </a:txBody>
-                  <a:tcPr>
-                    <a:solidFill>
-                      <a:srgbClr val="FFFFFF"/>
-                    </a:solidFill>
-                  </a:tcPr>
-                </a:tc>
+                <a:extLst>
+                  <a:ext uri="{0D108BD9-81ED-4DB2-BD59-A6C34878D82A}">
+                    <a16:rowId xmlns:a16="http://schemas.microsoft.com/office/drawing/2014/main" val="10002"/>
+                  </a:ext>
+                </a:extLst>
               </a:tr>
               <a:tr h="489857">
                 <a:tc>
@@ -6765,12 +7041,56 @@
                     <a:p>
                       <a:pPr algn="ctr"/>
                       <a:r>
+                        <a:rPr sz="1100" dirty="0">
+                          <a:solidFill>
+                            <a:srgbClr val="1A1A2E"/>
+                          </a:solidFill>
+                        </a:rPr>
+                        <a:t>0.6818</a:t>
+                      </a:r>
+                    </a:p>
+                  </a:txBody>
+                  <a:tcPr>
+                    <a:solidFill>
+                      <a:srgbClr val="F2F2F2"/>
+                    </a:solidFill>
+                  </a:tcPr>
+                </a:tc>
+                <a:tc>
+                  <a:txBody>
+                    <a:bodyPr/>
+                    <a:lstStyle/>
+                    <a:p>
+                      <a:pPr algn="ctr"/>
+                      <a:r>
+                        <a:rPr sz="1100" dirty="0">
+                          <a:solidFill>
+                            <a:srgbClr val="1A1A2E"/>
+                          </a:solidFill>
+                        </a:rPr>
+                        <a:t>9.864</a:t>
+                      </a:r>
+                    </a:p>
+                  </a:txBody>
+                  <a:tcPr>
+                    <a:solidFill>
+                      <a:srgbClr val="F2F2F2"/>
+                    </a:solidFill>
+                  </a:tcPr>
+                </a:tc>
+                <a:tc>
+                  <a:txBody>
+                    <a:bodyPr/>
+                    <a:lstStyle/>
+                    <a:p>
+                      <a:pPr algn="ctr"/>
+                      <a:r>
                         <a:rPr sz="1100">
                           <a:solidFill>
                             <a:srgbClr val="1A1A2E"/>
                           </a:solidFill>
                         </a:rPr>
-                        <a:t>0.6818</a:t>
+                        <a:t>0.0000e+00</a:t>
                       </a:r>
                     </a:p>
                   </a:txBody>
@@ -6780,50 +7100,11 @@
                     </a:solidFill>
                   </a:tcPr>
                 </a:tc>
-                <a:tc>
-                  <a:txBody>
-                    <a:bodyPr/>
-                    <a:lstStyle/>
-                    <a:p>
-                      <a:pPr algn="ctr"/>
-                      <a:r>
-                        <a:rPr sz="1100">
-                          <a:solidFill>
-                            <a:srgbClr val="1A1A2E"/>
-                          </a:solidFill>
-                        </a:rPr>
-                        <a:t>9.864</a:t>
-                      </a:r>
-                    </a:p>
-                  </a:txBody>
-                  <a:tcPr>
-                    <a:solidFill>
-                      <a:srgbClr val="F2F2F2"/>
-                    </a:solidFill>
-                  </a:tcPr>
-                </a:tc>
-                <a:tc>
-                  <a:txBody>
-                    <a:bodyPr/>
-                    <a:lstStyle/>
-                    <a:p>
-                      <a:pPr algn="ctr"/>
-                      <a:r>
-                        <a:rPr sz="1100">
-                          <a:solidFill>
-                            <a:srgbClr val="1A1A2E"/>
-                          </a:solidFill>
-                        </a:rPr>
-                        <a:t>0.0000e+00</a:t>
-                      </a:r>
-                    </a:p>
-                  </a:txBody>
-                  <a:tcPr>
-                    <a:solidFill>
-                      <a:srgbClr val="F2F2F2"/>
-                    </a:solidFill>
-                  </a:tcPr>
-                </a:tc>
+                <a:extLst>
+                  <a:ext uri="{0D108BD9-81ED-4DB2-BD59-A6C34878D82A}">
+                    <a16:rowId xmlns:a16="http://schemas.microsoft.com/office/drawing/2014/main" val="10003"/>
+                  </a:ext>
+                </a:extLst>
               </a:tr>
               <a:tr h="489857">
                 <a:tc>
@@ -6921,7 +7202,7 @@
                     <a:p>
                       <a:pPr algn="ctr"/>
                       <a:r>
-                        <a:rPr sz="1100">
+                        <a:rPr sz="1100" dirty="0">
                           <a:solidFill>
                             <a:srgbClr val="1A1A2E"/>
                           </a:solidFill>
@@ -6943,7 +7224,7 @@
                     <a:p>
                       <a:pPr algn="ctr"/>
                       <a:r>
-                        <a:rPr sz="1100">
+                        <a:rPr sz="1100" dirty="0">
                           <a:solidFill>
                             <a:srgbClr val="1A1A2E"/>
                           </a:solidFill>
@@ -6958,6 +7239,11 @@
                     </a:solidFill>
                   </a:tcPr>
                 </a:tc>
+                <a:extLst>
+                  <a:ext uri="{0D108BD9-81ED-4DB2-BD59-A6C34878D82A}">
+                    <a16:rowId xmlns:a16="http://schemas.microsoft.com/office/drawing/2014/main" val="10004"/>
+                  </a:ext>
+                </a:extLst>
               </a:tr>
               <a:tr h="489857">
                 <a:tc>
@@ -7077,7 +7363,7 @@
                     <a:p>
                       <a:pPr algn="ctr"/>
                       <a:r>
-                        <a:rPr sz="1100">
+                        <a:rPr sz="1100" dirty="0">
                           <a:solidFill>
                             <a:srgbClr val="1A1A2E"/>
                           </a:solidFill>
@@ -7092,6 +7378,11 @@
                     </a:solidFill>
                   </a:tcPr>
                 </a:tc>
+                <a:extLst>
+                  <a:ext uri="{0D108BD9-81ED-4DB2-BD59-A6C34878D82A}">
+                    <a16:rowId xmlns:a16="http://schemas.microsoft.com/office/drawing/2014/main" val="10005"/>
+                  </a:ext>
+                </a:extLst>
               </a:tr>
               <a:tr h="489858">
                 <a:tc>
@@ -7211,7 +7502,7 @@
                     <a:p>
                       <a:pPr algn="ctr"/>
                       <a:r>
-                        <a:rPr sz="1100">
+                        <a:rPr sz="1100" dirty="0">
                           <a:solidFill>
                             <a:srgbClr val="1A1A2E"/>
                           </a:solidFill>
@@ -7226,6 +7517,11 @@
                     </a:solidFill>
                   </a:tcPr>
                 </a:tc>
+                <a:extLst>
+                  <a:ext uri="{0D108BD9-81ED-4DB2-BD59-A6C34878D82A}">
+                    <a16:rowId xmlns:a16="http://schemas.microsoft.com/office/drawing/2014/main" val="10006"/>
+                  </a:ext>
+                </a:extLst>
               </a:tr>
             </a:tbl>
           </a:graphicData>
@@ -7332,7 +7628,7 @@
 </file>
 
 <file path=ppt/slides/slide13.xml><?xml version="1.0" encoding="utf-8"?>
-<p:sld xmlns:a="http://schemas.openxmlformats.org/drawingml/2006/main" xmlns:p="http://schemas.openxmlformats.org/presentationml/2006/main" xmlns:r="http://schemas.openxmlformats.org/officeDocument/2006/relationships">
+<p:sld xmlns:a="http://schemas.openxmlformats.org/drawingml/2006/main" xmlns:r="http://schemas.openxmlformats.org/officeDocument/2006/relationships" xmlns:p="http://schemas.openxmlformats.org/presentationml/2006/main">
   <p:cSld>
     <p:spTree>
       <p:nvGrpSpPr>
@@ -7340,7 +7636,14 @@
         <p:cNvGrpSpPr/>
         <p:nvPr/>
       </p:nvGrpSpPr>
-      <p:grpSpPr/>
+      <p:grpSpPr>
+        <a:xfrm>
+          <a:off x="0" y="0"/>
+          <a:ext cx="0" cy="0"/>
+          <a:chOff x="0" y="0"/>
+          <a:chExt cx="0" cy="0"/>
+        </a:xfrm>
+      </p:grpSpPr>
       <p:sp>
         <p:nvSpPr>
           <p:cNvPr id="2" name="Rectangle 1"/>
@@ -7381,6 +7684,7 @@
           <a:lstStyle/>
           <a:p>
             <a:pPr algn="ctr"/>
+            <a:endParaRPr/>
           </a:p>
         </p:txBody>
       </p:sp>
@@ -7424,6 +7728,7 @@
           <a:lstStyle/>
           <a:p>
             <a:pPr algn="ctr"/>
+            <a:endParaRPr/>
           </a:p>
         </p:txBody>
       </p:sp>
@@ -7514,11 +7819,41 @@
                 <a:tableStyleId>{5C22544A-7EE6-4342-B048-85BDC9FD1C3A}</a:tableStyleId>
               </a:tblPr>
               <a:tblGrid>
-                <a:gridCol w="2304288"/>
-                <a:gridCol w="2304288"/>
-                <a:gridCol w="2304288"/>
-                <a:gridCol w="2304288"/>
-                <a:gridCol w="2304288"/>
+                <a:gridCol w="2304288">
+                  <a:extLst>
+                    <a:ext uri="{9D8B030D-6E8A-4147-A177-3AD203B41FA5}">
+                      <a16:colId xmlns:a16="http://schemas.microsoft.com/office/drawing/2014/main" val="20000"/>
+                    </a:ext>
+                  </a:extLst>
+                </a:gridCol>
+                <a:gridCol w="2304288">
+                  <a:extLst>
+                    <a:ext uri="{9D8B030D-6E8A-4147-A177-3AD203B41FA5}">
+                      <a16:colId xmlns:a16="http://schemas.microsoft.com/office/drawing/2014/main" val="20001"/>
+                    </a:ext>
+                  </a:extLst>
+                </a:gridCol>
+                <a:gridCol w="2304288">
+                  <a:extLst>
+                    <a:ext uri="{9D8B030D-6E8A-4147-A177-3AD203B41FA5}">
+                      <a16:colId xmlns:a16="http://schemas.microsoft.com/office/drawing/2014/main" val="20002"/>
+                    </a:ext>
+                  </a:extLst>
+                </a:gridCol>
+                <a:gridCol w="2304288">
+                  <a:extLst>
+                    <a:ext uri="{9D8B030D-6E8A-4147-A177-3AD203B41FA5}">
+                      <a16:colId xmlns:a16="http://schemas.microsoft.com/office/drawing/2014/main" val="20003"/>
+                    </a:ext>
+                  </a:extLst>
+                </a:gridCol>
+                <a:gridCol w="2304288">
+                  <a:extLst>
+                    <a:ext uri="{9D8B030D-6E8A-4147-A177-3AD203B41FA5}">
+                      <a16:colId xmlns:a16="http://schemas.microsoft.com/office/drawing/2014/main" val="20004"/>
+                    </a:ext>
+                  </a:extLst>
+                </a:gridCol>
               </a:tblGrid>
               <a:tr h="377190">
                 <a:tc>
@@ -7528,7 +7863,7 @@
                     <a:p>
                       <a:pPr algn="ctr"/>
                       <a:r>
-                        <a:rPr b="1" sz="1100">
+                        <a:rPr sz="1100" b="1">
                           <a:solidFill>
                             <a:srgbClr val="FFFFFF"/>
                           </a:solidFill>
@@ -7550,7 +7885,7 @@
                     <a:p>
                       <a:pPr algn="ctr"/>
                       <a:r>
-                        <a:rPr b="1" sz="1100">
+                        <a:rPr sz="1100" b="1">
                           <a:solidFill>
                             <a:srgbClr val="FFFFFF"/>
                           </a:solidFill>
@@ -7572,7 +7907,7 @@
                     <a:p>
                       <a:pPr algn="ctr"/>
                       <a:r>
-                        <a:rPr b="1" sz="1100">
+                        <a:rPr sz="1100" b="1">
                           <a:solidFill>
                             <a:srgbClr val="FFFFFF"/>
                           </a:solidFill>
@@ -7594,7 +7929,7 @@
                     <a:p>
                       <a:pPr algn="ctr"/>
                       <a:r>
-                        <a:rPr b="1" sz="1100">
+                        <a:rPr sz="1100" b="1">
                           <a:solidFill>
                             <a:srgbClr val="FFFFFF"/>
                           </a:solidFill>
@@ -7616,7 +7951,7 @@
                     <a:p>
                       <a:pPr algn="ctr"/>
                       <a:r>
-                        <a:rPr b="1" sz="1100">
+                        <a:rPr sz="1100" b="1">
                           <a:solidFill>
                             <a:srgbClr val="FFFFFF"/>
                           </a:solidFill>
@@ -7631,6 +7966,11 @@
                     </a:solidFill>
                   </a:tcPr>
                 </a:tc>
+                <a:extLst>
+                  <a:ext uri="{0D108BD9-81ED-4DB2-BD59-A6C34878D82A}">
+                    <a16:rowId xmlns:a16="http://schemas.microsoft.com/office/drawing/2014/main" val="10000"/>
+                  </a:ext>
+                </a:extLst>
               </a:tr>
               <a:tr h="377190">
                 <a:tc>
@@ -7640,12 +7980,56 @@
                     <a:p>
                       <a:pPr algn="ctr"/>
                       <a:r>
+                        <a:rPr sz="1100" dirty="0">
+                          <a:solidFill>
+                            <a:srgbClr val="1A1A2E"/>
+                          </a:solidFill>
+                        </a:rPr>
+                        <a:t>Sex (M=1, F=0)</a:t>
+                      </a:r>
+                    </a:p>
+                  </a:txBody>
+                  <a:tcPr>
+                    <a:solidFill>
+                      <a:srgbClr val="F2F2F2"/>
+                    </a:solidFill>
+                  </a:tcPr>
+                </a:tc>
+                <a:tc>
+                  <a:txBody>
+                    <a:bodyPr/>
+                    <a:lstStyle/>
+                    <a:p>
+                      <a:pPr algn="ctr"/>
+                      <a:r>
+                        <a:rPr sz="1100" dirty="0">
+                          <a:solidFill>
+                            <a:srgbClr val="1A1A2E"/>
+                          </a:solidFill>
+                        </a:rPr>
+                        <a:t>1.050</a:t>
+                      </a:r>
+                    </a:p>
+                  </a:txBody>
+                  <a:tcPr>
+                    <a:solidFill>
+                      <a:srgbClr val="F2F2F2"/>
+                    </a:solidFill>
+                  </a:tcPr>
+                </a:tc>
+                <a:tc>
+                  <a:txBody>
+                    <a:bodyPr/>
+                    <a:lstStyle/>
+                    <a:p>
+                      <a:pPr algn="ctr"/>
+                      <a:r>
                         <a:rPr sz="1100">
                           <a:solidFill>
                             <a:srgbClr val="1A1A2E"/>
                           </a:solidFill>
                         </a:rPr>
-                        <a:t>Sex (M=1, F=0)</a:t>
+                        <a:t>[0.814, 1.353]</a:t>
                       </a:r>
                     </a:p>
                   </a:txBody>
@@ -7667,7 +8051,7 @@
                             <a:srgbClr val="1A1A2E"/>
                           </a:solidFill>
                         </a:rPr>
-                        <a:t>1.050</a:t>
+                        <a:t>0.709</a:t>
                       </a:r>
                     </a:p>
                   </a:txBody>
@@ -7689,7 +8073,7 @@
                             <a:srgbClr val="1A1A2E"/>
                           </a:solidFill>
                         </a:rPr>
-                        <a:t>[0.814, 1.353]</a:t>
+                        <a:t>0.506</a:t>
                       </a:r>
                     </a:p>
                   </a:txBody>
@@ -7699,50 +8083,11 @@
                     </a:solidFill>
                   </a:tcPr>
                 </a:tc>
-                <a:tc>
-                  <a:txBody>
-                    <a:bodyPr/>
-                    <a:lstStyle/>
-                    <a:p>
-                      <a:pPr algn="ctr"/>
-                      <a:r>
-                        <a:rPr sz="1100">
-                          <a:solidFill>
-                            <a:srgbClr val="1A1A2E"/>
-                          </a:solidFill>
-                        </a:rPr>
-                        <a:t>0.709</a:t>
-                      </a:r>
-                    </a:p>
-                  </a:txBody>
-                  <a:tcPr>
-                    <a:solidFill>
-                      <a:srgbClr val="F2F2F2"/>
-                    </a:solidFill>
-                  </a:tcPr>
-                </a:tc>
-                <a:tc>
-                  <a:txBody>
-                    <a:bodyPr/>
-                    <a:lstStyle/>
-                    <a:p>
-                      <a:pPr algn="ctr"/>
-                      <a:r>
-                        <a:rPr sz="1100">
-                          <a:solidFill>
-                            <a:srgbClr val="1A1A2E"/>
-                          </a:solidFill>
-                        </a:rPr>
-                        <a:t>0.506</a:t>
-                      </a:r>
-                    </a:p>
-                  </a:txBody>
-                  <a:tcPr>
-                    <a:solidFill>
-                      <a:srgbClr val="F2F2F2"/>
-                    </a:solidFill>
-                  </a:tcPr>
-                </a:tc>
+                <a:extLst>
+                  <a:ext uri="{0D108BD9-81ED-4DB2-BD59-A6C34878D82A}">
+                    <a16:rowId xmlns:a16="http://schemas.microsoft.com/office/drawing/2014/main" val="10001"/>
+                  </a:ext>
+                </a:extLst>
               </a:tr>
               <a:tr h="377190">
                 <a:tc>
@@ -7774,12 +8119,56 @@
                     <a:p>
                       <a:pPr algn="ctr"/>
                       <a:r>
+                        <a:rPr sz="1100" dirty="0">
+                          <a:solidFill>
+                            <a:srgbClr val="1A1A2E"/>
+                          </a:solidFill>
+                        </a:rPr>
+                        <a:t>1.409 *</a:t>
+                      </a:r>
+                    </a:p>
+                  </a:txBody>
+                  <a:tcPr>
+                    <a:solidFill>
+                      <a:srgbClr val="FFFFFF"/>
+                    </a:solidFill>
+                  </a:tcPr>
+                </a:tc>
+                <a:tc>
+                  <a:txBody>
+                    <a:bodyPr/>
+                    <a:lstStyle/>
+                    <a:p>
+                      <a:pPr algn="ctr"/>
+                      <a:r>
+                        <a:rPr sz="1100" dirty="0">
+                          <a:solidFill>
+                            <a:srgbClr val="1A1A2E"/>
+                          </a:solidFill>
+                        </a:rPr>
+                        <a:t>[1.224, 1.621]</a:t>
+                      </a:r>
+                    </a:p>
+                  </a:txBody>
+                  <a:tcPr>
+                    <a:solidFill>
+                      <a:srgbClr val="FFFFFF"/>
+                    </a:solidFill>
+                  </a:tcPr>
+                </a:tc>
+                <a:tc>
+                  <a:txBody>
+                    <a:bodyPr/>
+                    <a:lstStyle/>
+                    <a:p>
+                      <a:pPr algn="ctr"/>
+                      <a:r>
                         <a:rPr sz="1100">
                           <a:solidFill>
                             <a:srgbClr val="1A1A2E"/>
                           </a:solidFill>
                         </a:rPr>
-                        <a:t>1.409 *</a:t>
+                        <a:t>&lt; 0.001</a:t>
                       </a:r>
                     </a:p>
                   </a:txBody>
@@ -7801,7 +8190,7 @@
                             <a:srgbClr val="1A1A2E"/>
                           </a:solidFill>
                         </a:rPr>
-                        <a:t>[1.224, 1.621]</a:t>
+                        <a:t>0.610</a:t>
                       </a:r>
                     </a:p>
                   </a:txBody>
@@ -7811,50 +8200,11 @@
                     </a:solidFill>
                   </a:tcPr>
                 </a:tc>
-                <a:tc>
-                  <a:txBody>
-                    <a:bodyPr/>
-                    <a:lstStyle/>
-                    <a:p>
-                      <a:pPr algn="ctr"/>
-                      <a:r>
-                        <a:rPr sz="1100">
-                          <a:solidFill>
-                            <a:srgbClr val="1A1A2E"/>
-                          </a:solidFill>
-                        </a:rPr>
-                        <a:t>&lt; 0.001</a:t>
-                      </a:r>
-                    </a:p>
-                  </a:txBody>
-                  <a:tcPr>
-                    <a:solidFill>
-                      <a:srgbClr val="FFFFFF"/>
-                    </a:solidFill>
-                  </a:tcPr>
-                </a:tc>
-                <a:tc>
-                  <a:txBody>
-                    <a:bodyPr/>
-                    <a:lstStyle/>
-                    <a:p>
-                      <a:pPr algn="ctr"/>
-                      <a:r>
-                        <a:rPr sz="1100">
-                          <a:solidFill>
-                            <a:srgbClr val="1A1A2E"/>
-                          </a:solidFill>
-                        </a:rPr>
-                        <a:t>0.610</a:t>
-                      </a:r>
-                    </a:p>
-                  </a:txBody>
-                  <a:tcPr>
-                    <a:solidFill>
-                      <a:srgbClr val="FFFFFF"/>
-                    </a:solidFill>
-                  </a:tcPr>
-                </a:tc>
+                <a:extLst>
+                  <a:ext uri="{0D108BD9-81ED-4DB2-BD59-A6C34878D82A}">
+                    <a16:rowId xmlns:a16="http://schemas.microsoft.com/office/drawing/2014/main" val="10002"/>
+                  </a:ext>
+                </a:extLst>
               </a:tr>
               <a:tr h="377190">
                 <a:tc>
@@ -7908,12 +8258,56 @@
                     <a:p>
                       <a:pPr algn="ctr"/>
                       <a:r>
+                        <a:rPr sz="1100" dirty="0">
+                          <a:solidFill>
+                            <a:srgbClr val="1A1A2E"/>
+                          </a:solidFill>
+                        </a:rPr>
+                        <a:t>[0.608, 0.818]</a:t>
+                      </a:r>
+                    </a:p>
+                  </a:txBody>
+                  <a:tcPr>
+                    <a:solidFill>
+                      <a:srgbClr val="F2F2F2"/>
+                    </a:solidFill>
+                  </a:tcPr>
+                </a:tc>
+                <a:tc>
+                  <a:txBody>
+                    <a:bodyPr/>
+                    <a:lstStyle/>
+                    <a:p>
+                      <a:pPr algn="ctr"/>
+                      <a:r>
+                        <a:rPr sz="1100" dirty="0">
+                          <a:solidFill>
+                            <a:srgbClr val="1A1A2E"/>
+                          </a:solidFill>
+                        </a:rPr>
+                        <a:t>&lt; 0.001</a:t>
+                      </a:r>
+                    </a:p>
+                  </a:txBody>
+                  <a:tcPr>
+                    <a:solidFill>
+                      <a:srgbClr val="F2F2F2"/>
+                    </a:solidFill>
+                  </a:tcPr>
+                </a:tc>
+                <a:tc>
+                  <a:txBody>
+                    <a:bodyPr/>
+                    <a:lstStyle/>
+                    <a:p>
+                      <a:pPr algn="ctr"/>
+                      <a:r>
                         <a:rPr sz="1100">
                           <a:solidFill>
                             <a:srgbClr val="1A1A2E"/>
                           </a:solidFill>
                         </a:rPr>
-                        <a:t>[0.608, 0.818]</a:t>
+                        <a:t>0.595</a:t>
                       </a:r>
                     </a:p>
                   </a:txBody>
@@ -7923,50 +8317,11 @@
                     </a:solidFill>
                   </a:tcPr>
                 </a:tc>
-                <a:tc>
-                  <a:txBody>
-                    <a:bodyPr/>
-                    <a:lstStyle/>
-                    <a:p>
-                      <a:pPr algn="ctr"/>
-                      <a:r>
-                        <a:rPr sz="1100">
-                          <a:solidFill>
-                            <a:srgbClr val="1A1A2E"/>
-                          </a:solidFill>
-                        </a:rPr>
-                        <a:t>&lt; 0.001</a:t>
-                      </a:r>
-                    </a:p>
-                  </a:txBody>
-                  <a:tcPr>
-                    <a:solidFill>
-                      <a:srgbClr val="F2F2F2"/>
-                    </a:solidFill>
-                  </a:tcPr>
-                </a:tc>
-                <a:tc>
-                  <a:txBody>
-                    <a:bodyPr/>
-                    <a:lstStyle/>
-                    <a:p>
-                      <a:pPr algn="ctr"/>
-                      <a:r>
-                        <a:rPr sz="1100">
-                          <a:solidFill>
-                            <a:srgbClr val="1A1A2E"/>
-                          </a:solidFill>
-                        </a:rPr>
-                        <a:t>0.595</a:t>
-                      </a:r>
-                    </a:p>
-                  </a:txBody>
-                  <a:tcPr>
-                    <a:solidFill>
-                      <a:srgbClr val="F2F2F2"/>
-                    </a:solidFill>
-                  </a:tcPr>
-                </a:tc>
+                <a:extLst>
+                  <a:ext uri="{0D108BD9-81ED-4DB2-BD59-A6C34878D82A}">
+                    <a16:rowId xmlns:a16="http://schemas.microsoft.com/office/drawing/2014/main" val="10003"/>
+                  </a:ext>
+                </a:extLst>
               </a:tr>
               <a:tr h="377190">
                 <a:tc>
@@ -8042,12 +8397,34 @@
                     <a:p>
                       <a:pPr algn="ctr"/>
                       <a:r>
+                        <a:rPr sz="1100" dirty="0">
+                          <a:solidFill>
+                            <a:srgbClr val="1A1A2E"/>
+                          </a:solidFill>
+                        </a:rPr>
+                        <a:t>0.143</a:t>
+                      </a:r>
+                    </a:p>
+                  </a:txBody>
+                  <a:tcPr>
+                    <a:solidFill>
+                      <a:srgbClr val="FFFFFF"/>
+                    </a:solidFill>
+                  </a:tcPr>
+                </a:tc>
+                <a:tc>
+                  <a:txBody>
+                    <a:bodyPr/>
+                    <a:lstStyle/>
+                    <a:p>
+                      <a:pPr algn="ctr"/>
+                      <a:r>
                         <a:rPr sz="1100">
                           <a:solidFill>
                             <a:srgbClr val="1A1A2E"/>
                           </a:solidFill>
                         </a:rPr>
-                        <a:t>0.143</a:t>
+                        <a:t>0.535</a:t>
                       </a:r>
                     </a:p>
                   </a:txBody>
@@ -8057,28 +8434,11 @@
                     </a:solidFill>
                   </a:tcPr>
                 </a:tc>
-                <a:tc>
-                  <a:txBody>
-                    <a:bodyPr/>
-                    <a:lstStyle/>
-                    <a:p>
-                      <a:pPr algn="ctr"/>
-                      <a:r>
-                        <a:rPr sz="1100">
-                          <a:solidFill>
-                            <a:srgbClr val="1A1A2E"/>
-                          </a:solidFill>
-                        </a:rPr>
-                        <a:t>0.535</a:t>
-                      </a:r>
-                    </a:p>
-                  </a:txBody>
-                  <a:tcPr>
-                    <a:solidFill>
-                      <a:srgbClr val="FFFFFF"/>
-                    </a:solidFill>
-                  </a:tcPr>
-                </a:tc>
+                <a:extLst>
+                  <a:ext uri="{0D108BD9-81ED-4DB2-BD59-A6C34878D82A}">
+                    <a16:rowId xmlns:a16="http://schemas.microsoft.com/office/drawing/2014/main" val="10004"/>
+                  </a:ext>
+                </a:extLst>
               </a:tr>
               <a:tr h="377190">
                 <a:tc>
@@ -8176,7 +8536,7 @@
                     <a:p>
                       <a:pPr algn="ctr"/>
                       <a:r>
-                        <a:rPr sz="1100">
+                        <a:rPr sz="1100" dirty="0">
                           <a:solidFill>
                             <a:srgbClr val="1A1A2E"/>
                           </a:solidFill>
@@ -8191,6 +8551,11 @@
                     </a:solidFill>
                   </a:tcPr>
                 </a:tc>
+                <a:extLst>
+                  <a:ext uri="{0D108BD9-81ED-4DB2-BD59-A6C34878D82A}">
+                    <a16:rowId xmlns:a16="http://schemas.microsoft.com/office/drawing/2014/main" val="10005"/>
+                  </a:ext>
+                </a:extLst>
               </a:tr>
               <a:tr h="377190">
                 <a:tc>
@@ -8288,7 +8653,7 @@
                     <a:p>
                       <a:pPr algn="ctr"/>
                       <a:r>
-                        <a:rPr sz="1100">
+                        <a:rPr sz="1100" dirty="0">
                           <a:solidFill>
                             <a:srgbClr val="1A1A2E"/>
                           </a:solidFill>
@@ -8303,6 +8668,11 @@
                     </a:solidFill>
                   </a:tcPr>
                 </a:tc>
+                <a:extLst>
+                  <a:ext uri="{0D108BD9-81ED-4DB2-BD59-A6C34878D82A}">
+                    <a16:rowId xmlns:a16="http://schemas.microsoft.com/office/drawing/2014/main" val="10006"/>
+                  </a:ext>
+                </a:extLst>
               </a:tr>
               <a:tr h="377190">
                 <a:tc>
@@ -8400,7 +8770,7 @@
                     <a:p>
                       <a:pPr algn="ctr"/>
                       <a:r>
-                        <a:rPr sz="1100">
+                        <a:rPr sz="1100" dirty="0">
                           <a:solidFill>
                             <a:srgbClr val="1A1A2E"/>
                           </a:solidFill>
@@ -8415,6 +8785,11 @@
                     </a:solidFill>
                   </a:tcPr>
                 </a:tc>
+                <a:extLst>
+                  <a:ext uri="{0D108BD9-81ED-4DB2-BD59-A6C34878D82A}">
+                    <a16:rowId xmlns:a16="http://schemas.microsoft.com/office/drawing/2014/main" val="10007"/>
+                  </a:ext>
+                </a:extLst>
               </a:tr>
             </a:tbl>
           </a:graphicData>
@@ -8579,7 +8954,7 @@
 </file>
 
 <file path=ppt/slides/slide14.xml><?xml version="1.0" encoding="utf-8"?>
-<p:sld xmlns:a="http://schemas.openxmlformats.org/drawingml/2006/main" xmlns:p="http://schemas.openxmlformats.org/presentationml/2006/main" xmlns:r="http://schemas.openxmlformats.org/officeDocument/2006/relationships">
+<p:sld xmlns:a="http://schemas.openxmlformats.org/drawingml/2006/main" xmlns:r="http://schemas.openxmlformats.org/officeDocument/2006/relationships" xmlns:p="http://schemas.openxmlformats.org/presentationml/2006/main">
   <p:cSld>
     <p:spTree>
       <p:nvGrpSpPr>
@@ -8587,7 +8962,14 @@
         <p:cNvGrpSpPr/>
         <p:nvPr/>
       </p:nvGrpSpPr>
-      <p:grpSpPr/>
+      <p:grpSpPr>
+        <a:xfrm>
+          <a:off x="0" y="0"/>
+          <a:ext cx="0" cy="0"/>
+          <a:chOff x="0" y="0"/>
+          <a:chExt cx="0" cy="0"/>
+        </a:xfrm>
+      </p:grpSpPr>
       <p:sp>
         <p:nvSpPr>
           <p:cNvPr id="2" name="Rectangle 1"/>
@@ -8628,6 +9010,7 @@
           <a:lstStyle/>
           <a:p>
             <a:pPr algn="ctr"/>
+            <a:endParaRPr/>
           </a:p>
         </p:txBody>
       </p:sp>
@@ -8671,6 +9054,7 @@
           <a:lstStyle/>
           <a:p>
             <a:pPr algn="ctr"/>
+            <a:endParaRPr/>
           </a:p>
         </p:txBody>
       </p:sp>
@@ -8782,6 +9166,7 @@
           <a:lstStyle/>
           <a:p>
             <a:pPr algn="ctr"/>
+            <a:endParaRPr/>
           </a:p>
         </p:txBody>
       </p:sp>
@@ -8893,6 +9278,7 @@
           <a:lstStyle/>
           <a:p>
             <a:pPr algn="ctr"/>
+            <a:endParaRPr/>
           </a:p>
         </p:txBody>
       </p:sp>
@@ -9004,6 +9390,7 @@
           <a:lstStyle/>
           <a:p>
             <a:pPr algn="ctr"/>
+            <a:endParaRPr/>
           </a:p>
         </p:txBody>
       </p:sp>
@@ -9115,6 +9502,7 @@
           <a:lstStyle/>
           <a:p>
             <a:pPr algn="ctr"/>
+            <a:endParaRPr/>
           </a:p>
         </p:txBody>
       </p:sp>
@@ -9226,6 +9614,7 @@
           <a:lstStyle/>
           <a:p>
             <a:pPr algn="ctr"/>
+            <a:endParaRPr/>
           </a:p>
         </p:txBody>
       </p:sp>
@@ -9337,6 +9726,7 @@
           <a:lstStyle/>
           <a:p>
             <a:pPr algn="ctr"/>
+            <a:endParaRPr/>
           </a:p>
         </p:txBody>
       </p:sp>
@@ -9452,7 +9842,7 @@
         </p:nvGraphicFramePr>
         <p:xfrm>
           <a:off x="320040" y="3749039"/>
-          <a:ext cx="6400800" cy="1508760"/>
+          <a:ext cx="6400800" cy="1558290"/>
         </p:xfrm>
         <a:graphic>
           <a:graphicData uri="http://schemas.openxmlformats.org/drawingml/2006/table">
@@ -9461,9 +9851,27 @@
                 <a:tableStyleId>{5C22544A-7EE6-4342-B048-85BDC9FD1C3A}</a:tableStyleId>
               </a:tblPr>
               <a:tblGrid>
-                <a:gridCol w="2133600"/>
-                <a:gridCol w="2133600"/>
-                <a:gridCol w="2133600"/>
+                <a:gridCol w="2133600">
+                  <a:extLst>
+                    <a:ext uri="{9D8B030D-6E8A-4147-A177-3AD203B41FA5}">
+                      <a16:colId xmlns:a16="http://schemas.microsoft.com/office/drawing/2014/main" val="20000"/>
+                    </a:ext>
+                  </a:extLst>
+                </a:gridCol>
+                <a:gridCol w="2133600">
+                  <a:extLst>
+                    <a:ext uri="{9D8B030D-6E8A-4147-A177-3AD203B41FA5}">
+                      <a16:colId xmlns:a16="http://schemas.microsoft.com/office/drawing/2014/main" val="20001"/>
+                    </a:ext>
+                  </a:extLst>
+                </a:gridCol>
+                <a:gridCol w="2133600">
+                  <a:extLst>
+                    <a:ext uri="{9D8B030D-6E8A-4147-A177-3AD203B41FA5}">
+                      <a16:colId xmlns:a16="http://schemas.microsoft.com/office/drawing/2014/main" val="20002"/>
+                    </a:ext>
+                  </a:extLst>
+                </a:gridCol>
               </a:tblGrid>
               <a:tr h="377190">
                 <a:tc>
@@ -9473,7 +9881,7 @@
                     <a:p>
                       <a:pPr algn="ctr"/>
                       <a:r>
-                        <a:rPr b="1" sz="1100">
+                        <a:rPr sz="1100" b="1">
                           <a:solidFill>
                             <a:srgbClr val="FFFFFF"/>
                           </a:solidFill>
@@ -9495,7 +9903,7 @@
                     <a:p>
                       <a:pPr algn="ctr"/>
                       <a:r>
-                        <a:rPr b="1" sz="1100">
+                        <a:rPr sz="1100" b="1">
                           <a:solidFill>
                             <a:srgbClr val="FFFFFF"/>
                           </a:solidFill>
@@ -9517,7 +9925,7 @@
                     <a:p>
                       <a:pPr algn="ctr"/>
                       <a:r>
-                        <a:rPr b="1" sz="1100">
+                        <a:rPr sz="1100" b="1">
                           <a:solidFill>
                             <a:srgbClr val="FFFFFF"/>
                           </a:solidFill>
@@ -9532,6 +9940,11 @@
                     </a:solidFill>
                   </a:tcPr>
                 </a:tc>
+                <a:extLst>
+                  <a:ext uri="{0D108BD9-81ED-4DB2-BD59-A6C34878D82A}">
+                    <a16:rowId xmlns:a16="http://schemas.microsoft.com/office/drawing/2014/main" val="10000"/>
+                  </a:ext>
+                </a:extLst>
               </a:tr>
               <a:tr h="377190">
                 <a:tc>
@@ -9563,12 +9976,34 @@
                     <a:p>
                       <a:pPr algn="ctr"/>
                       <a:r>
+                        <a:rPr sz="1100" dirty="0">
+                          <a:solidFill>
+                            <a:srgbClr val="1A1A2E"/>
+                          </a:solidFill>
+                        </a:rPr>
+                        <a:t>5.249</a:t>
+                      </a:r>
+                    </a:p>
+                  </a:txBody>
+                  <a:tcPr>
+                    <a:solidFill>
+                      <a:srgbClr val="F2F2F2"/>
+                    </a:solidFill>
+                  </a:tcPr>
+                </a:tc>
+                <a:tc>
+                  <a:txBody>
+                    <a:bodyPr/>
+                    <a:lstStyle/>
+                    <a:p>
+                      <a:pPr algn="ctr"/>
+                      <a:r>
                         <a:rPr sz="1100">
                           <a:solidFill>
                             <a:srgbClr val="1A1A2E"/>
                           </a:solidFill>
                         </a:rPr>
-                        <a:t>5.249</a:t>
+                        <a:t>p=0.731 → 보정도 양호 ✔</a:t>
                       </a:r>
                     </a:p>
                   </a:txBody>
@@ -9578,28 +10013,11 @@
                     </a:solidFill>
                   </a:tcPr>
                 </a:tc>
-                <a:tc>
-                  <a:txBody>
-                    <a:bodyPr/>
-                    <a:lstStyle/>
-                    <a:p>
-                      <a:pPr algn="ctr"/>
-                      <a:r>
-                        <a:rPr sz="1100">
-                          <a:solidFill>
-                            <a:srgbClr val="1A1A2E"/>
-                          </a:solidFill>
-                        </a:rPr>
-                        <a:t>p=0.731 → 보정도 양호 ✔</a:t>
-                      </a:r>
-                    </a:p>
-                  </a:txBody>
-                  <a:tcPr>
-                    <a:solidFill>
-                      <a:srgbClr val="F2F2F2"/>
-                    </a:solidFill>
-                  </a:tcPr>
-                </a:tc>
+                <a:extLst>
+                  <a:ext uri="{0D108BD9-81ED-4DB2-BD59-A6C34878D82A}">
+                    <a16:rowId xmlns:a16="http://schemas.microsoft.com/office/drawing/2014/main" val="10001"/>
+                  </a:ext>
+                </a:extLst>
               </a:tr>
               <a:tr h="377190">
                 <a:tc>
@@ -9631,7 +10049,7 @@
                     <a:p>
                       <a:pPr algn="ctr"/>
                       <a:r>
-                        <a:rPr sz="1100">
+                        <a:rPr sz="1100" dirty="0">
                           <a:solidFill>
                             <a:srgbClr val="1A1A2E"/>
                           </a:solidFill>
@@ -9653,12 +10071,68 @@
                     <a:p>
                       <a:pPr algn="ctr"/>
                       <a:r>
-                        <a:rPr sz="1100">
-                          <a:solidFill>
-                            <a:srgbClr val="1A1A2E"/>
-                          </a:solidFill>
-                        </a:rPr>
-                        <a:t>낮을수록 우수 (0=완벽, 0.25=무작위)</a:t>
+                        <a:rPr sz="1100" dirty="0" err="1">
+                          <a:solidFill>
+                            <a:srgbClr val="1A1A2E"/>
+                          </a:solidFill>
+                        </a:rPr>
+                        <a:t>낮을수록</a:t>
+                      </a:r>
+                      <a:r>
+                        <a:rPr sz="1100" dirty="0">
+                          <a:solidFill>
+                            <a:srgbClr val="1A1A2E"/>
+                          </a:solidFill>
+                        </a:rPr>
+                        <a:t> </a:t>
+                      </a:r>
+                      <a:r>
+                        <a:rPr sz="1100" dirty="0" err="1">
+                          <a:solidFill>
+                            <a:srgbClr val="1A1A2E"/>
+                          </a:solidFill>
+                        </a:rPr>
+                        <a:t>우수</a:t>
+                      </a:r>
+                      <a:r>
+                        <a:rPr sz="1100" dirty="0">
+                          <a:solidFill>
+                            <a:srgbClr val="1A1A2E"/>
+                          </a:solidFill>
+                        </a:rPr>
+                        <a:t> (0=</a:t>
+                      </a:r>
+                      <a:r>
+                        <a:rPr sz="1100" dirty="0" err="1">
+                          <a:solidFill>
+                            <a:srgbClr val="1A1A2E"/>
+                          </a:solidFill>
+                        </a:rPr>
+                        <a:t>완벽</a:t>
+                      </a:r>
+                      <a:r>
+                        <a:rPr sz="1100" dirty="0">
+                          <a:solidFill>
+                            <a:srgbClr val="1A1A2E"/>
+                          </a:solidFill>
+                        </a:rPr>
+                        <a:t>, 0.25=</a:t>
+                      </a:r>
+                      <a:r>
+                        <a:rPr sz="1100" dirty="0" err="1">
+                          <a:solidFill>
+                            <a:srgbClr val="1A1A2E"/>
+                          </a:solidFill>
+                        </a:rPr>
+                        <a:t>무작위</a:t>
+                      </a:r>
+                      <a:r>
+                        <a:rPr sz="1100" dirty="0">
+                          <a:solidFill>
+                            <a:srgbClr val="1A1A2E"/>
+                          </a:solidFill>
+                        </a:rPr>
+                        <a:t>)</a:t>
                       </a:r>
                     </a:p>
                   </a:txBody>
@@ -9668,6 +10142,11 @@
                     </a:solidFill>
                   </a:tcPr>
                 </a:tc>
+                <a:extLst>
+                  <a:ext uri="{0D108BD9-81ED-4DB2-BD59-A6C34878D82A}">
+                    <a16:rowId xmlns:a16="http://schemas.microsoft.com/office/drawing/2014/main" val="10002"/>
+                  </a:ext>
+                </a:extLst>
               </a:tr>
               <a:tr h="377190">
                 <a:tc>
@@ -9699,7 +10178,7 @@
                     <a:p>
                       <a:pPr algn="ctr"/>
                       <a:r>
-                        <a:rPr sz="1100">
+                        <a:rPr sz="1100" dirty="0">
                           <a:solidFill>
                             <a:srgbClr val="1A1A2E"/>
                           </a:solidFill>
@@ -9721,13 +10200,42 @@
                     <a:p>
                       <a:pPr algn="ctr"/>
                       <a:r>
-                        <a:rPr sz="1100">
-                          <a:solidFill>
-                            <a:srgbClr val="1A1A2E"/>
-                          </a:solidFill>
-                        </a:rPr>
-                        <a:t>Case 비교 기준</a:t>
-                      </a:r>
+                        <a:rPr sz="1100" dirty="0">
+                          <a:solidFill>
+                            <a:srgbClr val="1A1A2E"/>
+                          </a:solidFill>
+                        </a:rPr>
+                        <a:t>Case </a:t>
+                      </a:r>
+                      <a:r>
+                        <a:rPr sz="1100" dirty="0" err="1">
+                          <a:solidFill>
+                            <a:srgbClr val="1A1A2E"/>
+                          </a:solidFill>
+                        </a:rPr>
+                        <a:t>비교</a:t>
+                      </a:r>
+                      <a:r>
+                        <a:rPr sz="1100" dirty="0">
+                          <a:solidFill>
+                            <a:srgbClr val="1A1A2E"/>
+                          </a:solidFill>
+                        </a:rPr>
+                        <a:t> </a:t>
+                      </a:r>
+                      <a:r>
+                        <a:rPr sz="1100" dirty="0" err="1">
+                          <a:solidFill>
+                            <a:srgbClr val="1A1A2E"/>
+                          </a:solidFill>
+                        </a:rPr>
+                        <a:t>기준</a:t>
+                      </a:r>
+                      <a:endParaRPr sz="1100" dirty="0">
+                        <a:solidFill>
+                          <a:srgbClr val="1A1A2E"/>
+                        </a:solidFill>
+                      </a:endParaRPr>
                     </a:p>
                   </a:txBody>
                   <a:tcPr>
@@ -9736,6 +10244,11 @@
                     </a:solidFill>
                   </a:tcPr>
                 </a:tc>
+                <a:extLst>
+                  <a:ext uri="{0D108BD9-81ED-4DB2-BD59-A6C34878D82A}">
+                    <a16:rowId xmlns:a16="http://schemas.microsoft.com/office/drawing/2014/main" val="10003"/>
+                  </a:ext>
+                </a:extLst>
               </a:tr>
             </a:tbl>
           </a:graphicData>
@@ -9866,7 +10379,7 @@
 </file>
 
 <file path=ppt/slides/slide15.xml><?xml version="1.0" encoding="utf-8"?>
-<p:sld xmlns:a="http://schemas.openxmlformats.org/drawingml/2006/main" xmlns:p="http://schemas.openxmlformats.org/presentationml/2006/main" xmlns:r="http://schemas.openxmlformats.org/officeDocument/2006/relationships">
+<p:sld xmlns:a="http://schemas.openxmlformats.org/drawingml/2006/main" xmlns:r="http://schemas.openxmlformats.org/officeDocument/2006/relationships" xmlns:p="http://schemas.openxmlformats.org/presentationml/2006/main">
   <p:cSld>
     <p:spTree>
       <p:nvGrpSpPr>
@@ -9874,7 +10387,14 @@
         <p:cNvGrpSpPr/>
         <p:nvPr/>
       </p:nvGrpSpPr>
-      <p:grpSpPr/>
+      <p:grpSpPr>
+        <a:xfrm>
+          <a:off x="0" y="0"/>
+          <a:ext cx="0" cy="0"/>
+          <a:chOff x="0" y="0"/>
+          <a:chExt cx="0" cy="0"/>
+        </a:xfrm>
+      </p:grpSpPr>
       <p:sp>
         <p:nvSpPr>
           <p:cNvPr id="2" name="Rectangle 1"/>
@@ -9883,7 +10403,7 @@
         </p:nvSpPr>
         <p:spPr>
           <a:xfrm>
-            <a:off x="0" y="0"/>
+            <a:off x="27305" y="0"/>
             <a:ext cx="12188952" cy="6858000"/>
           </a:xfrm>
           <a:prstGeom prst="rect">
@@ -9915,6 +10435,7 @@
           <a:lstStyle/>
           <a:p>
             <a:pPr algn="ctr"/>
+            <a:endParaRPr/>
           </a:p>
         </p:txBody>
       </p:sp>
@@ -9958,6 +10479,7 @@
           <a:lstStyle/>
           <a:p>
             <a:pPr algn="ctr"/>
+            <a:endParaRPr/>
           </a:p>
         </p:txBody>
       </p:sp>
@@ -10048,10 +10570,34 @@
                 <a:tableStyleId>{5C22544A-7EE6-4342-B048-85BDC9FD1C3A}</a:tableStyleId>
               </a:tblPr>
               <a:tblGrid>
-                <a:gridCol w="1828800"/>
-                <a:gridCol w="1828800"/>
-                <a:gridCol w="1828800"/>
-                <a:gridCol w="1828800"/>
+                <a:gridCol w="1828800">
+                  <a:extLst>
+                    <a:ext uri="{9D8B030D-6E8A-4147-A177-3AD203B41FA5}">
+                      <a16:colId xmlns:a16="http://schemas.microsoft.com/office/drawing/2014/main" val="20000"/>
+                    </a:ext>
+                  </a:extLst>
+                </a:gridCol>
+                <a:gridCol w="1828800">
+                  <a:extLst>
+                    <a:ext uri="{9D8B030D-6E8A-4147-A177-3AD203B41FA5}">
+                      <a16:colId xmlns:a16="http://schemas.microsoft.com/office/drawing/2014/main" val="20001"/>
+                    </a:ext>
+                  </a:extLst>
+                </a:gridCol>
+                <a:gridCol w="1828800">
+                  <a:extLst>
+                    <a:ext uri="{9D8B030D-6E8A-4147-A177-3AD203B41FA5}">
+                      <a16:colId xmlns:a16="http://schemas.microsoft.com/office/drawing/2014/main" val="20002"/>
+                    </a:ext>
+                  </a:extLst>
+                </a:gridCol>
+                <a:gridCol w="1828800">
+                  <a:extLst>
+                    <a:ext uri="{9D8B030D-6E8A-4147-A177-3AD203B41FA5}">
+                      <a16:colId xmlns:a16="http://schemas.microsoft.com/office/drawing/2014/main" val="20003"/>
+                    </a:ext>
+                  </a:extLst>
+                </a:gridCol>
               </a:tblGrid>
               <a:tr h="513370">
                 <a:tc>
@@ -10061,7 +10607,7 @@
                     <a:p>
                       <a:pPr algn="ctr"/>
                       <a:r>
-                        <a:rPr b="1" sz="1100">
+                        <a:rPr sz="1100" b="1">
                           <a:solidFill>
                             <a:srgbClr val="FFFFFF"/>
                           </a:solidFill>
@@ -10083,7 +10629,7 @@
                     <a:p>
                       <a:pPr algn="ctr"/>
                       <a:r>
-                        <a:rPr b="1" sz="1100">
+                        <a:rPr sz="1100" b="1">
                           <a:solidFill>
                             <a:srgbClr val="FFFFFF"/>
                           </a:solidFill>
@@ -10105,7 +10651,7 @@
                     <a:p>
                       <a:pPr algn="ctr"/>
                       <a:r>
-                        <a:rPr b="1" sz="1100">
+                        <a:rPr sz="1100" b="1">
                           <a:solidFill>
                             <a:srgbClr val="FFFFFF"/>
                           </a:solidFill>
@@ -10127,7 +10673,7 @@
                     <a:p>
                       <a:pPr algn="ctr"/>
                       <a:r>
-                        <a:rPr b="1" sz="1100">
+                        <a:rPr sz="1100" b="1">
                           <a:solidFill>
                             <a:srgbClr val="FFFFFF"/>
                           </a:solidFill>
@@ -10142,6 +10688,11 @@
                     </a:solidFill>
                   </a:tcPr>
                 </a:tc>
+                <a:extLst>
+                  <a:ext uri="{0D108BD9-81ED-4DB2-BD59-A6C34878D82A}">
+                    <a16:rowId xmlns:a16="http://schemas.microsoft.com/office/drawing/2014/main" val="10000"/>
+                  </a:ext>
+                </a:extLst>
               </a:tr>
               <a:tr h="513370">
                 <a:tc>
@@ -10232,6 +10783,11 @@
                     </a:solidFill>
                   </a:tcPr>
                 </a:tc>
+                <a:extLst>
+                  <a:ext uri="{0D108BD9-81ED-4DB2-BD59-A6C34878D82A}">
+                    <a16:rowId xmlns:a16="http://schemas.microsoft.com/office/drawing/2014/main" val="10001"/>
+                  </a:ext>
+                </a:extLst>
               </a:tr>
               <a:tr h="513370">
                 <a:tc>
@@ -10322,6 +10878,11 @@
                     </a:solidFill>
                   </a:tcPr>
                 </a:tc>
+                <a:extLst>
+                  <a:ext uri="{0D108BD9-81ED-4DB2-BD59-A6C34878D82A}">
+                    <a16:rowId xmlns:a16="http://schemas.microsoft.com/office/drawing/2014/main" val="10002"/>
+                  </a:ext>
+                </a:extLst>
               </a:tr>
               <a:tr h="513370">
                 <a:tc>
@@ -10412,6 +10973,11 @@
                     </a:solidFill>
                   </a:tcPr>
                 </a:tc>
+                <a:extLst>
+                  <a:ext uri="{0D108BD9-81ED-4DB2-BD59-A6C34878D82A}">
+                    <a16:rowId xmlns:a16="http://schemas.microsoft.com/office/drawing/2014/main" val="10003"/>
+                  </a:ext>
+                </a:extLst>
               </a:tr>
               <a:tr h="513370">
                 <a:tc>
@@ -10502,6 +11068,11 @@
                     </a:solidFill>
                   </a:tcPr>
                 </a:tc>
+                <a:extLst>
+                  <a:ext uri="{0D108BD9-81ED-4DB2-BD59-A6C34878D82A}">
+                    <a16:rowId xmlns:a16="http://schemas.microsoft.com/office/drawing/2014/main" val="10004"/>
+                  </a:ext>
+                </a:extLst>
               </a:tr>
               <a:tr h="513370">
                 <a:tc>
@@ -10592,6 +11163,11 @@
                     </a:solidFill>
                   </a:tcPr>
                 </a:tc>
+                <a:extLst>
+                  <a:ext uri="{0D108BD9-81ED-4DB2-BD59-A6C34878D82A}">
+                    <a16:rowId xmlns:a16="http://schemas.microsoft.com/office/drawing/2014/main" val="10005"/>
+                  </a:ext>
+                </a:extLst>
               </a:tr>
               <a:tr h="513371">
                 <a:tc>
@@ -10682,6 +11258,11 @@
                     </a:solidFill>
                   </a:tcPr>
                 </a:tc>
+                <a:extLst>
+                  <a:ext uri="{0D108BD9-81ED-4DB2-BD59-A6C34878D82A}">
+                    <a16:rowId xmlns:a16="http://schemas.microsoft.com/office/drawing/2014/main" val="10006"/>
+                  </a:ext>
+                </a:extLst>
               </a:tr>
             </a:tbl>
           </a:graphicData>
@@ -10772,8 +11353,8 @@
         </p:blipFill>
         <p:spPr>
           <a:xfrm>
-            <a:off x="7589520" y="1481328"/>
-            <a:ext cx="4279392" cy="5166360"/>
+            <a:off x="7830726" y="1772528"/>
+            <a:ext cx="4038185" cy="4875159"/>
           </a:xfrm>
           <a:prstGeom prst="rect">
             <a:avLst/>
@@ -10789,7 +11370,7 @@
 </file>
 
 <file path=ppt/slides/slide16.xml><?xml version="1.0" encoding="utf-8"?>
-<p:sld xmlns:a="http://schemas.openxmlformats.org/drawingml/2006/main" xmlns:p="http://schemas.openxmlformats.org/presentationml/2006/main" xmlns:r="http://schemas.openxmlformats.org/officeDocument/2006/relationships">
+<p:sld xmlns:a="http://schemas.openxmlformats.org/drawingml/2006/main" xmlns:r="http://schemas.openxmlformats.org/officeDocument/2006/relationships" xmlns:p="http://schemas.openxmlformats.org/presentationml/2006/main">
   <p:cSld>
     <p:spTree>
       <p:nvGrpSpPr>
@@ -10797,7 +11378,14 @@
         <p:cNvGrpSpPr/>
         <p:nvPr/>
       </p:nvGrpSpPr>
-      <p:grpSpPr/>
+      <p:grpSpPr>
+        <a:xfrm>
+          <a:off x="0" y="0"/>
+          <a:ext cx="0" cy="0"/>
+          <a:chOff x="0" y="0"/>
+          <a:chExt cx="0" cy="0"/>
+        </a:xfrm>
+      </p:grpSpPr>
       <p:sp>
         <p:nvSpPr>
           <p:cNvPr id="2" name="Rectangle 1"/>
@@ -10838,6 +11426,7 @@
           <a:lstStyle/>
           <a:p>
             <a:pPr algn="ctr"/>
+            <a:endParaRPr/>
           </a:p>
         </p:txBody>
       </p:sp>
@@ -10881,6 +11470,7 @@
           <a:lstStyle/>
           <a:p>
             <a:pPr algn="ctr"/>
+            <a:endParaRPr/>
           </a:p>
         </p:txBody>
       </p:sp>
@@ -10962,7 +11552,7 @@
         </p:nvGraphicFramePr>
         <p:xfrm>
           <a:off x="320040" y="1143000"/>
-          <a:ext cx="11521440" cy="2103120"/>
+          <a:ext cx="11521440" cy="2200656"/>
         </p:xfrm>
         <a:graphic>
           <a:graphicData uri="http://schemas.openxmlformats.org/drawingml/2006/table">
@@ -10971,13 +11561,55 @@
                 <a:tableStyleId>{5C22544A-7EE6-4342-B048-85BDC9FD1C3A}</a:tableStyleId>
               </a:tblPr>
               <a:tblGrid>
-                <a:gridCol w="1645920"/>
-                <a:gridCol w="1645920"/>
-                <a:gridCol w="1645920"/>
-                <a:gridCol w="1645920"/>
-                <a:gridCol w="1645920"/>
-                <a:gridCol w="1645920"/>
-                <a:gridCol w="1645920"/>
+                <a:gridCol w="1645920">
+                  <a:extLst>
+                    <a:ext uri="{9D8B030D-6E8A-4147-A177-3AD203B41FA5}">
+                      <a16:colId xmlns:a16="http://schemas.microsoft.com/office/drawing/2014/main" val="20000"/>
+                    </a:ext>
+                  </a:extLst>
+                </a:gridCol>
+                <a:gridCol w="1645920">
+                  <a:extLst>
+                    <a:ext uri="{9D8B030D-6E8A-4147-A177-3AD203B41FA5}">
+                      <a16:colId xmlns:a16="http://schemas.microsoft.com/office/drawing/2014/main" val="20001"/>
+                    </a:ext>
+                  </a:extLst>
+                </a:gridCol>
+                <a:gridCol w="1645920">
+                  <a:extLst>
+                    <a:ext uri="{9D8B030D-6E8A-4147-A177-3AD203B41FA5}">
+                      <a16:colId xmlns:a16="http://schemas.microsoft.com/office/drawing/2014/main" val="20002"/>
+                    </a:ext>
+                  </a:extLst>
+                </a:gridCol>
+                <a:gridCol w="1645920">
+                  <a:extLst>
+                    <a:ext uri="{9D8B030D-6E8A-4147-A177-3AD203B41FA5}">
+                      <a16:colId xmlns:a16="http://schemas.microsoft.com/office/drawing/2014/main" val="20003"/>
+                    </a:ext>
+                  </a:extLst>
+                </a:gridCol>
+                <a:gridCol w="1645920">
+                  <a:extLst>
+                    <a:ext uri="{9D8B030D-6E8A-4147-A177-3AD203B41FA5}">
+                      <a16:colId xmlns:a16="http://schemas.microsoft.com/office/drawing/2014/main" val="20004"/>
+                    </a:ext>
+                  </a:extLst>
+                </a:gridCol>
+                <a:gridCol w="1645920">
+                  <a:extLst>
+                    <a:ext uri="{9D8B030D-6E8A-4147-A177-3AD203B41FA5}">
+                      <a16:colId xmlns:a16="http://schemas.microsoft.com/office/drawing/2014/main" val="20005"/>
+                    </a:ext>
+                  </a:extLst>
+                </a:gridCol>
+                <a:gridCol w="1645920">
+                  <a:extLst>
+                    <a:ext uri="{9D8B030D-6E8A-4147-A177-3AD203B41FA5}">
+                      <a16:colId xmlns:a16="http://schemas.microsoft.com/office/drawing/2014/main" val="20006"/>
+                    </a:ext>
+                  </a:extLst>
+                </a:gridCol>
               </a:tblGrid>
               <a:tr h="420624">
                 <a:tc>
@@ -10987,7 +11619,7 @@
                     <a:p>
                       <a:pPr algn="ctr"/>
                       <a:r>
-                        <a:rPr b="1" sz="1000">
+                        <a:rPr sz="1000" b="1">
                           <a:solidFill>
                             <a:srgbClr val="FFFFFF"/>
                           </a:solidFill>
@@ -11009,7 +11641,7 @@
                     <a:p>
                       <a:pPr algn="ctr"/>
                       <a:r>
-                        <a:rPr b="1" sz="1000">
+                        <a:rPr sz="1000" b="1">
                           <a:solidFill>
                             <a:srgbClr val="FFFFFF"/>
                           </a:solidFill>
@@ -11036,7 +11668,7 @@
                     <a:p>
                       <a:pPr algn="ctr"/>
                       <a:r>
-                        <a:rPr b="1" sz="1000">
+                        <a:rPr sz="1000" b="1">
                           <a:solidFill>
                             <a:srgbClr val="FFFFFF"/>
                           </a:solidFill>
@@ -11063,7 +11695,7 @@
                     <a:p>
                       <a:pPr algn="ctr"/>
                       <a:r>
-                        <a:rPr b="1" sz="1000">
+                        <a:rPr sz="1000" b="1">
                           <a:solidFill>
                             <a:srgbClr val="FFFFFF"/>
                           </a:solidFill>
@@ -11090,7 +11722,7 @@
                     <a:p>
                       <a:pPr algn="ctr"/>
                       <a:r>
-                        <a:rPr b="1" sz="1000">
+                        <a:rPr sz="1000" b="1">
                           <a:solidFill>
                             <a:srgbClr val="FFFFFF"/>
                           </a:solidFill>
@@ -11117,7 +11749,7 @@
                     <a:p>
                       <a:pPr algn="ctr"/>
                       <a:r>
-                        <a:rPr b="1" sz="1000">
+                        <a:rPr sz="1000" b="1">
                           <a:solidFill>
                             <a:srgbClr val="FFFFFF"/>
                           </a:solidFill>
@@ -11139,7 +11771,7 @@
                     <a:p>
                       <a:pPr algn="ctr"/>
                       <a:r>
-                        <a:rPr b="1" sz="1000">
+                        <a:rPr sz="1000" b="1">
                           <a:solidFill>
                             <a:srgbClr val="FFFFFF"/>
                           </a:solidFill>
@@ -11154,6 +11786,11 @@
                     </a:solidFill>
                   </a:tcPr>
                 </a:tc>
+                <a:extLst>
+                  <a:ext uri="{0D108BD9-81ED-4DB2-BD59-A6C34878D82A}">
+                    <a16:rowId xmlns:a16="http://schemas.microsoft.com/office/drawing/2014/main" val="10000"/>
+                  </a:ext>
+                </a:extLst>
               </a:tr>
               <a:tr h="420624">
                 <a:tc>
@@ -11185,12 +11822,34 @@
                     <a:p>
                       <a:pPr algn="ctr"/>
                       <a:r>
+                        <a:rPr sz="1000" dirty="0">
+                          <a:solidFill>
+                            <a:srgbClr val="1A1A2E"/>
+                          </a:solidFill>
+                        </a:rPr>
+                        <a:t>0.074</a:t>
+                      </a:r>
+                    </a:p>
+                  </a:txBody>
+                  <a:tcPr>
+                    <a:solidFill>
+                      <a:srgbClr val="F2F2F2"/>
+                    </a:solidFill>
+                  </a:tcPr>
+                </a:tc>
+                <a:tc>
+                  <a:txBody>
+                    <a:bodyPr/>
+                    <a:lstStyle/>
+                    <a:p>
+                      <a:pPr algn="ctr"/>
+                      <a:r>
                         <a:rPr sz="1000">
                           <a:solidFill>
                             <a:srgbClr val="1A1A2E"/>
                           </a:solidFill>
                         </a:rPr>
-                        <a:t>0.074</a:t>
+                        <a:t>0.5203</a:t>
                       </a:r>
                     </a:p>
                   </a:txBody>
@@ -11207,12 +11866,12 @@
                     <a:p>
                       <a:pPr algn="ctr"/>
                       <a:r>
-                        <a:rPr sz="1000">
-                          <a:solidFill>
-                            <a:srgbClr val="1A1A2E"/>
-                          </a:solidFill>
-                        </a:rPr>
-                        <a:t>0.5203</a:t>
+                        <a:rPr sz="1000" dirty="0">
+                          <a:solidFill>
+                            <a:srgbClr val="1A1A2E"/>
+                          </a:solidFill>
+                        </a:rPr>
+                        <a:t>0.548</a:t>
                       </a:r>
                     </a:p>
                   </a:txBody>
@@ -11229,12 +11888,12 @@
                     <a:p>
                       <a:pPr algn="ctr"/>
                       <a:r>
-                        <a:rPr sz="1000">
-                          <a:solidFill>
-                            <a:srgbClr val="1A1A2E"/>
-                          </a:solidFill>
-                        </a:rPr>
-                        <a:t>0.548</a:t>
+                        <a:rPr sz="1000" dirty="0">
+                          <a:solidFill>
+                            <a:srgbClr val="1A1A2E"/>
+                          </a:solidFill>
+                        </a:rPr>
+                        <a:t>0.5901</a:t>
                       </a:r>
                     </a:p>
                   </a:txBody>
@@ -11251,12 +11910,12 @@
                     <a:p>
                       <a:pPr algn="ctr"/>
                       <a:r>
-                        <a:rPr sz="1000">
-                          <a:solidFill>
-                            <a:srgbClr val="1A1A2E"/>
-                          </a:solidFill>
-                        </a:rPr>
-                        <a:t>0.5901</a:t>
+                        <a:rPr sz="1000" dirty="0">
+                          <a:solidFill>
+                            <a:srgbClr val="1A1A2E"/>
+                          </a:solidFill>
+                        </a:rPr>
+                        <a:t>+0.0277</a:t>
                       </a:r>
                     </a:p>
                   </a:txBody>
@@ -11273,12 +11932,12 @@
                     <a:p>
                       <a:pPr algn="ctr"/>
                       <a:r>
-                        <a:rPr sz="1000">
-                          <a:solidFill>
-                            <a:srgbClr val="1A1A2E"/>
-                          </a:solidFill>
-                        </a:rPr>
-                        <a:t>+0.0277</a:t>
+                        <a:rPr sz="1000" dirty="0">
+                          <a:solidFill>
+                            <a:srgbClr val="1A1A2E"/>
+                          </a:solidFill>
+                        </a:rPr>
+                        <a:t>+0.0421</a:t>
                       </a:r>
                     </a:p>
                   </a:txBody>
@@ -11288,28 +11947,11 @@
                     </a:solidFill>
                   </a:tcPr>
                 </a:tc>
-                <a:tc>
-                  <a:txBody>
-                    <a:bodyPr/>
-                    <a:lstStyle/>
-                    <a:p>
-                      <a:pPr algn="ctr"/>
-                      <a:r>
-                        <a:rPr sz="1000">
-                          <a:solidFill>
-                            <a:srgbClr val="1A1A2E"/>
-                          </a:solidFill>
-                        </a:rPr>
-                        <a:t>+0.0421</a:t>
-                      </a:r>
-                    </a:p>
-                  </a:txBody>
-                  <a:tcPr>
-                    <a:solidFill>
-                      <a:srgbClr val="F2F2F2"/>
-                    </a:solidFill>
-                  </a:tcPr>
-                </a:tc>
+                <a:extLst>
+                  <a:ext uri="{0D108BD9-81ED-4DB2-BD59-A6C34878D82A}">
+                    <a16:rowId xmlns:a16="http://schemas.microsoft.com/office/drawing/2014/main" val="10001"/>
+                  </a:ext>
+                </a:extLst>
               </a:tr>
               <a:tr h="420624">
                 <a:tc>
@@ -11466,6 +12108,11 @@
                     </a:solidFill>
                   </a:tcPr>
                 </a:tc>
+                <a:extLst>
+                  <a:ext uri="{0D108BD9-81ED-4DB2-BD59-A6C34878D82A}">
+                    <a16:rowId xmlns:a16="http://schemas.microsoft.com/office/drawing/2014/main" val="10002"/>
+                  </a:ext>
+                </a:extLst>
               </a:tr>
               <a:tr h="420624">
                 <a:tc>
@@ -11497,7 +12144,7 @@
                     <a:p>
                       <a:pPr algn="ctr"/>
                       <a:r>
-                        <a:rPr sz="1000">
+                        <a:rPr sz="1000" dirty="0">
                           <a:solidFill>
                             <a:srgbClr val="1A1A2E"/>
                           </a:solidFill>
@@ -11519,7 +12166,7 @@
                     <a:p>
                       <a:pPr algn="ctr"/>
                       <a:r>
-                        <a:rPr sz="1000">
+                        <a:rPr sz="1000" dirty="0">
                           <a:solidFill>
                             <a:srgbClr val="1A1A2E"/>
                           </a:solidFill>
@@ -11541,7 +12188,7 @@
                     <a:p>
                       <a:pPr algn="ctr"/>
                       <a:r>
-                        <a:rPr sz="1000">
+                        <a:rPr sz="1000" dirty="0">
                           <a:solidFill>
                             <a:srgbClr val="1A1A2E"/>
                           </a:solidFill>
@@ -11563,7 +12210,7 @@
                     <a:p>
                       <a:pPr algn="ctr"/>
                       <a:r>
-                        <a:rPr sz="1000">
+                        <a:rPr sz="1000" dirty="0">
                           <a:solidFill>
                             <a:srgbClr val="1A1A2E"/>
                           </a:solidFill>
@@ -11585,7 +12232,7 @@
                     <a:p>
                       <a:pPr algn="ctr"/>
                       <a:r>
-                        <a:rPr sz="1000">
+                        <a:rPr sz="1000" dirty="0">
                           <a:solidFill>
                             <a:srgbClr val="1A1A2E"/>
                           </a:solidFill>
@@ -11607,7 +12254,7 @@
                     <a:p>
                       <a:pPr algn="ctr"/>
                       <a:r>
-                        <a:rPr sz="1000">
+                        <a:rPr sz="1000" dirty="0">
                           <a:solidFill>
                             <a:srgbClr val="1A1A2E"/>
                           </a:solidFill>
@@ -11622,6 +12269,11 @@
                     </a:solidFill>
                   </a:tcPr>
                 </a:tc>
+                <a:extLst>
+                  <a:ext uri="{0D108BD9-81ED-4DB2-BD59-A6C34878D82A}">
+                    <a16:rowId xmlns:a16="http://schemas.microsoft.com/office/drawing/2014/main" val="10003"/>
+                  </a:ext>
+                </a:extLst>
               </a:tr>
               <a:tr h="420624">
                 <a:tc>
@@ -11763,7 +12415,7 @@
                     <a:p>
                       <a:pPr algn="ctr"/>
                       <a:r>
-                        <a:rPr sz="1000">
+                        <a:rPr sz="1000" dirty="0">
                           <a:solidFill>
                             <a:srgbClr val="1A1A2E"/>
                           </a:solidFill>
@@ -11778,6 +12430,11 @@
                     </a:solidFill>
                   </a:tcPr>
                 </a:tc>
+                <a:extLst>
+                  <a:ext uri="{0D108BD9-81ED-4DB2-BD59-A6C34878D82A}">
+                    <a16:rowId xmlns:a16="http://schemas.microsoft.com/office/drawing/2014/main" val="10004"/>
+                  </a:ext>
+                </a:extLst>
               </a:tr>
             </a:tbl>
           </a:graphicData>
@@ -11807,12 +12464,124 @@
           <a:p>
             <a:pPr algn="l"/>
             <a:r>
-              <a:rPr sz="1300" b="1" i="0">
+              <a:rPr sz="1300" b="1" i="0" dirty="0">
                 <a:solidFill>
                   <a:srgbClr val="2E75B6"/>
                 </a:solidFill>
               </a:rPr>
-              <a:t>AEC 특징 추가(Case1→2)로 R² +2.8%p 향상  |  CT 모델명/kVp 추가(Case2→3)로 추가 +4.2%p</a:t>
+              <a:t>AEC </a:t>
+            </a:r>
+            <a:r>
+              <a:rPr sz="1300" b="1" i="0" dirty="0" err="1">
+                <a:solidFill>
+                  <a:srgbClr val="2E75B6"/>
+                </a:solidFill>
+              </a:rPr>
+              <a:t>특징</a:t>
+            </a:r>
+            <a:r>
+              <a:rPr sz="1300" b="1" i="0" dirty="0">
+                <a:solidFill>
+                  <a:srgbClr val="2E75B6"/>
+                </a:solidFill>
+              </a:rPr>
+              <a:t> </a:t>
+            </a:r>
+            <a:r>
+              <a:rPr sz="1300" b="1" i="0" dirty="0" err="1">
+                <a:solidFill>
+                  <a:srgbClr val="2E75B6"/>
+                </a:solidFill>
+              </a:rPr>
+              <a:t>추가</a:t>
+            </a:r>
+            <a:r>
+              <a:rPr sz="1300" b="1" i="0" dirty="0">
+                <a:solidFill>
+                  <a:srgbClr val="2E75B6"/>
+                </a:solidFill>
+              </a:rPr>
+              <a:t>(Case1→2)로 R² +2.8%p </a:t>
+            </a:r>
+            <a:r>
+              <a:rPr sz="1300" b="1" i="0" dirty="0" err="1">
+                <a:solidFill>
+                  <a:srgbClr val="2E75B6"/>
+                </a:solidFill>
+              </a:rPr>
+              <a:t>향상</a:t>
+            </a:r>
+            <a:r>
+              <a:rPr sz="1300" b="1" i="0" dirty="0">
+                <a:solidFill>
+                  <a:srgbClr val="2E75B6"/>
+                </a:solidFill>
+              </a:rPr>
+              <a:t>  |  CT </a:t>
+            </a:r>
+            <a:r>
+              <a:rPr sz="1300" b="1" i="0" dirty="0" err="1">
+                <a:solidFill>
+                  <a:srgbClr val="2E75B6"/>
+                </a:solidFill>
+              </a:rPr>
+              <a:t>모델명</a:t>
+            </a:r>
+            <a:r>
+              <a:rPr sz="1300" b="1" i="0" dirty="0">
+                <a:solidFill>
+                  <a:srgbClr val="2E75B6"/>
+                </a:solidFill>
+              </a:rPr>
+              <a:t>/</a:t>
+            </a:r>
+            <a:r>
+              <a:rPr sz="1300" b="1" i="0" dirty="0" err="1">
+                <a:solidFill>
+                  <a:srgbClr val="2E75B6"/>
+                </a:solidFill>
+              </a:rPr>
+              <a:t>kVp</a:t>
+            </a:r>
+            <a:r>
+              <a:rPr sz="1300" b="1" i="0" dirty="0">
+                <a:solidFill>
+                  <a:srgbClr val="2E75B6"/>
+                </a:solidFill>
+              </a:rPr>
+              <a:t> </a:t>
+            </a:r>
+            <a:r>
+              <a:rPr sz="1300" b="1" i="0" dirty="0" err="1">
+                <a:solidFill>
+                  <a:srgbClr val="2E75B6"/>
+                </a:solidFill>
+              </a:rPr>
+              <a:t>추가</a:t>
+            </a:r>
+            <a:r>
+              <a:rPr sz="1300" b="1" i="0" dirty="0">
+                <a:solidFill>
+                  <a:srgbClr val="2E75B6"/>
+                </a:solidFill>
+              </a:rPr>
+              <a:t>(Case2→3)로 </a:t>
+            </a:r>
+            <a:r>
+              <a:rPr sz="1300" b="1" i="0" dirty="0" err="1">
+                <a:solidFill>
+                  <a:srgbClr val="2E75B6"/>
+                </a:solidFill>
+              </a:rPr>
+              <a:t>추가</a:t>
+            </a:r>
+            <a:r>
+              <a:rPr sz="1300" b="1" i="0" dirty="0">
+                <a:solidFill>
+                  <a:srgbClr val="2E75B6"/>
+                </a:solidFill>
+              </a:rPr>
+              <a:t> +4.2%p</a:t>
             </a:r>
           </a:p>
         </p:txBody>
@@ -11942,7 +12711,7 @@
 </file>
 
 <file path=ppt/slides/slide17.xml><?xml version="1.0" encoding="utf-8"?>
-<p:sld xmlns:a="http://schemas.openxmlformats.org/drawingml/2006/main" xmlns:p="http://schemas.openxmlformats.org/presentationml/2006/main" xmlns:r="http://schemas.openxmlformats.org/officeDocument/2006/relationships">
+<p:sld xmlns:a="http://schemas.openxmlformats.org/drawingml/2006/main" xmlns:r="http://schemas.openxmlformats.org/officeDocument/2006/relationships" xmlns:p="http://schemas.openxmlformats.org/presentationml/2006/main">
   <p:cSld>
     <p:spTree>
       <p:nvGrpSpPr>
@@ -11950,7 +12719,14 @@
         <p:cNvGrpSpPr/>
         <p:nvPr/>
       </p:nvGrpSpPr>
-      <p:grpSpPr/>
+      <p:grpSpPr>
+        <a:xfrm>
+          <a:off x="0" y="0"/>
+          <a:ext cx="0" cy="0"/>
+          <a:chOff x="0" y="0"/>
+          <a:chExt cx="0" cy="0"/>
+        </a:xfrm>
+      </p:grpSpPr>
       <p:sp>
         <p:nvSpPr>
           <p:cNvPr id="2" name="Rectangle 1"/>
@@ -11991,6 +12767,7 @@
           <a:lstStyle/>
           <a:p>
             <a:pPr algn="ctr"/>
+            <a:endParaRPr/>
           </a:p>
         </p:txBody>
       </p:sp>
@@ -12034,6 +12811,7 @@
           <a:lstStyle/>
           <a:p>
             <a:pPr algn="ctr"/>
+            <a:endParaRPr/>
           </a:p>
         </p:txBody>
       </p:sp>
@@ -12115,7 +12893,7 @@
         </p:nvGraphicFramePr>
         <p:xfrm>
           <a:off x="320040" y="1143000"/>
-          <a:ext cx="11521440" cy="2103120"/>
+          <a:ext cx="11521440" cy="2200656"/>
         </p:xfrm>
         <a:graphic>
           <a:graphicData uri="http://schemas.openxmlformats.org/drawingml/2006/table">
@@ -12124,13 +12902,55 @@
                 <a:tableStyleId>{5C22544A-7EE6-4342-B048-85BDC9FD1C3A}</a:tableStyleId>
               </a:tblPr>
               <a:tblGrid>
-                <a:gridCol w="1645920"/>
-                <a:gridCol w="1645920"/>
-                <a:gridCol w="1645920"/>
-                <a:gridCol w="1645920"/>
-                <a:gridCol w="1645920"/>
-                <a:gridCol w="1645920"/>
-                <a:gridCol w="1645920"/>
+                <a:gridCol w="1645920">
+                  <a:extLst>
+                    <a:ext uri="{9D8B030D-6E8A-4147-A177-3AD203B41FA5}">
+                      <a16:colId xmlns:a16="http://schemas.microsoft.com/office/drawing/2014/main" val="20000"/>
+                    </a:ext>
+                  </a:extLst>
+                </a:gridCol>
+                <a:gridCol w="1645920">
+                  <a:extLst>
+                    <a:ext uri="{9D8B030D-6E8A-4147-A177-3AD203B41FA5}">
+                      <a16:colId xmlns:a16="http://schemas.microsoft.com/office/drawing/2014/main" val="20001"/>
+                    </a:ext>
+                  </a:extLst>
+                </a:gridCol>
+                <a:gridCol w="1645920">
+                  <a:extLst>
+                    <a:ext uri="{9D8B030D-6E8A-4147-A177-3AD203B41FA5}">
+                      <a16:colId xmlns:a16="http://schemas.microsoft.com/office/drawing/2014/main" val="20002"/>
+                    </a:ext>
+                  </a:extLst>
+                </a:gridCol>
+                <a:gridCol w="1645920">
+                  <a:extLst>
+                    <a:ext uri="{9D8B030D-6E8A-4147-A177-3AD203B41FA5}">
+                      <a16:colId xmlns:a16="http://schemas.microsoft.com/office/drawing/2014/main" val="20003"/>
+                    </a:ext>
+                  </a:extLst>
+                </a:gridCol>
+                <a:gridCol w="1645920">
+                  <a:extLst>
+                    <a:ext uri="{9D8B030D-6E8A-4147-A177-3AD203B41FA5}">
+                      <a16:colId xmlns:a16="http://schemas.microsoft.com/office/drawing/2014/main" val="20004"/>
+                    </a:ext>
+                  </a:extLst>
+                </a:gridCol>
+                <a:gridCol w="1645920">
+                  <a:extLst>
+                    <a:ext uri="{9D8B030D-6E8A-4147-A177-3AD203B41FA5}">
+                      <a16:colId xmlns:a16="http://schemas.microsoft.com/office/drawing/2014/main" val="20005"/>
+                    </a:ext>
+                  </a:extLst>
+                </a:gridCol>
+                <a:gridCol w="1645920">
+                  <a:extLst>
+                    <a:ext uri="{9D8B030D-6E8A-4147-A177-3AD203B41FA5}">
+                      <a16:colId xmlns:a16="http://schemas.microsoft.com/office/drawing/2014/main" val="20006"/>
+                    </a:ext>
+                  </a:extLst>
+                </a:gridCol>
               </a:tblGrid>
               <a:tr h="420624">
                 <a:tc>
@@ -12140,7 +12960,7 @@
                     <a:p>
                       <a:pPr algn="ctr"/>
                       <a:r>
-                        <a:rPr b="1" sz="1000">
+                        <a:rPr sz="1000" b="1">
                           <a:solidFill>
                             <a:srgbClr val="FFFFFF"/>
                           </a:solidFill>
@@ -12162,7 +12982,7 @@
                     <a:p>
                       <a:pPr algn="ctr"/>
                       <a:r>
-                        <a:rPr b="1" sz="1000">
+                        <a:rPr sz="1000" b="1">
                           <a:solidFill>
                             <a:srgbClr val="FFFFFF"/>
                           </a:solidFill>
@@ -12189,7 +13009,7 @@
                     <a:p>
                       <a:pPr algn="ctr"/>
                       <a:r>
-                        <a:rPr b="1" sz="1000">
+                        <a:rPr sz="1000" b="1">
                           <a:solidFill>
                             <a:srgbClr val="FFFFFF"/>
                           </a:solidFill>
@@ -12216,7 +13036,7 @@
                     <a:p>
                       <a:pPr algn="ctr"/>
                       <a:r>
-                        <a:rPr b="1" sz="1000">
+                        <a:rPr sz="1000" b="1">
                           <a:solidFill>
                             <a:srgbClr val="FFFFFF"/>
                           </a:solidFill>
@@ -12243,7 +13063,7 @@
                     <a:p>
                       <a:pPr algn="ctr"/>
                       <a:r>
-                        <a:rPr b="1" sz="1000">
+                        <a:rPr sz="1000" b="1">
                           <a:solidFill>
                             <a:srgbClr val="FFFFFF"/>
                           </a:solidFill>
@@ -12270,7 +13090,7 @@
                     <a:p>
                       <a:pPr algn="ctr"/>
                       <a:r>
-                        <a:rPr b="1" sz="1000">
+                        <a:rPr sz="1000" b="1">
                           <a:solidFill>
                             <a:srgbClr val="FFFFFF"/>
                           </a:solidFill>
@@ -12292,7 +13112,7 @@
                     <a:p>
                       <a:pPr algn="ctr"/>
                       <a:r>
-                        <a:rPr b="1" sz="1000">
+                        <a:rPr sz="1000" b="1">
                           <a:solidFill>
                             <a:srgbClr val="FFFFFF"/>
                           </a:solidFill>
@@ -12307,6 +13127,11 @@
                     </a:solidFill>
                   </a:tcPr>
                 </a:tc>
+                <a:extLst>
+                  <a:ext uri="{0D108BD9-81ED-4DB2-BD59-A6C34878D82A}">
+                    <a16:rowId xmlns:a16="http://schemas.microsoft.com/office/drawing/2014/main" val="10000"/>
+                  </a:ext>
+                </a:extLst>
               </a:tr>
               <a:tr h="420624">
                 <a:tc>
@@ -12316,12 +13141,78 @@
                     <a:p>
                       <a:pPr algn="ctr"/>
                       <a:r>
+                        <a:rPr sz="1000" dirty="0">
+                          <a:solidFill>
+                            <a:srgbClr val="1A1A2E"/>
+                          </a:solidFill>
+                        </a:rPr>
+                        <a:t>AUC-ROC</a:t>
+                      </a:r>
+                    </a:p>
+                  </a:txBody>
+                  <a:tcPr>
+                    <a:solidFill>
+                      <a:srgbClr val="F2F2F2"/>
+                    </a:solidFill>
+                  </a:tcPr>
+                </a:tc>
+                <a:tc>
+                  <a:txBody>
+                    <a:bodyPr/>
+                    <a:lstStyle/>
+                    <a:p>
+                      <a:pPr algn="ctr"/>
+                      <a:r>
+                        <a:rPr sz="1000" dirty="0">
+                          <a:solidFill>
+                            <a:srgbClr val="1A1A2E"/>
+                          </a:solidFill>
+                        </a:rPr>
+                        <a:t>0.6117</a:t>
+                      </a:r>
+                    </a:p>
+                  </a:txBody>
+                  <a:tcPr>
+                    <a:solidFill>
+                      <a:srgbClr val="F2F2F2"/>
+                    </a:solidFill>
+                  </a:tcPr>
+                </a:tc>
+                <a:tc>
+                  <a:txBody>
+                    <a:bodyPr/>
+                    <a:lstStyle/>
+                    <a:p>
+                      <a:pPr algn="ctr"/>
+                      <a:r>
+                        <a:rPr sz="1000" dirty="0">
+                          <a:solidFill>
+                            <a:srgbClr val="1A1A2E"/>
+                          </a:solidFill>
+                        </a:rPr>
+                        <a:t>0.6097</a:t>
+                      </a:r>
+                    </a:p>
+                  </a:txBody>
+                  <a:tcPr>
+                    <a:solidFill>
+                      <a:srgbClr val="F2F2F2"/>
+                    </a:solidFill>
+                  </a:tcPr>
+                </a:tc>
+                <a:tc>
+                  <a:txBody>
+                    <a:bodyPr/>
+                    <a:lstStyle/>
+                    <a:p>
+                      <a:pPr algn="ctr"/>
+                      <a:r>
                         <a:rPr sz="1000">
                           <a:solidFill>
                             <a:srgbClr val="1A1A2E"/>
                           </a:solidFill>
                         </a:rPr>
-                        <a:t>AUC-ROC</a:t>
+                        <a:t>0.6497</a:t>
                       </a:r>
                     </a:p>
                   </a:txBody>
@@ -12343,7 +13234,7 @@
                             <a:srgbClr val="1A1A2E"/>
                           </a:solidFill>
                         </a:rPr>
-                        <a:t>0.6117</a:t>
+                        <a:t>0.7282</a:t>
                       </a:r>
                     </a:p>
                   </a:txBody>
@@ -12365,7 +13256,7 @@
                             <a:srgbClr val="1A1A2E"/>
                           </a:solidFill>
                         </a:rPr>
-                        <a:t>0.6097</a:t>
+                        <a:t>+0.040</a:t>
                       </a:r>
                     </a:p>
                   </a:txBody>
@@ -12387,7 +13278,7 @@
                             <a:srgbClr val="1A1A2E"/>
                           </a:solidFill>
                         </a:rPr>
-                        <a:t>0.6497</a:t>
+                        <a:t>+0.078</a:t>
                       </a:r>
                     </a:p>
                   </a:txBody>
@@ -12397,72 +13288,11 @@
                     </a:solidFill>
                   </a:tcPr>
                 </a:tc>
-                <a:tc>
-                  <a:txBody>
-                    <a:bodyPr/>
-                    <a:lstStyle/>
-                    <a:p>
-                      <a:pPr algn="ctr"/>
-                      <a:r>
-                        <a:rPr sz="1000">
-                          <a:solidFill>
-                            <a:srgbClr val="1A1A2E"/>
-                          </a:solidFill>
-                        </a:rPr>
-                        <a:t>0.7282</a:t>
-                      </a:r>
-                    </a:p>
-                  </a:txBody>
-                  <a:tcPr>
-                    <a:solidFill>
-                      <a:srgbClr val="F2F2F2"/>
-                    </a:solidFill>
-                  </a:tcPr>
-                </a:tc>
-                <a:tc>
-                  <a:txBody>
-                    <a:bodyPr/>
-                    <a:lstStyle/>
-                    <a:p>
-                      <a:pPr algn="ctr"/>
-                      <a:r>
-                        <a:rPr sz="1000">
-                          <a:solidFill>
-                            <a:srgbClr val="1A1A2E"/>
-                          </a:solidFill>
-                        </a:rPr>
-                        <a:t>+0.040</a:t>
-                      </a:r>
-                    </a:p>
-                  </a:txBody>
-                  <a:tcPr>
-                    <a:solidFill>
-                      <a:srgbClr val="F2F2F2"/>
-                    </a:solidFill>
-                  </a:tcPr>
-                </a:tc>
-                <a:tc>
-                  <a:txBody>
-                    <a:bodyPr/>
-                    <a:lstStyle/>
-                    <a:p>
-                      <a:pPr algn="ctr"/>
-                      <a:r>
-                        <a:rPr sz="1000">
-                          <a:solidFill>
-                            <a:srgbClr val="1A1A2E"/>
-                          </a:solidFill>
-                        </a:rPr>
-                        <a:t>+0.078</a:t>
-                      </a:r>
-                    </a:p>
-                  </a:txBody>
-                  <a:tcPr>
-                    <a:solidFill>
-                      <a:srgbClr val="F2F2F2"/>
-                    </a:solidFill>
-                  </a:tcPr>
-                </a:tc>
+                <a:extLst>
+                  <a:ext uri="{0D108BD9-81ED-4DB2-BD59-A6C34878D82A}">
+                    <a16:rowId xmlns:a16="http://schemas.microsoft.com/office/drawing/2014/main" val="10001"/>
+                  </a:ext>
+                </a:extLst>
               </a:tr>
               <a:tr h="420624">
                 <a:tc>
@@ -12494,12 +13324,78 @@
                     <a:p>
                       <a:pPr algn="ctr"/>
                       <a:r>
+                        <a:rPr sz="1000" dirty="0">
+                          <a:solidFill>
+                            <a:srgbClr val="1A1A2E"/>
+                          </a:solidFill>
+                        </a:rPr>
+                        <a:t>0.0369</a:t>
+                      </a:r>
+                    </a:p>
+                  </a:txBody>
+                  <a:tcPr>
+                    <a:solidFill>
+                      <a:srgbClr val="FFFFFF"/>
+                    </a:solidFill>
+                  </a:tcPr>
+                </a:tc>
+                <a:tc>
+                  <a:txBody>
+                    <a:bodyPr/>
+                    <a:lstStyle/>
+                    <a:p>
+                      <a:pPr algn="ctr"/>
+                      <a:r>
+                        <a:rPr sz="1000" dirty="0">
+                          <a:solidFill>
+                            <a:srgbClr val="1A1A2E"/>
+                          </a:solidFill>
+                        </a:rPr>
+                        <a:t>0.0286</a:t>
+                      </a:r>
+                    </a:p>
+                  </a:txBody>
+                  <a:tcPr>
+                    <a:solidFill>
+                      <a:srgbClr val="FFFFFF"/>
+                    </a:solidFill>
+                  </a:tcPr>
+                </a:tc>
+                <a:tc>
+                  <a:txBody>
+                    <a:bodyPr/>
+                    <a:lstStyle/>
+                    <a:p>
+                      <a:pPr algn="ctr"/>
+                      <a:r>
+                        <a:rPr sz="1000" dirty="0">
+                          <a:solidFill>
+                            <a:srgbClr val="1A1A2E"/>
+                          </a:solidFill>
+                        </a:rPr>
+                        <a:t>0.0727</a:t>
+                      </a:r>
+                    </a:p>
+                  </a:txBody>
+                  <a:tcPr>
+                    <a:solidFill>
+                      <a:srgbClr val="FFFFFF"/>
+                    </a:solidFill>
+                  </a:tcPr>
+                </a:tc>
+                <a:tc>
+                  <a:txBody>
+                    <a:bodyPr/>
+                    <a:lstStyle/>
+                    <a:p>
+                      <a:pPr algn="ctr"/>
+                      <a:r>
                         <a:rPr sz="1000">
                           <a:solidFill>
                             <a:srgbClr val="1A1A2E"/>
                           </a:solidFill>
                         </a:rPr>
-                        <a:t>0.0369</a:t>
+                        <a:t>0.1791</a:t>
                       </a:r>
                     </a:p>
                   </a:txBody>
@@ -12521,7 +13417,7 @@
                             <a:srgbClr val="1A1A2E"/>
                           </a:solidFill>
                         </a:rPr>
-                        <a:t>0.0286</a:t>
+                        <a:t>+0.044</a:t>
                       </a:r>
                     </a:p>
                   </a:txBody>
@@ -12543,7 +13439,7 @@
                             <a:srgbClr val="1A1A2E"/>
                           </a:solidFill>
                         </a:rPr>
-                        <a:t>0.0727</a:t>
+                        <a:t>+0.106</a:t>
                       </a:r>
                     </a:p>
                   </a:txBody>
@@ -12553,72 +13449,11 @@
                     </a:solidFill>
                   </a:tcPr>
                 </a:tc>
-                <a:tc>
-                  <a:txBody>
-                    <a:bodyPr/>
-                    <a:lstStyle/>
-                    <a:p>
-                      <a:pPr algn="ctr"/>
-                      <a:r>
-                        <a:rPr sz="1000">
-                          <a:solidFill>
-                            <a:srgbClr val="1A1A2E"/>
-                          </a:solidFill>
-                        </a:rPr>
-                        <a:t>0.1791</a:t>
-                      </a:r>
-                    </a:p>
-                  </a:txBody>
-                  <a:tcPr>
-                    <a:solidFill>
-                      <a:srgbClr val="FFFFFF"/>
-                    </a:solidFill>
-                  </a:tcPr>
-                </a:tc>
-                <a:tc>
-                  <a:txBody>
-                    <a:bodyPr/>
-                    <a:lstStyle/>
-                    <a:p>
-                      <a:pPr algn="ctr"/>
-                      <a:r>
-                        <a:rPr sz="1000">
-                          <a:solidFill>
-                            <a:srgbClr val="1A1A2E"/>
-                          </a:solidFill>
-                        </a:rPr>
-                        <a:t>+0.044</a:t>
-                      </a:r>
-                    </a:p>
-                  </a:txBody>
-                  <a:tcPr>
-                    <a:solidFill>
-                      <a:srgbClr val="FFFFFF"/>
-                    </a:solidFill>
-                  </a:tcPr>
-                </a:tc>
-                <a:tc>
-                  <a:txBody>
-                    <a:bodyPr/>
-                    <a:lstStyle/>
-                    <a:p>
-                      <a:pPr algn="ctr"/>
-                      <a:r>
-                        <a:rPr sz="1000">
-                          <a:solidFill>
-                            <a:srgbClr val="1A1A2E"/>
-                          </a:solidFill>
-                        </a:rPr>
-                        <a:t>+0.106</a:t>
-                      </a:r>
-                    </a:p>
-                  </a:txBody>
-                  <a:tcPr>
-                    <a:solidFill>
-                      <a:srgbClr val="FFFFFF"/>
-                    </a:solidFill>
-                  </a:tcPr>
-                </a:tc>
+                <a:extLst>
+                  <a:ext uri="{0D108BD9-81ED-4DB2-BD59-A6C34878D82A}">
+                    <a16:rowId xmlns:a16="http://schemas.microsoft.com/office/drawing/2014/main" val="10002"/>
+                  </a:ext>
+                </a:extLst>
               </a:tr>
               <a:tr h="420624">
                 <a:tc>
@@ -12672,12 +13507,100 @@
                     <a:p>
                       <a:pPr algn="ctr"/>
                       <a:r>
+                        <a:rPr sz="1000" dirty="0">
+                          <a:solidFill>
+                            <a:srgbClr val="1A1A2E"/>
+                          </a:solidFill>
+                        </a:rPr>
+                        <a:t>1407.95</a:t>
+                      </a:r>
+                    </a:p>
+                  </a:txBody>
+                  <a:tcPr>
+                    <a:solidFill>
+                      <a:srgbClr val="F2F2F2"/>
+                    </a:solidFill>
+                  </a:tcPr>
+                </a:tc>
+                <a:tc>
+                  <a:txBody>
+                    <a:bodyPr/>
+                    <a:lstStyle/>
+                    <a:p>
+                      <a:pPr algn="ctr"/>
+                      <a:r>
+                        <a:rPr sz="1000" dirty="0">
+                          <a:solidFill>
+                            <a:srgbClr val="1A1A2E"/>
+                          </a:solidFill>
+                        </a:rPr>
+                        <a:t>1376.83</a:t>
+                      </a:r>
+                    </a:p>
+                  </a:txBody>
+                  <a:tcPr>
+                    <a:solidFill>
+                      <a:srgbClr val="F2F2F2"/>
+                    </a:solidFill>
+                  </a:tcPr>
+                </a:tc>
+                <a:tc>
+                  <a:txBody>
+                    <a:bodyPr/>
+                    <a:lstStyle/>
+                    <a:p>
+                      <a:pPr algn="ctr"/>
+                      <a:r>
+                        <a:rPr sz="1000" dirty="0">
+                          <a:solidFill>
+                            <a:srgbClr val="1A1A2E"/>
+                          </a:solidFill>
+                        </a:rPr>
+                        <a:t>1369.12</a:t>
+                      </a:r>
+                    </a:p>
+                  </a:txBody>
+                  <a:tcPr>
+                    <a:solidFill>
+                      <a:srgbClr val="F2F2F2"/>
+                    </a:solidFill>
+                  </a:tcPr>
+                </a:tc>
+                <a:tc>
+                  <a:txBody>
+                    <a:bodyPr/>
+                    <a:lstStyle/>
+                    <a:p>
+                      <a:pPr algn="ctr"/>
+                      <a:r>
+                        <a:rPr sz="1000" dirty="0">
+                          <a:solidFill>
+                            <a:srgbClr val="1A1A2E"/>
+                          </a:solidFill>
+                        </a:rPr>
+                        <a:t>-31</a:t>
+                      </a:r>
+                    </a:p>
+                  </a:txBody>
+                  <a:tcPr>
+                    <a:solidFill>
+                      <a:srgbClr val="F2F2F2"/>
+                    </a:solidFill>
+                  </a:tcPr>
+                </a:tc>
+                <a:tc>
+                  <a:txBody>
+                    <a:bodyPr/>
+                    <a:lstStyle/>
+                    <a:p>
+                      <a:pPr algn="ctr"/>
+                      <a:r>
                         <a:rPr sz="1000">
                           <a:solidFill>
                             <a:srgbClr val="1A1A2E"/>
                           </a:solidFill>
                         </a:rPr>
-                        <a:t>1407.95</a:t>
+                        <a:t>-8</a:t>
                       </a:r>
                     </a:p>
                   </a:txBody>
@@ -12687,94 +13610,11 @@
                     </a:solidFill>
                   </a:tcPr>
                 </a:tc>
-                <a:tc>
-                  <a:txBody>
-                    <a:bodyPr/>
-                    <a:lstStyle/>
-                    <a:p>
-                      <a:pPr algn="ctr"/>
-                      <a:r>
-                        <a:rPr sz="1000">
-                          <a:solidFill>
-                            <a:srgbClr val="1A1A2E"/>
-                          </a:solidFill>
-                        </a:rPr>
-                        <a:t>1376.83</a:t>
-                      </a:r>
-                    </a:p>
-                  </a:txBody>
-                  <a:tcPr>
-                    <a:solidFill>
-                      <a:srgbClr val="F2F2F2"/>
-                    </a:solidFill>
-                  </a:tcPr>
-                </a:tc>
-                <a:tc>
-                  <a:txBody>
-                    <a:bodyPr/>
-                    <a:lstStyle/>
-                    <a:p>
-                      <a:pPr algn="ctr"/>
-                      <a:r>
-                        <a:rPr sz="1000">
-                          <a:solidFill>
-                            <a:srgbClr val="1A1A2E"/>
-                          </a:solidFill>
-                        </a:rPr>
-                        <a:t>1369.12</a:t>
-                      </a:r>
-                    </a:p>
-                  </a:txBody>
-                  <a:tcPr>
-                    <a:solidFill>
-                      <a:srgbClr val="F2F2F2"/>
-                    </a:solidFill>
-                  </a:tcPr>
-                </a:tc>
-                <a:tc>
-                  <a:txBody>
-                    <a:bodyPr/>
-                    <a:lstStyle/>
-                    <a:p>
-                      <a:pPr algn="ctr"/>
-                      <a:r>
-                        <a:rPr sz="1000">
-                          <a:solidFill>
-                            <a:srgbClr val="1A1A2E"/>
-                          </a:solidFill>
-                        </a:rPr>
-                        <a:t>-31</a:t>
-                      </a:r>
-                    </a:p>
-                  </a:txBody>
-                  <a:tcPr>
-                    <a:solidFill>
-                      <a:srgbClr val="F2F2F2"/>
-                    </a:solidFill>
-                  </a:tcPr>
-                </a:tc>
-                <a:tc>
-                  <a:txBody>
-                    <a:bodyPr/>
-                    <a:lstStyle/>
-                    <a:p>
-                      <a:pPr algn="ctr"/>
-                      <a:r>
-                        <a:rPr sz="1000">
-                          <a:solidFill>
-                            <a:srgbClr val="1A1A2E"/>
-                          </a:solidFill>
-                        </a:rPr>
-                        <a:t>-8</a:t>
-                      </a:r>
-                    </a:p>
-                  </a:txBody>
-                  <a:tcPr>
-                    <a:solidFill>
-                      <a:srgbClr val="F2F2F2"/>
-                    </a:solidFill>
-                  </a:tcPr>
-                </a:tc>
+                <a:extLst>
+                  <a:ext uri="{0D108BD9-81ED-4DB2-BD59-A6C34878D82A}">
+                    <a16:rowId xmlns:a16="http://schemas.microsoft.com/office/drawing/2014/main" val="10003"/>
+                  </a:ext>
+                </a:extLst>
               </a:tr>
               <a:tr h="420624">
                 <a:tc>
@@ -12872,7 +13712,7 @@
                     <a:p>
                       <a:pPr algn="ctr"/>
                       <a:r>
-                        <a:rPr sz="1000">
+                        <a:rPr sz="1000" dirty="0">
                           <a:solidFill>
                             <a:srgbClr val="1A1A2E"/>
                           </a:solidFill>
@@ -12894,13 +13734,34 @@
                     <a:p>
                       <a:pPr algn="ctr"/>
                       <a:r>
-                        <a:rPr sz="1000">
-                          <a:solidFill>
-                            <a:srgbClr val="1A1A2E"/>
-                          </a:solidFill>
-                        </a:rPr>
-                        <a:t>보정도 개선</a:t>
-                      </a:r>
+                        <a:rPr sz="1000" dirty="0" err="1">
+                          <a:solidFill>
+                            <a:srgbClr val="1A1A2E"/>
+                          </a:solidFill>
+                        </a:rPr>
+                        <a:t>보정도</a:t>
+                      </a:r>
+                      <a:r>
+                        <a:rPr sz="1000" dirty="0">
+                          <a:solidFill>
+                            <a:srgbClr val="1A1A2E"/>
+                          </a:solidFill>
+                        </a:rPr>
+                        <a:t> </a:t>
+                      </a:r>
+                      <a:r>
+                        <a:rPr sz="1000" dirty="0" err="1">
+                          <a:solidFill>
+                            <a:srgbClr val="1A1A2E"/>
+                          </a:solidFill>
+                        </a:rPr>
+                        <a:t>개선</a:t>
+                      </a:r>
+                      <a:endParaRPr sz="1000" dirty="0">
+                        <a:solidFill>
+                          <a:srgbClr val="1A1A2E"/>
+                        </a:solidFill>
+                      </a:endParaRPr>
                     </a:p>
                   </a:txBody>
                   <a:tcPr>
@@ -12916,13 +13777,34 @@
                     <a:p>
                       <a:pPr algn="ctr"/>
                       <a:r>
-                        <a:rPr sz="1000">
-                          <a:solidFill>
-                            <a:srgbClr val="1A1A2E"/>
-                          </a:solidFill>
-                        </a:rPr>
-                        <a:t>보정도 양호</a:t>
-                      </a:r>
+                        <a:rPr sz="1000" dirty="0" err="1">
+                          <a:solidFill>
+                            <a:srgbClr val="1A1A2E"/>
+                          </a:solidFill>
+                        </a:rPr>
+                        <a:t>보정도</a:t>
+                      </a:r>
+                      <a:r>
+                        <a:rPr sz="1000" dirty="0">
+                          <a:solidFill>
+                            <a:srgbClr val="1A1A2E"/>
+                          </a:solidFill>
+                        </a:rPr>
+                        <a:t> </a:t>
+                      </a:r>
+                      <a:r>
+                        <a:rPr sz="1000" dirty="0" err="1">
+                          <a:solidFill>
+                            <a:srgbClr val="1A1A2E"/>
+                          </a:solidFill>
+                        </a:rPr>
+                        <a:t>양호</a:t>
+                      </a:r>
+                      <a:endParaRPr sz="1000" dirty="0">
+                        <a:solidFill>
+                          <a:srgbClr val="1A1A2E"/>
+                        </a:solidFill>
+                      </a:endParaRPr>
                     </a:p>
                   </a:txBody>
                   <a:tcPr>
@@ -12931,6 +13813,11 @@
                     </a:solidFill>
                   </a:tcPr>
                 </a:tc>
+                <a:extLst>
+                  <a:ext uri="{0D108BD9-81ED-4DB2-BD59-A6C34878D82A}">
+                    <a16:rowId xmlns:a16="http://schemas.microsoft.com/office/drawing/2014/main" val="10004"/>
+                  </a:ext>
+                </a:extLst>
               </a:tr>
             </a:tbl>
           </a:graphicData>
@@ -12960,13 +13847,122 @@
           <a:p>
             <a:pPr algn="l"/>
             <a:r>
-              <a:rPr sz="1300" b="1" i="0">
+              <a:rPr sz="1300" b="1" i="0" dirty="0">
                 <a:solidFill>
                   <a:srgbClr val="2E75B6"/>
                 </a:solidFill>
               </a:rPr>
-              <a:t>AEC 추가(Case1→2)로 AUC +4.0%p 향상  |  CT 모델명/kVp 추가(Case2→3)로 +7.8%p 추가 개선</a:t>
-            </a:r>
+              <a:t>AEC </a:t>
+            </a:r>
+            <a:r>
+              <a:rPr sz="1300" b="1" i="0" dirty="0" err="1">
+                <a:solidFill>
+                  <a:srgbClr val="2E75B6"/>
+                </a:solidFill>
+              </a:rPr>
+              <a:t>추가</a:t>
+            </a:r>
+            <a:r>
+              <a:rPr sz="1300" b="1" i="0" dirty="0">
+                <a:solidFill>
+                  <a:srgbClr val="2E75B6"/>
+                </a:solidFill>
+              </a:rPr>
+              <a:t>(Case1→2)로 AUC +4.0%p </a:t>
+            </a:r>
+            <a:r>
+              <a:rPr sz="1300" b="1" i="0" dirty="0" err="1">
+                <a:solidFill>
+                  <a:srgbClr val="2E75B6"/>
+                </a:solidFill>
+              </a:rPr>
+              <a:t>향상</a:t>
+            </a:r>
+            <a:r>
+              <a:rPr sz="1300" b="1" i="0" dirty="0">
+                <a:solidFill>
+                  <a:srgbClr val="2E75B6"/>
+                </a:solidFill>
+              </a:rPr>
+              <a:t>  |  CT </a:t>
+            </a:r>
+            <a:r>
+              <a:rPr sz="1300" b="1" i="0" dirty="0" err="1">
+                <a:solidFill>
+                  <a:srgbClr val="2E75B6"/>
+                </a:solidFill>
+              </a:rPr>
+              <a:t>모델명</a:t>
+            </a:r>
+            <a:r>
+              <a:rPr sz="1300" b="1" i="0" dirty="0">
+                <a:solidFill>
+                  <a:srgbClr val="2E75B6"/>
+                </a:solidFill>
+              </a:rPr>
+              <a:t>/</a:t>
+            </a:r>
+            <a:r>
+              <a:rPr sz="1300" b="1" i="0" dirty="0" err="1">
+                <a:solidFill>
+                  <a:srgbClr val="2E75B6"/>
+                </a:solidFill>
+              </a:rPr>
+              <a:t>kVp</a:t>
+            </a:r>
+            <a:r>
+              <a:rPr sz="1300" b="1" i="0" dirty="0">
+                <a:solidFill>
+                  <a:srgbClr val="2E75B6"/>
+                </a:solidFill>
+              </a:rPr>
+              <a:t> </a:t>
+            </a:r>
+            <a:r>
+              <a:rPr sz="1300" b="1" i="0" dirty="0" err="1">
+                <a:solidFill>
+                  <a:srgbClr val="2E75B6"/>
+                </a:solidFill>
+              </a:rPr>
+              <a:t>추가</a:t>
+            </a:r>
+            <a:r>
+              <a:rPr sz="1300" b="1" i="0" dirty="0">
+                <a:solidFill>
+                  <a:srgbClr val="2E75B6"/>
+                </a:solidFill>
+              </a:rPr>
+              <a:t>(Case2→3)로 +7.8%p </a:t>
+            </a:r>
+            <a:r>
+              <a:rPr sz="1300" b="1" i="0" dirty="0" err="1">
+                <a:solidFill>
+                  <a:srgbClr val="2E75B6"/>
+                </a:solidFill>
+              </a:rPr>
+              <a:t>추가</a:t>
+            </a:r>
+            <a:r>
+              <a:rPr sz="1300" b="1" i="0" dirty="0">
+                <a:solidFill>
+                  <a:srgbClr val="2E75B6"/>
+                </a:solidFill>
+              </a:rPr>
+              <a:t> </a:t>
+            </a:r>
+            <a:r>
+              <a:rPr sz="1300" b="1" i="0" dirty="0" err="1">
+                <a:solidFill>
+                  <a:srgbClr val="2E75B6"/>
+                </a:solidFill>
+              </a:rPr>
+              <a:t>개선</a:t>
+            </a:r>
+            <a:endParaRPr sz="1300" b="1" i="0" dirty="0">
+              <a:solidFill>
+                <a:srgbClr val="2E75B6"/>
+              </a:solidFill>
+            </a:endParaRPr>
           </a:p>
         </p:txBody>
       </p:sp>
@@ -13095,7 +14091,7 @@
 </file>
 
 <file path=ppt/slides/slide18.xml><?xml version="1.0" encoding="utf-8"?>
-<p:sld xmlns:a="http://schemas.openxmlformats.org/drawingml/2006/main" xmlns:p="http://schemas.openxmlformats.org/presentationml/2006/main" xmlns:r="http://schemas.openxmlformats.org/officeDocument/2006/relationships">
+<p:sld xmlns:a="http://schemas.openxmlformats.org/drawingml/2006/main" xmlns:r="http://schemas.openxmlformats.org/officeDocument/2006/relationships" xmlns:p="http://schemas.openxmlformats.org/presentationml/2006/main">
   <p:cSld>
     <p:spTree>
       <p:nvGrpSpPr>
@@ -13103,7 +14099,14 @@
         <p:cNvGrpSpPr/>
         <p:nvPr/>
       </p:nvGrpSpPr>
-      <p:grpSpPr/>
+      <p:grpSpPr>
+        <a:xfrm>
+          <a:off x="0" y="0"/>
+          <a:ext cx="0" cy="0"/>
+          <a:chOff x="0" y="0"/>
+          <a:chExt cx="0" cy="0"/>
+        </a:xfrm>
+      </p:grpSpPr>
       <p:sp>
         <p:nvSpPr>
           <p:cNvPr id="2" name="Rectangle 1"/>
@@ -13144,6 +14147,7 @@
           <a:lstStyle/>
           <a:p>
             <a:pPr algn="ctr"/>
+            <a:endParaRPr/>
           </a:p>
         </p:txBody>
       </p:sp>
@@ -13187,6 +14191,7 @@
           <a:lstStyle/>
           <a:p>
             <a:pPr algn="ctr"/>
+            <a:endParaRPr/>
           </a:p>
         </p:txBody>
       </p:sp>
@@ -13332,6 +14337,7 @@
           <a:lstStyle/>
           <a:p>
             <a:pPr algn="ctr"/>
+            <a:endParaRPr/>
           </a:p>
         </p:txBody>
       </p:sp>
@@ -13478,6 +14484,7 @@
           <a:lstStyle/>
           <a:p>
             <a:pPr algn="ctr"/>
+            <a:endParaRPr/>
           </a:p>
         </p:txBody>
       </p:sp>
@@ -13624,6 +14631,7 @@
           <a:lstStyle/>
           <a:p>
             <a:pPr algn="ctr"/>
+            <a:endParaRPr/>
           </a:p>
         </p:txBody>
       </p:sp>
@@ -13770,6 +14778,7 @@
           <a:lstStyle/>
           <a:p>
             <a:pPr algn="ctr"/>
+            <a:endParaRPr/>
           </a:p>
         </p:txBody>
       </p:sp>
@@ -13895,11 +14904,41 @@
                 <a:tableStyleId>{5C22544A-7EE6-4342-B048-85BDC9FD1C3A}</a:tableStyleId>
               </a:tblPr>
               <a:tblGrid>
-                <a:gridCol w="2304288"/>
-                <a:gridCol w="2304288"/>
-                <a:gridCol w="2304288"/>
-                <a:gridCol w="2304288"/>
-                <a:gridCol w="2304288"/>
+                <a:gridCol w="2304288">
+                  <a:extLst>
+                    <a:ext uri="{9D8B030D-6E8A-4147-A177-3AD203B41FA5}">
+                      <a16:colId xmlns:a16="http://schemas.microsoft.com/office/drawing/2014/main" val="20000"/>
+                    </a:ext>
+                  </a:extLst>
+                </a:gridCol>
+                <a:gridCol w="2304288">
+                  <a:extLst>
+                    <a:ext uri="{9D8B030D-6E8A-4147-A177-3AD203B41FA5}">
+                      <a16:colId xmlns:a16="http://schemas.microsoft.com/office/drawing/2014/main" val="20001"/>
+                    </a:ext>
+                  </a:extLst>
+                </a:gridCol>
+                <a:gridCol w="2304288">
+                  <a:extLst>
+                    <a:ext uri="{9D8B030D-6E8A-4147-A177-3AD203B41FA5}">
+                      <a16:colId xmlns:a16="http://schemas.microsoft.com/office/drawing/2014/main" val="20002"/>
+                    </a:ext>
+                  </a:extLst>
+                </a:gridCol>
+                <a:gridCol w="2304288">
+                  <a:extLst>
+                    <a:ext uri="{9D8B030D-6E8A-4147-A177-3AD203B41FA5}">
+                      <a16:colId xmlns:a16="http://schemas.microsoft.com/office/drawing/2014/main" val="20003"/>
+                    </a:ext>
+                  </a:extLst>
+                </a:gridCol>
+                <a:gridCol w="2304288">
+                  <a:extLst>
+                    <a:ext uri="{9D8B030D-6E8A-4147-A177-3AD203B41FA5}">
+                      <a16:colId xmlns:a16="http://schemas.microsoft.com/office/drawing/2014/main" val="20004"/>
+                    </a:ext>
+                  </a:extLst>
+                </a:gridCol>
               </a:tblGrid>
               <a:tr h="420624">
                 <a:tc>
@@ -13909,7 +14948,7 @@
                     <a:p>
                       <a:pPr algn="ctr"/>
                       <a:r>
-                        <a:rPr b="1" sz="1000">
+                        <a:rPr sz="1000" b="1">
                           <a:solidFill>
                             <a:srgbClr val="FFFFFF"/>
                           </a:solidFill>
@@ -13931,7 +14970,7 @@
                     <a:p>
                       <a:pPr algn="ctr"/>
                       <a:r>
-                        <a:rPr b="1" sz="1000">
+                        <a:rPr sz="1000" b="1">
                           <a:solidFill>
                             <a:srgbClr val="FFFFFF"/>
                           </a:solidFill>
@@ -13958,7 +14997,7 @@
                     <a:p>
                       <a:pPr algn="ctr"/>
                       <a:r>
-                        <a:rPr b="1" sz="1000">
+                        <a:rPr sz="1000" b="1">
                           <a:solidFill>
                             <a:srgbClr val="FFFFFF"/>
                           </a:solidFill>
@@ -13985,7 +15024,7 @@
                     <a:p>
                       <a:pPr algn="ctr"/>
                       <a:r>
-                        <a:rPr b="1" sz="1000">
+                        <a:rPr sz="1000" b="1">
                           <a:solidFill>
                             <a:srgbClr val="FFFFFF"/>
                           </a:solidFill>
@@ -14007,7 +15046,7 @@
                     <a:p>
                       <a:pPr algn="ctr"/>
                       <a:r>
-                        <a:rPr b="1" sz="1000">
+                        <a:rPr sz="1000" b="1">
                           <a:solidFill>
                             <a:srgbClr val="FFFFFF"/>
                           </a:solidFill>
@@ -14022,6 +15061,11 @@
                     </a:solidFill>
                   </a:tcPr>
                 </a:tc>
+                <a:extLst>
+                  <a:ext uri="{0D108BD9-81ED-4DB2-BD59-A6C34878D82A}">
+                    <a16:rowId xmlns:a16="http://schemas.microsoft.com/office/drawing/2014/main" val="10000"/>
+                  </a:ext>
+                </a:extLst>
               </a:tr>
               <a:tr h="420624">
                 <a:tc>
@@ -14134,6 +15178,11 @@
                     </a:solidFill>
                   </a:tcPr>
                 </a:tc>
+                <a:extLst>
+                  <a:ext uri="{0D108BD9-81ED-4DB2-BD59-A6C34878D82A}">
+                    <a16:rowId xmlns:a16="http://schemas.microsoft.com/office/drawing/2014/main" val="10001"/>
+                  </a:ext>
+                </a:extLst>
               </a:tr>
               <a:tr h="420624">
                 <a:tc>
@@ -14246,6 +15295,11 @@
                     </a:solidFill>
                   </a:tcPr>
                 </a:tc>
+                <a:extLst>
+                  <a:ext uri="{0D108BD9-81ED-4DB2-BD59-A6C34878D82A}">
+                    <a16:rowId xmlns:a16="http://schemas.microsoft.com/office/drawing/2014/main" val="10002"/>
+                  </a:ext>
+                </a:extLst>
               </a:tr>
               <a:tr h="420624">
                 <a:tc>
@@ -14358,6 +15412,11 @@
                     </a:solidFill>
                   </a:tcPr>
                 </a:tc>
+                <a:extLst>
+                  <a:ext uri="{0D108BD9-81ED-4DB2-BD59-A6C34878D82A}">
+                    <a16:rowId xmlns:a16="http://schemas.microsoft.com/office/drawing/2014/main" val="10003"/>
+                  </a:ext>
+                </a:extLst>
               </a:tr>
               <a:tr h="420624">
                 <a:tc>
@@ -14470,6 +15529,11 @@
                     </a:solidFill>
                   </a:tcPr>
                 </a:tc>
+                <a:extLst>
+                  <a:ext uri="{0D108BD9-81ED-4DB2-BD59-A6C34878D82A}">
+                    <a16:rowId xmlns:a16="http://schemas.microsoft.com/office/drawing/2014/main" val="10004"/>
+                  </a:ext>
+                </a:extLst>
               </a:tr>
             </a:tbl>
           </a:graphicData>
@@ -14515,6 +15579,7 @@
           <a:lstStyle/>
           <a:p>
             <a:pPr algn="ctr"/>
+            <a:endParaRPr/>
           </a:p>
         </p:txBody>
       </p:sp>
@@ -14561,7 +15626,7 @@
 </file>
 
 <file path=ppt/slides/slide19.xml><?xml version="1.0" encoding="utf-8"?>
-<p:sld xmlns:a="http://schemas.openxmlformats.org/drawingml/2006/main" xmlns:p="http://schemas.openxmlformats.org/presentationml/2006/main" xmlns:r="http://schemas.openxmlformats.org/officeDocument/2006/relationships">
+<p:sld xmlns:a="http://schemas.openxmlformats.org/drawingml/2006/main" xmlns:r="http://schemas.openxmlformats.org/officeDocument/2006/relationships" xmlns:p="http://schemas.openxmlformats.org/presentationml/2006/main">
   <p:cSld>
     <p:spTree>
       <p:nvGrpSpPr>
@@ -14569,7 +15634,14 @@
         <p:cNvGrpSpPr/>
         <p:nvPr/>
       </p:nvGrpSpPr>
-      <p:grpSpPr/>
+      <p:grpSpPr>
+        <a:xfrm>
+          <a:off x="0" y="0"/>
+          <a:ext cx="0" cy="0"/>
+          <a:chOff x="0" y="0"/>
+          <a:chExt cx="0" cy="0"/>
+        </a:xfrm>
+      </p:grpSpPr>
       <p:sp>
         <p:nvSpPr>
           <p:cNvPr id="2" name="Rectangle 1"/>
@@ -14610,6 +15682,7 @@
           <a:lstStyle/>
           <a:p>
             <a:pPr algn="ctr"/>
+            <a:endParaRPr/>
           </a:p>
         </p:txBody>
       </p:sp>
@@ -14653,6 +15726,7 @@
           <a:lstStyle/>
           <a:p>
             <a:pPr algn="ctr"/>
+            <a:endParaRPr/>
           </a:p>
         </p:txBody>
       </p:sp>
@@ -14777,8 +15851,20 @@
                 <a:tableStyleId>{5C22544A-7EE6-4342-B048-85BDC9FD1C3A}</a:tableStyleId>
               </a:tblPr>
               <a:tblGrid>
-                <a:gridCol w="2880360"/>
-                <a:gridCol w="2880360"/>
+                <a:gridCol w="2880360">
+                  <a:extLst>
+                    <a:ext uri="{9D8B030D-6E8A-4147-A177-3AD203B41FA5}">
+                      <a16:colId xmlns:a16="http://schemas.microsoft.com/office/drawing/2014/main" val="20000"/>
+                    </a:ext>
+                  </a:extLst>
+                </a:gridCol>
+                <a:gridCol w="2880360">
+                  <a:extLst>
+                    <a:ext uri="{9D8B030D-6E8A-4147-A177-3AD203B41FA5}">
+                      <a16:colId xmlns:a16="http://schemas.microsoft.com/office/drawing/2014/main" val="20001"/>
+                    </a:ext>
+                  </a:extLst>
+                </a:gridCol>
               </a:tblGrid>
               <a:tr h="431074">
                 <a:tc>
@@ -14788,7 +15874,7 @@
                     <a:p>
                       <a:pPr algn="ctr"/>
                       <a:r>
-                        <a:rPr b="1" sz="1000">
+                        <a:rPr sz="1000" b="1">
                           <a:solidFill>
                             <a:srgbClr val="FFFFFF"/>
                           </a:solidFill>
@@ -14810,7 +15896,7 @@
                     <a:p>
                       <a:pPr algn="ctr"/>
                       <a:r>
-                        <a:rPr b="1" sz="1000">
+                        <a:rPr sz="1000" b="1">
                           <a:solidFill>
                             <a:srgbClr val="FFFFFF"/>
                           </a:solidFill>
@@ -14825,6 +15911,11 @@
                     </a:solidFill>
                   </a:tcPr>
                 </a:tc>
+                <a:extLst>
+                  <a:ext uri="{0D108BD9-81ED-4DB2-BD59-A6C34878D82A}">
+                    <a16:rowId xmlns:a16="http://schemas.microsoft.com/office/drawing/2014/main" val="10000"/>
+                  </a:ext>
+                </a:extLst>
               </a:tr>
               <a:tr h="431074">
                 <a:tc>
@@ -14871,6 +15962,11 @@
                     </a:solidFill>
                   </a:tcPr>
                 </a:tc>
+                <a:extLst>
+                  <a:ext uri="{0D108BD9-81ED-4DB2-BD59-A6C34878D82A}">
+                    <a16:rowId xmlns:a16="http://schemas.microsoft.com/office/drawing/2014/main" val="10001"/>
+                  </a:ext>
+                </a:extLst>
               </a:tr>
               <a:tr h="431074">
                 <a:tc>
@@ -14917,6 +16013,11 @@
                     </a:solidFill>
                   </a:tcPr>
                 </a:tc>
+                <a:extLst>
+                  <a:ext uri="{0D108BD9-81ED-4DB2-BD59-A6C34878D82A}">
+                    <a16:rowId xmlns:a16="http://schemas.microsoft.com/office/drawing/2014/main" val="10002"/>
+                  </a:ext>
+                </a:extLst>
               </a:tr>
               <a:tr h="431074">
                 <a:tc>
@@ -14963,6 +16064,11 @@
                     </a:solidFill>
                   </a:tcPr>
                 </a:tc>
+                <a:extLst>
+                  <a:ext uri="{0D108BD9-81ED-4DB2-BD59-A6C34878D82A}">
+                    <a16:rowId xmlns:a16="http://schemas.microsoft.com/office/drawing/2014/main" val="10003"/>
+                  </a:ext>
+                </a:extLst>
               </a:tr>
               <a:tr h="431074">
                 <a:tc>
@@ -15009,6 +16115,11 @@
                     </a:solidFill>
                   </a:tcPr>
                 </a:tc>
+                <a:extLst>
+                  <a:ext uri="{0D108BD9-81ED-4DB2-BD59-A6C34878D82A}">
+                    <a16:rowId xmlns:a16="http://schemas.microsoft.com/office/drawing/2014/main" val="10004"/>
+                  </a:ext>
+                </a:extLst>
               </a:tr>
               <a:tr h="431074">
                 <a:tc>
@@ -15055,6 +16166,11 @@
                     </a:solidFill>
                   </a:tcPr>
                 </a:tc>
+                <a:extLst>
+                  <a:ext uri="{0D108BD9-81ED-4DB2-BD59-A6C34878D82A}">
+                    <a16:rowId xmlns:a16="http://schemas.microsoft.com/office/drawing/2014/main" val="10005"/>
+                  </a:ext>
+                </a:extLst>
               </a:tr>
               <a:tr h="431076">
                 <a:tc>
@@ -15101,6 +16217,11 @@
                     </a:solidFill>
                   </a:tcPr>
                 </a:tc>
+                <a:extLst>
+                  <a:ext uri="{0D108BD9-81ED-4DB2-BD59-A6C34878D82A}">
+                    <a16:rowId xmlns:a16="http://schemas.microsoft.com/office/drawing/2014/main" val="10006"/>
+                  </a:ext>
+                </a:extLst>
               </a:tr>
             </a:tbl>
           </a:graphicData>
@@ -15159,8 +16280,20 @@
                 <a:tableStyleId>{5C22544A-7EE6-4342-B048-85BDC9FD1C3A}</a:tableStyleId>
               </a:tblPr>
               <a:tblGrid>
-                <a:gridCol w="2825496"/>
-                <a:gridCol w="2825496"/>
+                <a:gridCol w="2825496">
+                  <a:extLst>
+                    <a:ext uri="{9D8B030D-6E8A-4147-A177-3AD203B41FA5}">
+                      <a16:colId xmlns:a16="http://schemas.microsoft.com/office/drawing/2014/main" val="20000"/>
+                    </a:ext>
+                  </a:extLst>
+                </a:gridCol>
+                <a:gridCol w="2825496">
+                  <a:extLst>
+                    <a:ext uri="{9D8B030D-6E8A-4147-A177-3AD203B41FA5}">
+                      <a16:colId xmlns:a16="http://schemas.microsoft.com/office/drawing/2014/main" val="20001"/>
+                    </a:ext>
+                  </a:extLst>
+                </a:gridCol>
               </a:tblGrid>
               <a:tr h="422910">
                 <a:tc>
@@ -15170,7 +16303,7 @@
                     <a:p>
                       <a:pPr algn="ctr"/>
                       <a:r>
-                        <a:rPr b="1" sz="1000">
+                        <a:rPr sz="1000" b="1">
                           <a:solidFill>
                             <a:srgbClr val="FFFFFF"/>
                           </a:solidFill>
@@ -15192,7 +16325,7 @@
                     <a:p>
                       <a:pPr algn="ctr"/>
                       <a:r>
-                        <a:rPr b="1" sz="1000">
+                        <a:rPr sz="1000" b="1">
                           <a:solidFill>
                             <a:srgbClr val="FFFFFF"/>
                           </a:solidFill>
@@ -15207,6 +16340,11 @@
                     </a:solidFill>
                   </a:tcPr>
                 </a:tc>
+                <a:extLst>
+                  <a:ext uri="{0D108BD9-81ED-4DB2-BD59-A6C34878D82A}">
+                    <a16:rowId xmlns:a16="http://schemas.microsoft.com/office/drawing/2014/main" val="10000"/>
+                  </a:ext>
+                </a:extLst>
               </a:tr>
               <a:tr h="422910">
                 <a:tc>
@@ -15253,6 +16391,11 @@
                     </a:solidFill>
                   </a:tcPr>
                 </a:tc>
+                <a:extLst>
+                  <a:ext uri="{0D108BD9-81ED-4DB2-BD59-A6C34878D82A}">
+                    <a16:rowId xmlns:a16="http://schemas.microsoft.com/office/drawing/2014/main" val="10001"/>
+                  </a:ext>
+                </a:extLst>
               </a:tr>
               <a:tr h="422910">
                 <a:tc>
@@ -15299,6 +16442,11 @@
                     </a:solidFill>
                   </a:tcPr>
                 </a:tc>
+                <a:extLst>
+                  <a:ext uri="{0D108BD9-81ED-4DB2-BD59-A6C34878D82A}">
+                    <a16:rowId xmlns:a16="http://schemas.microsoft.com/office/drawing/2014/main" val="10002"/>
+                  </a:ext>
+                </a:extLst>
               </a:tr>
               <a:tr h="422910">
                 <a:tc>
@@ -15345,6 +16493,11 @@
                     </a:solidFill>
                   </a:tcPr>
                 </a:tc>
+                <a:extLst>
+                  <a:ext uri="{0D108BD9-81ED-4DB2-BD59-A6C34878D82A}">
+                    <a16:rowId xmlns:a16="http://schemas.microsoft.com/office/drawing/2014/main" val="10003"/>
+                  </a:ext>
+                </a:extLst>
               </a:tr>
               <a:tr h="422910">
                 <a:tc>
@@ -15391,6 +16544,11 @@
                     </a:solidFill>
                   </a:tcPr>
                 </a:tc>
+                <a:extLst>
+                  <a:ext uri="{0D108BD9-81ED-4DB2-BD59-A6C34878D82A}">
+                    <a16:rowId xmlns:a16="http://schemas.microsoft.com/office/drawing/2014/main" val="10004"/>
+                  </a:ext>
+                </a:extLst>
               </a:tr>
               <a:tr h="422910">
                 <a:tc>
@@ -15437,6 +16595,11 @@
                     </a:solidFill>
                   </a:tcPr>
                 </a:tc>
+                <a:extLst>
+                  <a:ext uri="{0D108BD9-81ED-4DB2-BD59-A6C34878D82A}">
+                    <a16:rowId xmlns:a16="http://schemas.microsoft.com/office/drawing/2014/main" val="10005"/>
+                  </a:ext>
+                </a:extLst>
               </a:tr>
               <a:tr h="422910">
                 <a:tc>
@@ -15483,6 +16646,11 @@
                     </a:solidFill>
                   </a:tcPr>
                 </a:tc>
+                <a:extLst>
+                  <a:ext uri="{0D108BD9-81ED-4DB2-BD59-A6C34878D82A}">
+                    <a16:rowId xmlns:a16="http://schemas.microsoft.com/office/drawing/2014/main" val="10006"/>
+                  </a:ext>
+                </a:extLst>
               </a:tr>
               <a:tr h="422910">
                 <a:tc>
@@ -15529,6 +16697,11 @@
                     </a:solidFill>
                   </a:tcPr>
                 </a:tc>
+                <a:extLst>
+                  <a:ext uri="{0D108BD9-81ED-4DB2-BD59-A6C34878D82A}">
+                    <a16:rowId xmlns:a16="http://schemas.microsoft.com/office/drawing/2014/main" val="10007"/>
+                  </a:ext>
+                </a:extLst>
               </a:tr>
             </a:tbl>
           </a:graphicData>
@@ -15574,6 +16747,7 @@
           <a:lstStyle/>
           <a:p>
             <a:pPr algn="ctr"/>
+            <a:endParaRPr/>
           </a:p>
         </p:txBody>
       </p:sp>
@@ -15687,6 +16861,7 @@
           <a:lstStyle/>
           <a:p>
             <a:pPr algn="ctr"/>
+            <a:endParaRPr/>
           </a:p>
         </p:txBody>
       </p:sp>
@@ -15769,7 +16944,7 @@
 </file>
 
 <file path=ppt/slides/slide2.xml><?xml version="1.0" encoding="utf-8"?>
-<p:sld xmlns:a="http://schemas.openxmlformats.org/drawingml/2006/main" xmlns:p="http://schemas.openxmlformats.org/presentationml/2006/main" xmlns:r="http://schemas.openxmlformats.org/officeDocument/2006/relationships">
+<p:sld xmlns:a="http://schemas.openxmlformats.org/drawingml/2006/main" xmlns:r="http://schemas.openxmlformats.org/officeDocument/2006/relationships" xmlns:p="http://schemas.openxmlformats.org/presentationml/2006/main">
   <p:cSld>
     <p:spTree>
       <p:nvGrpSpPr>
@@ -15777,7 +16952,14 @@
         <p:cNvGrpSpPr/>
         <p:nvPr/>
       </p:nvGrpSpPr>
-      <p:grpSpPr/>
+      <p:grpSpPr>
+        <a:xfrm>
+          <a:off x="0" y="0"/>
+          <a:ext cx="0" cy="0"/>
+          <a:chOff x="0" y="0"/>
+          <a:chExt cx="0" cy="0"/>
+        </a:xfrm>
+      </p:grpSpPr>
       <p:sp>
         <p:nvSpPr>
           <p:cNvPr id="2" name="Rectangle 1"/>
@@ -15818,6 +17000,7 @@
           <a:lstStyle/>
           <a:p>
             <a:pPr algn="ctr"/>
+            <a:endParaRPr/>
           </a:p>
         </p:txBody>
       </p:sp>
@@ -15861,6 +17044,7 @@
           <a:lstStyle/>
           <a:p>
             <a:pPr algn="ctr"/>
+            <a:endParaRPr/>
           </a:p>
         </p:txBody>
       </p:sp>
@@ -15972,6 +17156,7 @@
           <a:lstStyle/>
           <a:p>
             <a:pPr algn="ctr"/>
+            <a:endParaRPr/>
           </a:p>
         </p:txBody>
       </p:sp>
@@ -16117,6 +17302,7 @@
           <a:lstStyle/>
           <a:p>
             <a:pPr algn="ctr"/>
+            <a:endParaRPr/>
           </a:p>
         </p:txBody>
       </p:sp>
@@ -16262,6 +17448,7 @@
           <a:lstStyle/>
           <a:p>
             <a:pPr algn="ctr"/>
+            <a:endParaRPr/>
           </a:p>
         </p:txBody>
       </p:sp>
@@ -16407,6 +17594,7 @@
           <a:lstStyle/>
           <a:p>
             <a:pPr algn="ctr"/>
+            <a:endParaRPr/>
           </a:p>
         </p:txBody>
       </p:sp>
@@ -16552,6 +17740,7 @@
           <a:lstStyle/>
           <a:p>
             <a:pPr algn="ctr"/>
+            <a:endParaRPr/>
           </a:p>
         </p:txBody>
       </p:sp>
@@ -16697,6 +17886,7 @@
           <a:lstStyle/>
           <a:p>
             <a:pPr algn="ctr"/>
+            <a:endParaRPr/>
           </a:p>
         </p:txBody>
       </p:sp>
@@ -16842,6 +18032,7 @@
           <a:lstStyle/>
           <a:p>
             <a:pPr algn="ctr"/>
+            <a:endParaRPr/>
           </a:p>
         </p:txBody>
       </p:sp>
@@ -16956,7 +18147,7 @@
 </file>
 
 <file path=ppt/slides/slide20.xml><?xml version="1.0" encoding="utf-8"?>
-<p:sld xmlns:a="http://schemas.openxmlformats.org/drawingml/2006/main" xmlns:p="http://schemas.openxmlformats.org/presentationml/2006/main" xmlns:r="http://schemas.openxmlformats.org/officeDocument/2006/relationships">
+<p:sld xmlns:a="http://schemas.openxmlformats.org/drawingml/2006/main" xmlns:r="http://schemas.openxmlformats.org/officeDocument/2006/relationships" xmlns:p="http://schemas.openxmlformats.org/presentationml/2006/main">
   <p:cSld>
     <p:spTree>
       <p:nvGrpSpPr>
@@ -16964,7 +18155,14 @@
         <p:cNvGrpSpPr/>
         <p:nvPr/>
       </p:nvGrpSpPr>
-      <p:grpSpPr/>
+      <p:grpSpPr>
+        <a:xfrm>
+          <a:off x="0" y="0"/>
+          <a:ext cx="0" cy="0"/>
+          <a:chOff x="0" y="0"/>
+          <a:chExt cx="0" cy="0"/>
+        </a:xfrm>
+      </p:grpSpPr>
       <p:sp>
         <p:nvSpPr>
           <p:cNvPr id="2" name="Rectangle 1"/>
@@ -17005,6 +18203,7 @@
           <a:lstStyle/>
           <a:p>
             <a:pPr algn="ctr"/>
+            <a:endParaRPr/>
           </a:p>
         </p:txBody>
       </p:sp>
@@ -17048,6 +18247,7 @@
           <a:lstStyle/>
           <a:p>
             <a:pPr algn="ctr"/>
+            <a:endParaRPr/>
           </a:p>
         </p:txBody>
       </p:sp>
@@ -17159,6 +18359,7 @@
           <a:lstStyle/>
           <a:p>
             <a:pPr algn="ctr"/>
+            <a:endParaRPr/>
           </a:p>
         </p:txBody>
       </p:sp>
@@ -17202,6 +18403,7 @@
           <a:lstStyle/>
           <a:p>
             <a:pPr algn="ctr"/>
+            <a:endParaRPr/>
           </a:p>
         </p:txBody>
       </p:sp>
@@ -17314,6 +18516,7 @@
           <a:lstStyle/>
           <a:p>
             <a:pPr algn="ctr"/>
+            <a:endParaRPr/>
           </a:p>
         </p:txBody>
       </p:sp>
@@ -17357,6 +18560,7 @@
           <a:lstStyle/>
           <a:p>
             <a:pPr algn="ctr"/>
+            <a:endParaRPr/>
           </a:p>
         </p:txBody>
       </p:sp>
@@ -17470,6 +18674,7 @@
           <a:lstStyle/>
           <a:p>
             <a:pPr algn="ctr"/>
+            <a:endParaRPr/>
           </a:p>
         </p:txBody>
       </p:sp>
@@ -17513,6 +18718,7 @@
           <a:lstStyle/>
           <a:p>
             <a:pPr algn="ctr"/>
+            <a:endParaRPr/>
           </a:p>
         </p:txBody>
       </p:sp>
@@ -17625,6 +18831,7 @@
           <a:lstStyle/>
           <a:p>
             <a:pPr algn="ctr"/>
+            <a:endParaRPr/>
           </a:p>
         </p:txBody>
       </p:sp>
@@ -17668,6 +18875,7 @@
           <a:lstStyle/>
           <a:p>
             <a:pPr algn="ctr"/>
+            <a:endParaRPr/>
           </a:p>
         </p:txBody>
       </p:sp>
@@ -17784,7 +18992,7 @@
 </file>
 
 <file path=ppt/slides/slide21.xml><?xml version="1.0" encoding="utf-8"?>
-<p:sld xmlns:a="http://schemas.openxmlformats.org/drawingml/2006/main" xmlns:p="http://schemas.openxmlformats.org/presentationml/2006/main" xmlns:r="http://schemas.openxmlformats.org/officeDocument/2006/relationships">
+<p:sld xmlns:a="http://schemas.openxmlformats.org/drawingml/2006/main" xmlns:r="http://schemas.openxmlformats.org/officeDocument/2006/relationships" xmlns:p="http://schemas.openxmlformats.org/presentationml/2006/main">
   <p:cSld>
     <p:spTree>
       <p:nvGrpSpPr>
@@ -17792,7 +19000,14 @@
         <p:cNvGrpSpPr/>
         <p:nvPr/>
       </p:nvGrpSpPr>
-      <p:grpSpPr/>
+      <p:grpSpPr>
+        <a:xfrm>
+          <a:off x="0" y="0"/>
+          <a:ext cx="0" cy="0"/>
+          <a:chOff x="0" y="0"/>
+          <a:chExt cx="0" cy="0"/>
+        </a:xfrm>
+      </p:grpSpPr>
       <p:sp>
         <p:nvSpPr>
           <p:cNvPr id="2" name="Rectangle 1"/>
@@ -17833,6 +19048,7 @@
           <a:lstStyle/>
           <a:p>
             <a:pPr algn="ctr"/>
+            <a:endParaRPr/>
           </a:p>
         </p:txBody>
       </p:sp>
@@ -17876,6 +19092,7 @@
           <a:lstStyle/>
           <a:p>
             <a:pPr algn="ctr"/>
+            <a:endParaRPr/>
           </a:p>
         </p:txBody>
       </p:sp>
@@ -17989,6 +19206,7 @@
           <a:lstStyle/>
           <a:p>
             <a:pPr algn="ctr"/>
+            <a:endParaRPr/>
           </a:p>
         </p:txBody>
       </p:sp>
@@ -18204,6 +19422,7 @@
           <a:lstStyle/>
           <a:p>
             <a:pPr algn="ctr"/>
+            <a:endParaRPr/>
           </a:p>
         </p:txBody>
       </p:sp>
@@ -18451,6 +19670,7 @@
           <a:lstStyle/>
           <a:p>
             <a:pPr algn="ctr"/>
+            <a:endParaRPr/>
           </a:p>
         </p:txBody>
       </p:sp>
@@ -18532,7 +19752,7 @@
 </file>
 
 <file path=ppt/slides/slide3.xml><?xml version="1.0" encoding="utf-8"?>
-<p:sld xmlns:a="http://schemas.openxmlformats.org/drawingml/2006/main" xmlns:p="http://schemas.openxmlformats.org/presentationml/2006/main" xmlns:r="http://schemas.openxmlformats.org/officeDocument/2006/relationships">
+<p:sld xmlns:a="http://schemas.openxmlformats.org/drawingml/2006/main" xmlns:r="http://schemas.openxmlformats.org/officeDocument/2006/relationships" xmlns:p="http://schemas.openxmlformats.org/presentationml/2006/main">
   <p:cSld>
     <p:spTree>
       <p:nvGrpSpPr>
@@ -18540,7 +19760,14 @@
         <p:cNvGrpSpPr/>
         <p:nvPr/>
       </p:nvGrpSpPr>
-      <p:grpSpPr/>
+      <p:grpSpPr>
+        <a:xfrm>
+          <a:off x="0" y="0"/>
+          <a:ext cx="0" cy="0"/>
+          <a:chOff x="0" y="0"/>
+          <a:chExt cx="0" cy="0"/>
+        </a:xfrm>
+      </p:grpSpPr>
       <p:sp>
         <p:nvSpPr>
           <p:cNvPr id="2" name="Rectangle 1"/>
@@ -18581,6 +19808,7 @@
           <a:lstStyle/>
           <a:p>
             <a:pPr algn="ctr"/>
+            <a:endParaRPr/>
           </a:p>
         </p:txBody>
       </p:sp>
@@ -18624,6 +19852,7 @@
           <a:lstStyle/>
           <a:p>
             <a:pPr algn="ctr"/>
+            <a:endParaRPr/>
           </a:p>
         </p:txBody>
       </p:sp>
@@ -18735,6 +19964,7 @@
           <a:lstStyle/>
           <a:p>
             <a:pPr algn="ctr"/>
+            <a:endParaRPr/>
           </a:p>
         </p:txBody>
       </p:sp>
@@ -18848,6 +20078,7 @@
           <a:lstStyle/>
           <a:p>
             <a:pPr algn="ctr"/>
+            <a:endParaRPr/>
           </a:p>
         </p:txBody>
       </p:sp>
@@ -18996,6 +20227,7 @@
           <a:lstStyle/>
           <a:p>
             <a:pPr algn="ctr"/>
+            <a:endParaRPr/>
           </a:p>
         </p:txBody>
       </p:sp>
@@ -19144,6 +20376,7 @@
           <a:lstStyle/>
           <a:p>
             <a:pPr algn="ctr"/>
+            <a:endParaRPr/>
           </a:p>
         </p:txBody>
       </p:sp>
@@ -19328,7 +20561,7 @@
         </p:nvGraphicFramePr>
         <p:xfrm>
           <a:off x="320040" y="4800600"/>
-          <a:ext cx="11521440" cy="1828800"/>
+          <a:ext cx="11521440" cy="1981200"/>
         </p:xfrm>
         <a:graphic>
           <a:graphicData uri="http://schemas.openxmlformats.org/drawingml/2006/table">
@@ -19337,9 +20570,27 @@
                 <a:tableStyleId>{5C22544A-7EE6-4342-B048-85BDC9FD1C3A}</a:tableStyleId>
               </a:tblPr>
               <a:tblGrid>
-                <a:gridCol w="3840480"/>
-                <a:gridCol w="3840480"/>
-                <a:gridCol w="3840480"/>
+                <a:gridCol w="3840480">
+                  <a:extLst>
+                    <a:ext uri="{9D8B030D-6E8A-4147-A177-3AD203B41FA5}">
+                      <a16:colId xmlns:a16="http://schemas.microsoft.com/office/drawing/2014/main" val="20000"/>
+                    </a:ext>
+                  </a:extLst>
+                </a:gridCol>
+                <a:gridCol w="3840480">
+                  <a:extLst>
+                    <a:ext uri="{9D8B030D-6E8A-4147-A177-3AD203B41FA5}">
+                      <a16:colId xmlns:a16="http://schemas.microsoft.com/office/drawing/2014/main" val="20001"/>
+                    </a:ext>
+                  </a:extLst>
+                </a:gridCol>
+                <a:gridCol w="3840480">
+                  <a:extLst>
+                    <a:ext uri="{9D8B030D-6E8A-4147-A177-3AD203B41FA5}">
+                      <a16:colId xmlns:a16="http://schemas.microsoft.com/office/drawing/2014/main" val="20002"/>
+                    </a:ext>
+                  </a:extLst>
+                </a:gridCol>
               </a:tblGrid>
               <a:tr h="365760">
                 <a:tc>
@@ -19349,7 +20600,7 @@
                     <a:p>
                       <a:pPr algn="ctr"/>
                       <a:r>
-                        <a:rPr b="1" sz="1000">
+                        <a:rPr sz="1000" b="1">
                           <a:solidFill>
                             <a:srgbClr val="FFFFFF"/>
                           </a:solidFill>
@@ -19371,7 +20622,7 @@
                     <a:p>
                       <a:pPr algn="ctr"/>
                       <a:r>
-                        <a:rPr b="1" sz="1000">
+                        <a:rPr sz="1000" b="1">
                           <a:solidFill>
                             <a:srgbClr val="FFFFFF"/>
                           </a:solidFill>
@@ -19393,7 +20644,7 @@
                     <a:p>
                       <a:pPr algn="ctr"/>
                       <a:r>
-                        <a:rPr b="1" sz="1000">
+                        <a:rPr sz="1000" b="1">
                           <a:solidFill>
                             <a:srgbClr val="FFFFFF"/>
                           </a:solidFill>
@@ -19408,6 +20659,11 @@
                     </a:solidFill>
                   </a:tcPr>
                 </a:tc>
+                <a:extLst>
+                  <a:ext uri="{0D108BD9-81ED-4DB2-BD59-A6C34878D82A}">
+                    <a16:rowId xmlns:a16="http://schemas.microsoft.com/office/drawing/2014/main" val="10000"/>
+                  </a:ext>
+                </a:extLst>
               </a:tr>
               <a:tr h="365760">
                 <a:tc>
@@ -19481,6 +20737,11 @@
                     </a:solidFill>
                   </a:tcPr>
                 </a:tc>
+                <a:extLst>
+                  <a:ext uri="{0D108BD9-81ED-4DB2-BD59-A6C34878D82A}">
+                    <a16:rowId xmlns:a16="http://schemas.microsoft.com/office/drawing/2014/main" val="10001"/>
+                  </a:ext>
+                </a:extLst>
               </a:tr>
               <a:tr h="365760">
                 <a:tc>
@@ -19549,6 +20810,11 @@
                     </a:solidFill>
                   </a:tcPr>
                 </a:tc>
+                <a:extLst>
+                  <a:ext uri="{0D108BD9-81ED-4DB2-BD59-A6C34878D82A}">
+                    <a16:rowId xmlns:a16="http://schemas.microsoft.com/office/drawing/2014/main" val="10002"/>
+                  </a:ext>
+                </a:extLst>
               </a:tr>
               <a:tr h="365760">
                 <a:tc>
@@ -19617,6 +20883,11 @@
                     </a:solidFill>
                   </a:tcPr>
                 </a:tc>
+                <a:extLst>
+                  <a:ext uri="{0D108BD9-81ED-4DB2-BD59-A6C34878D82A}">
+                    <a16:rowId xmlns:a16="http://schemas.microsoft.com/office/drawing/2014/main" val="10003"/>
+                  </a:ext>
+                </a:extLst>
               </a:tr>
               <a:tr h="365760">
                 <a:tc>
@@ -19685,6 +20956,11 @@
                     </a:solidFill>
                   </a:tcPr>
                 </a:tc>
+                <a:extLst>
+                  <a:ext uri="{0D108BD9-81ED-4DB2-BD59-A6C34878D82A}">
+                    <a16:rowId xmlns:a16="http://schemas.microsoft.com/office/drawing/2014/main" val="10004"/>
+                  </a:ext>
+                </a:extLst>
               </a:tr>
             </a:tbl>
           </a:graphicData>
@@ -19699,7 +20975,7 @@
 </file>
 
 <file path=ppt/slides/slide4.xml><?xml version="1.0" encoding="utf-8"?>
-<p:sld xmlns:a="http://schemas.openxmlformats.org/drawingml/2006/main" xmlns:p="http://schemas.openxmlformats.org/presentationml/2006/main" xmlns:r="http://schemas.openxmlformats.org/officeDocument/2006/relationships">
+<p:sld xmlns:a="http://schemas.openxmlformats.org/drawingml/2006/main" xmlns:r="http://schemas.openxmlformats.org/officeDocument/2006/relationships" xmlns:p="http://schemas.openxmlformats.org/presentationml/2006/main">
   <p:cSld>
     <p:spTree>
       <p:nvGrpSpPr>
@@ -19707,7 +20983,14 @@
         <p:cNvGrpSpPr/>
         <p:nvPr/>
       </p:nvGrpSpPr>
-      <p:grpSpPr/>
+      <p:grpSpPr>
+        <a:xfrm>
+          <a:off x="0" y="0"/>
+          <a:ext cx="0" cy="0"/>
+          <a:chOff x="0" y="0"/>
+          <a:chExt cx="0" cy="0"/>
+        </a:xfrm>
+      </p:grpSpPr>
       <p:sp>
         <p:nvSpPr>
           <p:cNvPr id="2" name="Rectangle 1"/>
@@ -19748,6 +21031,7 @@
           <a:lstStyle/>
           <a:p>
             <a:pPr algn="ctr"/>
+            <a:endParaRPr/>
           </a:p>
         </p:txBody>
       </p:sp>
@@ -19791,6 +21075,7 @@
           <a:lstStyle/>
           <a:p>
             <a:pPr algn="ctr"/>
+            <a:endParaRPr/>
           </a:p>
         </p:txBody>
       </p:sp>
@@ -19904,6 +21189,7 @@
           <a:lstStyle/>
           <a:p>
             <a:pPr algn="ctr"/>
+            <a:endParaRPr/>
           </a:p>
         </p:txBody>
       </p:sp>
@@ -20017,6 +21303,7 @@
           <a:lstStyle/>
           <a:p>
             <a:pPr algn="ctr"/>
+            <a:endParaRPr/>
           </a:p>
         </p:txBody>
       </p:sp>
@@ -20078,7 +21365,7 @@
           <a:p>
             <a:pPr algn="l"/>
             <a:r>
-              <a:rPr sz="1600" b="1" i="0">
+              <a:rPr sz="1600" b="1" i="0" dirty="0">
                 <a:solidFill>
                   <a:srgbClr val="1A355E"/>
                 </a:solidFill>
@@ -20130,6 +21417,7 @@
           <a:lstStyle/>
           <a:p>
             <a:pPr algn="ctr"/>
+            <a:endParaRPr/>
           </a:p>
         </p:txBody>
       </p:sp>
@@ -20191,7 +21479,7 @@
           <a:p>
             <a:pPr algn="l"/>
             <a:r>
-              <a:rPr sz="1600" b="1" i="0">
+              <a:rPr sz="1600" b="1" i="0" dirty="0">
                 <a:solidFill>
                   <a:srgbClr val="1A355E"/>
                 </a:solidFill>
@@ -20243,6 +21531,7 @@
           <a:lstStyle/>
           <a:p>
             <a:pPr algn="ctr"/>
+            <a:endParaRPr/>
           </a:p>
         </p:txBody>
       </p:sp>
@@ -20304,12 +21593,28 @@
           <a:p>
             <a:pPr algn="l"/>
             <a:r>
-              <a:rPr sz="1600" b="1" i="0">
+              <a:rPr sz="1600" b="1" i="0" dirty="0">
                 <a:solidFill>
                   <a:srgbClr val="1A355E"/>
                 </a:solidFill>
               </a:rPr>
-              <a:t>46종  |  100 kVp (75.3%)</a:t>
+              <a:t>46종  |  100 </a:t>
+            </a:r>
+            <a:r>
+              <a:rPr sz="1600" b="1" i="0" dirty="0" err="1">
+                <a:solidFill>
+                  <a:srgbClr val="1A355E"/>
+                </a:solidFill>
+              </a:rPr>
+              <a:t>kVp</a:t>
+            </a:r>
+            <a:r>
+              <a:rPr sz="1600" b="1" i="0" dirty="0">
+                <a:solidFill>
+                  <a:srgbClr val="1A355E"/>
+                </a:solidFill>
+              </a:rPr>
+              <a:t> (75.3%)</a:t>
             </a:r>
           </a:p>
         </p:txBody>
@@ -20356,6 +21661,7 @@
           <a:lstStyle/>
           <a:p>
             <a:pPr algn="ctr"/>
+            <a:endParaRPr/>
           </a:p>
         </p:txBody>
       </p:sp>
@@ -20417,7 +21723,7 @@
           <a:p>
             <a:pPr algn="l"/>
             <a:r>
-              <a:rPr sz="1600" b="1" i="0">
+              <a:rPr sz="1600" b="1" i="0" dirty="0">
                 <a:solidFill>
                   <a:srgbClr val="1A355E"/>
                 </a:solidFill>
@@ -20469,6 +21775,7 @@
           <a:lstStyle/>
           <a:p>
             <a:pPr algn="ctr"/>
+            <a:endParaRPr/>
           </a:p>
         </p:txBody>
       </p:sp>
@@ -20530,7 +21837,7 @@
           <a:p>
             <a:pPr algn="l"/>
             <a:r>
-              <a:rPr sz="1600" b="1" i="0">
+              <a:rPr sz="1600" b="1" i="0" dirty="0">
                 <a:solidFill>
                   <a:srgbClr val="1A355E"/>
                 </a:solidFill>
@@ -20593,13 +21900,55 @@
                 <a:tableStyleId>{5C22544A-7EE6-4342-B048-85BDC9FD1C3A}</a:tableStyleId>
               </a:tblPr>
               <a:tblGrid>
-                <a:gridCol w="979714"/>
-                <a:gridCol w="979714"/>
-                <a:gridCol w="979714"/>
-                <a:gridCol w="979714"/>
-                <a:gridCol w="979714"/>
-                <a:gridCol w="979714"/>
-                <a:gridCol w="979714"/>
+                <a:gridCol w="979714">
+                  <a:extLst>
+                    <a:ext uri="{9D8B030D-6E8A-4147-A177-3AD203B41FA5}">
+                      <a16:colId xmlns:a16="http://schemas.microsoft.com/office/drawing/2014/main" val="20000"/>
+                    </a:ext>
+                  </a:extLst>
+                </a:gridCol>
+                <a:gridCol w="979714">
+                  <a:extLst>
+                    <a:ext uri="{9D8B030D-6E8A-4147-A177-3AD203B41FA5}">
+                      <a16:colId xmlns:a16="http://schemas.microsoft.com/office/drawing/2014/main" val="20001"/>
+                    </a:ext>
+                  </a:extLst>
+                </a:gridCol>
+                <a:gridCol w="979714">
+                  <a:extLst>
+                    <a:ext uri="{9D8B030D-6E8A-4147-A177-3AD203B41FA5}">
+                      <a16:colId xmlns:a16="http://schemas.microsoft.com/office/drawing/2014/main" val="20002"/>
+                    </a:ext>
+                  </a:extLst>
+                </a:gridCol>
+                <a:gridCol w="979714">
+                  <a:extLst>
+                    <a:ext uri="{9D8B030D-6E8A-4147-A177-3AD203B41FA5}">
+                      <a16:colId xmlns:a16="http://schemas.microsoft.com/office/drawing/2014/main" val="20003"/>
+                    </a:ext>
+                  </a:extLst>
+                </a:gridCol>
+                <a:gridCol w="979714">
+                  <a:extLst>
+                    <a:ext uri="{9D8B030D-6E8A-4147-A177-3AD203B41FA5}">
+                      <a16:colId xmlns:a16="http://schemas.microsoft.com/office/drawing/2014/main" val="20004"/>
+                    </a:ext>
+                  </a:extLst>
+                </a:gridCol>
+                <a:gridCol w="979714">
+                  <a:extLst>
+                    <a:ext uri="{9D8B030D-6E8A-4147-A177-3AD203B41FA5}">
+                      <a16:colId xmlns:a16="http://schemas.microsoft.com/office/drawing/2014/main" val="20005"/>
+                    </a:ext>
+                  </a:extLst>
+                </a:gridCol>
+                <a:gridCol w="979714">
+                  <a:extLst>
+                    <a:ext uri="{9D8B030D-6E8A-4147-A177-3AD203B41FA5}">
+                      <a16:colId xmlns:a16="http://schemas.microsoft.com/office/drawing/2014/main" val="20006"/>
+                    </a:ext>
+                  </a:extLst>
+                </a:gridCol>
               </a:tblGrid>
               <a:tr h="411480">
                 <a:tc>
@@ -20609,7 +21958,7 @@
                     <a:p>
                       <a:pPr algn="ctr"/>
                       <a:r>
-                        <a:rPr b="1" sz="1100">
+                        <a:rPr sz="1100" b="1">
                           <a:solidFill>
                             <a:srgbClr val="FFFFFF"/>
                           </a:solidFill>
@@ -20631,7 +21980,7 @@
                     <a:p>
                       <a:pPr algn="ctr"/>
                       <a:r>
-                        <a:rPr b="1" sz="1100">
+                        <a:rPr sz="1100" b="1">
                           <a:solidFill>
                             <a:srgbClr val="FFFFFF"/>
                           </a:solidFill>
@@ -20653,7 +22002,7 @@
                     <a:p>
                       <a:pPr algn="ctr"/>
                       <a:r>
-                        <a:rPr b="1" sz="1100">
+                        <a:rPr sz="1100" b="1">
                           <a:solidFill>
                             <a:srgbClr val="FFFFFF"/>
                           </a:solidFill>
@@ -20675,7 +22024,7 @@
                     <a:p>
                       <a:pPr algn="ctr"/>
                       <a:r>
-                        <a:rPr b="1" sz="1100">
+                        <a:rPr sz="1100" b="1">
                           <a:solidFill>
                             <a:srgbClr val="FFFFFF"/>
                           </a:solidFill>
@@ -20697,7 +22046,7 @@
                     <a:p>
                       <a:pPr algn="ctr"/>
                       <a:r>
-                        <a:rPr b="1" sz="1100">
+                        <a:rPr sz="1100" b="1">
                           <a:solidFill>
                             <a:srgbClr val="FFFFFF"/>
                           </a:solidFill>
@@ -20719,7 +22068,7 @@
                     <a:p>
                       <a:pPr algn="ctr"/>
                       <a:r>
-                        <a:rPr b="1" sz="1100">
+                        <a:rPr sz="1100" b="1">
                           <a:solidFill>
                             <a:srgbClr val="FFFFFF"/>
                           </a:solidFill>
@@ -20741,7 +22090,7 @@
                     <a:p>
                       <a:pPr algn="ctr"/>
                       <a:r>
-                        <a:rPr b="1" sz="1100">
+                        <a:rPr sz="1100" b="1">
                           <a:solidFill>
                             <a:srgbClr val="FFFFFF"/>
                           </a:solidFill>
@@ -20756,6 +22105,11 @@
                     </a:solidFill>
                   </a:tcPr>
                 </a:tc>
+                <a:extLst>
+                  <a:ext uri="{0D108BD9-81ED-4DB2-BD59-A6C34878D82A}">
+                    <a16:rowId xmlns:a16="http://schemas.microsoft.com/office/drawing/2014/main" val="10000"/>
+                  </a:ext>
+                </a:extLst>
               </a:tr>
               <a:tr h="411480">
                 <a:tc>
@@ -20787,7 +22141,7 @@
                     <a:p>
                       <a:pPr algn="ctr"/>
                       <a:r>
-                        <a:rPr sz="1100">
+                        <a:rPr sz="1100" dirty="0">
                           <a:solidFill>
                             <a:srgbClr val="1A1A2E"/>
                           </a:solidFill>
@@ -20809,7 +22163,7 @@
                     <a:p>
                       <a:pPr algn="ctr"/>
                       <a:r>
-                        <a:rPr sz="1100">
+                        <a:rPr sz="1100" dirty="0">
                           <a:solidFill>
                             <a:srgbClr val="1A1A2E"/>
                           </a:solidFill>
@@ -20831,7 +22185,7 @@
                     <a:p>
                       <a:pPr algn="ctr"/>
                       <a:r>
-                        <a:rPr sz="1100">
+                        <a:rPr sz="1100" dirty="0">
                           <a:solidFill>
                             <a:srgbClr val="1A1A2E"/>
                           </a:solidFill>
@@ -20853,7 +22207,7 @@
                     <a:p>
                       <a:pPr algn="ctr"/>
                       <a:r>
-                        <a:rPr sz="1100">
+                        <a:rPr sz="1100" dirty="0">
                           <a:solidFill>
                             <a:srgbClr val="1A1A2E"/>
                           </a:solidFill>
@@ -20875,7 +22229,7 @@
                     <a:p>
                       <a:pPr algn="ctr"/>
                       <a:r>
-                        <a:rPr sz="1100">
+                        <a:rPr sz="1100" dirty="0">
                           <a:solidFill>
                             <a:srgbClr val="1A1A2E"/>
                           </a:solidFill>
@@ -20897,7 +22251,7 @@
                     <a:p>
                       <a:pPr algn="ctr"/>
                       <a:r>
-                        <a:rPr sz="1100">
+                        <a:rPr sz="1100" dirty="0">
                           <a:solidFill>
                             <a:srgbClr val="1A1A2E"/>
                           </a:solidFill>
@@ -20912,6 +22266,11 @@
                     </a:solidFill>
                   </a:tcPr>
                 </a:tc>
+                <a:extLst>
+                  <a:ext uri="{0D108BD9-81ED-4DB2-BD59-A6C34878D82A}">
+                    <a16:rowId xmlns:a16="http://schemas.microsoft.com/office/drawing/2014/main" val="10001"/>
+                  </a:ext>
+                </a:extLst>
               </a:tr>
               <a:tr h="411480">
                 <a:tc>
@@ -21053,7 +22412,7 @@
                     <a:p>
                       <a:pPr algn="ctr"/>
                       <a:r>
-                        <a:rPr sz="1100">
+                        <a:rPr sz="1100" dirty="0">
                           <a:solidFill>
                             <a:srgbClr val="1A1A2E"/>
                           </a:solidFill>
@@ -21068,6 +22427,11 @@
                     </a:solidFill>
                   </a:tcPr>
                 </a:tc>
+                <a:extLst>
+                  <a:ext uri="{0D108BD9-81ED-4DB2-BD59-A6C34878D82A}">
+                    <a16:rowId xmlns:a16="http://schemas.microsoft.com/office/drawing/2014/main" val="10002"/>
+                  </a:ext>
+                </a:extLst>
               </a:tr>
             </a:tbl>
           </a:graphicData>
@@ -21113,6 +22477,7 @@
           <a:lstStyle/>
           <a:p>
             <a:pPr algn="ctr"/>
+            <a:endParaRPr/>
           </a:p>
         </p:txBody>
       </p:sp>
@@ -21174,14 +22539,78 @@
           <a:p>
             <a:pPr algn="l"/>
             <a:r>
-              <a:rPr sz="1200" b="0" i="0">
+              <a:rPr sz="1200" b="0" i="0" dirty="0">
                 <a:solidFill>
                   <a:srgbClr val="FFFFFF"/>
                 </a:solidFill>
               </a:rPr>
-              <a:t>• 남성: TAMA &lt; 132 cm²  →  Low Muscle (1)
-• 여성: TAMA &lt; 95 cm²  →  Low Muscle (1)
-• 양성 비율: 317 / 1,269 = 25.0 %</a:t>
+              <a:t>• </a:t>
+            </a:r>
+            <a:r>
+              <a:rPr sz="1200" b="0" i="0" dirty="0" err="1">
+                <a:solidFill>
+                  <a:srgbClr val="FFFFFF"/>
+                </a:solidFill>
+              </a:rPr>
+              <a:t>남성</a:t>
+            </a:r>
+            <a:r>
+              <a:rPr sz="1200" b="0" i="0" dirty="0">
+                <a:solidFill>
+                  <a:srgbClr val="FFFFFF"/>
+                </a:solidFill>
+              </a:rPr>
+              <a:t>: TAMA &lt; 132 cm²  →  Low Muscle (1)
+• </a:t>
+            </a:r>
+            <a:r>
+              <a:rPr sz="1200" b="0" i="0" dirty="0" err="1">
+                <a:solidFill>
+                  <a:srgbClr val="FFFFFF"/>
+                </a:solidFill>
+              </a:rPr>
+              <a:t>여성</a:t>
+            </a:r>
+            <a:r>
+              <a:rPr sz="1200" b="0" i="0" dirty="0">
+                <a:solidFill>
+                  <a:srgbClr val="FFFFFF"/>
+                </a:solidFill>
+              </a:rPr>
+              <a:t>: TAMA &lt; 95 cm²  →  Low Muscle (1)
+• </a:t>
+            </a:r>
+            <a:r>
+              <a:rPr sz="1200" b="0" i="0" dirty="0" err="1">
+                <a:solidFill>
+                  <a:srgbClr val="FFFFFF"/>
+                </a:solidFill>
+              </a:rPr>
+              <a:t>양성</a:t>
+            </a:r>
+            <a:r>
+              <a:rPr sz="1200" b="0" i="0" dirty="0">
+                <a:solidFill>
+                  <a:srgbClr val="FFFFFF"/>
+                </a:solidFill>
+              </a:rPr>
+              <a:t> </a:t>
+            </a:r>
+            <a:r>
+              <a:rPr sz="1200" b="0" i="0" dirty="0" err="1">
+                <a:solidFill>
+                  <a:srgbClr val="FFFFFF"/>
+                </a:solidFill>
+              </a:rPr>
+              <a:t>비율</a:t>
+            </a:r>
+            <a:r>
+              <a:rPr sz="1200" b="0" i="0" dirty="0">
+                <a:solidFill>
+                  <a:srgbClr val="FFFFFF"/>
+                </a:solidFill>
+              </a:rPr>
+              <a:t>: 317 / 1,269 = 25.0 %</a:t>
             </a:r>
           </a:p>
         </p:txBody>
@@ -21311,7 +22740,7 @@
 </file>
 
 <file path=ppt/slides/slide5.xml><?xml version="1.0" encoding="utf-8"?>
-<p:sld xmlns:a="http://schemas.openxmlformats.org/drawingml/2006/main" xmlns:p="http://schemas.openxmlformats.org/presentationml/2006/main" xmlns:r="http://schemas.openxmlformats.org/officeDocument/2006/relationships">
+<p:sld xmlns:a="http://schemas.openxmlformats.org/drawingml/2006/main" xmlns:r="http://schemas.openxmlformats.org/officeDocument/2006/relationships" xmlns:p="http://schemas.openxmlformats.org/presentationml/2006/main">
   <p:cSld>
     <p:spTree>
       <p:nvGrpSpPr>
@@ -21319,7 +22748,14 @@
         <p:cNvGrpSpPr/>
         <p:nvPr/>
       </p:nvGrpSpPr>
-      <p:grpSpPr/>
+      <p:grpSpPr>
+        <a:xfrm>
+          <a:off x="0" y="0"/>
+          <a:ext cx="0" cy="0"/>
+          <a:chOff x="0" y="0"/>
+          <a:chExt cx="0" cy="0"/>
+        </a:xfrm>
+      </p:grpSpPr>
       <p:sp>
         <p:nvSpPr>
           <p:cNvPr id="2" name="Rectangle 1"/>
@@ -21360,6 +22796,7 @@
           <a:lstStyle/>
           <a:p>
             <a:pPr algn="ctr"/>
+            <a:endParaRPr/>
           </a:p>
         </p:txBody>
       </p:sp>
@@ -21403,6 +22840,7 @@
           <a:lstStyle/>
           <a:p>
             <a:pPr algn="ctr"/>
+            <a:endParaRPr/>
           </a:p>
         </p:txBody>
       </p:sp>
@@ -21548,6 +22986,7 @@
           <a:lstStyle/>
           <a:p>
             <a:pPr algn="ctr"/>
+            <a:endParaRPr/>
           </a:p>
         </p:txBody>
       </p:sp>
@@ -21627,6 +23066,7 @@
           <a:lstStyle/>
           <a:p>
             <a:pPr algn="ctr"/>
+            <a:endParaRPr/>
           </a:p>
         </p:txBody>
       </p:sp>
@@ -21738,6 +23178,7 @@
           <a:lstStyle/>
           <a:p>
             <a:pPr algn="ctr"/>
+            <a:endParaRPr/>
           </a:p>
         </p:txBody>
       </p:sp>
@@ -21817,6 +23258,7 @@
           <a:lstStyle/>
           <a:p>
             <a:pPr algn="ctr"/>
+            <a:endParaRPr/>
           </a:p>
         </p:txBody>
       </p:sp>
@@ -21928,6 +23370,7 @@
           <a:lstStyle/>
           <a:p>
             <a:pPr algn="ctr"/>
+            <a:endParaRPr/>
           </a:p>
         </p:txBody>
       </p:sp>
@@ -22007,6 +23450,7 @@
           <a:lstStyle/>
           <a:p>
             <a:pPr algn="ctr"/>
+            <a:endParaRPr/>
           </a:p>
         </p:txBody>
       </p:sp>
@@ -22118,6 +23562,7 @@
           <a:lstStyle/>
           <a:p>
             <a:pPr algn="ctr"/>
+            <a:endParaRPr/>
           </a:p>
         </p:txBody>
       </p:sp>
@@ -22197,6 +23642,7 @@
           <a:lstStyle/>
           <a:p>
             <a:pPr algn="ctr"/>
+            <a:endParaRPr/>
           </a:p>
         </p:txBody>
       </p:sp>
@@ -22308,6 +23754,7 @@
           <a:lstStyle/>
           <a:p>
             <a:pPr algn="ctr"/>
+            <a:endParaRPr/>
           </a:p>
         </p:txBody>
       </p:sp>
@@ -22387,6 +23834,7 @@
           <a:lstStyle/>
           <a:p>
             <a:pPr algn="ctr"/>
+            <a:endParaRPr/>
           </a:p>
         </p:txBody>
       </p:sp>
@@ -22464,6 +23912,7 @@
           <a:lstStyle/>
           <a:p>
             <a:pPr algn="ctr"/>
+            <a:endParaRPr/>
           </a:p>
         </p:txBody>
       </p:sp>
@@ -22510,7 +23959,7 @@
 </file>
 
 <file path=ppt/slides/slide6.xml><?xml version="1.0" encoding="utf-8"?>
-<p:sld xmlns:a="http://schemas.openxmlformats.org/drawingml/2006/main" xmlns:p="http://schemas.openxmlformats.org/presentationml/2006/main" xmlns:r="http://schemas.openxmlformats.org/officeDocument/2006/relationships">
+<p:sld xmlns:a="http://schemas.openxmlformats.org/drawingml/2006/main" xmlns:r="http://schemas.openxmlformats.org/officeDocument/2006/relationships" xmlns:p="http://schemas.openxmlformats.org/presentationml/2006/main">
   <p:cSld>
     <p:spTree>
       <p:nvGrpSpPr>
@@ -22518,7 +23967,14 @@
         <p:cNvGrpSpPr/>
         <p:nvPr/>
       </p:nvGrpSpPr>
-      <p:grpSpPr/>
+      <p:grpSpPr>
+        <a:xfrm>
+          <a:off x="0" y="0"/>
+          <a:ext cx="0" cy="0"/>
+          <a:chOff x="0" y="0"/>
+          <a:chExt cx="0" cy="0"/>
+        </a:xfrm>
+      </p:grpSpPr>
       <p:sp>
         <p:nvSpPr>
           <p:cNvPr id="2" name="Rectangle 1"/>
@@ -22559,6 +24015,7 @@
           <a:lstStyle/>
           <a:p>
             <a:pPr algn="ctr"/>
+            <a:endParaRPr/>
           </a:p>
         </p:txBody>
       </p:sp>
@@ -22602,6 +24059,7 @@
           <a:lstStyle/>
           <a:p>
             <a:pPr algn="ctr"/>
+            <a:endParaRPr/>
           </a:p>
         </p:txBody>
       </p:sp>
@@ -22715,6 +24173,7 @@
           <a:lstStyle/>
           <a:p>
             <a:pPr algn="ctr"/>
+            <a:endParaRPr/>
           </a:p>
         </p:txBody>
       </p:sp>
@@ -22828,6 +24287,7 @@
           <a:lstStyle/>
           <a:p>
             <a:pPr algn="ctr"/>
+            <a:endParaRPr/>
           </a:p>
         </p:txBody>
       </p:sp>
@@ -22941,6 +24401,7 @@
           <a:lstStyle/>
           <a:p>
             <a:pPr algn="ctr"/>
+            <a:endParaRPr/>
           </a:p>
         </p:txBody>
       </p:sp>
@@ -23054,6 +24515,7 @@
           <a:lstStyle/>
           <a:p>
             <a:pPr algn="ctr"/>
+            <a:endParaRPr/>
           </a:p>
         </p:txBody>
       </p:sp>
@@ -23250,7 +24712,7 @@
 </file>
 
 <file path=ppt/slides/slide7.xml><?xml version="1.0" encoding="utf-8"?>
-<p:sld xmlns:a="http://schemas.openxmlformats.org/drawingml/2006/main" xmlns:p="http://schemas.openxmlformats.org/presentationml/2006/main" xmlns:r="http://schemas.openxmlformats.org/officeDocument/2006/relationships">
+<p:sld xmlns:a="http://schemas.openxmlformats.org/drawingml/2006/main" xmlns:r="http://schemas.openxmlformats.org/officeDocument/2006/relationships" xmlns:p="http://schemas.openxmlformats.org/presentationml/2006/main">
   <p:cSld>
     <p:spTree>
       <p:nvGrpSpPr>
@@ -23258,7 +24720,14 @@
         <p:cNvGrpSpPr/>
         <p:nvPr/>
       </p:nvGrpSpPr>
-      <p:grpSpPr/>
+      <p:grpSpPr>
+        <a:xfrm>
+          <a:off x="0" y="0"/>
+          <a:ext cx="0" cy="0"/>
+          <a:chOff x="0" y="0"/>
+          <a:chExt cx="0" cy="0"/>
+        </a:xfrm>
+      </p:grpSpPr>
       <p:sp>
         <p:nvSpPr>
           <p:cNvPr id="2" name="Rectangle 1"/>
@@ -23299,6 +24768,7 @@
           <a:lstStyle/>
           <a:p>
             <a:pPr algn="ctr"/>
+            <a:endParaRPr/>
           </a:p>
         </p:txBody>
       </p:sp>
@@ -23342,6 +24812,7 @@
           <a:lstStyle/>
           <a:p>
             <a:pPr algn="ctr"/>
+            <a:endParaRPr/>
           </a:p>
         </p:txBody>
       </p:sp>
@@ -23457,7 +24928,7 @@
         </p:nvGraphicFramePr>
         <p:xfrm>
           <a:off x="320040" y="1508760"/>
-          <a:ext cx="11521440" cy="2377440"/>
+          <a:ext cx="11521440" cy="2725784"/>
         </p:xfrm>
         <a:graphic>
           <a:graphicData uri="http://schemas.openxmlformats.org/drawingml/2006/table">
@@ -23466,11 +24937,41 @@
                 <a:tableStyleId>{5C22544A-7EE6-4342-B048-85BDC9FD1C3A}</a:tableStyleId>
               </a:tblPr>
               <a:tblGrid>
-                <a:gridCol w="2304288"/>
-                <a:gridCol w="2304288"/>
-                <a:gridCol w="2304288"/>
-                <a:gridCol w="2304288"/>
-                <a:gridCol w="2304288"/>
+                <a:gridCol w="2304288">
+                  <a:extLst>
+                    <a:ext uri="{9D8B030D-6E8A-4147-A177-3AD203B41FA5}">
+                      <a16:colId xmlns:a16="http://schemas.microsoft.com/office/drawing/2014/main" val="20000"/>
+                    </a:ext>
+                  </a:extLst>
+                </a:gridCol>
+                <a:gridCol w="2304288">
+                  <a:extLst>
+                    <a:ext uri="{9D8B030D-6E8A-4147-A177-3AD203B41FA5}">
+                      <a16:colId xmlns:a16="http://schemas.microsoft.com/office/drawing/2014/main" val="20001"/>
+                    </a:ext>
+                  </a:extLst>
+                </a:gridCol>
+                <a:gridCol w="2304288">
+                  <a:extLst>
+                    <a:ext uri="{9D8B030D-6E8A-4147-A177-3AD203B41FA5}">
+                      <a16:colId xmlns:a16="http://schemas.microsoft.com/office/drawing/2014/main" val="20002"/>
+                    </a:ext>
+                  </a:extLst>
+                </a:gridCol>
+                <a:gridCol w="2304288">
+                  <a:extLst>
+                    <a:ext uri="{9D8B030D-6E8A-4147-A177-3AD203B41FA5}">
+                      <a16:colId xmlns:a16="http://schemas.microsoft.com/office/drawing/2014/main" val="20003"/>
+                    </a:ext>
+                  </a:extLst>
+                </a:gridCol>
+                <a:gridCol w="2304288">
+                  <a:extLst>
+                    <a:ext uri="{9D8B030D-6E8A-4147-A177-3AD203B41FA5}">
+                      <a16:colId xmlns:a16="http://schemas.microsoft.com/office/drawing/2014/main" val="20004"/>
+                    </a:ext>
+                  </a:extLst>
+                </a:gridCol>
               </a:tblGrid>
               <a:tr h="339634">
                 <a:tc>
@@ -23480,7 +24981,7 @@
                     <a:p>
                       <a:pPr algn="ctr"/>
                       <a:r>
-                        <a:rPr b="1" sz="1100">
+                        <a:rPr sz="1100" b="1">
                           <a:solidFill>
                             <a:srgbClr val="FFFFFF"/>
                           </a:solidFill>
@@ -23502,7 +25003,7 @@
                     <a:p>
                       <a:pPr algn="ctr"/>
                       <a:r>
-                        <a:rPr b="1" sz="1100">
+                        <a:rPr sz="1100" b="1">
                           <a:solidFill>
                             <a:srgbClr val="FFFFFF"/>
                           </a:solidFill>
@@ -23524,7 +25025,7 @@
                     <a:p>
                       <a:pPr algn="ctr"/>
                       <a:r>
-                        <a:rPr b="1" sz="1100">
+                        <a:rPr sz="1100" b="1">
                           <a:solidFill>
                             <a:srgbClr val="FFFFFF"/>
                           </a:solidFill>
@@ -23546,7 +25047,7 @@
                     <a:p>
                       <a:pPr algn="ctr"/>
                       <a:r>
-                        <a:rPr b="1" sz="1100">
+                        <a:rPr sz="1100" b="1">
                           <a:solidFill>
                             <a:srgbClr val="FFFFFF"/>
                           </a:solidFill>
@@ -23568,7 +25069,7 @@
                     <a:p>
                       <a:pPr algn="ctr"/>
                       <a:r>
-                        <a:rPr b="1" sz="1100">
+                        <a:rPr sz="1100" b="1">
                           <a:solidFill>
                             <a:srgbClr val="FFFFFF"/>
                           </a:solidFill>
@@ -23583,6 +25084,11 @@
                     </a:solidFill>
                   </a:tcPr>
                 </a:tc>
+                <a:extLst>
+                  <a:ext uri="{0D108BD9-81ED-4DB2-BD59-A6C34878D82A}">
+                    <a16:rowId xmlns:a16="http://schemas.microsoft.com/office/drawing/2014/main" val="10000"/>
+                  </a:ext>
+                </a:extLst>
               </a:tr>
               <a:tr h="339634">
                 <a:tc>
@@ -23592,12 +25098,56 @@
                     <a:p>
                       <a:pPr algn="ctr"/>
                       <a:r>
+                        <a:rPr sz="1100" dirty="0">
+                          <a:solidFill>
+                            <a:srgbClr val="1A1A2E"/>
+                          </a:solidFill>
+                        </a:rPr>
+                        <a:t>mean</a:t>
+                      </a:r>
+                    </a:p>
+                  </a:txBody>
+                  <a:tcPr>
+                    <a:solidFill>
+                      <a:srgbClr val="F2F2F2"/>
+                    </a:solidFill>
+                  </a:tcPr>
+                </a:tc>
+                <a:tc>
+                  <a:txBody>
+                    <a:bodyPr/>
+                    <a:lstStyle/>
+                    <a:p>
+                      <a:pPr algn="ctr"/>
+                      <a:r>
+                        <a:rPr sz="1100" dirty="0">
+                          <a:solidFill>
+                            <a:srgbClr val="1A1A2E"/>
+                          </a:solidFill>
+                        </a:rPr>
+                        <a:t>+0.234</a:t>
+                      </a:r>
+                    </a:p>
+                  </a:txBody>
+                  <a:tcPr>
+                    <a:solidFill>
+                      <a:srgbClr val="F2F2F2"/>
+                    </a:solidFill>
+                  </a:tcPr>
+                </a:tc>
+                <a:tc>
+                  <a:txBody>
+                    <a:bodyPr/>
+                    <a:lstStyle/>
+                    <a:p>
+                      <a:pPr algn="ctr"/>
+                      <a:r>
                         <a:rPr sz="1100">
                           <a:solidFill>
                             <a:srgbClr val="1A1A2E"/>
                           </a:solidFill>
                         </a:rPr>
-                        <a:t>mean</a:t>
+                        <a:t>AEC 평균값 → 체격 전반 반영 (amplitude 그룹 대표)</a:t>
                       </a:r>
                     </a:p>
                   </a:txBody>
@@ -23619,7 +25169,7 @@
                             <a:srgbClr val="1A1A2E"/>
                           </a:solidFill>
                         </a:rPr>
-                        <a:t>+0.234</a:t>
+                        <a:t>1.12</a:t>
                       </a:r>
                     </a:p>
                   </a:txBody>
@@ -23641,7 +25191,7 @@
                             <a:srgbClr val="1A1A2E"/>
                           </a:solidFill>
                         </a:rPr>
-                        <a:t>AEC 평균값 → 체격 전반 반영 (amplitude 그룹 대표)</a:t>
+                        <a:t>✔</a:t>
                       </a:r>
                     </a:p>
                   </a:txBody>
@@ -23651,50 +25201,11 @@
                     </a:solidFill>
                   </a:tcPr>
                 </a:tc>
-                <a:tc>
-                  <a:txBody>
-                    <a:bodyPr/>
-                    <a:lstStyle/>
-                    <a:p>
-                      <a:pPr algn="ctr"/>
-                      <a:r>
-                        <a:rPr sz="1100">
-                          <a:solidFill>
-                            <a:srgbClr val="1A1A2E"/>
-                          </a:solidFill>
-                        </a:rPr>
-                        <a:t>1.12</a:t>
-                      </a:r>
-                    </a:p>
-                  </a:txBody>
-                  <a:tcPr>
-                    <a:solidFill>
-                      <a:srgbClr val="F2F2F2"/>
-                    </a:solidFill>
-                  </a:tcPr>
-                </a:tc>
-                <a:tc>
-                  <a:txBody>
-                    <a:bodyPr/>
-                    <a:lstStyle/>
-                    <a:p>
-                      <a:pPr algn="ctr"/>
-                      <a:r>
-                        <a:rPr sz="1100">
-                          <a:solidFill>
-                            <a:srgbClr val="1A1A2E"/>
-                          </a:solidFill>
-                        </a:rPr>
-                        <a:t>✔</a:t>
-                      </a:r>
-                    </a:p>
-                  </a:txBody>
-                  <a:tcPr>
-                    <a:solidFill>
-                      <a:srgbClr val="F2F2F2"/>
-                    </a:solidFill>
-                  </a:tcPr>
-                </a:tc>
+                <a:extLst>
+                  <a:ext uri="{0D108BD9-81ED-4DB2-BD59-A6C34878D82A}">
+                    <a16:rowId xmlns:a16="http://schemas.microsoft.com/office/drawing/2014/main" val="10001"/>
+                  </a:ext>
+                </a:extLst>
               </a:tr>
               <a:tr h="339634">
                 <a:tc>
@@ -23726,12 +25237,109 @@
                     <a:p>
                       <a:pPr algn="ctr"/>
                       <a:r>
+                        <a:rPr sz="1100" dirty="0">
+                          <a:solidFill>
+                            <a:srgbClr val="1A1A2E"/>
+                          </a:solidFill>
+                        </a:rPr>
+                        <a:t>-0.126</a:t>
+                      </a:r>
+                    </a:p>
+                  </a:txBody>
+                  <a:tcPr>
+                    <a:solidFill>
+                      <a:srgbClr val="FFFFFF"/>
+                    </a:solidFill>
+                  </a:tcPr>
+                </a:tc>
+                <a:tc>
+                  <a:txBody>
+                    <a:bodyPr/>
+                    <a:lstStyle/>
+                    <a:p>
+                      <a:pPr algn="ctr"/>
+                      <a:r>
+                        <a:rPr sz="1100" dirty="0" err="1">
+                          <a:solidFill>
+                            <a:srgbClr val="1A1A2E"/>
+                          </a:solidFill>
+                        </a:rPr>
+                        <a:t>변동계수</a:t>
+                      </a:r>
+                      <a:r>
+                        <a:rPr sz="1100" dirty="0">
+                          <a:solidFill>
+                            <a:srgbClr val="1A1A2E"/>
+                          </a:solidFill>
+                        </a:rPr>
+                        <a:t>(std/mean) → </a:t>
+                      </a:r>
+                      <a:r>
+                        <a:rPr sz="1100" dirty="0" err="1">
+                          <a:solidFill>
+                            <a:srgbClr val="1A1A2E"/>
+                          </a:solidFill>
+                        </a:rPr>
+                        <a:t>체형</a:t>
+                      </a:r>
+                      <a:r>
+                        <a:rPr sz="1100" dirty="0">
+                          <a:solidFill>
+                            <a:srgbClr val="1A1A2E"/>
+                          </a:solidFill>
+                        </a:rPr>
+                        <a:t> </a:t>
+                      </a:r>
+                      <a:r>
+                        <a:rPr sz="1100" dirty="0" err="1">
+                          <a:solidFill>
+                            <a:srgbClr val="1A1A2E"/>
+                          </a:solidFill>
+                        </a:rPr>
+                        <a:t>불균일성</a:t>
+                      </a:r>
+                      <a:r>
+                        <a:rPr sz="1100" dirty="0">
+                          <a:solidFill>
+                            <a:srgbClr val="1A1A2E"/>
+                          </a:solidFill>
+                        </a:rPr>
+                        <a:t> </a:t>
+                      </a:r>
+                      <a:r>
+                        <a:rPr sz="1100" dirty="0" err="1">
+                          <a:solidFill>
+                            <a:srgbClr val="1A1A2E"/>
+                          </a:solidFill>
+                        </a:rPr>
+                        <a:t>반영</a:t>
+                      </a:r>
+                      <a:endParaRPr sz="1100" dirty="0">
+                        <a:solidFill>
+                          <a:srgbClr val="1A1A2E"/>
+                        </a:solidFill>
+                      </a:endParaRPr>
+                    </a:p>
+                  </a:txBody>
+                  <a:tcPr>
+                    <a:solidFill>
+                      <a:srgbClr val="FFFFFF"/>
+                    </a:solidFill>
+                  </a:tcPr>
+                </a:tc>
+                <a:tc>
+                  <a:txBody>
+                    <a:bodyPr/>
+                    <a:lstStyle/>
+                    <a:p>
+                      <a:pPr algn="ctr"/>
+                      <a:r>
                         <a:rPr sz="1100">
                           <a:solidFill>
                             <a:srgbClr val="1A1A2E"/>
                           </a:solidFill>
                         </a:rPr>
-                        <a:t>-0.126</a:t>
+                        <a:t>1.27</a:t>
                       </a:r>
                     </a:p>
                   </a:txBody>
@@ -23753,7 +25361,7 @@
                             <a:srgbClr val="1A1A2E"/>
                           </a:solidFill>
                         </a:rPr>
-                        <a:t>변동계수(std/mean) → 체형 불균일성 반영</a:t>
+                        <a:t>✔</a:t>
                       </a:r>
                     </a:p>
                   </a:txBody>
@@ -23763,50 +25371,11 @@
                     </a:solidFill>
                   </a:tcPr>
                 </a:tc>
-                <a:tc>
-                  <a:txBody>
-                    <a:bodyPr/>
-                    <a:lstStyle/>
-                    <a:p>
-                      <a:pPr algn="ctr"/>
-                      <a:r>
-                        <a:rPr sz="1100">
-                          <a:solidFill>
-                            <a:srgbClr val="1A1A2E"/>
-                          </a:solidFill>
-                        </a:rPr>
-                        <a:t>1.27</a:t>
-                      </a:r>
-                    </a:p>
-                  </a:txBody>
-                  <a:tcPr>
-                    <a:solidFill>
-                      <a:srgbClr val="FFFFFF"/>
-                    </a:solidFill>
-                  </a:tcPr>
-                </a:tc>
-                <a:tc>
-                  <a:txBody>
-                    <a:bodyPr/>
-                    <a:lstStyle/>
-                    <a:p>
-                      <a:pPr algn="ctr"/>
-                      <a:r>
-                        <a:rPr sz="1100">
-                          <a:solidFill>
-                            <a:srgbClr val="1A1A2E"/>
-                          </a:solidFill>
-                        </a:rPr>
-                        <a:t>✔</a:t>
-                      </a:r>
-                    </a:p>
-                  </a:txBody>
-                  <a:tcPr>
-                    <a:solidFill>
-                      <a:srgbClr val="FFFFFF"/>
-                    </a:solidFill>
-                  </a:tcPr>
-                </a:tc>
+                <a:extLst>
+                  <a:ext uri="{0D108BD9-81ED-4DB2-BD59-A6C34878D82A}">
+                    <a16:rowId xmlns:a16="http://schemas.microsoft.com/office/drawing/2014/main" val="10002"/>
+                  </a:ext>
+                </a:extLst>
               </a:tr>
               <a:tr h="339634">
                 <a:tc>
@@ -23860,12 +25429,133 @@
                     <a:p>
                       <a:pPr algn="ctr"/>
                       <a:r>
+                        <a:rPr sz="1100" dirty="0">
+                          <a:solidFill>
+                            <a:srgbClr val="1A1A2E"/>
+                          </a:solidFill>
+                        </a:rPr>
+                        <a:t>AEC </a:t>
+                      </a:r>
+                      <a:r>
+                        <a:rPr sz="1100" dirty="0" err="1">
+                          <a:solidFill>
+                            <a:srgbClr val="1A1A2E"/>
+                          </a:solidFill>
+                        </a:rPr>
+                        <a:t>곡선</a:t>
+                      </a:r>
+                      <a:r>
+                        <a:rPr sz="1100" dirty="0">
+                          <a:solidFill>
+                            <a:srgbClr val="1A1A2E"/>
+                          </a:solidFill>
+                        </a:rPr>
+                        <a:t> </a:t>
+                      </a:r>
+                      <a:r>
+                        <a:rPr sz="1100" dirty="0" err="1">
+                          <a:solidFill>
+                            <a:srgbClr val="1A1A2E"/>
+                          </a:solidFill>
+                        </a:rPr>
+                        <a:t>비대칭성</a:t>
+                      </a:r>
+                      <a:r>
+                        <a:rPr sz="1100" dirty="0">
+                          <a:solidFill>
+                            <a:srgbClr val="1A1A2E"/>
+                          </a:solidFill>
+                        </a:rPr>
+                        <a:t> → </a:t>
+                      </a:r>
+                      <a:r>
+                        <a:rPr sz="1100" dirty="0" err="1">
+                          <a:solidFill>
+                            <a:srgbClr val="1A1A2E"/>
+                          </a:solidFill>
+                        </a:rPr>
+                        <a:t>체형</a:t>
+                      </a:r>
+                      <a:r>
+                        <a:rPr sz="1100" dirty="0">
+                          <a:solidFill>
+                            <a:srgbClr val="1A1A2E"/>
+                          </a:solidFill>
+                        </a:rPr>
+                        <a:t> </a:t>
+                      </a:r>
+                      <a:r>
+                        <a:rPr sz="1100" dirty="0" err="1">
+                          <a:solidFill>
+                            <a:srgbClr val="1A1A2E"/>
+                          </a:solidFill>
+                        </a:rPr>
+                        <a:t>분포</a:t>
+                      </a:r>
+                      <a:r>
+                        <a:rPr sz="1100" dirty="0">
+                          <a:solidFill>
+                            <a:srgbClr val="1A1A2E"/>
+                          </a:solidFill>
+                        </a:rPr>
+                        <a:t> </a:t>
+                      </a:r>
+                      <a:r>
+                        <a:rPr sz="1100" dirty="0" err="1">
+                          <a:solidFill>
+                            <a:srgbClr val="1A1A2E"/>
+                          </a:solidFill>
+                        </a:rPr>
+                        <a:t>특성</a:t>
+                      </a:r>
+                      <a:endParaRPr sz="1100" dirty="0">
+                        <a:solidFill>
+                          <a:srgbClr val="1A1A2E"/>
+                        </a:solidFill>
+                      </a:endParaRPr>
+                    </a:p>
+                  </a:txBody>
+                  <a:tcPr>
+                    <a:solidFill>
+                      <a:srgbClr val="F2F2F2"/>
+                    </a:solidFill>
+                  </a:tcPr>
+                </a:tc>
+                <a:tc>
+                  <a:txBody>
+                    <a:bodyPr/>
+                    <a:lstStyle/>
+                    <a:p>
+                      <a:pPr algn="ctr"/>
+                      <a:r>
+                        <a:rPr sz="1100" dirty="0">
+                          <a:solidFill>
+                            <a:srgbClr val="1A1A2E"/>
+                          </a:solidFill>
+                        </a:rPr>
+                        <a:t>1.20</a:t>
+                      </a:r>
+                    </a:p>
+                  </a:txBody>
+                  <a:tcPr>
+                    <a:solidFill>
+                      <a:srgbClr val="F2F2F2"/>
+                    </a:solidFill>
+                  </a:tcPr>
+                </a:tc>
+                <a:tc>
+                  <a:txBody>
+                    <a:bodyPr/>
+                    <a:lstStyle/>
+                    <a:p>
+                      <a:pPr algn="ctr"/>
+                      <a:r>
                         <a:rPr sz="1100">
                           <a:solidFill>
                             <a:srgbClr val="1A1A2E"/>
                           </a:solidFill>
                         </a:rPr>
-                        <a:t>AEC 곡선 비대칭성 → 체형 분포 특성</a:t>
+                        <a:t>✔</a:t>
                       </a:r>
                     </a:p>
                   </a:txBody>
@@ -23875,50 +25565,11 @@
                     </a:solidFill>
                   </a:tcPr>
                 </a:tc>
-                <a:tc>
-                  <a:txBody>
-                    <a:bodyPr/>
-                    <a:lstStyle/>
-                    <a:p>
-                      <a:pPr algn="ctr"/>
-                      <a:r>
-                        <a:rPr sz="1100">
-                          <a:solidFill>
-                            <a:srgbClr val="1A1A2E"/>
-                          </a:solidFill>
-                        </a:rPr>
-                        <a:t>1.20</a:t>
-                      </a:r>
-                    </a:p>
-                  </a:txBody>
-                  <a:tcPr>
-                    <a:solidFill>
-                      <a:srgbClr val="F2F2F2"/>
-                    </a:solidFill>
-                  </a:tcPr>
-                </a:tc>
-                <a:tc>
-                  <a:txBody>
-                    <a:bodyPr/>
-                    <a:lstStyle/>
-                    <a:p>
-                      <a:pPr algn="ctr"/>
-                      <a:r>
-                        <a:rPr sz="1100">
-                          <a:solidFill>
-                            <a:srgbClr val="1A1A2E"/>
-                          </a:solidFill>
-                        </a:rPr>
-                        <a:t>✔</a:t>
-                      </a:r>
-                    </a:p>
-                  </a:txBody>
-                  <a:tcPr>
-                    <a:solidFill>
-                      <a:srgbClr val="F2F2F2"/>
-                    </a:solidFill>
-                  </a:tcPr>
-                </a:tc>
+                <a:extLst>
+                  <a:ext uri="{0D108BD9-81ED-4DB2-BD59-A6C34878D82A}">
+                    <a16:rowId xmlns:a16="http://schemas.microsoft.com/office/drawing/2014/main" val="10003"/>
+                  </a:ext>
+                </a:extLst>
               </a:tr>
               <a:tr h="339634">
                 <a:tc>
@@ -23994,7 +25645,7 @@
                     <a:p>
                       <a:pPr algn="ctr"/>
                       <a:r>
-                        <a:rPr sz="1100">
+                        <a:rPr sz="1100" dirty="0">
                           <a:solidFill>
                             <a:srgbClr val="1A1A2E"/>
                           </a:solidFill>
@@ -24016,7 +25667,7 @@
                     <a:p>
                       <a:pPr algn="ctr"/>
                       <a:r>
-                        <a:rPr sz="1100">
+                        <a:rPr sz="1100" dirty="0">
                           <a:solidFill>
                             <a:srgbClr val="1A1A2E"/>
                           </a:solidFill>
@@ -24031,6 +25682,11 @@
                     </a:solidFill>
                   </a:tcPr>
                 </a:tc>
+                <a:extLst>
+                  <a:ext uri="{0D108BD9-81ED-4DB2-BD59-A6C34878D82A}">
+                    <a16:rowId xmlns:a16="http://schemas.microsoft.com/office/drawing/2014/main" val="10004"/>
+                  </a:ext>
+                </a:extLst>
               </a:tr>
               <a:tr h="339634">
                 <a:tc>
@@ -24128,13 +25784,26 @@
                     <a:p>
                       <a:pPr algn="ctr"/>
                       <a:r>
-                        <a:rPr sz="1100">
-                          <a:solidFill>
-                            <a:srgbClr val="1A1A2E"/>
-                          </a:solidFill>
-                        </a:rPr>
-                        <a:t>✗ 제외</a:t>
-                      </a:r>
+                        <a:rPr sz="1100" dirty="0">
+                          <a:solidFill>
+                            <a:srgbClr val="1A1A2E"/>
+                          </a:solidFill>
+                        </a:rPr>
+                        <a:t>✗ </a:t>
+                      </a:r>
+                      <a:r>
+                        <a:rPr sz="1100" dirty="0" err="1">
+                          <a:solidFill>
+                            <a:srgbClr val="1A1A2E"/>
+                          </a:solidFill>
+                        </a:rPr>
+                        <a:t>제외</a:t>
+                      </a:r>
+                      <a:endParaRPr sz="1100" dirty="0">
+                        <a:solidFill>
+                          <a:srgbClr val="1A1A2E"/>
+                        </a:solidFill>
+                      </a:endParaRPr>
                     </a:p>
                   </a:txBody>
                   <a:tcPr>
@@ -24143,6 +25812,11 @@
                     </a:solidFill>
                   </a:tcPr>
                 </a:tc>
+                <a:extLst>
+                  <a:ext uri="{0D108BD9-81ED-4DB2-BD59-A6C34878D82A}">
+                    <a16:rowId xmlns:a16="http://schemas.microsoft.com/office/drawing/2014/main" val="10005"/>
+                  </a:ext>
+                </a:extLst>
               </a:tr>
               <a:tr h="339636">
                 <a:tc>
@@ -24240,13 +25914,26 @@
                     <a:p>
                       <a:pPr algn="ctr"/>
                       <a:r>
-                        <a:rPr sz="1100">
-                          <a:solidFill>
-                            <a:srgbClr val="1A1A2E"/>
-                          </a:solidFill>
-                        </a:rPr>
-                        <a:t>✗ 제외</a:t>
-                      </a:r>
+                        <a:rPr sz="1100" dirty="0">
+                          <a:solidFill>
+                            <a:srgbClr val="1A1A2E"/>
+                          </a:solidFill>
+                        </a:rPr>
+                        <a:t>✗ </a:t>
+                      </a:r>
+                      <a:r>
+                        <a:rPr sz="1100" dirty="0" err="1">
+                          <a:solidFill>
+                            <a:srgbClr val="1A1A2E"/>
+                          </a:solidFill>
+                        </a:rPr>
+                        <a:t>제외</a:t>
+                      </a:r>
+                      <a:endParaRPr sz="1100" dirty="0">
+                        <a:solidFill>
+                          <a:srgbClr val="1A1A2E"/>
+                        </a:solidFill>
+                      </a:endParaRPr>
                     </a:p>
                   </a:txBody>
                   <a:tcPr>
@@ -24255,6 +25942,11 @@
                     </a:solidFill>
                   </a:tcPr>
                 </a:tc>
+                <a:extLst>
+                  <a:ext uri="{0D108BD9-81ED-4DB2-BD59-A6C34878D82A}">
+                    <a16:rowId xmlns:a16="http://schemas.microsoft.com/office/drawing/2014/main" val="10006"/>
+                  </a:ext>
+                </a:extLst>
               </a:tr>
             </a:tbl>
           </a:graphicData>
@@ -24284,13 +25976,138 @@
           <a:p>
             <a:pPr algn="l"/>
             <a:r>
-              <a:rPr sz="1200" b="0" i="1">
+              <a:rPr sz="1200" b="0" i="1" dirty="0">
                 <a:solidFill>
                   <a:srgbClr val="FF7F27"/>
                 </a:solidFill>
               </a:rPr>
-              <a:t>⚠  p25·AUC_normalized: mean과 동일 amplitude 그룹(r≥0.88) → 다중공선성 제거 / mean을 대표로 포함</a:t>
-            </a:r>
+              <a:t>⚠  p25·AUC_normalized: </a:t>
+            </a:r>
+            <a:r>
+              <a:rPr sz="1200" b="0" i="1" dirty="0" err="1">
+                <a:solidFill>
+                  <a:srgbClr val="FF7F27"/>
+                </a:solidFill>
+              </a:rPr>
+              <a:t>mean과</a:t>
+            </a:r>
+            <a:r>
+              <a:rPr sz="1200" b="0" i="1" dirty="0">
+                <a:solidFill>
+                  <a:srgbClr val="FF7F27"/>
+                </a:solidFill>
+              </a:rPr>
+              <a:t> </a:t>
+            </a:r>
+            <a:r>
+              <a:rPr sz="1200" b="0" i="1" dirty="0" err="1">
+                <a:solidFill>
+                  <a:srgbClr val="FF7F27"/>
+                </a:solidFill>
+              </a:rPr>
+              <a:t>동일</a:t>
+            </a:r>
+            <a:r>
+              <a:rPr sz="1200" b="0" i="1" dirty="0">
+                <a:solidFill>
+                  <a:srgbClr val="FF7F27"/>
+                </a:solidFill>
+              </a:rPr>
+              <a:t> amplitude </a:t>
+            </a:r>
+            <a:r>
+              <a:rPr sz="1200" b="0" i="1" dirty="0" err="1">
+                <a:solidFill>
+                  <a:srgbClr val="FF7F27"/>
+                </a:solidFill>
+              </a:rPr>
+              <a:t>그룹</a:t>
+            </a:r>
+            <a:r>
+              <a:rPr sz="1200" b="0" i="1" dirty="0">
+                <a:solidFill>
+                  <a:srgbClr val="FF7F27"/>
+                </a:solidFill>
+              </a:rPr>
+              <a:t>(r≥0.88) → </a:t>
+            </a:r>
+            <a:r>
+              <a:rPr sz="1200" b="0" i="1" dirty="0" err="1">
+                <a:solidFill>
+                  <a:srgbClr val="FF7F27"/>
+                </a:solidFill>
+              </a:rPr>
+              <a:t>다중공선성</a:t>
+            </a:r>
+            <a:r>
+              <a:rPr sz="1200" b="0" i="1" dirty="0">
+                <a:solidFill>
+                  <a:srgbClr val="FF7F27"/>
+                </a:solidFill>
+              </a:rPr>
+              <a:t> </a:t>
+            </a:r>
+            <a:r>
+              <a:rPr sz="1200" b="0" i="1" dirty="0" err="1">
+                <a:solidFill>
+                  <a:srgbClr val="FF7F27"/>
+                </a:solidFill>
+              </a:rPr>
+              <a:t>제거</a:t>
+            </a:r>
+            <a:r>
+              <a:rPr sz="1200" b="0" i="1" dirty="0">
+                <a:solidFill>
+                  <a:srgbClr val="FF7F27"/>
+                </a:solidFill>
+              </a:rPr>
+              <a:t> / </a:t>
+            </a:r>
+            <a:r>
+              <a:rPr sz="1200" b="0" i="1" dirty="0" err="1">
+                <a:solidFill>
+                  <a:srgbClr val="FF7F27"/>
+                </a:solidFill>
+              </a:rPr>
+              <a:t>mean을</a:t>
+            </a:r>
+            <a:r>
+              <a:rPr sz="1200" b="0" i="1" dirty="0">
+                <a:solidFill>
+                  <a:srgbClr val="FF7F27"/>
+                </a:solidFill>
+              </a:rPr>
+              <a:t> </a:t>
+            </a:r>
+            <a:r>
+              <a:rPr sz="1200" b="0" i="1" dirty="0" err="1">
+                <a:solidFill>
+                  <a:srgbClr val="FF7F27"/>
+                </a:solidFill>
+              </a:rPr>
+              <a:t>대표로</a:t>
+            </a:r>
+            <a:r>
+              <a:rPr sz="1200" b="0" i="1" dirty="0">
+                <a:solidFill>
+                  <a:srgbClr val="FF7F27"/>
+                </a:solidFill>
+              </a:rPr>
+              <a:t> </a:t>
+            </a:r>
+            <a:r>
+              <a:rPr sz="1200" b="0" i="1" dirty="0" err="1">
+                <a:solidFill>
+                  <a:srgbClr val="FF7F27"/>
+                </a:solidFill>
+              </a:rPr>
+              <a:t>포함</a:t>
+            </a:r>
+            <a:endParaRPr sz="1200" b="0" i="1" dirty="0">
+              <a:solidFill>
+                <a:srgbClr val="FF7F27"/>
+              </a:solidFill>
+            </a:endParaRPr>
           </a:p>
         </p:txBody>
       </p:sp>
@@ -24419,7 +26236,7 @@
 </file>
 
 <file path=ppt/slides/slide8.xml><?xml version="1.0" encoding="utf-8"?>
-<p:sld xmlns:a="http://schemas.openxmlformats.org/drawingml/2006/main" xmlns:p="http://schemas.openxmlformats.org/presentationml/2006/main" xmlns:r="http://schemas.openxmlformats.org/officeDocument/2006/relationships">
+<p:sld xmlns:a="http://schemas.openxmlformats.org/drawingml/2006/main" xmlns:r="http://schemas.openxmlformats.org/officeDocument/2006/relationships" xmlns:p="http://schemas.openxmlformats.org/presentationml/2006/main">
   <p:cSld>
     <p:spTree>
       <p:nvGrpSpPr>
@@ -24427,7 +26244,14 @@
         <p:cNvGrpSpPr/>
         <p:nvPr/>
       </p:nvGrpSpPr>
-      <p:grpSpPr/>
+      <p:grpSpPr>
+        <a:xfrm>
+          <a:off x="0" y="0"/>
+          <a:ext cx="0" cy="0"/>
+          <a:chOff x="0" y="0"/>
+          <a:chExt cx="0" cy="0"/>
+        </a:xfrm>
+      </p:grpSpPr>
       <p:sp>
         <p:nvSpPr>
           <p:cNvPr id="2" name="Rectangle 1"/>
@@ -24468,6 +26292,7 @@
           <a:lstStyle/>
           <a:p>
             <a:pPr algn="ctr"/>
+            <a:endParaRPr/>
           </a:p>
         </p:txBody>
       </p:sp>
@@ -24511,6 +26336,7 @@
           <a:lstStyle/>
           <a:p>
             <a:pPr algn="ctr"/>
+            <a:endParaRPr/>
           </a:p>
         </p:txBody>
       </p:sp>
@@ -24680,6 +26506,7 @@
           <a:lstStyle/>
           <a:p>
             <a:pPr algn="ctr"/>
+            <a:endParaRPr/>
           </a:p>
         </p:txBody>
       </p:sp>
@@ -24797,6 +26624,7 @@
           <a:lstStyle/>
           <a:p>
             <a:pPr algn="ctr"/>
+            <a:endParaRPr/>
           </a:p>
         </p:txBody>
       </p:sp>
@@ -24858,17 +26686,233 @@
           <a:p>
             <a:pPr algn="l"/>
             <a:r>
-              <a:rPr sz="1100" b="0" i="0">
+              <a:rPr sz="1100" b="0" i="0" dirty="0" err="1">
                 <a:solidFill>
                   <a:srgbClr val="1A1A2E"/>
                 </a:solidFill>
               </a:rPr>
-              <a:t>제외된 amplitude 그룹:
-• p25: 제외 (amplitude 중복)
-• AUC_normalized: 제외 (amplitude 중복)
-• peak_max_height: 제외 (amplitude 중복)
-선택 대표: mean
-(VIF 확인 후 포함)</a:t>
+              <a:t>제외된</a:t>
+            </a:r>
+            <a:r>
+              <a:rPr sz="1100" b="0" i="0" dirty="0">
+                <a:solidFill>
+                  <a:srgbClr val="1A1A2E"/>
+                </a:solidFill>
+              </a:rPr>
+              <a:t> amplitude </a:t>
+            </a:r>
+            <a:r>
+              <a:rPr sz="1100" b="0" i="0" dirty="0" err="1">
+                <a:solidFill>
+                  <a:srgbClr val="1A1A2E"/>
+                </a:solidFill>
+              </a:rPr>
+              <a:t>그룹</a:t>
+            </a:r>
+            <a:r>
+              <a:rPr sz="1100" b="0" i="0" dirty="0">
+                <a:solidFill>
+                  <a:srgbClr val="1A1A2E"/>
+                </a:solidFill>
+              </a:rPr>
+              <a:t>:
+• p25: </a:t>
+            </a:r>
+            <a:r>
+              <a:rPr sz="1100" b="0" i="0" dirty="0" err="1">
+                <a:solidFill>
+                  <a:srgbClr val="1A1A2E"/>
+                </a:solidFill>
+              </a:rPr>
+              <a:t>제외</a:t>
+            </a:r>
+            <a:r>
+              <a:rPr sz="1100" b="0" i="0" dirty="0">
+                <a:solidFill>
+                  <a:srgbClr val="1A1A2E"/>
+                </a:solidFill>
+              </a:rPr>
+              <a:t> (amplitude </a:t>
+            </a:r>
+            <a:r>
+              <a:rPr sz="1100" b="0" i="0" dirty="0" err="1">
+                <a:solidFill>
+                  <a:srgbClr val="1A1A2E"/>
+                </a:solidFill>
+              </a:rPr>
+              <a:t>중복</a:t>
+            </a:r>
+            <a:r>
+              <a:rPr sz="1100" b="0" i="0" dirty="0">
+                <a:solidFill>
+                  <a:srgbClr val="1A1A2E"/>
+                </a:solidFill>
+              </a:rPr>
+              <a:t>)
+• </a:t>
+            </a:r>
+            <a:r>
+              <a:rPr sz="1100" b="0" i="0" dirty="0" err="1">
+                <a:solidFill>
+                  <a:srgbClr val="1A1A2E"/>
+                </a:solidFill>
+              </a:rPr>
+              <a:t>AUC_normalized</a:t>
+            </a:r>
+            <a:r>
+              <a:rPr sz="1100" b="0" i="0" dirty="0">
+                <a:solidFill>
+                  <a:srgbClr val="1A1A2E"/>
+                </a:solidFill>
+              </a:rPr>
+              <a:t>: </a:t>
+            </a:r>
+            <a:r>
+              <a:rPr sz="1100" b="0" i="0" dirty="0" err="1">
+                <a:solidFill>
+                  <a:srgbClr val="1A1A2E"/>
+                </a:solidFill>
+              </a:rPr>
+              <a:t>제외</a:t>
+            </a:r>
+            <a:r>
+              <a:rPr sz="1100" b="0" i="0" dirty="0">
+                <a:solidFill>
+                  <a:srgbClr val="1A1A2E"/>
+                </a:solidFill>
+              </a:rPr>
+              <a:t> (amplitude </a:t>
+            </a:r>
+            <a:r>
+              <a:rPr sz="1100" b="0" i="0" dirty="0" err="1">
+                <a:solidFill>
+                  <a:srgbClr val="1A1A2E"/>
+                </a:solidFill>
+              </a:rPr>
+              <a:t>중복</a:t>
+            </a:r>
+            <a:r>
+              <a:rPr sz="1100" b="0" i="0" dirty="0">
+                <a:solidFill>
+                  <a:srgbClr val="1A1A2E"/>
+                </a:solidFill>
+              </a:rPr>
+              <a:t>)
+• </a:t>
+            </a:r>
+            <a:r>
+              <a:rPr sz="1100" b="0" i="0" dirty="0" err="1">
+                <a:solidFill>
+                  <a:srgbClr val="1A1A2E"/>
+                </a:solidFill>
+              </a:rPr>
+              <a:t>peak_max_height</a:t>
+            </a:r>
+            <a:r>
+              <a:rPr sz="1100" b="0" i="0" dirty="0">
+                <a:solidFill>
+                  <a:srgbClr val="1A1A2E"/>
+                </a:solidFill>
+              </a:rPr>
+              <a:t>: </a:t>
+            </a:r>
+            <a:r>
+              <a:rPr sz="1100" b="0" i="0" dirty="0" err="1">
+                <a:solidFill>
+                  <a:srgbClr val="1A1A2E"/>
+                </a:solidFill>
+              </a:rPr>
+              <a:t>제외</a:t>
+            </a:r>
+            <a:r>
+              <a:rPr sz="1100" b="0" i="0" dirty="0">
+                <a:solidFill>
+                  <a:srgbClr val="1A1A2E"/>
+                </a:solidFill>
+              </a:rPr>
+              <a:t> (amplitude </a:t>
+            </a:r>
+            <a:r>
+              <a:rPr sz="1100" b="0" i="0" dirty="0" err="1">
+                <a:solidFill>
+                  <a:srgbClr val="1A1A2E"/>
+                </a:solidFill>
+              </a:rPr>
+              <a:t>중복</a:t>
+            </a:r>
+            <a:r>
+              <a:rPr sz="1100" b="0" i="0" dirty="0">
+                <a:solidFill>
+                  <a:srgbClr val="1A1A2E"/>
+                </a:solidFill>
+              </a:rPr>
+              <a:t>)
+</a:t>
+            </a:r>
+            <a:r>
+              <a:rPr sz="1100" b="0" i="0" dirty="0" err="1">
+                <a:solidFill>
+                  <a:srgbClr val="1A1A2E"/>
+                </a:solidFill>
+              </a:rPr>
+              <a:t>선택</a:t>
+            </a:r>
+            <a:r>
+              <a:rPr sz="1100" b="0" i="0" dirty="0">
+                <a:solidFill>
+                  <a:srgbClr val="1A1A2E"/>
+                </a:solidFill>
+              </a:rPr>
+              <a:t> </a:t>
+            </a:r>
+            <a:r>
+              <a:rPr sz="1100" b="0" i="0" dirty="0" err="1">
+                <a:solidFill>
+                  <a:srgbClr val="1A1A2E"/>
+                </a:solidFill>
+              </a:rPr>
+              <a:t>대표</a:t>
+            </a:r>
+            <a:r>
+              <a:rPr sz="1100" b="0" i="0" dirty="0">
+                <a:solidFill>
+                  <a:srgbClr val="1A1A2E"/>
+                </a:solidFill>
+              </a:rPr>
+              <a:t>: mean
+(VIF </a:t>
+            </a:r>
+            <a:r>
+              <a:rPr sz="1100" b="0" i="0" dirty="0" err="1">
+                <a:solidFill>
+                  <a:srgbClr val="1A1A2E"/>
+                </a:solidFill>
+              </a:rPr>
+              <a:t>확인</a:t>
+            </a:r>
+            <a:r>
+              <a:rPr sz="1100" b="0" i="0" dirty="0">
+                <a:solidFill>
+                  <a:srgbClr val="1A1A2E"/>
+                </a:solidFill>
+              </a:rPr>
+              <a:t> 후 </a:t>
+            </a:r>
+            <a:r>
+              <a:rPr sz="1100" b="0" i="0" dirty="0" err="1">
+                <a:solidFill>
+                  <a:srgbClr val="1A1A2E"/>
+                </a:solidFill>
+              </a:rPr>
+              <a:t>포함</a:t>
+            </a:r>
+            <a:r>
+              <a:rPr sz="1100" b="0" i="0" dirty="0">
+                <a:solidFill>
+                  <a:srgbClr val="1A1A2E"/>
+                </a:solidFill>
+              </a:rPr>
+              <a:t>)</a:t>
             </a:r>
           </a:p>
         </p:txBody>
@@ -24882,7 +26926,7 @@
 </file>
 
 <file path=ppt/slides/slide9.xml><?xml version="1.0" encoding="utf-8"?>
-<p:sld xmlns:a="http://schemas.openxmlformats.org/drawingml/2006/main" xmlns:p="http://schemas.openxmlformats.org/presentationml/2006/main" xmlns:r="http://schemas.openxmlformats.org/officeDocument/2006/relationships">
+<p:sld xmlns:a="http://schemas.openxmlformats.org/drawingml/2006/main" xmlns:r="http://schemas.openxmlformats.org/officeDocument/2006/relationships" xmlns:p="http://schemas.openxmlformats.org/presentationml/2006/main">
   <p:cSld>
     <p:spTree>
       <p:nvGrpSpPr>
@@ -24890,7 +26934,14 @@
         <p:cNvGrpSpPr/>
         <p:nvPr/>
       </p:nvGrpSpPr>
-      <p:grpSpPr/>
+      <p:grpSpPr>
+        <a:xfrm>
+          <a:off x="0" y="0"/>
+          <a:ext cx="0" cy="0"/>
+          <a:chOff x="0" y="0"/>
+          <a:chExt cx="0" cy="0"/>
+        </a:xfrm>
+      </p:grpSpPr>
       <p:sp>
         <p:nvSpPr>
           <p:cNvPr id="2" name="Rectangle 1"/>
@@ -24931,6 +26982,7 @@
           <a:lstStyle/>
           <a:p>
             <a:pPr algn="ctr"/>
+            <a:endParaRPr/>
           </a:p>
         </p:txBody>
       </p:sp>
@@ -24974,6 +27026,7 @@
           <a:lstStyle/>
           <a:p>
             <a:pPr algn="ctr"/>
+            <a:endParaRPr/>
           </a:p>
         </p:txBody>
       </p:sp>
@@ -25089,7 +27142,7 @@
         </p:nvGraphicFramePr>
         <p:xfrm>
           <a:off x="320040" y="1508760"/>
-          <a:ext cx="5486400" cy="1920240"/>
+          <a:ext cx="5486400" cy="1962912"/>
         </p:xfrm>
         <a:graphic>
           <a:graphicData uri="http://schemas.openxmlformats.org/drawingml/2006/table">
@@ -25098,8 +27151,20 @@
                 <a:tableStyleId>{5C22544A-7EE6-4342-B048-85BDC9FD1C3A}</a:tableStyleId>
               </a:tblPr>
               <a:tblGrid>
-                <a:gridCol w="2743200"/>
-                <a:gridCol w="2743200"/>
+                <a:gridCol w="2743200">
+                  <a:extLst>
+                    <a:ext uri="{9D8B030D-6E8A-4147-A177-3AD203B41FA5}">
+                      <a16:colId xmlns:a16="http://schemas.microsoft.com/office/drawing/2014/main" val="20000"/>
+                    </a:ext>
+                  </a:extLst>
+                </a:gridCol>
+                <a:gridCol w="2743200">
+                  <a:extLst>
+                    <a:ext uri="{9D8B030D-6E8A-4147-A177-3AD203B41FA5}">
+                      <a16:colId xmlns:a16="http://schemas.microsoft.com/office/drawing/2014/main" val="20001"/>
+                    </a:ext>
+                  </a:extLst>
+                </a:gridCol>
               </a:tblGrid>
               <a:tr h="384048">
                 <a:tc>
@@ -25109,7 +27174,7 @@
                     <a:p>
                       <a:pPr algn="ctr"/>
                       <a:r>
-                        <a:rPr b="1" sz="1100">
+                        <a:rPr sz="1100" b="1">
                           <a:solidFill>
                             <a:srgbClr val="FFFFFF"/>
                           </a:solidFill>
@@ -25131,7 +27196,7 @@
                     <a:p>
                       <a:pPr algn="ctr"/>
                       <a:r>
-                        <a:rPr b="1" sz="1100">
+                        <a:rPr sz="1100" b="1">
                           <a:solidFill>
                             <a:srgbClr val="FFFFFF"/>
                           </a:solidFill>
@@ -25146,6 +27211,11 @@
                     </a:solidFill>
                   </a:tcPr>
                 </a:tc>
+                <a:extLst>
+                  <a:ext uri="{0D108BD9-81ED-4DB2-BD59-A6C34878D82A}">
+                    <a16:rowId xmlns:a16="http://schemas.microsoft.com/office/drawing/2014/main" val="10000"/>
+                  </a:ext>
+                </a:extLst>
               </a:tr>
               <a:tr h="384048">
                 <a:tc>
@@ -25192,6 +27262,11 @@
                     </a:solidFill>
                   </a:tcPr>
                 </a:tc>
+                <a:extLst>
+                  <a:ext uri="{0D108BD9-81ED-4DB2-BD59-A6C34878D82A}">
+                    <a16:rowId xmlns:a16="http://schemas.microsoft.com/office/drawing/2014/main" val="10001"/>
+                  </a:ext>
+                </a:extLst>
               </a:tr>
               <a:tr h="384048">
                 <a:tc>
@@ -25238,6 +27313,11 @@
                     </a:solidFill>
                   </a:tcPr>
                 </a:tc>
+                <a:extLst>
+                  <a:ext uri="{0D108BD9-81ED-4DB2-BD59-A6C34878D82A}">
+                    <a16:rowId xmlns:a16="http://schemas.microsoft.com/office/drawing/2014/main" val="10002"/>
+                  </a:ext>
+                </a:extLst>
               </a:tr>
               <a:tr h="384048">
                 <a:tc>
@@ -25284,6 +27364,11 @@
                     </a:solidFill>
                   </a:tcPr>
                 </a:tc>
+                <a:extLst>
+                  <a:ext uri="{0D108BD9-81ED-4DB2-BD59-A6C34878D82A}">
+                    <a16:rowId xmlns:a16="http://schemas.microsoft.com/office/drawing/2014/main" val="10003"/>
+                  </a:ext>
+                </a:extLst>
               </a:tr>
               <a:tr h="384048">
                 <a:tc>
@@ -25330,6 +27415,11 @@
                     </a:solidFill>
                   </a:tcPr>
                 </a:tc>
+                <a:extLst>
+                  <a:ext uri="{0D108BD9-81ED-4DB2-BD59-A6C34878D82A}">
+                    <a16:rowId xmlns:a16="http://schemas.microsoft.com/office/drawing/2014/main" val="10004"/>
+                  </a:ext>
+                </a:extLst>
               </a:tr>
             </a:tbl>
           </a:graphicData>
@@ -25411,6 +27501,7 @@
           <a:lstStyle/>
           <a:p>
             <a:pPr algn="ctr"/>
+            <a:endParaRPr/>
           </a:p>
         </p:txBody>
       </p:sp>
@@ -25525,6 +27616,7 @@
           <a:lstStyle/>
           <a:p>
             <a:pPr algn="ctr"/>
+            <a:endParaRPr/>
           </a:p>
         </p:txBody>
       </p:sp>
@@ -25650,8 +27742,20 @@
                 <a:tableStyleId>{5C22544A-7EE6-4342-B048-85BDC9FD1C3A}</a:tableStyleId>
               </a:tblPr>
               <a:tblGrid>
-                <a:gridCol w="5760720"/>
-                <a:gridCol w="5760720"/>
+                <a:gridCol w="5760720">
+                  <a:extLst>
+                    <a:ext uri="{9D8B030D-6E8A-4147-A177-3AD203B41FA5}">
+                      <a16:colId xmlns:a16="http://schemas.microsoft.com/office/drawing/2014/main" val="20000"/>
+                    </a:ext>
+                  </a:extLst>
+                </a:gridCol>
+                <a:gridCol w="5760720">
+                  <a:extLst>
+                    <a:ext uri="{9D8B030D-6E8A-4147-A177-3AD203B41FA5}">
+                      <a16:colId xmlns:a16="http://schemas.microsoft.com/office/drawing/2014/main" val="20001"/>
+                    </a:ext>
+                  </a:extLst>
+                </a:gridCol>
               </a:tblGrid>
               <a:tr h="384048">
                 <a:tc>
@@ -25661,7 +27765,7 @@
                     <a:p>
                       <a:pPr algn="ctr"/>
                       <a:r>
-                        <a:rPr b="1" sz="1100">
+                        <a:rPr sz="1100" b="1">
                           <a:solidFill>
                             <a:srgbClr val="FFFFFF"/>
                           </a:solidFill>
@@ -25683,7 +27787,7 @@
                     <a:p>
                       <a:pPr algn="ctr"/>
                       <a:r>
-                        <a:rPr b="1" sz="1100">
+                        <a:rPr sz="1100" b="1">
                           <a:solidFill>
                             <a:srgbClr val="FFFFFF"/>
                           </a:solidFill>
@@ -25698,6 +27802,11 @@
                     </a:solidFill>
                   </a:tcPr>
                 </a:tc>
+                <a:extLst>
+                  <a:ext uri="{0D108BD9-81ED-4DB2-BD59-A6C34878D82A}">
+                    <a16:rowId xmlns:a16="http://schemas.microsoft.com/office/drawing/2014/main" val="10000"/>
+                  </a:ext>
+                </a:extLst>
               </a:tr>
               <a:tr h="384048">
                 <a:tc>
@@ -25744,6 +27853,11 @@
                     </a:solidFill>
                   </a:tcPr>
                 </a:tc>
+                <a:extLst>
+                  <a:ext uri="{0D108BD9-81ED-4DB2-BD59-A6C34878D82A}">
+                    <a16:rowId xmlns:a16="http://schemas.microsoft.com/office/drawing/2014/main" val="10001"/>
+                  </a:ext>
+                </a:extLst>
               </a:tr>
               <a:tr h="384048">
                 <a:tc>
@@ -25790,6 +27904,11 @@
                     </a:solidFill>
                   </a:tcPr>
                 </a:tc>
+                <a:extLst>
+                  <a:ext uri="{0D108BD9-81ED-4DB2-BD59-A6C34878D82A}">
+                    <a16:rowId xmlns:a16="http://schemas.microsoft.com/office/drawing/2014/main" val="10002"/>
+                  </a:ext>
+                </a:extLst>
               </a:tr>
               <a:tr h="384048">
                 <a:tc>
@@ -25836,6 +27955,11 @@
                     </a:solidFill>
                   </a:tcPr>
                 </a:tc>
+                <a:extLst>
+                  <a:ext uri="{0D108BD9-81ED-4DB2-BD59-A6C34878D82A}">
+                    <a16:rowId xmlns:a16="http://schemas.microsoft.com/office/drawing/2014/main" val="10003"/>
+                  </a:ext>
+                </a:extLst>
               </a:tr>
               <a:tr h="384048">
                 <a:tc>
@@ -25882,6 +28006,11 @@
                     </a:solidFill>
                   </a:tcPr>
                 </a:tc>
+                <a:extLst>
+                  <a:ext uri="{0D108BD9-81ED-4DB2-BD59-A6C34878D82A}">
+                    <a16:rowId xmlns:a16="http://schemas.microsoft.com/office/drawing/2014/main" val="10004"/>
+                  </a:ext>
+                </a:extLst>
               </a:tr>
             </a:tbl>
           </a:graphicData>

--- a/연구코드/aec/results/신촌_TAMA_연구보고서.pptx
+++ b/연구코드/aec/results/신촌_TAMA_연구보고서.pptx
@@ -5,29 +5,29 @@
     <p:sldMasterId id="2147483648" r:id="rId1"/>
   </p:sldMasterIdLst>
   <p:sldIdLst>
-    <p:sldId id="256" r:id="rId2"/>
-    <p:sldId id="257" r:id="rId3"/>
-    <p:sldId id="258" r:id="rId4"/>
-    <p:sldId id="259" r:id="rId5"/>
-    <p:sldId id="260" r:id="rId6"/>
-    <p:sldId id="261" r:id="rId7"/>
-    <p:sldId id="262" r:id="rId8"/>
-    <p:sldId id="263" r:id="rId9"/>
-    <p:sldId id="264" r:id="rId10"/>
-    <p:sldId id="265" r:id="rId11"/>
-    <p:sldId id="266" r:id="rId12"/>
-    <p:sldId id="267" r:id="rId13"/>
-    <p:sldId id="268" r:id="rId14"/>
-    <p:sldId id="269" r:id="rId15"/>
-    <p:sldId id="270" r:id="rId16"/>
-    <p:sldId id="271" r:id="rId17"/>
-    <p:sldId id="272" r:id="rId18"/>
-    <p:sldId id="273" r:id="rId19"/>
-    <p:sldId id="274" r:id="rId20"/>
-    <p:sldId id="275" r:id="rId21"/>
-    <p:sldId id="276" r:id="rId22"/>
+    <p:sldId id="256" r:id="rId7"/>
+    <p:sldId id="257" r:id="rId8"/>
+    <p:sldId id="258" r:id="rId9"/>
+    <p:sldId id="259" r:id="rId10"/>
+    <p:sldId id="260" r:id="rId11"/>
+    <p:sldId id="261" r:id="rId12"/>
+    <p:sldId id="262" r:id="rId13"/>
+    <p:sldId id="263" r:id="rId14"/>
+    <p:sldId id="264" r:id="rId15"/>
+    <p:sldId id="265" r:id="rId16"/>
+    <p:sldId id="266" r:id="rId17"/>
+    <p:sldId id="267" r:id="rId18"/>
+    <p:sldId id="268" r:id="rId19"/>
+    <p:sldId id="269" r:id="rId20"/>
+    <p:sldId id="270" r:id="rId21"/>
+    <p:sldId id="271" r:id="rId22"/>
+    <p:sldId id="272" r:id="rId23"/>
+    <p:sldId id="273" r:id="rId24"/>
+    <p:sldId id="274" r:id="rId25"/>
+    <p:sldId id="275" r:id="rId26"/>
+    <p:sldId id="276" r:id="rId27"/>
   </p:sldIdLst>
-  <p:sldSz cx="12188825" cy="6858000"/>
+  <p:sldSz cx="12188952" cy="6858000" type="screen4x3"/>
   <p:notesSz cx="6858000" cy="9144000"/>
   <p:defaultTextStyle>
     <a:defPPr>
@@ -124,91 +124,7 @@
       </a:defRPr>
     </a:lvl9pPr>
   </p:defaultTextStyle>
-  <p:extLst>
-    <p:ext uri="{EFAFB233-063F-42B5-8137-9DF3F51BA10A}">
-      <p15:sldGuideLst xmlns:p15="http://schemas.microsoft.com/office/powerpoint/2012/main">
-        <p15:guide id="1" orient="horz" pos="2160">
-          <p15:clr>
-            <a:srgbClr val="A4A3A4"/>
-          </p15:clr>
-        </p15:guide>
-        <p15:guide id="2" pos="2880">
-          <p15:clr>
-            <a:srgbClr val="A4A3A4"/>
-          </p15:clr>
-        </p15:guide>
-      </p15:sldGuideLst>
-    </p:ext>
-  </p:extLst>
 </p:presentation>
-</file>
-
-<file path=ppt/revisionInfo.xml><?xml version="1.0" encoding="utf-8"?>
-<p1510:revInfo xmlns:a="http://schemas.openxmlformats.org/drawingml/2006/main" xmlns:r="http://schemas.openxmlformats.org/officeDocument/2006/relationships" xmlns:p1510="http://schemas.microsoft.com/office/powerpoint/2015/10/main">
-  <p1510:revLst>
-    <p1510:client id="{58252FE0-1131-419E-A5FC-13DB22D3BB3D}" v="4" dt="2026-04-23T05:47:30.475"/>
-  </p1510:revLst>
-</p1510:revInfo>
-</file>
-
-<file path=ppt/changesInfos/changesInfo1.xml><?xml version="1.0" encoding="utf-8"?>
-<pc:chgInfo xmlns:a="http://schemas.openxmlformats.org/drawingml/2006/main" xmlns:r="http://schemas.openxmlformats.org/officeDocument/2006/relationships" xmlns:ac="http://schemas.microsoft.com/office/drawing/2013/main/command" xmlns:pc="http://schemas.microsoft.com/office/powerpoint/2013/main/command">
-  <pc:docChgLst>
-    <pc:chgData name="janghoon jun" userId="056a5883350c2f5e" providerId="LiveId" clId="{74AFAB52-6487-4651-9B79-2F181DBD8D0A}"/>
-    <pc:docChg chg="modSld">
-      <pc:chgData name="janghoon jun" userId="056a5883350c2f5e" providerId="LiveId" clId="{74AFAB52-6487-4651-9B79-2F181DBD8D0A}" dt="2026-04-23T05:47:29.594" v="3"/>
-      <pc:docMkLst>
-        <pc:docMk/>
-      </pc:docMkLst>
-      <pc:sldChg chg="modSp mod">
-        <pc:chgData name="janghoon jun" userId="056a5883350c2f5e" providerId="LiveId" clId="{74AFAB52-6487-4651-9B79-2F181DBD8D0A}" dt="2026-04-23T05:38:02.457" v="1" actId="1076"/>
-        <pc:sldMkLst>
-          <pc:docMk/>
-          <pc:sldMk cId="0" sldId="270"/>
-        </pc:sldMkLst>
-        <pc:spChg chg="mod">
-          <ac:chgData name="janghoon jun" userId="056a5883350c2f5e" providerId="LiveId" clId="{74AFAB52-6487-4651-9B79-2F181DBD8D0A}" dt="2026-04-23T05:38:02.457" v="1" actId="1076"/>
-          <ac:spMkLst>
-            <pc:docMk/>
-            <pc:sldMk cId="0" sldId="270"/>
-            <ac:spMk id="2" creationId="{00000000-0000-0000-0000-000000000000}"/>
-          </ac:spMkLst>
-        </pc:spChg>
-        <pc:picChg chg="mod">
-          <ac:chgData name="janghoon jun" userId="056a5883350c2f5e" providerId="LiveId" clId="{74AFAB52-6487-4651-9B79-2F181DBD8D0A}" dt="2026-04-23T05:38:01.602" v="0" actId="14100"/>
-          <ac:picMkLst>
-            <pc:docMk/>
-            <pc:sldMk cId="0" sldId="270"/>
-            <ac:picMk id="9" creationId="{00000000-0000-0000-0000-000000000000}"/>
-          </ac:picMkLst>
-        </pc:picChg>
-      </pc:sldChg>
-      <pc:sldChg chg="addSp modSp">
-        <pc:chgData name="janghoon jun" userId="056a5883350c2f5e" providerId="LiveId" clId="{74AFAB52-6487-4651-9B79-2F181DBD8D0A}" dt="2026-04-23T05:47:29.594" v="3"/>
-        <pc:sldMkLst>
-          <pc:docMk/>
-          <pc:sldMk cId="0" sldId="272"/>
-        </pc:sldMkLst>
-        <pc:picChg chg="add mod">
-          <ac:chgData name="janghoon jun" userId="056a5883350c2f5e" providerId="LiveId" clId="{74AFAB52-6487-4651-9B79-2F181DBD8D0A}" dt="2026-04-23T05:46:51.361" v="2"/>
-          <ac:picMkLst>
-            <pc:docMk/>
-            <pc:sldMk cId="0" sldId="272"/>
-            <ac:picMk id="12" creationId="{F30E5905-F65D-B701-7DBD-2BD811FF458C}"/>
-          </ac:picMkLst>
-        </pc:picChg>
-        <pc:picChg chg="add mod">
-          <ac:chgData name="janghoon jun" userId="056a5883350c2f5e" providerId="LiveId" clId="{74AFAB52-6487-4651-9B79-2F181DBD8D0A}" dt="2026-04-23T05:47:29.594" v="3"/>
-          <ac:picMkLst>
-            <pc:docMk/>
-            <pc:sldMk cId="0" sldId="272"/>
-            <ac:picMk id="13" creationId="{5939FC40-11A8-82FE-BA4F-149640085874}"/>
-          </ac:picMkLst>
-        </pc:picChg>
-      </pc:sldChg>
-    </pc:docChg>
-  </pc:docChgLst>
-</pc:chgInfo>
 </file>
 
 <file path=ppt/slideLayouts/slideLayout1.xml><?xml version="1.0" encoding="utf-8"?>
@@ -249,9 +165,10 @@
           <a:lstStyle/>
           <a:p>
             <a:r>
-              <a:rPr lang="en-US"/>
+              <a:rPr lang="en-US" smtClean="0"/>
               <a:t>Click to edit Master title style</a:t>
             </a:r>
+            <a:endParaRPr lang="en-US"/>
           </a:p>
         </p:txBody>
       </p:sp>
@@ -367,9 +284,10 @@
           </a:lstStyle>
           <a:p>
             <a:r>
-              <a:rPr lang="en-US"/>
+              <a:rPr lang="en-US" smtClean="0"/>
               <a:t>Click to edit Master subtitle style</a:t>
             </a:r>
+            <a:endParaRPr lang="en-US"/>
           </a:p>
         </p:txBody>
       </p:sp>
@@ -390,7 +308,7 @@
           <a:p>
             <a:fld id="{5BCAD085-E8A6-8845-BD4E-CB4CCA059FC4}" type="datetimeFigureOut">
               <a:rPr lang="en-US" smtClean="0"/>
-              <a:t>4/23/2026</a:t>
+              <a:t>1/27/13</a:t>
             </a:fld>
             <a:endParaRPr lang="en-US"/>
           </a:p>
@@ -484,9 +402,10 @@
           <a:lstStyle/>
           <a:p>
             <a:r>
-              <a:rPr lang="en-US"/>
+              <a:rPr lang="en-US" smtClean="0"/>
               <a:t>Click to edit Master title style</a:t>
             </a:r>
+            <a:endParaRPr lang="en-US"/>
           </a:p>
         </p:txBody>
       </p:sp>
@@ -507,37 +426,38 @@
           <a:p>
             <a:pPr lvl="0"/>
             <a:r>
-              <a:rPr lang="en-US"/>
+              <a:rPr lang="en-US" smtClean="0"/>
               <a:t>Click to edit Master text styles</a:t>
             </a:r>
           </a:p>
           <a:p>
             <a:pPr lvl="1"/>
             <a:r>
-              <a:rPr lang="en-US"/>
+              <a:rPr lang="en-US" smtClean="0"/>
               <a:t>Second level</a:t>
             </a:r>
           </a:p>
           <a:p>
             <a:pPr lvl="2"/>
             <a:r>
-              <a:rPr lang="en-US"/>
+              <a:rPr lang="en-US" smtClean="0"/>
               <a:t>Third level</a:t>
             </a:r>
           </a:p>
           <a:p>
             <a:pPr lvl="3"/>
             <a:r>
-              <a:rPr lang="en-US"/>
+              <a:rPr lang="en-US" smtClean="0"/>
               <a:t>Fourth level</a:t>
             </a:r>
           </a:p>
           <a:p>
             <a:pPr lvl="4"/>
             <a:r>
-              <a:rPr lang="en-US"/>
+              <a:rPr lang="en-US" smtClean="0"/>
               <a:t>Fifth level</a:t>
             </a:r>
+            <a:endParaRPr lang="en-US"/>
           </a:p>
         </p:txBody>
       </p:sp>
@@ -558,7 +478,7 @@
           <a:p>
             <a:fld id="{5BCAD085-E8A6-8845-BD4E-CB4CCA059FC4}" type="datetimeFigureOut">
               <a:rPr lang="en-US" smtClean="0"/>
-              <a:t>4/23/2026</a:t>
+              <a:t>1/27/13</a:t>
             </a:fld>
             <a:endParaRPr lang="en-US"/>
           </a:p>
@@ -657,9 +577,10 @@
           <a:lstStyle/>
           <a:p>
             <a:r>
-              <a:rPr lang="en-US"/>
+              <a:rPr lang="en-US" smtClean="0"/>
               <a:t>Click to edit Master title style</a:t>
             </a:r>
+            <a:endParaRPr lang="en-US"/>
           </a:p>
         </p:txBody>
       </p:sp>
@@ -685,37 +606,38 @@
           <a:p>
             <a:pPr lvl="0"/>
             <a:r>
-              <a:rPr lang="en-US"/>
+              <a:rPr lang="en-US" smtClean="0"/>
               <a:t>Click to edit Master text styles</a:t>
             </a:r>
           </a:p>
           <a:p>
             <a:pPr lvl="1"/>
             <a:r>
-              <a:rPr lang="en-US"/>
+              <a:rPr lang="en-US" smtClean="0"/>
               <a:t>Second level</a:t>
             </a:r>
           </a:p>
           <a:p>
             <a:pPr lvl="2"/>
             <a:r>
-              <a:rPr lang="en-US"/>
+              <a:rPr lang="en-US" smtClean="0"/>
               <a:t>Third level</a:t>
             </a:r>
           </a:p>
           <a:p>
             <a:pPr lvl="3"/>
             <a:r>
-              <a:rPr lang="en-US"/>
+              <a:rPr lang="en-US" smtClean="0"/>
               <a:t>Fourth level</a:t>
             </a:r>
           </a:p>
           <a:p>
             <a:pPr lvl="4"/>
             <a:r>
-              <a:rPr lang="en-US"/>
+              <a:rPr lang="en-US" smtClean="0"/>
               <a:t>Fifth level</a:t>
             </a:r>
+            <a:endParaRPr lang="en-US"/>
           </a:p>
         </p:txBody>
       </p:sp>
@@ -736,7 +658,7 @@
           <a:p>
             <a:fld id="{5BCAD085-E8A6-8845-BD4E-CB4CCA059FC4}" type="datetimeFigureOut">
               <a:rPr lang="en-US" smtClean="0"/>
-              <a:t>4/23/2026</a:t>
+              <a:t>1/27/13</a:t>
             </a:fld>
             <a:endParaRPr lang="en-US"/>
           </a:p>
@@ -830,9 +752,10 @@
           <a:lstStyle/>
           <a:p>
             <a:r>
-              <a:rPr lang="en-US"/>
+              <a:rPr lang="en-US" smtClean="0"/>
               <a:t>Click to edit Master title style</a:t>
             </a:r>
+            <a:endParaRPr lang="en-US"/>
           </a:p>
         </p:txBody>
       </p:sp>
@@ -853,37 +776,38 @@
           <a:p>
             <a:pPr lvl="0"/>
             <a:r>
-              <a:rPr lang="en-US"/>
+              <a:rPr lang="en-US" smtClean="0"/>
               <a:t>Click to edit Master text styles</a:t>
             </a:r>
           </a:p>
           <a:p>
             <a:pPr lvl="1"/>
             <a:r>
-              <a:rPr lang="en-US"/>
+              <a:rPr lang="en-US" smtClean="0"/>
               <a:t>Second level</a:t>
             </a:r>
           </a:p>
           <a:p>
             <a:pPr lvl="2"/>
             <a:r>
-              <a:rPr lang="en-US"/>
+              <a:rPr lang="en-US" smtClean="0"/>
               <a:t>Third level</a:t>
             </a:r>
           </a:p>
           <a:p>
             <a:pPr lvl="3"/>
             <a:r>
-              <a:rPr lang="en-US"/>
+              <a:rPr lang="en-US" smtClean="0"/>
               <a:t>Fourth level</a:t>
             </a:r>
           </a:p>
           <a:p>
             <a:pPr lvl="4"/>
             <a:r>
-              <a:rPr lang="en-US"/>
+              <a:rPr lang="en-US" smtClean="0"/>
               <a:t>Fifth level</a:t>
             </a:r>
+            <a:endParaRPr lang="en-US"/>
           </a:p>
         </p:txBody>
       </p:sp>
@@ -904,7 +828,7 @@
           <a:p>
             <a:fld id="{5BCAD085-E8A6-8845-BD4E-CB4CCA059FC4}" type="datetimeFigureOut">
               <a:rPr lang="en-US" smtClean="0"/>
-              <a:t>4/23/2026</a:t>
+              <a:t>1/27/13</a:t>
             </a:fld>
             <a:endParaRPr lang="en-US"/>
           </a:p>
@@ -1007,9 +931,10 @@
           </a:lstStyle>
           <a:p>
             <a:r>
-              <a:rPr lang="en-US"/>
+              <a:rPr lang="en-US" smtClean="0"/>
               <a:t>Click to edit Master title style</a:t>
             </a:r>
+            <a:endParaRPr lang="en-US"/>
           </a:p>
         </p:txBody>
       </p:sp>
@@ -1126,7 +1051,7 @@
           <a:p>
             <a:pPr lvl="0"/>
             <a:r>
-              <a:rPr lang="en-US"/>
+              <a:rPr lang="en-US" smtClean="0"/>
               <a:t>Click to edit Master text styles</a:t>
             </a:r>
           </a:p>
@@ -1149,7 +1074,7 @@
           <a:p>
             <a:fld id="{5BCAD085-E8A6-8845-BD4E-CB4CCA059FC4}" type="datetimeFigureOut">
               <a:rPr lang="en-US" smtClean="0"/>
-              <a:t>4/23/2026</a:t>
+              <a:t>1/27/13</a:t>
             </a:fld>
             <a:endParaRPr lang="en-US"/>
           </a:p>
@@ -1243,9 +1168,10 @@
           <a:lstStyle/>
           <a:p>
             <a:r>
-              <a:rPr lang="en-US"/>
+              <a:rPr lang="en-US" smtClean="0"/>
               <a:t>Click to edit Master title style</a:t>
             </a:r>
+            <a:endParaRPr lang="en-US"/>
           </a:p>
         </p:txBody>
       </p:sp>
@@ -1299,37 +1225,38 @@
           <a:p>
             <a:pPr lvl="0"/>
             <a:r>
-              <a:rPr lang="en-US"/>
+              <a:rPr lang="en-US" smtClean="0"/>
               <a:t>Click to edit Master text styles</a:t>
             </a:r>
           </a:p>
           <a:p>
             <a:pPr lvl="1"/>
             <a:r>
-              <a:rPr lang="en-US"/>
+              <a:rPr lang="en-US" smtClean="0"/>
               <a:t>Second level</a:t>
             </a:r>
           </a:p>
           <a:p>
             <a:pPr lvl="2"/>
             <a:r>
-              <a:rPr lang="en-US"/>
+              <a:rPr lang="en-US" smtClean="0"/>
               <a:t>Third level</a:t>
             </a:r>
           </a:p>
           <a:p>
             <a:pPr lvl="3"/>
             <a:r>
-              <a:rPr lang="en-US"/>
+              <a:rPr lang="en-US" smtClean="0"/>
               <a:t>Fourth level</a:t>
             </a:r>
           </a:p>
           <a:p>
             <a:pPr lvl="4"/>
             <a:r>
-              <a:rPr lang="en-US"/>
+              <a:rPr lang="en-US" smtClean="0"/>
               <a:t>Fifth level</a:t>
             </a:r>
+            <a:endParaRPr lang="en-US"/>
           </a:p>
         </p:txBody>
       </p:sp>
@@ -1383,37 +1310,38 @@
           <a:p>
             <a:pPr lvl="0"/>
             <a:r>
-              <a:rPr lang="en-US"/>
+              <a:rPr lang="en-US" smtClean="0"/>
               <a:t>Click to edit Master text styles</a:t>
             </a:r>
           </a:p>
           <a:p>
             <a:pPr lvl="1"/>
             <a:r>
-              <a:rPr lang="en-US"/>
+              <a:rPr lang="en-US" smtClean="0"/>
               <a:t>Second level</a:t>
             </a:r>
           </a:p>
           <a:p>
             <a:pPr lvl="2"/>
             <a:r>
-              <a:rPr lang="en-US"/>
+              <a:rPr lang="en-US" smtClean="0"/>
               <a:t>Third level</a:t>
             </a:r>
           </a:p>
           <a:p>
             <a:pPr lvl="3"/>
             <a:r>
-              <a:rPr lang="en-US"/>
+              <a:rPr lang="en-US" smtClean="0"/>
               <a:t>Fourth level</a:t>
             </a:r>
           </a:p>
           <a:p>
             <a:pPr lvl="4"/>
             <a:r>
-              <a:rPr lang="en-US"/>
+              <a:rPr lang="en-US" smtClean="0"/>
               <a:t>Fifth level</a:t>
             </a:r>
+            <a:endParaRPr lang="en-US"/>
           </a:p>
         </p:txBody>
       </p:sp>
@@ -1434,7 +1362,7 @@
           <a:p>
             <a:fld id="{5BCAD085-E8A6-8845-BD4E-CB4CCA059FC4}" type="datetimeFigureOut">
               <a:rPr lang="en-US" smtClean="0"/>
-              <a:t>4/23/2026</a:t>
+              <a:t>1/27/13</a:t>
             </a:fld>
             <a:endParaRPr lang="en-US"/>
           </a:p>
@@ -1532,9 +1460,10 @@
           </a:lstStyle>
           <a:p>
             <a:r>
-              <a:rPr lang="en-US"/>
+              <a:rPr lang="en-US" smtClean="0"/>
               <a:t>Click to edit Master title style</a:t>
             </a:r>
+            <a:endParaRPr lang="en-US"/>
           </a:p>
         </p:txBody>
       </p:sp>
@@ -1597,7 +1526,7 @@
           <a:p>
             <a:pPr lvl="0"/>
             <a:r>
-              <a:rPr lang="en-US"/>
+              <a:rPr lang="en-US" smtClean="0"/>
               <a:t>Click to edit Master text styles</a:t>
             </a:r>
           </a:p>
@@ -1653,37 +1582,38 @@
           <a:p>
             <a:pPr lvl="0"/>
             <a:r>
-              <a:rPr lang="en-US"/>
+              <a:rPr lang="en-US" smtClean="0"/>
               <a:t>Click to edit Master text styles</a:t>
             </a:r>
           </a:p>
           <a:p>
             <a:pPr lvl="1"/>
             <a:r>
-              <a:rPr lang="en-US"/>
+              <a:rPr lang="en-US" smtClean="0"/>
               <a:t>Second level</a:t>
             </a:r>
           </a:p>
           <a:p>
             <a:pPr lvl="2"/>
             <a:r>
-              <a:rPr lang="en-US"/>
+              <a:rPr lang="en-US" smtClean="0"/>
               <a:t>Third level</a:t>
             </a:r>
           </a:p>
           <a:p>
             <a:pPr lvl="3"/>
             <a:r>
-              <a:rPr lang="en-US"/>
+              <a:rPr lang="en-US" smtClean="0"/>
               <a:t>Fourth level</a:t>
             </a:r>
           </a:p>
           <a:p>
             <a:pPr lvl="4"/>
             <a:r>
-              <a:rPr lang="en-US"/>
+              <a:rPr lang="en-US" smtClean="0"/>
               <a:t>Fifth level</a:t>
             </a:r>
+            <a:endParaRPr lang="en-US"/>
           </a:p>
         </p:txBody>
       </p:sp>
@@ -1746,7 +1676,7 @@
           <a:p>
             <a:pPr lvl="0"/>
             <a:r>
-              <a:rPr lang="en-US"/>
+              <a:rPr lang="en-US" smtClean="0"/>
               <a:t>Click to edit Master text styles</a:t>
             </a:r>
           </a:p>
@@ -1802,37 +1732,38 @@
           <a:p>
             <a:pPr lvl="0"/>
             <a:r>
-              <a:rPr lang="en-US"/>
+              <a:rPr lang="en-US" smtClean="0"/>
               <a:t>Click to edit Master text styles</a:t>
             </a:r>
           </a:p>
           <a:p>
             <a:pPr lvl="1"/>
             <a:r>
-              <a:rPr lang="en-US"/>
+              <a:rPr lang="en-US" smtClean="0"/>
               <a:t>Second level</a:t>
             </a:r>
           </a:p>
           <a:p>
             <a:pPr lvl="2"/>
             <a:r>
-              <a:rPr lang="en-US"/>
+              <a:rPr lang="en-US" smtClean="0"/>
               <a:t>Third level</a:t>
             </a:r>
           </a:p>
           <a:p>
             <a:pPr lvl="3"/>
             <a:r>
-              <a:rPr lang="en-US"/>
+              <a:rPr lang="en-US" smtClean="0"/>
               <a:t>Fourth level</a:t>
             </a:r>
           </a:p>
           <a:p>
             <a:pPr lvl="4"/>
             <a:r>
-              <a:rPr lang="en-US"/>
+              <a:rPr lang="en-US" smtClean="0"/>
               <a:t>Fifth level</a:t>
             </a:r>
+            <a:endParaRPr lang="en-US"/>
           </a:p>
         </p:txBody>
       </p:sp>
@@ -1853,7 +1784,7 @@
           <a:p>
             <a:fld id="{5BCAD085-E8A6-8845-BD4E-CB4CCA059FC4}" type="datetimeFigureOut">
               <a:rPr lang="en-US" smtClean="0"/>
-              <a:t>4/23/2026</a:t>
+              <a:t>1/27/13</a:t>
             </a:fld>
             <a:endParaRPr lang="en-US"/>
           </a:p>
@@ -1947,9 +1878,10 @@
           <a:lstStyle/>
           <a:p>
             <a:r>
-              <a:rPr lang="en-US"/>
+              <a:rPr lang="en-US" smtClean="0"/>
               <a:t>Click to edit Master title style</a:t>
             </a:r>
+            <a:endParaRPr lang="en-US"/>
           </a:p>
         </p:txBody>
       </p:sp>
@@ -1970,7 +1902,7 @@
           <a:p>
             <a:fld id="{5BCAD085-E8A6-8845-BD4E-CB4CCA059FC4}" type="datetimeFigureOut">
               <a:rPr lang="en-US" smtClean="0"/>
-              <a:t>4/23/2026</a:t>
+              <a:t>1/27/13</a:t>
             </a:fld>
             <a:endParaRPr lang="en-US"/>
           </a:p>
@@ -2065,7 +1997,7 @@
           <a:p>
             <a:fld id="{5BCAD085-E8A6-8845-BD4E-CB4CCA059FC4}" type="datetimeFigureOut">
               <a:rPr lang="en-US" smtClean="0"/>
-              <a:t>4/23/2026</a:t>
+              <a:t>1/27/13</a:t>
             </a:fld>
             <a:endParaRPr lang="en-US"/>
           </a:p>
@@ -2168,9 +2100,10 @@
           </a:lstStyle>
           <a:p>
             <a:r>
-              <a:rPr lang="en-US"/>
+              <a:rPr lang="en-US" smtClean="0"/>
               <a:t>Click to edit Master title style</a:t>
             </a:r>
+            <a:endParaRPr lang="en-US"/>
           </a:p>
         </p:txBody>
       </p:sp>
@@ -2224,37 +2157,38 @@
           <a:p>
             <a:pPr lvl="0"/>
             <a:r>
-              <a:rPr lang="en-US"/>
+              <a:rPr lang="en-US" smtClean="0"/>
               <a:t>Click to edit Master text styles</a:t>
             </a:r>
           </a:p>
           <a:p>
             <a:pPr lvl="1"/>
             <a:r>
-              <a:rPr lang="en-US"/>
+              <a:rPr lang="en-US" smtClean="0"/>
               <a:t>Second level</a:t>
             </a:r>
           </a:p>
           <a:p>
             <a:pPr lvl="2"/>
             <a:r>
-              <a:rPr lang="en-US"/>
+              <a:rPr lang="en-US" smtClean="0"/>
               <a:t>Third level</a:t>
             </a:r>
           </a:p>
           <a:p>
             <a:pPr lvl="3"/>
             <a:r>
-              <a:rPr lang="en-US"/>
+              <a:rPr lang="en-US" smtClean="0"/>
               <a:t>Fourth level</a:t>
             </a:r>
           </a:p>
           <a:p>
             <a:pPr lvl="4"/>
             <a:r>
-              <a:rPr lang="en-US"/>
+              <a:rPr lang="en-US" smtClean="0"/>
               <a:t>Fifth level</a:t>
             </a:r>
+            <a:endParaRPr lang="en-US"/>
           </a:p>
         </p:txBody>
       </p:sp>
@@ -2317,7 +2251,7 @@
           <a:p>
             <a:pPr lvl="0"/>
             <a:r>
-              <a:rPr lang="en-US"/>
+              <a:rPr lang="en-US" smtClean="0"/>
               <a:t>Click to edit Master text styles</a:t>
             </a:r>
           </a:p>
@@ -2340,7 +2274,7 @@
           <a:p>
             <a:fld id="{5BCAD085-E8A6-8845-BD4E-CB4CCA059FC4}" type="datetimeFigureOut">
               <a:rPr lang="en-US" smtClean="0"/>
-              <a:t>4/23/2026</a:t>
+              <a:t>1/27/13</a:t>
             </a:fld>
             <a:endParaRPr lang="en-US"/>
           </a:p>
@@ -2443,9 +2377,10 @@
           </a:lstStyle>
           <a:p>
             <a:r>
-              <a:rPr lang="en-US"/>
+              <a:rPr lang="en-US" smtClean="0"/>
               <a:t>Click to edit Master title style</a:t>
             </a:r>
+            <a:endParaRPr lang="en-US"/>
           </a:p>
         </p:txBody>
       </p:sp>
@@ -2569,7 +2504,7 @@
           <a:p>
             <a:pPr lvl="0"/>
             <a:r>
-              <a:rPr lang="en-US"/>
+              <a:rPr lang="en-US" smtClean="0"/>
               <a:t>Click to edit Master text styles</a:t>
             </a:r>
           </a:p>
@@ -2592,7 +2527,7 @@
           <a:p>
             <a:fld id="{5BCAD085-E8A6-8845-BD4E-CB4CCA059FC4}" type="datetimeFigureOut">
               <a:rPr lang="en-US" smtClean="0"/>
-              <a:t>4/23/2026</a:t>
+              <a:t>1/27/13</a:t>
             </a:fld>
             <a:endParaRPr lang="en-US"/>
           </a:p>
@@ -2701,9 +2636,10 @@
           <a:lstStyle/>
           <a:p>
             <a:r>
-              <a:rPr lang="en-US"/>
+              <a:rPr lang="en-US" smtClean="0"/>
               <a:t>Click to edit Master title style</a:t>
             </a:r>
+            <a:endParaRPr lang="en-US"/>
           </a:p>
         </p:txBody>
       </p:sp>
@@ -2734,37 +2670,38 @@
           <a:p>
             <a:pPr lvl="0"/>
             <a:r>
-              <a:rPr lang="en-US"/>
+              <a:rPr lang="en-US" smtClean="0"/>
               <a:t>Click to edit Master text styles</a:t>
             </a:r>
           </a:p>
           <a:p>
             <a:pPr lvl="1"/>
             <a:r>
-              <a:rPr lang="en-US"/>
+              <a:rPr lang="en-US" smtClean="0"/>
               <a:t>Second level</a:t>
             </a:r>
           </a:p>
           <a:p>
             <a:pPr lvl="2"/>
             <a:r>
-              <a:rPr lang="en-US"/>
+              <a:rPr lang="en-US" smtClean="0"/>
               <a:t>Third level</a:t>
             </a:r>
           </a:p>
           <a:p>
             <a:pPr lvl="3"/>
             <a:r>
-              <a:rPr lang="en-US"/>
+              <a:rPr lang="en-US" smtClean="0"/>
               <a:t>Fourth level</a:t>
             </a:r>
           </a:p>
           <a:p>
             <a:pPr lvl="4"/>
             <a:r>
-              <a:rPr lang="en-US"/>
+              <a:rPr lang="en-US" smtClean="0"/>
               <a:t>Fifth level</a:t>
             </a:r>
+            <a:endParaRPr lang="en-US"/>
           </a:p>
         </p:txBody>
       </p:sp>
@@ -2803,7 +2740,7 @@
           <a:p>
             <a:fld id="{5BCAD085-E8A6-8845-BD4E-CB4CCA059FC4}" type="datetimeFigureOut">
               <a:rPr lang="en-US" smtClean="0"/>
-              <a:t>4/23/2026</a:t>
+              <a:t>1/27/13</a:t>
             </a:fld>
             <a:endParaRPr lang="en-US"/>
           </a:p>
@@ -3162,7 +3099,7 @@
 </file>
 
 <file path=ppt/slides/slide1.xml><?xml version="1.0" encoding="utf-8"?>
-<p:sld xmlns:a="http://schemas.openxmlformats.org/drawingml/2006/main" xmlns:r="http://schemas.openxmlformats.org/officeDocument/2006/relationships" xmlns:p="http://schemas.openxmlformats.org/presentationml/2006/main">
+<p:sld xmlns:a="http://schemas.openxmlformats.org/drawingml/2006/main" xmlns:p="http://schemas.openxmlformats.org/presentationml/2006/main" xmlns:r="http://schemas.openxmlformats.org/officeDocument/2006/relationships">
   <p:cSld>
     <p:spTree>
       <p:nvGrpSpPr>
@@ -3170,14 +3107,7 @@
         <p:cNvGrpSpPr/>
         <p:nvPr/>
       </p:nvGrpSpPr>
-      <p:grpSpPr>
-        <a:xfrm>
-          <a:off x="0" y="0"/>
-          <a:ext cx="0" cy="0"/>
-          <a:chOff x="0" y="0"/>
-          <a:chExt cx="0" cy="0"/>
-        </a:xfrm>
-      </p:grpSpPr>
+      <p:grpSpPr/>
       <p:sp>
         <p:nvSpPr>
           <p:cNvPr id="2" name="Rectangle 1"/>
@@ -3218,7 +3148,6 @@
           <a:lstStyle/>
           <a:p>
             <a:pPr algn="ctr"/>
-            <a:endParaRPr/>
           </a:p>
         </p:txBody>
       </p:sp>
@@ -3262,7 +3191,6 @@
           <a:lstStyle/>
           <a:p>
             <a:pPr algn="ctr"/>
-            <a:endParaRPr/>
           </a:p>
         </p:txBody>
       </p:sp>
@@ -3306,7 +3234,6 @@
           <a:lstStyle/>
           <a:p>
             <a:pPr algn="ctr"/>
-            <a:endParaRPr/>
           </a:p>
         </p:txBody>
       </p:sp>
@@ -3457,7 +3384,7 @@
 </file>
 
 <file path=ppt/slides/slide10.xml><?xml version="1.0" encoding="utf-8"?>
-<p:sld xmlns:a="http://schemas.openxmlformats.org/drawingml/2006/main" xmlns:r="http://schemas.openxmlformats.org/officeDocument/2006/relationships" xmlns:p="http://schemas.openxmlformats.org/presentationml/2006/main">
+<p:sld xmlns:a="http://schemas.openxmlformats.org/drawingml/2006/main" xmlns:p="http://schemas.openxmlformats.org/presentationml/2006/main" xmlns:r="http://schemas.openxmlformats.org/officeDocument/2006/relationships">
   <p:cSld>
     <p:spTree>
       <p:nvGrpSpPr>
@@ -3465,14 +3392,7 @@
         <p:cNvGrpSpPr/>
         <p:nvPr/>
       </p:nvGrpSpPr>
-      <p:grpSpPr>
-        <a:xfrm>
-          <a:off x="0" y="0"/>
-          <a:ext cx="0" cy="0"/>
-          <a:chOff x="0" y="0"/>
-          <a:chExt cx="0" cy="0"/>
-        </a:xfrm>
-      </p:grpSpPr>
+      <p:grpSpPr/>
       <p:sp>
         <p:nvSpPr>
           <p:cNvPr id="2" name="Rectangle 1"/>
@@ -3513,7 +3433,6 @@
           <a:lstStyle/>
           <a:p>
             <a:pPr algn="ctr"/>
-            <a:endParaRPr/>
           </a:p>
         </p:txBody>
       </p:sp>
@@ -3557,7 +3476,6 @@
           <a:lstStyle/>
           <a:p>
             <a:pPr algn="ctr"/>
-            <a:endParaRPr/>
           </a:p>
         </p:txBody>
       </p:sp>
@@ -3648,41 +3566,11 @@
                 <a:tableStyleId>{5C22544A-7EE6-4342-B048-85BDC9FD1C3A}</a:tableStyleId>
               </a:tblPr>
               <a:tblGrid>
-                <a:gridCol w="2304288">
-                  <a:extLst>
-                    <a:ext uri="{9D8B030D-6E8A-4147-A177-3AD203B41FA5}">
-                      <a16:colId xmlns:a16="http://schemas.microsoft.com/office/drawing/2014/main" val="20000"/>
-                    </a:ext>
-                  </a:extLst>
-                </a:gridCol>
-                <a:gridCol w="2304288">
-                  <a:extLst>
-                    <a:ext uri="{9D8B030D-6E8A-4147-A177-3AD203B41FA5}">
-                      <a16:colId xmlns:a16="http://schemas.microsoft.com/office/drawing/2014/main" val="20001"/>
-                    </a:ext>
-                  </a:extLst>
-                </a:gridCol>
-                <a:gridCol w="2304288">
-                  <a:extLst>
-                    <a:ext uri="{9D8B030D-6E8A-4147-A177-3AD203B41FA5}">
-                      <a16:colId xmlns:a16="http://schemas.microsoft.com/office/drawing/2014/main" val="20002"/>
-                    </a:ext>
-                  </a:extLst>
-                </a:gridCol>
-                <a:gridCol w="2304288">
-                  <a:extLst>
-                    <a:ext uri="{9D8B030D-6E8A-4147-A177-3AD203B41FA5}">
-                      <a16:colId xmlns:a16="http://schemas.microsoft.com/office/drawing/2014/main" val="20003"/>
-                    </a:ext>
-                  </a:extLst>
-                </a:gridCol>
-                <a:gridCol w="2304288">
-                  <a:extLst>
-                    <a:ext uri="{9D8B030D-6E8A-4147-A177-3AD203B41FA5}">
-                      <a16:colId xmlns:a16="http://schemas.microsoft.com/office/drawing/2014/main" val="20004"/>
-                    </a:ext>
-                  </a:extLst>
-                </a:gridCol>
+                <a:gridCol w="2304288"/>
+                <a:gridCol w="2304288"/>
+                <a:gridCol w="2304288"/>
+                <a:gridCol w="2304288"/>
+                <a:gridCol w="2304288"/>
               </a:tblGrid>
               <a:tr h="377190">
                 <a:tc>
@@ -3692,7 +3580,7 @@
                     <a:p>
                       <a:pPr algn="ctr"/>
                       <a:r>
-                        <a:rPr sz="1100" b="1">
+                        <a:rPr b="1" sz="1100">
                           <a:solidFill>
                             <a:srgbClr val="FFFFFF"/>
                           </a:solidFill>
@@ -3714,7 +3602,7 @@
                     <a:p>
                       <a:pPr algn="ctr"/>
                       <a:r>
-                        <a:rPr sz="1100" b="1">
+                        <a:rPr b="1" sz="1100">
                           <a:solidFill>
                             <a:srgbClr val="FFFFFF"/>
                           </a:solidFill>
@@ -3736,7 +3624,7 @@
                     <a:p>
                       <a:pPr algn="ctr"/>
                       <a:r>
-                        <a:rPr sz="1100" b="1">
+                        <a:rPr b="1" sz="1100">
                           <a:solidFill>
                             <a:srgbClr val="FFFFFF"/>
                           </a:solidFill>
@@ -3758,7 +3646,7 @@
                     <a:p>
                       <a:pPr algn="ctr"/>
                       <a:r>
-                        <a:rPr sz="1100" b="1">
+                        <a:rPr b="1" sz="1100">
                           <a:solidFill>
                             <a:srgbClr val="FFFFFF"/>
                           </a:solidFill>
@@ -3780,7 +3668,7 @@
                     <a:p>
                       <a:pPr algn="ctr"/>
                       <a:r>
-                        <a:rPr sz="1100" b="1">
+                        <a:rPr b="1" sz="1100">
                           <a:solidFill>
                             <a:srgbClr val="FFFFFF"/>
                           </a:solidFill>
@@ -3795,11 +3683,6 @@
                     </a:solidFill>
                   </a:tcPr>
                 </a:tc>
-                <a:extLst>
-                  <a:ext uri="{0D108BD9-81ED-4DB2-BD59-A6C34878D82A}">
-                    <a16:rowId xmlns:a16="http://schemas.microsoft.com/office/drawing/2014/main" val="10000"/>
-                  </a:ext>
-                </a:extLst>
               </a:tr>
               <a:tr h="377190">
                 <a:tc>
@@ -3809,7 +3692,7 @@
                     <a:p>
                       <a:pPr algn="ctr"/>
                       <a:r>
-                        <a:rPr sz="1100" dirty="0">
+                        <a:rPr sz="1100">
                           <a:solidFill>
                             <a:srgbClr val="1A1A2E"/>
                           </a:solidFill>
@@ -3831,7 +3714,7 @@
                     <a:p>
                       <a:pPr algn="ctr"/>
                       <a:r>
-                        <a:rPr sz="1100" dirty="0">
+                        <a:rPr sz="1100">
                           <a:solidFill>
                             <a:srgbClr val="1A1A2E"/>
                           </a:solidFill>
@@ -3912,11 +3795,6 @@
                     </a:solidFill>
                   </a:tcPr>
                 </a:tc>
-                <a:extLst>
-                  <a:ext uri="{0D108BD9-81ED-4DB2-BD59-A6C34878D82A}">
-                    <a16:rowId xmlns:a16="http://schemas.microsoft.com/office/drawing/2014/main" val="10001"/>
-                  </a:ext>
-                </a:extLst>
               </a:tr>
               <a:tr h="377190">
                 <a:tc>
@@ -3948,7 +3826,7 @@
                     <a:p>
                       <a:pPr algn="ctr"/>
                       <a:r>
-                        <a:rPr sz="1100" dirty="0">
+                        <a:rPr sz="1100">
                           <a:solidFill>
                             <a:srgbClr val="1A1A2E"/>
                           </a:solidFill>
@@ -4029,11 +3907,6 @@
                     </a:solidFill>
                   </a:tcPr>
                 </a:tc>
-                <a:extLst>
-                  <a:ext uri="{0D108BD9-81ED-4DB2-BD59-A6C34878D82A}">
-                    <a16:rowId xmlns:a16="http://schemas.microsoft.com/office/drawing/2014/main" val="10002"/>
-                  </a:ext>
-                </a:extLst>
               </a:tr>
               <a:tr h="377190">
                 <a:tc>
@@ -4065,7 +3938,7 @@
                     <a:p>
                       <a:pPr algn="ctr"/>
                       <a:r>
-                        <a:rPr sz="1100" dirty="0">
+                        <a:rPr sz="1100">
                           <a:solidFill>
                             <a:srgbClr val="1A1A2E"/>
                           </a:solidFill>
@@ -4087,7 +3960,7 @@
                     <a:p>
                       <a:pPr algn="ctr"/>
                       <a:r>
-                        <a:rPr sz="1100" dirty="0">
+                        <a:rPr sz="1100">
                           <a:solidFill>
                             <a:srgbClr val="1A1A2E"/>
                           </a:solidFill>
@@ -4146,11 +4019,6 @@
                     </a:solidFill>
                   </a:tcPr>
                 </a:tc>
-                <a:extLst>
-                  <a:ext uri="{0D108BD9-81ED-4DB2-BD59-A6C34878D82A}">
-                    <a16:rowId xmlns:a16="http://schemas.microsoft.com/office/drawing/2014/main" val="10003"/>
-                  </a:ext>
-                </a:extLst>
               </a:tr>
               <a:tr h="377190">
                 <a:tc>
@@ -4204,7 +4072,7 @@
                     <a:p>
                       <a:pPr algn="ctr"/>
                       <a:r>
-                        <a:rPr sz="1100" dirty="0">
+                        <a:rPr sz="1100">
                           <a:solidFill>
                             <a:srgbClr val="1A1A2E"/>
                           </a:solidFill>
@@ -4226,7 +4094,7 @@
                     <a:p>
                       <a:pPr algn="ctr"/>
                       <a:r>
-                        <a:rPr sz="1100" dirty="0">
+                        <a:rPr sz="1100">
                           <a:solidFill>
                             <a:srgbClr val="1A1A2E"/>
                           </a:solidFill>
@@ -4263,11 +4131,6 @@
                     </a:solidFill>
                   </a:tcPr>
                 </a:tc>
-                <a:extLst>
-                  <a:ext uri="{0D108BD9-81ED-4DB2-BD59-A6C34878D82A}">
-                    <a16:rowId xmlns:a16="http://schemas.microsoft.com/office/drawing/2014/main" val="10004"/>
-                  </a:ext>
-                </a:extLst>
               </a:tr>
               <a:tr h="377190">
                 <a:tc>
@@ -4343,7 +4206,7 @@
                     <a:p>
                       <a:pPr algn="ctr"/>
                       <a:r>
-                        <a:rPr sz="1100" dirty="0">
+                        <a:rPr sz="1100">
                           <a:solidFill>
                             <a:srgbClr val="1A1A2E"/>
                           </a:solidFill>
@@ -4365,7 +4228,7 @@
                     <a:p>
                       <a:pPr algn="ctr"/>
                       <a:r>
-                        <a:rPr sz="1100" dirty="0">
+                        <a:rPr sz="1100">
                           <a:solidFill>
                             <a:srgbClr val="1A1A2E"/>
                           </a:solidFill>
@@ -4380,11 +4243,6 @@
                     </a:solidFill>
                   </a:tcPr>
                 </a:tc>
-                <a:extLst>
-                  <a:ext uri="{0D108BD9-81ED-4DB2-BD59-A6C34878D82A}">
-                    <a16:rowId xmlns:a16="http://schemas.microsoft.com/office/drawing/2014/main" val="10005"/>
-                  </a:ext>
-                </a:extLst>
               </a:tr>
               <a:tr h="377190">
                 <a:tc>
@@ -4482,7 +4340,7 @@
                     <a:p>
                       <a:pPr algn="ctr"/>
                       <a:r>
-                        <a:rPr sz="1100" dirty="0">
+                        <a:rPr sz="1100">
                           <a:solidFill>
                             <a:srgbClr val="1A1A2E"/>
                           </a:solidFill>
@@ -4497,11 +4355,6 @@
                     </a:solidFill>
                   </a:tcPr>
                 </a:tc>
-                <a:extLst>
-                  <a:ext uri="{0D108BD9-81ED-4DB2-BD59-A6C34878D82A}">
-                    <a16:rowId xmlns:a16="http://schemas.microsoft.com/office/drawing/2014/main" val="10006"/>
-                  </a:ext>
-                </a:extLst>
               </a:tr>
               <a:tr h="377190">
                 <a:tc>
@@ -4599,7 +4452,7 @@
                     <a:p>
                       <a:pPr algn="ctr"/>
                       <a:r>
-                        <a:rPr sz="1100" dirty="0">
+                        <a:rPr sz="1100">
                           <a:solidFill>
                             <a:srgbClr val="1A1A2E"/>
                           </a:solidFill>
@@ -4614,11 +4467,6 @@
                     </a:solidFill>
                   </a:tcPr>
                 </a:tc>
-                <a:extLst>
-                  <a:ext uri="{0D108BD9-81ED-4DB2-BD59-A6C34878D82A}">
-                    <a16:rowId xmlns:a16="http://schemas.microsoft.com/office/drawing/2014/main" val="10007"/>
-                  </a:ext>
-                </a:extLst>
               </a:tr>
             </a:tbl>
           </a:graphicData>
@@ -4783,7 +4631,7 @@
 </file>
 
 <file path=ppt/slides/slide11.xml><?xml version="1.0" encoding="utf-8"?>
-<p:sld xmlns:a="http://schemas.openxmlformats.org/drawingml/2006/main" xmlns:r="http://schemas.openxmlformats.org/officeDocument/2006/relationships" xmlns:p="http://schemas.openxmlformats.org/presentationml/2006/main">
+<p:sld xmlns:a="http://schemas.openxmlformats.org/drawingml/2006/main" xmlns:p="http://schemas.openxmlformats.org/presentationml/2006/main" xmlns:r="http://schemas.openxmlformats.org/officeDocument/2006/relationships">
   <p:cSld>
     <p:spTree>
       <p:nvGrpSpPr>
@@ -4791,14 +4639,7 @@
         <p:cNvGrpSpPr/>
         <p:nvPr/>
       </p:nvGrpSpPr>
-      <p:grpSpPr>
-        <a:xfrm>
-          <a:off x="0" y="0"/>
-          <a:ext cx="0" cy="0"/>
-          <a:chOff x="0" y="0"/>
-          <a:chExt cx="0" cy="0"/>
-        </a:xfrm>
-      </p:grpSpPr>
+      <p:grpSpPr/>
       <p:sp>
         <p:nvSpPr>
           <p:cNvPr id="2" name="Rectangle 1"/>
@@ -4839,7 +4680,6 @@
           <a:lstStyle/>
           <a:p>
             <a:pPr algn="ctr"/>
-            <a:endParaRPr/>
           </a:p>
         </p:txBody>
       </p:sp>
@@ -4883,7 +4723,6 @@
           <a:lstStyle/>
           <a:p>
             <a:pPr algn="ctr"/>
-            <a:endParaRPr/>
           </a:p>
         </p:txBody>
       </p:sp>
@@ -4995,7 +4834,6 @@
           <a:lstStyle/>
           <a:p>
             <a:pPr algn="ctr"/>
-            <a:endParaRPr/>
           </a:p>
         </p:txBody>
       </p:sp>
@@ -5107,7 +4945,6 @@
           <a:lstStyle/>
           <a:p>
             <a:pPr algn="ctr"/>
-            <a:endParaRPr/>
           </a:p>
         </p:txBody>
       </p:sp>
@@ -5219,7 +5056,6 @@
           <a:lstStyle/>
           <a:p>
             <a:pPr algn="ctr"/>
-            <a:endParaRPr/>
           </a:p>
         </p:txBody>
       </p:sp>
@@ -5331,7 +5167,6 @@
           <a:lstStyle/>
           <a:p>
             <a:pPr algn="ctr"/>
-            <a:endParaRPr/>
           </a:p>
         </p:txBody>
       </p:sp>
@@ -5443,7 +5278,6 @@
           <a:lstStyle/>
           <a:p>
             <a:pPr algn="ctr"/>
-            <a:endParaRPr/>
           </a:p>
         </p:txBody>
       </p:sp>
@@ -5556,7 +5390,6 @@
           <a:lstStyle/>
           <a:p>
             <a:pPr algn="ctr"/>
-            <a:endParaRPr/>
           </a:p>
         </p:txBody>
       </p:sp>
@@ -5682,34 +5515,10 @@
                 <a:tableStyleId>{5C22544A-7EE6-4342-B048-85BDC9FD1C3A}</a:tableStyleId>
               </a:tblPr>
               <a:tblGrid>
-                <a:gridCol w="1485900">
-                  <a:extLst>
-                    <a:ext uri="{9D8B030D-6E8A-4147-A177-3AD203B41FA5}">
-                      <a16:colId xmlns:a16="http://schemas.microsoft.com/office/drawing/2014/main" val="20000"/>
-                    </a:ext>
-                  </a:extLst>
-                </a:gridCol>
-                <a:gridCol w="1485900">
-                  <a:extLst>
-                    <a:ext uri="{9D8B030D-6E8A-4147-A177-3AD203B41FA5}">
-                      <a16:colId xmlns:a16="http://schemas.microsoft.com/office/drawing/2014/main" val="20001"/>
-                    </a:ext>
-                  </a:extLst>
-                </a:gridCol>
-                <a:gridCol w="1485900">
-                  <a:extLst>
-                    <a:ext uri="{9D8B030D-6E8A-4147-A177-3AD203B41FA5}">
-                      <a16:colId xmlns:a16="http://schemas.microsoft.com/office/drawing/2014/main" val="20002"/>
-                    </a:ext>
-                  </a:extLst>
-                </a:gridCol>
-                <a:gridCol w="1485900">
-                  <a:extLst>
-                    <a:ext uri="{9D8B030D-6E8A-4147-A177-3AD203B41FA5}">
-                      <a16:colId xmlns:a16="http://schemas.microsoft.com/office/drawing/2014/main" val="20003"/>
-                    </a:ext>
-                  </a:extLst>
-                </a:gridCol>
+                <a:gridCol w="1485900"/>
+                <a:gridCol w="1485900"/>
+                <a:gridCol w="1485900"/>
+                <a:gridCol w="1485900"/>
               </a:tblGrid>
               <a:tr h="365760">
                 <a:tc>
@@ -5719,7 +5528,7 @@
                     <a:p>
                       <a:pPr algn="ctr"/>
                       <a:r>
-                        <a:rPr sz="1100" b="1">
+                        <a:rPr b="1" sz="1100">
                           <a:solidFill>
                             <a:srgbClr val="FFFFFF"/>
                           </a:solidFill>
@@ -5741,7 +5550,7 @@
                     <a:p>
                       <a:pPr algn="ctr"/>
                       <a:r>
-                        <a:rPr sz="1100" b="1">
+                        <a:rPr b="1" sz="1100">
                           <a:solidFill>
                             <a:srgbClr val="FFFFFF"/>
                           </a:solidFill>
@@ -5763,7 +5572,7 @@
                     <a:p>
                       <a:pPr algn="ctr"/>
                       <a:r>
-                        <a:rPr sz="1100" b="1">
+                        <a:rPr b="1" sz="1100">
                           <a:solidFill>
                             <a:srgbClr val="FFFFFF"/>
                           </a:solidFill>
@@ -5785,7 +5594,7 @@
                     <a:p>
                       <a:pPr algn="ctr"/>
                       <a:r>
-                        <a:rPr sz="1100" b="1">
+                        <a:rPr b="1" sz="1100">
                           <a:solidFill>
                             <a:srgbClr val="FFFFFF"/>
                           </a:solidFill>
@@ -5800,11 +5609,6 @@
                     </a:solidFill>
                   </a:tcPr>
                 </a:tc>
-                <a:extLst>
-                  <a:ext uri="{0D108BD9-81ED-4DB2-BD59-A6C34878D82A}">
-                    <a16:rowId xmlns:a16="http://schemas.microsoft.com/office/drawing/2014/main" val="10000"/>
-                  </a:ext>
-                </a:extLst>
               </a:tr>
               <a:tr h="365760">
                 <a:tc>
@@ -5895,11 +5699,6 @@
                     </a:solidFill>
                   </a:tcPr>
                 </a:tc>
-                <a:extLst>
-                  <a:ext uri="{0D108BD9-81ED-4DB2-BD59-A6C34878D82A}">
-                    <a16:rowId xmlns:a16="http://schemas.microsoft.com/office/drawing/2014/main" val="10001"/>
-                  </a:ext>
-                </a:extLst>
               </a:tr>
               <a:tr h="365760">
                 <a:tc>
@@ -5990,11 +5789,6 @@
                     </a:solidFill>
                   </a:tcPr>
                 </a:tc>
-                <a:extLst>
-                  <a:ext uri="{0D108BD9-81ED-4DB2-BD59-A6C34878D82A}">
-                    <a16:rowId xmlns:a16="http://schemas.microsoft.com/office/drawing/2014/main" val="10002"/>
-                  </a:ext>
-                </a:extLst>
               </a:tr>
               <a:tr h="365760">
                 <a:tc>
@@ -6085,11 +5879,6 @@
                     </a:solidFill>
                   </a:tcPr>
                 </a:tc>
-                <a:extLst>
-                  <a:ext uri="{0D108BD9-81ED-4DB2-BD59-A6C34878D82A}">
-                    <a16:rowId xmlns:a16="http://schemas.microsoft.com/office/drawing/2014/main" val="10003"/>
-                  </a:ext>
-                </a:extLst>
               </a:tr>
               <a:tr h="365760">
                 <a:tc>
@@ -6180,11 +5969,6 @@
                     </a:solidFill>
                   </a:tcPr>
                 </a:tc>
-                <a:extLst>
-                  <a:ext uri="{0D108BD9-81ED-4DB2-BD59-A6C34878D82A}">
-                    <a16:rowId xmlns:a16="http://schemas.microsoft.com/office/drawing/2014/main" val="10004"/>
-                  </a:ext>
-                </a:extLst>
               </a:tr>
             </a:tbl>
           </a:graphicData>
@@ -6316,7 +6100,7 @@
 </file>
 
 <file path=ppt/slides/slide12.xml><?xml version="1.0" encoding="utf-8"?>
-<p:sld xmlns:a="http://schemas.openxmlformats.org/drawingml/2006/main" xmlns:r="http://schemas.openxmlformats.org/officeDocument/2006/relationships" xmlns:p="http://schemas.openxmlformats.org/presentationml/2006/main">
+<p:sld xmlns:a="http://schemas.openxmlformats.org/drawingml/2006/main" xmlns:p="http://schemas.openxmlformats.org/presentationml/2006/main" xmlns:r="http://schemas.openxmlformats.org/officeDocument/2006/relationships">
   <p:cSld>
     <p:spTree>
       <p:nvGrpSpPr>
@@ -6324,14 +6108,7 @@
         <p:cNvGrpSpPr/>
         <p:nvPr/>
       </p:nvGrpSpPr>
-      <p:grpSpPr>
-        <a:xfrm>
-          <a:off x="0" y="0"/>
-          <a:ext cx="0" cy="0"/>
-          <a:chOff x="0" y="0"/>
-          <a:chExt cx="0" cy="0"/>
-        </a:xfrm>
-      </p:grpSpPr>
+      <p:grpSpPr/>
       <p:sp>
         <p:nvSpPr>
           <p:cNvPr id="2" name="Rectangle 1"/>
@@ -6372,7 +6149,6 @@
           <a:lstStyle/>
           <a:p>
             <a:pPr algn="ctr"/>
-            <a:endParaRPr/>
           </a:p>
         </p:txBody>
       </p:sp>
@@ -6416,7 +6192,6 @@
           <a:lstStyle/>
           <a:p>
             <a:pPr algn="ctr"/>
-            <a:endParaRPr/>
           </a:p>
         </p:txBody>
       </p:sp>
@@ -6507,48 +6282,12 @@
                 <a:tableStyleId>{5C22544A-7EE6-4342-B048-85BDC9FD1C3A}</a:tableStyleId>
               </a:tblPr>
               <a:tblGrid>
-                <a:gridCol w="1920240">
-                  <a:extLst>
-                    <a:ext uri="{9D8B030D-6E8A-4147-A177-3AD203B41FA5}">
-                      <a16:colId xmlns:a16="http://schemas.microsoft.com/office/drawing/2014/main" val="20000"/>
-                    </a:ext>
-                  </a:extLst>
-                </a:gridCol>
-                <a:gridCol w="1920240">
-                  <a:extLst>
-                    <a:ext uri="{9D8B030D-6E8A-4147-A177-3AD203B41FA5}">
-                      <a16:colId xmlns:a16="http://schemas.microsoft.com/office/drawing/2014/main" val="20001"/>
-                    </a:ext>
-                  </a:extLst>
-                </a:gridCol>
-                <a:gridCol w="1920240">
-                  <a:extLst>
-                    <a:ext uri="{9D8B030D-6E8A-4147-A177-3AD203B41FA5}">
-                      <a16:colId xmlns:a16="http://schemas.microsoft.com/office/drawing/2014/main" val="20002"/>
-                    </a:ext>
-                  </a:extLst>
-                </a:gridCol>
-                <a:gridCol w="1920240">
-                  <a:extLst>
-                    <a:ext uri="{9D8B030D-6E8A-4147-A177-3AD203B41FA5}">
-                      <a16:colId xmlns:a16="http://schemas.microsoft.com/office/drawing/2014/main" val="20003"/>
-                    </a:ext>
-                  </a:extLst>
-                </a:gridCol>
-                <a:gridCol w="1920240">
-                  <a:extLst>
-                    <a:ext uri="{9D8B030D-6E8A-4147-A177-3AD203B41FA5}">
-                      <a16:colId xmlns:a16="http://schemas.microsoft.com/office/drawing/2014/main" val="20004"/>
-                    </a:ext>
-                  </a:extLst>
-                </a:gridCol>
-                <a:gridCol w="1920240">
-                  <a:extLst>
-                    <a:ext uri="{9D8B030D-6E8A-4147-A177-3AD203B41FA5}">
-                      <a16:colId xmlns:a16="http://schemas.microsoft.com/office/drawing/2014/main" val="20005"/>
-                    </a:ext>
-                  </a:extLst>
-                </a:gridCol>
+                <a:gridCol w="1920240"/>
+                <a:gridCol w="1920240"/>
+                <a:gridCol w="1920240"/>
+                <a:gridCol w="1920240"/>
+                <a:gridCol w="1920240"/>
+                <a:gridCol w="1920240"/>
               </a:tblGrid>
               <a:tr h="489857">
                 <a:tc>
@@ -6558,7 +6297,7 @@
                     <a:p>
                       <a:pPr algn="ctr"/>
                       <a:r>
-                        <a:rPr sz="1100" b="1">
+                        <a:rPr b="1" sz="1100">
                           <a:solidFill>
                             <a:srgbClr val="FFFFFF"/>
                           </a:solidFill>
@@ -6580,7 +6319,7 @@
                     <a:p>
                       <a:pPr algn="ctr"/>
                       <a:r>
-                        <a:rPr sz="1100" b="1">
+                        <a:rPr b="1" sz="1100">
                           <a:solidFill>
                             <a:srgbClr val="FFFFFF"/>
                           </a:solidFill>
@@ -6602,7 +6341,7 @@
                     <a:p>
                       <a:pPr algn="ctr"/>
                       <a:r>
-                        <a:rPr sz="1100" b="1">
+                        <a:rPr b="1" sz="1100">
                           <a:solidFill>
                             <a:srgbClr val="FFFFFF"/>
                           </a:solidFill>
@@ -6624,7 +6363,7 @@
                     <a:p>
                       <a:pPr algn="ctr"/>
                       <a:r>
-                        <a:rPr sz="1100" b="1">
+                        <a:rPr b="1" sz="1100">
                           <a:solidFill>
                             <a:srgbClr val="FFFFFF"/>
                           </a:solidFill>
@@ -6646,7 +6385,7 @@
                     <a:p>
                       <a:pPr algn="ctr"/>
                       <a:r>
-                        <a:rPr sz="1100" b="1">
+                        <a:rPr b="1" sz="1100">
                           <a:solidFill>
                             <a:srgbClr val="FFFFFF"/>
                           </a:solidFill>
@@ -6668,7 +6407,7 @@
                     <a:p>
                       <a:pPr algn="ctr"/>
                       <a:r>
-                        <a:rPr sz="1100" b="1">
+                        <a:rPr b="1" sz="1100">
                           <a:solidFill>
                             <a:srgbClr val="FFFFFF"/>
                           </a:solidFill>
@@ -6683,11 +6422,6 @@
                     </a:solidFill>
                   </a:tcPr>
                 </a:tc>
-                <a:extLst>
-                  <a:ext uri="{0D108BD9-81ED-4DB2-BD59-A6C34878D82A}">
-                    <a16:rowId xmlns:a16="http://schemas.microsoft.com/office/drawing/2014/main" val="10000"/>
-                  </a:ext>
-                </a:extLst>
               </a:tr>
               <a:tr h="489857">
                 <a:tc>
@@ -6697,7 +6431,7 @@
                     <a:p>
                       <a:pPr algn="ctr"/>
                       <a:r>
-                        <a:rPr sz="1100" dirty="0">
+                        <a:rPr sz="1100">
                           <a:solidFill>
                             <a:srgbClr val="1A1A2E"/>
                           </a:solidFill>
@@ -6719,7 +6453,7 @@
                     <a:p>
                       <a:pPr algn="ctr"/>
                       <a:r>
-                        <a:rPr sz="1100" dirty="0">
+                        <a:rPr sz="1100">
                           <a:solidFill>
                             <a:srgbClr val="1A1A2E"/>
                           </a:solidFill>
@@ -6822,11 +6556,6 @@
                     </a:solidFill>
                   </a:tcPr>
                 </a:tc>
-                <a:extLst>
-                  <a:ext uri="{0D108BD9-81ED-4DB2-BD59-A6C34878D82A}">
-                    <a16:rowId xmlns:a16="http://schemas.microsoft.com/office/drawing/2014/main" val="10001"/>
-                  </a:ext>
-                </a:extLst>
               </a:tr>
               <a:tr h="489857">
                 <a:tc>
@@ -6858,7 +6587,7 @@
                     <a:p>
                       <a:pPr algn="ctr"/>
                       <a:r>
-                        <a:rPr sz="1100" dirty="0">
+                        <a:rPr sz="1100">
                           <a:solidFill>
                             <a:srgbClr val="1A1A2E"/>
                           </a:solidFill>
@@ -6880,7 +6609,7 @@
                     <a:p>
                       <a:pPr algn="ctr"/>
                       <a:r>
-                        <a:rPr sz="1100" dirty="0">
+                        <a:rPr sz="1100">
                           <a:solidFill>
                             <a:srgbClr val="1A1A2E"/>
                           </a:solidFill>
@@ -6961,11 +6690,6 @@
                     </a:solidFill>
                   </a:tcPr>
                 </a:tc>
-                <a:extLst>
-                  <a:ext uri="{0D108BD9-81ED-4DB2-BD59-A6C34878D82A}">
-                    <a16:rowId xmlns:a16="http://schemas.microsoft.com/office/drawing/2014/main" val="10002"/>
-                  </a:ext>
-                </a:extLst>
               </a:tr>
               <a:tr h="489857">
                 <a:tc>
@@ -7041,7 +6765,7 @@
                     <a:p>
                       <a:pPr algn="ctr"/>
                       <a:r>
-                        <a:rPr sz="1100" dirty="0">
+                        <a:rPr sz="1100">
                           <a:solidFill>
                             <a:srgbClr val="1A1A2E"/>
                           </a:solidFill>
@@ -7063,7 +6787,7 @@
                     <a:p>
                       <a:pPr algn="ctr"/>
                       <a:r>
-                        <a:rPr sz="1100" dirty="0">
+                        <a:rPr sz="1100">
                           <a:solidFill>
                             <a:srgbClr val="1A1A2E"/>
                           </a:solidFill>
@@ -7100,11 +6824,6 @@
                     </a:solidFill>
                   </a:tcPr>
                 </a:tc>
-                <a:extLst>
-                  <a:ext uri="{0D108BD9-81ED-4DB2-BD59-A6C34878D82A}">
-                    <a16:rowId xmlns:a16="http://schemas.microsoft.com/office/drawing/2014/main" val="10003"/>
-                  </a:ext>
-                </a:extLst>
               </a:tr>
               <a:tr h="489857">
                 <a:tc>
@@ -7202,7 +6921,7 @@
                     <a:p>
                       <a:pPr algn="ctr"/>
                       <a:r>
-                        <a:rPr sz="1100" dirty="0">
+                        <a:rPr sz="1100">
                           <a:solidFill>
                             <a:srgbClr val="1A1A2E"/>
                           </a:solidFill>
@@ -7224,7 +6943,7 @@
                     <a:p>
                       <a:pPr algn="ctr"/>
                       <a:r>
-                        <a:rPr sz="1100" dirty="0">
+                        <a:rPr sz="1100">
                           <a:solidFill>
                             <a:srgbClr val="1A1A2E"/>
                           </a:solidFill>
@@ -7239,11 +6958,6 @@
                     </a:solidFill>
                   </a:tcPr>
                 </a:tc>
-                <a:extLst>
-                  <a:ext uri="{0D108BD9-81ED-4DB2-BD59-A6C34878D82A}">
-                    <a16:rowId xmlns:a16="http://schemas.microsoft.com/office/drawing/2014/main" val="10004"/>
-                  </a:ext>
-                </a:extLst>
               </a:tr>
               <a:tr h="489857">
                 <a:tc>
@@ -7363,7 +7077,7 @@
                     <a:p>
                       <a:pPr algn="ctr"/>
                       <a:r>
-                        <a:rPr sz="1100" dirty="0">
+                        <a:rPr sz="1100">
                           <a:solidFill>
                             <a:srgbClr val="1A1A2E"/>
                           </a:solidFill>
@@ -7378,11 +7092,6 @@
                     </a:solidFill>
                   </a:tcPr>
                 </a:tc>
-                <a:extLst>
-                  <a:ext uri="{0D108BD9-81ED-4DB2-BD59-A6C34878D82A}">
-                    <a16:rowId xmlns:a16="http://schemas.microsoft.com/office/drawing/2014/main" val="10005"/>
-                  </a:ext>
-                </a:extLst>
               </a:tr>
               <a:tr h="489858">
                 <a:tc>
@@ -7502,7 +7211,7 @@
                     <a:p>
                       <a:pPr algn="ctr"/>
                       <a:r>
-                        <a:rPr sz="1100" dirty="0">
+                        <a:rPr sz="1100">
                           <a:solidFill>
                             <a:srgbClr val="1A1A2E"/>
                           </a:solidFill>
@@ -7517,11 +7226,6 @@
                     </a:solidFill>
                   </a:tcPr>
                 </a:tc>
-                <a:extLst>
-                  <a:ext uri="{0D108BD9-81ED-4DB2-BD59-A6C34878D82A}">
-                    <a16:rowId xmlns:a16="http://schemas.microsoft.com/office/drawing/2014/main" val="10006"/>
-                  </a:ext>
-                </a:extLst>
               </a:tr>
             </a:tbl>
           </a:graphicData>
@@ -7628,7 +7332,7 @@
 </file>
 
 <file path=ppt/slides/slide13.xml><?xml version="1.0" encoding="utf-8"?>
-<p:sld xmlns:a="http://schemas.openxmlformats.org/drawingml/2006/main" xmlns:r="http://schemas.openxmlformats.org/officeDocument/2006/relationships" xmlns:p="http://schemas.openxmlformats.org/presentationml/2006/main">
+<p:sld xmlns:a="http://schemas.openxmlformats.org/drawingml/2006/main" xmlns:p="http://schemas.openxmlformats.org/presentationml/2006/main" xmlns:r="http://schemas.openxmlformats.org/officeDocument/2006/relationships">
   <p:cSld>
     <p:spTree>
       <p:nvGrpSpPr>
@@ -7636,14 +7340,7 @@
         <p:cNvGrpSpPr/>
         <p:nvPr/>
       </p:nvGrpSpPr>
-      <p:grpSpPr>
-        <a:xfrm>
-          <a:off x="0" y="0"/>
-          <a:ext cx="0" cy="0"/>
-          <a:chOff x="0" y="0"/>
-          <a:chExt cx="0" cy="0"/>
-        </a:xfrm>
-      </p:grpSpPr>
+      <p:grpSpPr/>
       <p:sp>
         <p:nvSpPr>
           <p:cNvPr id="2" name="Rectangle 1"/>
@@ -7684,7 +7381,6 @@
           <a:lstStyle/>
           <a:p>
             <a:pPr algn="ctr"/>
-            <a:endParaRPr/>
           </a:p>
         </p:txBody>
       </p:sp>
@@ -7728,7 +7424,6 @@
           <a:lstStyle/>
           <a:p>
             <a:pPr algn="ctr"/>
-            <a:endParaRPr/>
           </a:p>
         </p:txBody>
       </p:sp>
@@ -7819,41 +7514,11 @@
                 <a:tableStyleId>{5C22544A-7EE6-4342-B048-85BDC9FD1C3A}</a:tableStyleId>
               </a:tblPr>
               <a:tblGrid>
-                <a:gridCol w="2304288">
-                  <a:extLst>
-                    <a:ext uri="{9D8B030D-6E8A-4147-A177-3AD203B41FA5}">
-                      <a16:colId xmlns:a16="http://schemas.microsoft.com/office/drawing/2014/main" val="20000"/>
-                    </a:ext>
-                  </a:extLst>
-                </a:gridCol>
-                <a:gridCol w="2304288">
-                  <a:extLst>
-                    <a:ext uri="{9D8B030D-6E8A-4147-A177-3AD203B41FA5}">
-                      <a16:colId xmlns:a16="http://schemas.microsoft.com/office/drawing/2014/main" val="20001"/>
-                    </a:ext>
-                  </a:extLst>
-                </a:gridCol>
-                <a:gridCol w="2304288">
-                  <a:extLst>
-                    <a:ext uri="{9D8B030D-6E8A-4147-A177-3AD203B41FA5}">
-                      <a16:colId xmlns:a16="http://schemas.microsoft.com/office/drawing/2014/main" val="20002"/>
-                    </a:ext>
-                  </a:extLst>
-                </a:gridCol>
-                <a:gridCol w="2304288">
-                  <a:extLst>
-                    <a:ext uri="{9D8B030D-6E8A-4147-A177-3AD203B41FA5}">
-                      <a16:colId xmlns:a16="http://schemas.microsoft.com/office/drawing/2014/main" val="20003"/>
-                    </a:ext>
-                  </a:extLst>
-                </a:gridCol>
-                <a:gridCol w="2304288">
-                  <a:extLst>
-                    <a:ext uri="{9D8B030D-6E8A-4147-A177-3AD203B41FA5}">
-                      <a16:colId xmlns:a16="http://schemas.microsoft.com/office/drawing/2014/main" val="20004"/>
-                    </a:ext>
-                  </a:extLst>
-                </a:gridCol>
+                <a:gridCol w="2304288"/>
+                <a:gridCol w="2304288"/>
+                <a:gridCol w="2304288"/>
+                <a:gridCol w="2304288"/>
+                <a:gridCol w="2304288"/>
               </a:tblGrid>
               <a:tr h="377190">
                 <a:tc>
@@ -7863,7 +7528,7 @@
                     <a:p>
                       <a:pPr algn="ctr"/>
                       <a:r>
-                        <a:rPr sz="1100" b="1">
+                        <a:rPr b="1" sz="1100">
                           <a:solidFill>
                             <a:srgbClr val="FFFFFF"/>
                           </a:solidFill>
@@ -7885,7 +7550,7 @@
                     <a:p>
                       <a:pPr algn="ctr"/>
                       <a:r>
-                        <a:rPr sz="1100" b="1">
+                        <a:rPr b="1" sz="1100">
                           <a:solidFill>
                             <a:srgbClr val="FFFFFF"/>
                           </a:solidFill>
@@ -7907,7 +7572,7 @@
                     <a:p>
                       <a:pPr algn="ctr"/>
                       <a:r>
-                        <a:rPr sz="1100" b="1">
+                        <a:rPr b="1" sz="1100">
                           <a:solidFill>
                             <a:srgbClr val="FFFFFF"/>
                           </a:solidFill>
@@ -7929,7 +7594,7 @@
                     <a:p>
                       <a:pPr algn="ctr"/>
                       <a:r>
-                        <a:rPr sz="1100" b="1">
+                        <a:rPr b="1" sz="1100">
                           <a:solidFill>
                             <a:srgbClr val="FFFFFF"/>
                           </a:solidFill>
@@ -7951,7 +7616,7 @@
                     <a:p>
                       <a:pPr algn="ctr"/>
                       <a:r>
-                        <a:rPr sz="1100" b="1">
+                        <a:rPr b="1" sz="1100">
                           <a:solidFill>
                             <a:srgbClr val="FFFFFF"/>
                           </a:solidFill>
@@ -7966,11 +7631,6 @@
                     </a:solidFill>
                   </a:tcPr>
                 </a:tc>
-                <a:extLst>
-                  <a:ext uri="{0D108BD9-81ED-4DB2-BD59-A6C34878D82A}">
-                    <a16:rowId xmlns:a16="http://schemas.microsoft.com/office/drawing/2014/main" val="10000"/>
-                  </a:ext>
-                </a:extLst>
               </a:tr>
               <a:tr h="377190">
                 <a:tc>
@@ -7980,7 +7640,7 @@
                     <a:p>
                       <a:pPr algn="ctr"/>
                       <a:r>
-                        <a:rPr sz="1100" dirty="0">
+                        <a:rPr sz="1100">
                           <a:solidFill>
                             <a:srgbClr val="1A1A2E"/>
                           </a:solidFill>
@@ -8002,7 +7662,7 @@
                     <a:p>
                       <a:pPr algn="ctr"/>
                       <a:r>
-                        <a:rPr sz="1100" dirty="0">
+                        <a:rPr sz="1100">
                           <a:solidFill>
                             <a:srgbClr val="1A1A2E"/>
                           </a:solidFill>
@@ -8083,11 +7743,6 @@
                     </a:solidFill>
                   </a:tcPr>
                 </a:tc>
-                <a:extLst>
-                  <a:ext uri="{0D108BD9-81ED-4DB2-BD59-A6C34878D82A}">
-                    <a16:rowId xmlns:a16="http://schemas.microsoft.com/office/drawing/2014/main" val="10001"/>
-                  </a:ext>
-                </a:extLst>
               </a:tr>
               <a:tr h="377190">
                 <a:tc>
@@ -8119,7 +7774,7 @@
                     <a:p>
                       <a:pPr algn="ctr"/>
                       <a:r>
-                        <a:rPr sz="1100" dirty="0">
+                        <a:rPr sz="1100">
                           <a:solidFill>
                             <a:srgbClr val="1A1A2E"/>
                           </a:solidFill>
@@ -8141,7 +7796,7 @@
                     <a:p>
                       <a:pPr algn="ctr"/>
                       <a:r>
-                        <a:rPr sz="1100" dirty="0">
+                        <a:rPr sz="1100">
                           <a:solidFill>
                             <a:srgbClr val="1A1A2E"/>
                           </a:solidFill>
@@ -8200,11 +7855,6 @@
                     </a:solidFill>
                   </a:tcPr>
                 </a:tc>
-                <a:extLst>
-                  <a:ext uri="{0D108BD9-81ED-4DB2-BD59-A6C34878D82A}">
-                    <a16:rowId xmlns:a16="http://schemas.microsoft.com/office/drawing/2014/main" val="10002"/>
-                  </a:ext>
-                </a:extLst>
               </a:tr>
               <a:tr h="377190">
                 <a:tc>
@@ -8258,7 +7908,7 @@
                     <a:p>
                       <a:pPr algn="ctr"/>
                       <a:r>
-                        <a:rPr sz="1100" dirty="0">
+                        <a:rPr sz="1100">
                           <a:solidFill>
                             <a:srgbClr val="1A1A2E"/>
                           </a:solidFill>
@@ -8280,7 +7930,7 @@
                     <a:p>
                       <a:pPr algn="ctr"/>
                       <a:r>
-                        <a:rPr sz="1100" dirty="0">
+                        <a:rPr sz="1100">
                           <a:solidFill>
                             <a:srgbClr val="1A1A2E"/>
                           </a:solidFill>
@@ -8317,11 +7967,6 @@
                     </a:solidFill>
                   </a:tcPr>
                 </a:tc>
-                <a:extLst>
-                  <a:ext uri="{0D108BD9-81ED-4DB2-BD59-A6C34878D82A}">
-                    <a16:rowId xmlns:a16="http://schemas.microsoft.com/office/drawing/2014/main" val="10003"/>
-                  </a:ext>
-                </a:extLst>
               </a:tr>
               <a:tr h="377190">
                 <a:tc>
@@ -8397,7 +8042,7 @@
                     <a:p>
                       <a:pPr algn="ctr"/>
                       <a:r>
-                        <a:rPr sz="1100" dirty="0">
+                        <a:rPr sz="1100">
                           <a:solidFill>
                             <a:srgbClr val="1A1A2E"/>
                           </a:solidFill>
@@ -8434,11 +8079,6 @@
                     </a:solidFill>
                   </a:tcPr>
                 </a:tc>
-                <a:extLst>
-                  <a:ext uri="{0D108BD9-81ED-4DB2-BD59-A6C34878D82A}">
-                    <a16:rowId xmlns:a16="http://schemas.microsoft.com/office/drawing/2014/main" val="10004"/>
-                  </a:ext>
-                </a:extLst>
               </a:tr>
               <a:tr h="377190">
                 <a:tc>
@@ -8536,7 +8176,7 @@
                     <a:p>
                       <a:pPr algn="ctr"/>
                       <a:r>
-                        <a:rPr sz="1100" dirty="0">
+                        <a:rPr sz="1100">
                           <a:solidFill>
                             <a:srgbClr val="1A1A2E"/>
                           </a:solidFill>
@@ -8551,11 +8191,6 @@
                     </a:solidFill>
                   </a:tcPr>
                 </a:tc>
-                <a:extLst>
-                  <a:ext uri="{0D108BD9-81ED-4DB2-BD59-A6C34878D82A}">
-                    <a16:rowId xmlns:a16="http://schemas.microsoft.com/office/drawing/2014/main" val="10005"/>
-                  </a:ext>
-                </a:extLst>
               </a:tr>
               <a:tr h="377190">
                 <a:tc>
@@ -8653,7 +8288,7 @@
                     <a:p>
                       <a:pPr algn="ctr"/>
                       <a:r>
-                        <a:rPr sz="1100" dirty="0">
+                        <a:rPr sz="1100">
                           <a:solidFill>
                             <a:srgbClr val="1A1A2E"/>
                           </a:solidFill>
@@ -8668,11 +8303,6 @@
                     </a:solidFill>
                   </a:tcPr>
                 </a:tc>
-                <a:extLst>
-                  <a:ext uri="{0D108BD9-81ED-4DB2-BD59-A6C34878D82A}">
-                    <a16:rowId xmlns:a16="http://schemas.microsoft.com/office/drawing/2014/main" val="10006"/>
-                  </a:ext>
-                </a:extLst>
               </a:tr>
               <a:tr h="377190">
                 <a:tc>
@@ -8770,7 +8400,7 @@
                     <a:p>
                       <a:pPr algn="ctr"/>
                       <a:r>
-                        <a:rPr sz="1100" dirty="0">
+                        <a:rPr sz="1100">
                           <a:solidFill>
                             <a:srgbClr val="1A1A2E"/>
                           </a:solidFill>
@@ -8785,11 +8415,6 @@
                     </a:solidFill>
                   </a:tcPr>
                 </a:tc>
-                <a:extLst>
-                  <a:ext uri="{0D108BD9-81ED-4DB2-BD59-A6C34878D82A}">
-                    <a16:rowId xmlns:a16="http://schemas.microsoft.com/office/drawing/2014/main" val="10007"/>
-                  </a:ext>
-                </a:extLst>
               </a:tr>
             </a:tbl>
           </a:graphicData>
@@ -8954,7 +8579,7 @@
 </file>
 
 <file path=ppt/slides/slide14.xml><?xml version="1.0" encoding="utf-8"?>
-<p:sld xmlns:a="http://schemas.openxmlformats.org/drawingml/2006/main" xmlns:r="http://schemas.openxmlformats.org/officeDocument/2006/relationships" xmlns:p="http://schemas.openxmlformats.org/presentationml/2006/main">
+<p:sld xmlns:a="http://schemas.openxmlformats.org/drawingml/2006/main" xmlns:p="http://schemas.openxmlformats.org/presentationml/2006/main" xmlns:r="http://schemas.openxmlformats.org/officeDocument/2006/relationships">
   <p:cSld>
     <p:spTree>
       <p:nvGrpSpPr>
@@ -8962,14 +8587,7 @@
         <p:cNvGrpSpPr/>
         <p:nvPr/>
       </p:nvGrpSpPr>
-      <p:grpSpPr>
-        <a:xfrm>
-          <a:off x="0" y="0"/>
-          <a:ext cx="0" cy="0"/>
-          <a:chOff x="0" y="0"/>
-          <a:chExt cx="0" cy="0"/>
-        </a:xfrm>
-      </p:grpSpPr>
+      <p:grpSpPr/>
       <p:sp>
         <p:nvSpPr>
           <p:cNvPr id="2" name="Rectangle 1"/>
@@ -9010,7 +8628,6 @@
           <a:lstStyle/>
           <a:p>
             <a:pPr algn="ctr"/>
-            <a:endParaRPr/>
           </a:p>
         </p:txBody>
       </p:sp>
@@ -9054,7 +8671,6 @@
           <a:lstStyle/>
           <a:p>
             <a:pPr algn="ctr"/>
-            <a:endParaRPr/>
           </a:p>
         </p:txBody>
       </p:sp>
@@ -9166,7 +8782,6 @@
           <a:lstStyle/>
           <a:p>
             <a:pPr algn="ctr"/>
-            <a:endParaRPr/>
           </a:p>
         </p:txBody>
       </p:sp>
@@ -9278,7 +8893,6 @@
           <a:lstStyle/>
           <a:p>
             <a:pPr algn="ctr"/>
-            <a:endParaRPr/>
           </a:p>
         </p:txBody>
       </p:sp>
@@ -9390,7 +9004,6 @@
           <a:lstStyle/>
           <a:p>
             <a:pPr algn="ctr"/>
-            <a:endParaRPr/>
           </a:p>
         </p:txBody>
       </p:sp>
@@ -9502,7 +9115,6 @@
           <a:lstStyle/>
           <a:p>
             <a:pPr algn="ctr"/>
-            <a:endParaRPr/>
           </a:p>
         </p:txBody>
       </p:sp>
@@ -9614,7 +9226,6 @@
           <a:lstStyle/>
           <a:p>
             <a:pPr algn="ctr"/>
-            <a:endParaRPr/>
           </a:p>
         </p:txBody>
       </p:sp>
@@ -9726,7 +9337,6 @@
           <a:lstStyle/>
           <a:p>
             <a:pPr algn="ctr"/>
-            <a:endParaRPr/>
           </a:p>
         </p:txBody>
       </p:sp>
@@ -9842,7 +9452,7 @@
         </p:nvGraphicFramePr>
         <p:xfrm>
           <a:off x="320040" y="3749039"/>
-          <a:ext cx="6400800" cy="1558290"/>
+          <a:ext cx="6400800" cy="1508760"/>
         </p:xfrm>
         <a:graphic>
           <a:graphicData uri="http://schemas.openxmlformats.org/drawingml/2006/table">
@@ -9851,27 +9461,9 @@
                 <a:tableStyleId>{5C22544A-7EE6-4342-B048-85BDC9FD1C3A}</a:tableStyleId>
               </a:tblPr>
               <a:tblGrid>
-                <a:gridCol w="2133600">
-                  <a:extLst>
-                    <a:ext uri="{9D8B030D-6E8A-4147-A177-3AD203B41FA5}">
-                      <a16:colId xmlns:a16="http://schemas.microsoft.com/office/drawing/2014/main" val="20000"/>
-                    </a:ext>
-                  </a:extLst>
-                </a:gridCol>
-                <a:gridCol w="2133600">
-                  <a:extLst>
-                    <a:ext uri="{9D8B030D-6E8A-4147-A177-3AD203B41FA5}">
-                      <a16:colId xmlns:a16="http://schemas.microsoft.com/office/drawing/2014/main" val="20001"/>
-                    </a:ext>
-                  </a:extLst>
-                </a:gridCol>
-                <a:gridCol w="2133600">
-                  <a:extLst>
-                    <a:ext uri="{9D8B030D-6E8A-4147-A177-3AD203B41FA5}">
-                      <a16:colId xmlns:a16="http://schemas.microsoft.com/office/drawing/2014/main" val="20002"/>
-                    </a:ext>
-                  </a:extLst>
-                </a:gridCol>
+                <a:gridCol w="2133600"/>
+                <a:gridCol w="2133600"/>
+                <a:gridCol w="2133600"/>
               </a:tblGrid>
               <a:tr h="377190">
                 <a:tc>
@@ -9881,7 +9473,7 @@
                     <a:p>
                       <a:pPr algn="ctr"/>
                       <a:r>
-                        <a:rPr sz="1100" b="1">
+                        <a:rPr b="1" sz="1100">
                           <a:solidFill>
                             <a:srgbClr val="FFFFFF"/>
                           </a:solidFill>
@@ -9903,7 +9495,7 @@
                     <a:p>
                       <a:pPr algn="ctr"/>
                       <a:r>
-                        <a:rPr sz="1100" b="1">
+                        <a:rPr b="1" sz="1100">
                           <a:solidFill>
                             <a:srgbClr val="FFFFFF"/>
                           </a:solidFill>
@@ -9925,7 +9517,7 @@
                     <a:p>
                       <a:pPr algn="ctr"/>
                       <a:r>
-                        <a:rPr sz="1100" b="1">
+                        <a:rPr b="1" sz="1100">
                           <a:solidFill>
                             <a:srgbClr val="FFFFFF"/>
                           </a:solidFill>
@@ -9940,11 +9532,6 @@
                     </a:solidFill>
                   </a:tcPr>
                 </a:tc>
-                <a:extLst>
-                  <a:ext uri="{0D108BD9-81ED-4DB2-BD59-A6C34878D82A}">
-                    <a16:rowId xmlns:a16="http://schemas.microsoft.com/office/drawing/2014/main" val="10000"/>
-                  </a:ext>
-                </a:extLst>
               </a:tr>
               <a:tr h="377190">
                 <a:tc>
@@ -9976,7 +9563,7 @@
                     <a:p>
                       <a:pPr algn="ctr"/>
                       <a:r>
-                        <a:rPr sz="1100" dirty="0">
+                        <a:rPr sz="1100">
                           <a:solidFill>
                             <a:srgbClr val="1A1A2E"/>
                           </a:solidFill>
@@ -10013,11 +9600,6 @@
                     </a:solidFill>
                   </a:tcPr>
                 </a:tc>
-                <a:extLst>
-                  <a:ext uri="{0D108BD9-81ED-4DB2-BD59-A6C34878D82A}">
-                    <a16:rowId xmlns:a16="http://schemas.microsoft.com/office/drawing/2014/main" val="10001"/>
-                  </a:ext>
-                </a:extLst>
               </a:tr>
               <a:tr h="377190">
                 <a:tc>
@@ -10049,7 +9631,7 @@
                     <a:p>
                       <a:pPr algn="ctr"/>
                       <a:r>
-                        <a:rPr sz="1100" dirty="0">
+                        <a:rPr sz="1100">
                           <a:solidFill>
                             <a:srgbClr val="1A1A2E"/>
                           </a:solidFill>
@@ -10071,68 +9653,12 @@
                     <a:p>
                       <a:pPr algn="ctr"/>
                       <a:r>
-                        <a:rPr sz="1100" dirty="0" err="1">
-                          <a:solidFill>
-                            <a:srgbClr val="1A1A2E"/>
-                          </a:solidFill>
-                        </a:rPr>
-                        <a:t>낮을수록</a:t>
-                      </a:r>
-                      <a:r>
-                        <a:rPr sz="1100" dirty="0">
-                          <a:solidFill>
-                            <a:srgbClr val="1A1A2E"/>
-                          </a:solidFill>
-                        </a:rPr>
-                        <a:t> </a:t>
-                      </a:r>
-                      <a:r>
-                        <a:rPr sz="1100" dirty="0" err="1">
-                          <a:solidFill>
-                            <a:srgbClr val="1A1A2E"/>
-                          </a:solidFill>
-                        </a:rPr>
-                        <a:t>우수</a:t>
-                      </a:r>
-                      <a:r>
-                        <a:rPr sz="1100" dirty="0">
-                          <a:solidFill>
-                            <a:srgbClr val="1A1A2E"/>
-                          </a:solidFill>
-                        </a:rPr>
-                        <a:t> (0=</a:t>
-                      </a:r>
-                      <a:r>
-                        <a:rPr sz="1100" dirty="0" err="1">
-                          <a:solidFill>
-                            <a:srgbClr val="1A1A2E"/>
-                          </a:solidFill>
-                        </a:rPr>
-                        <a:t>완벽</a:t>
-                      </a:r>
-                      <a:r>
-                        <a:rPr sz="1100" dirty="0">
-                          <a:solidFill>
-                            <a:srgbClr val="1A1A2E"/>
-                          </a:solidFill>
-                        </a:rPr>
-                        <a:t>, 0.25=</a:t>
-                      </a:r>
-                      <a:r>
-                        <a:rPr sz="1100" dirty="0" err="1">
-                          <a:solidFill>
-                            <a:srgbClr val="1A1A2E"/>
-                          </a:solidFill>
-                        </a:rPr>
-                        <a:t>무작위</a:t>
-                      </a:r>
-                      <a:r>
-                        <a:rPr sz="1100" dirty="0">
-                          <a:solidFill>
-                            <a:srgbClr val="1A1A2E"/>
-                          </a:solidFill>
-                        </a:rPr>
-                        <a:t>)</a:t>
+                        <a:rPr sz="1100">
+                          <a:solidFill>
+                            <a:srgbClr val="1A1A2E"/>
+                          </a:solidFill>
+                        </a:rPr>
+                        <a:t>낮을수록 우수 (0=완벽, 0.25=무작위)</a:t>
                       </a:r>
                     </a:p>
                   </a:txBody>
@@ -10142,11 +9668,6 @@
                     </a:solidFill>
                   </a:tcPr>
                 </a:tc>
-                <a:extLst>
-                  <a:ext uri="{0D108BD9-81ED-4DB2-BD59-A6C34878D82A}">
-                    <a16:rowId xmlns:a16="http://schemas.microsoft.com/office/drawing/2014/main" val="10002"/>
-                  </a:ext>
-                </a:extLst>
               </a:tr>
               <a:tr h="377190">
                 <a:tc>
@@ -10178,7 +9699,7 @@
                     <a:p>
                       <a:pPr algn="ctr"/>
                       <a:r>
-                        <a:rPr sz="1100" dirty="0">
+                        <a:rPr sz="1100">
                           <a:solidFill>
                             <a:srgbClr val="1A1A2E"/>
                           </a:solidFill>
@@ -10200,42 +9721,13 @@
                     <a:p>
                       <a:pPr algn="ctr"/>
                       <a:r>
-                        <a:rPr sz="1100" dirty="0">
-                          <a:solidFill>
-                            <a:srgbClr val="1A1A2E"/>
-                          </a:solidFill>
-                        </a:rPr>
-                        <a:t>Case </a:t>
-                      </a:r>
-                      <a:r>
-                        <a:rPr sz="1100" dirty="0" err="1">
-                          <a:solidFill>
-                            <a:srgbClr val="1A1A2E"/>
-                          </a:solidFill>
-                        </a:rPr>
-                        <a:t>비교</a:t>
-                      </a:r>
-                      <a:r>
-                        <a:rPr sz="1100" dirty="0">
-                          <a:solidFill>
-                            <a:srgbClr val="1A1A2E"/>
-                          </a:solidFill>
-                        </a:rPr>
-                        <a:t> </a:t>
-                      </a:r>
-                      <a:r>
-                        <a:rPr sz="1100" dirty="0" err="1">
-                          <a:solidFill>
-                            <a:srgbClr val="1A1A2E"/>
-                          </a:solidFill>
-                        </a:rPr>
-                        <a:t>기준</a:t>
-                      </a:r>
-                      <a:endParaRPr sz="1100" dirty="0">
-                        <a:solidFill>
-                          <a:srgbClr val="1A1A2E"/>
-                        </a:solidFill>
-                      </a:endParaRPr>
+                        <a:rPr sz="1100">
+                          <a:solidFill>
+                            <a:srgbClr val="1A1A2E"/>
+                          </a:solidFill>
+                        </a:rPr>
+                        <a:t>Case 비교 기준</a:t>
+                      </a:r>
                     </a:p>
                   </a:txBody>
                   <a:tcPr>
@@ -10244,11 +9736,6 @@
                     </a:solidFill>
                   </a:tcPr>
                 </a:tc>
-                <a:extLst>
-                  <a:ext uri="{0D108BD9-81ED-4DB2-BD59-A6C34878D82A}">
-                    <a16:rowId xmlns:a16="http://schemas.microsoft.com/office/drawing/2014/main" val="10003"/>
-                  </a:ext>
-                </a:extLst>
               </a:tr>
             </a:tbl>
           </a:graphicData>
@@ -10379,7 +9866,7 @@
 </file>
 
 <file path=ppt/slides/slide15.xml><?xml version="1.0" encoding="utf-8"?>
-<p:sld xmlns:a="http://schemas.openxmlformats.org/drawingml/2006/main" xmlns:r="http://schemas.openxmlformats.org/officeDocument/2006/relationships" xmlns:p="http://schemas.openxmlformats.org/presentationml/2006/main">
+<p:sld xmlns:a="http://schemas.openxmlformats.org/drawingml/2006/main" xmlns:p="http://schemas.openxmlformats.org/presentationml/2006/main" xmlns:r="http://schemas.openxmlformats.org/officeDocument/2006/relationships">
   <p:cSld>
     <p:spTree>
       <p:nvGrpSpPr>
@@ -10387,14 +9874,7 @@
         <p:cNvGrpSpPr/>
         <p:nvPr/>
       </p:nvGrpSpPr>
-      <p:grpSpPr>
-        <a:xfrm>
-          <a:off x="0" y="0"/>
-          <a:ext cx="0" cy="0"/>
-          <a:chOff x="0" y="0"/>
-          <a:chExt cx="0" cy="0"/>
-        </a:xfrm>
-      </p:grpSpPr>
+      <p:grpSpPr/>
       <p:sp>
         <p:nvSpPr>
           <p:cNvPr id="2" name="Rectangle 1"/>
@@ -10403,7 +9883,7 @@
         </p:nvSpPr>
         <p:spPr>
           <a:xfrm>
-            <a:off x="27305" y="0"/>
+            <a:off x="0" y="0"/>
             <a:ext cx="12188952" cy="6858000"/>
           </a:xfrm>
           <a:prstGeom prst="rect">
@@ -10435,7 +9915,6 @@
           <a:lstStyle/>
           <a:p>
             <a:pPr algn="ctr"/>
-            <a:endParaRPr/>
           </a:p>
         </p:txBody>
       </p:sp>
@@ -10479,7 +9958,6 @@
           <a:lstStyle/>
           <a:p>
             <a:pPr algn="ctr"/>
-            <a:endParaRPr/>
           </a:p>
         </p:txBody>
       </p:sp>
@@ -10570,34 +10048,10 @@
                 <a:tableStyleId>{5C22544A-7EE6-4342-B048-85BDC9FD1C3A}</a:tableStyleId>
               </a:tblPr>
               <a:tblGrid>
-                <a:gridCol w="1828800">
-                  <a:extLst>
-                    <a:ext uri="{9D8B030D-6E8A-4147-A177-3AD203B41FA5}">
-                      <a16:colId xmlns:a16="http://schemas.microsoft.com/office/drawing/2014/main" val="20000"/>
-                    </a:ext>
-                  </a:extLst>
-                </a:gridCol>
-                <a:gridCol w="1828800">
-                  <a:extLst>
-                    <a:ext uri="{9D8B030D-6E8A-4147-A177-3AD203B41FA5}">
-                      <a16:colId xmlns:a16="http://schemas.microsoft.com/office/drawing/2014/main" val="20001"/>
-                    </a:ext>
-                  </a:extLst>
-                </a:gridCol>
-                <a:gridCol w="1828800">
-                  <a:extLst>
-                    <a:ext uri="{9D8B030D-6E8A-4147-A177-3AD203B41FA5}">
-                      <a16:colId xmlns:a16="http://schemas.microsoft.com/office/drawing/2014/main" val="20002"/>
-                    </a:ext>
-                  </a:extLst>
-                </a:gridCol>
-                <a:gridCol w="1828800">
-                  <a:extLst>
-                    <a:ext uri="{9D8B030D-6E8A-4147-A177-3AD203B41FA5}">
-                      <a16:colId xmlns:a16="http://schemas.microsoft.com/office/drawing/2014/main" val="20003"/>
-                    </a:ext>
-                  </a:extLst>
-                </a:gridCol>
+                <a:gridCol w="1828800"/>
+                <a:gridCol w="1828800"/>
+                <a:gridCol w="1828800"/>
+                <a:gridCol w="1828800"/>
               </a:tblGrid>
               <a:tr h="513370">
                 <a:tc>
@@ -10607,7 +10061,7 @@
                     <a:p>
                       <a:pPr algn="ctr"/>
                       <a:r>
-                        <a:rPr sz="1100" b="1">
+                        <a:rPr b="1" sz="1100">
                           <a:solidFill>
                             <a:srgbClr val="FFFFFF"/>
                           </a:solidFill>
@@ -10629,7 +10083,7 @@
                     <a:p>
                       <a:pPr algn="ctr"/>
                       <a:r>
-                        <a:rPr sz="1100" b="1">
+                        <a:rPr b="1" sz="1100">
                           <a:solidFill>
                             <a:srgbClr val="FFFFFF"/>
                           </a:solidFill>
@@ -10651,7 +10105,7 @@
                     <a:p>
                       <a:pPr algn="ctr"/>
                       <a:r>
-                        <a:rPr sz="1100" b="1">
+                        <a:rPr b="1" sz="1100">
                           <a:solidFill>
                             <a:srgbClr val="FFFFFF"/>
                           </a:solidFill>
@@ -10673,7 +10127,7 @@
                     <a:p>
                       <a:pPr algn="ctr"/>
                       <a:r>
-                        <a:rPr sz="1100" b="1">
+                        <a:rPr b="1" sz="1100">
                           <a:solidFill>
                             <a:srgbClr val="FFFFFF"/>
                           </a:solidFill>
@@ -10688,11 +10142,6 @@
                     </a:solidFill>
                   </a:tcPr>
                 </a:tc>
-                <a:extLst>
-                  <a:ext uri="{0D108BD9-81ED-4DB2-BD59-A6C34878D82A}">
-                    <a16:rowId xmlns:a16="http://schemas.microsoft.com/office/drawing/2014/main" val="10000"/>
-                  </a:ext>
-                </a:extLst>
               </a:tr>
               <a:tr h="513370">
                 <a:tc>
@@ -10783,11 +10232,6 @@
                     </a:solidFill>
                   </a:tcPr>
                 </a:tc>
-                <a:extLst>
-                  <a:ext uri="{0D108BD9-81ED-4DB2-BD59-A6C34878D82A}">
-                    <a16:rowId xmlns:a16="http://schemas.microsoft.com/office/drawing/2014/main" val="10001"/>
-                  </a:ext>
-                </a:extLst>
               </a:tr>
               <a:tr h="513370">
                 <a:tc>
@@ -10878,11 +10322,6 @@
                     </a:solidFill>
                   </a:tcPr>
                 </a:tc>
-                <a:extLst>
-                  <a:ext uri="{0D108BD9-81ED-4DB2-BD59-A6C34878D82A}">
-                    <a16:rowId xmlns:a16="http://schemas.microsoft.com/office/drawing/2014/main" val="10002"/>
-                  </a:ext>
-                </a:extLst>
               </a:tr>
               <a:tr h="513370">
                 <a:tc>
@@ -10973,11 +10412,6 @@
                     </a:solidFill>
                   </a:tcPr>
                 </a:tc>
-                <a:extLst>
-                  <a:ext uri="{0D108BD9-81ED-4DB2-BD59-A6C34878D82A}">
-                    <a16:rowId xmlns:a16="http://schemas.microsoft.com/office/drawing/2014/main" val="10003"/>
-                  </a:ext>
-                </a:extLst>
               </a:tr>
               <a:tr h="513370">
                 <a:tc>
@@ -11068,11 +10502,6 @@
                     </a:solidFill>
                   </a:tcPr>
                 </a:tc>
-                <a:extLst>
-                  <a:ext uri="{0D108BD9-81ED-4DB2-BD59-A6C34878D82A}">
-                    <a16:rowId xmlns:a16="http://schemas.microsoft.com/office/drawing/2014/main" val="10004"/>
-                  </a:ext>
-                </a:extLst>
               </a:tr>
               <a:tr h="513370">
                 <a:tc>
@@ -11163,11 +10592,6 @@
                     </a:solidFill>
                   </a:tcPr>
                 </a:tc>
-                <a:extLst>
-                  <a:ext uri="{0D108BD9-81ED-4DB2-BD59-A6C34878D82A}">
-                    <a16:rowId xmlns:a16="http://schemas.microsoft.com/office/drawing/2014/main" val="10005"/>
-                  </a:ext>
-                </a:extLst>
               </a:tr>
               <a:tr h="513371">
                 <a:tc>
@@ -11258,11 +10682,6 @@
                     </a:solidFill>
                   </a:tcPr>
                 </a:tc>
-                <a:extLst>
-                  <a:ext uri="{0D108BD9-81ED-4DB2-BD59-A6C34878D82A}">
-                    <a16:rowId xmlns:a16="http://schemas.microsoft.com/office/drawing/2014/main" val="10006"/>
-                  </a:ext>
-                </a:extLst>
               </a:tr>
             </a:tbl>
           </a:graphicData>
@@ -11353,8 +10772,8 @@
         </p:blipFill>
         <p:spPr>
           <a:xfrm>
-            <a:off x="7830726" y="1772528"/>
-            <a:ext cx="4038185" cy="4875159"/>
+            <a:off x="7589520" y="1481328"/>
+            <a:ext cx="4279392" cy="5166360"/>
           </a:xfrm>
           <a:prstGeom prst="rect">
             <a:avLst/>
@@ -11370,7 +10789,7 @@
 </file>
 
 <file path=ppt/slides/slide16.xml><?xml version="1.0" encoding="utf-8"?>
-<p:sld xmlns:a="http://schemas.openxmlformats.org/drawingml/2006/main" xmlns:r="http://schemas.openxmlformats.org/officeDocument/2006/relationships" xmlns:p="http://schemas.openxmlformats.org/presentationml/2006/main">
+<p:sld xmlns:a="http://schemas.openxmlformats.org/drawingml/2006/main" xmlns:p="http://schemas.openxmlformats.org/presentationml/2006/main" xmlns:r="http://schemas.openxmlformats.org/officeDocument/2006/relationships">
   <p:cSld>
     <p:spTree>
       <p:nvGrpSpPr>
@@ -11378,14 +10797,7 @@
         <p:cNvGrpSpPr/>
         <p:nvPr/>
       </p:nvGrpSpPr>
-      <p:grpSpPr>
-        <a:xfrm>
-          <a:off x="0" y="0"/>
-          <a:ext cx="0" cy="0"/>
-          <a:chOff x="0" y="0"/>
-          <a:chExt cx="0" cy="0"/>
-        </a:xfrm>
-      </p:grpSpPr>
+      <p:grpSpPr/>
       <p:sp>
         <p:nvSpPr>
           <p:cNvPr id="2" name="Rectangle 1"/>
@@ -11426,7 +10838,6 @@
           <a:lstStyle/>
           <a:p>
             <a:pPr algn="ctr"/>
-            <a:endParaRPr/>
           </a:p>
         </p:txBody>
       </p:sp>
@@ -11470,7 +10881,6 @@
           <a:lstStyle/>
           <a:p>
             <a:pPr algn="ctr"/>
-            <a:endParaRPr/>
           </a:p>
         </p:txBody>
       </p:sp>
@@ -11552,7 +10962,7 @@
         </p:nvGraphicFramePr>
         <p:xfrm>
           <a:off x="320040" y="1143000"/>
-          <a:ext cx="11521440" cy="2200656"/>
+          <a:ext cx="11521440" cy="2103120"/>
         </p:xfrm>
         <a:graphic>
           <a:graphicData uri="http://schemas.openxmlformats.org/drawingml/2006/table">
@@ -11561,55 +10971,13 @@
                 <a:tableStyleId>{5C22544A-7EE6-4342-B048-85BDC9FD1C3A}</a:tableStyleId>
               </a:tblPr>
               <a:tblGrid>
-                <a:gridCol w="1645920">
-                  <a:extLst>
-                    <a:ext uri="{9D8B030D-6E8A-4147-A177-3AD203B41FA5}">
-                      <a16:colId xmlns:a16="http://schemas.microsoft.com/office/drawing/2014/main" val="20000"/>
-                    </a:ext>
-                  </a:extLst>
-                </a:gridCol>
-                <a:gridCol w="1645920">
-                  <a:extLst>
-                    <a:ext uri="{9D8B030D-6E8A-4147-A177-3AD203B41FA5}">
-                      <a16:colId xmlns:a16="http://schemas.microsoft.com/office/drawing/2014/main" val="20001"/>
-                    </a:ext>
-                  </a:extLst>
-                </a:gridCol>
-                <a:gridCol w="1645920">
-                  <a:extLst>
-                    <a:ext uri="{9D8B030D-6E8A-4147-A177-3AD203B41FA5}">
-                      <a16:colId xmlns:a16="http://schemas.microsoft.com/office/drawing/2014/main" val="20002"/>
-                    </a:ext>
-                  </a:extLst>
-                </a:gridCol>
-                <a:gridCol w="1645920">
-                  <a:extLst>
-                    <a:ext uri="{9D8B030D-6E8A-4147-A177-3AD203B41FA5}">
-                      <a16:colId xmlns:a16="http://schemas.microsoft.com/office/drawing/2014/main" val="20003"/>
-                    </a:ext>
-                  </a:extLst>
-                </a:gridCol>
-                <a:gridCol w="1645920">
-                  <a:extLst>
-                    <a:ext uri="{9D8B030D-6E8A-4147-A177-3AD203B41FA5}">
-                      <a16:colId xmlns:a16="http://schemas.microsoft.com/office/drawing/2014/main" val="20004"/>
-                    </a:ext>
-                  </a:extLst>
-                </a:gridCol>
-                <a:gridCol w="1645920">
-                  <a:extLst>
-                    <a:ext uri="{9D8B030D-6E8A-4147-A177-3AD203B41FA5}">
-                      <a16:colId xmlns:a16="http://schemas.microsoft.com/office/drawing/2014/main" val="20005"/>
-                    </a:ext>
-                  </a:extLst>
-                </a:gridCol>
-                <a:gridCol w="1645920">
-                  <a:extLst>
-                    <a:ext uri="{9D8B030D-6E8A-4147-A177-3AD203B41FA5}">
-                      <a16:colId xmlns:a16="http://schemas.microsoft.com/office/drawing/2014/main" val="20006"/>
-                    </a:ext>
-                  </a:extLst>
-                </a:gridCol>
+                <a:gridCol w="1645920"/>
+                <a:gridCol w="1645920"/>
+                <a:gridCol w="1645920"/>
+                <a:gridCol w="1645920"/>
+                <a:gridCol w="1645920"/>
+                <a:gridCol w="1645920"/>
+                <a:gridCol w="1645920"/>
               </a:tblGrid>
               <a:tr h="420624">
                 <a:tc>
@@ -11619,7 +10987,7 @@
                     <a:p>
                       <a:pPr algn="ctr"/>
                       <a:r>
-                        <a:rPr sz="1000" b="1">
+                        <a:rPr b="1" sz="1000">
                           <a:solidFill>
                             <a:srgbClr val="FFFFFF"/>
                           </a:solidFill>
@@ -11641,7 +11009,7 @@
                     <a:p>
                       <a:pPr algn="ctr"/>
                       <a:r>
-                        <a:rPr sz="1000" b="1">
+                        <a:rPr b="1" sz="1000">
                           <a:solidFill>
                             <a:srgbClr val="FFFFFF"/>
                           </a:solidFill>
@@ -11668,7 +11036,7 @@
                     <a:p>
                       <a:pPr algn="ctr"/>
                       <a:r>
-                        <a:rPr sz="1000" b="1">
+                        <a:rPr b="1" sz="1000">
                           <a:solidFill>
                             <a:srgbClr val="FFFFFF"/>
                           </a:solidFill>
@@ -11695,7 +11063,7 @@
                     <a:p>
                       <a:pPr algn="ctr"/>
                       <a:r>
-                        <a:rPr sz="1000" b="1">
+                        <a:rPr b="1" sz="1000">
                           <a:solidFill>
                             <a:srgbClr val="FFFFFF"/>
                           </a:solidFill>
@@ -11722,7 +11090,7 @@
                     <a:p>
                       <a:pPr algn="ctr"/>
                       <a:r>
-                        <a:rPr sz="1000" b="1">
+                        <a:rPr b="1" sz="1000">
                           <a:solidFill>
                             <a:srgbClr val="FFFFFF"/>
                           </a:solidFill>
@@ -11749,7 +11117,7 @@
                     <a:p>
                       <a:pPr algn="ctr"/>
                       <a:r>
-                        <a:rPr sz="1000" b="1">
+                        <a:rPr b="1" sz="1000">
                           <a:solidFill>
                             <a:srgbClr val="FFFFFF"/>
                           </a:solidFill>
@@ -11771,7 +11139,7 @@
                     <a:p>
                       <a:pPr algn="ctr"/>
                       <a:r>
-                        <a:rPr sz="1000" b="1">
+                        <a:rPr b="1" sz="1000">
                           <a:solidFill>
                             <a:srgbClr val="FFFFFF"/>
                           </a:solidFill>
@@ -11786,11 +11154,6 @@
                     </a:solidFill>
                   </a:tcPr>
                 </a:tc>
-                <a:extLst>
-                  <a:ext uri="{0D108BD9-81ED-4DB2-BD59-A6C34878D82A}">
-                    <a16:rowId xmlns:a16="http://schemas.microsoft.com/office/drawing/2014/main" val="10000"/>
-                  </a:ext>
-                </a:extLst>
               </a:tr>
               <a:tr h="420624">
                 <a:tc>
@@ -11822,7 +11185,7 @@
                     <a:p>
                       <a:pPr algn="ctr"/>
                       <a:r>
-                        <a:rPr sz="1000" dirty="0">
+                        <a:rPr sz="1000">
                           <a:solidFill>
                             <a:srgbClr val="1A1A2E"/>
                           </a:solidFill>
@@ -11866,7 +11229,7 @@
                     <a:p>
                       <a:pPr algn="ctr"/>
                       <a:r>
-                        <a:rPr sz="1000" dirty="0">
+                        <a:rPr sz="1000">
                           <a:solidFill>
                             <a:srgbClr val="1A1A2E"/>
                           </a:solidFill>
@@ -11888,7 +11251,7 @@
                     <a:p>
                       <a:pPr algn="ctr"/>
                       <a:r>
-                        <a:rPr sz="1000" dirty="0">
+                        <a:rPr sz="1000">
                           <a:solidFill>
                             <a:srgbClr val="1A1A2E"/>
                           </a:solidFill>
@@ -11910,7 +11273,7 @@
                     <a:p>
                       <a:pPr algn="ctr"/>
                       <a:r>
-                        <a:rPr sz="1000" dirty="0">
+                        <a:rPr sz="1000">
                           <a:solidFill>
                             <a:srgbClr val="1A1A2E"/>
                           </a:solidFill>
@@ -11932,7 +11295,7 @@
                     <a:p>
                       <a:pPr algn="ctr"/>
                       <a:r>
-                        <a:rPr sz="1000" dirty="0">
+                        <a:rPr sz="1000">
                           <a:solidFill>
                             <a:srgbClr val="1A1A2E"/>
                           </a:solidFill>
@@ -11947,11 +11310,6 @@
                     </a:solidFill>
                   </a:tcPr>
                 </a:tc>
-                <a:extLst>
-                  <a:ext uri="{0D108BD9-81ED-4DB2-BD59-A6C34878D82A}">
-                    <a16:rowId xmlns:a16="http://schemas.microsoft.com/office/drawing/2014/main" val="10001"/>
-                  </a:ext>
-                </a:extLst>
               </a:tr>
               <a:tr h="420624">
                 <a:tc>
@@ -12108,11 +11466,6 @@
                     </a:solidFill>
                   </a:tcPr>
                 </a:tc>
-                <a:extLst>
-                  <a:ext uri="{0D108BD9-81ED-4DB2-BD59-A6C34878D82A}">
-                    <a16:rowId xmlns:a16="http://schemas.microsoft.com/office/drawing/2014/main" val="10002"/>
-                  </a:ext>
-                </a:extLst>
               </a:tr>
               <a:tr h="420624">
                 <a:tc>
@@ -12144,7 +11497,7 @@
                     <a:p>
                       <a:pPr algn="ctr"/>
                       <a:r>
-                        <a:rPr sz="1000" dirty="0">
+                        <a:rPr sz="1000">
                           <a:solidFill>
                             <a:srgbClr val="1A1A2E"/>
                           </a:solidFill>
@@ -12166,7 +11519,7 @@
                     <a:p>
                       <a:pPr algn="ctr"/>
                       <a:r>
-                        <a:rPr sz="1000" dirty="0">
+                        <a:rPr sz="1000">
                           <a:solidFill>
                             <a:srgbClr val="1A1A2E"/>
                           </a:solidFill>
@@ -12188,7 +11541,7 @@
                     <a:p>
                       <a:pPr algn="ctr"/>
                       <a:r>
-                        <a:rPr sz="1000" dirty="0">
+                        <a:rPr sz="1000">
                           <a:solidFill>
                             <a:srgbClr val="1A1A2E"/>
                           </a:solidFill>
@@ -12210,7 +11563,7 @@
                     <a:p>
                       <a:pPr algn="ctr"/>
                       <a:r>
-                        <a:rPr sz="1000" dirty="0">
+                        <a:rPr sz="1000">
                           <a:solidFill>
                             <a:srgbClr val="1A1A2E"/>
                           </a:solidFill>
@@ -12232,7 +11585,7 @@
                     <a:p>
                       <a:pPr algn="ctr"/>
                       <a:r>
-                        <a:rPr sz="1000" dirty="0">
+                        <a:rPr sz="1000">
                           <a:solidFill>
                             <a:srgbClr val="1A1A2E"/>
                           </a:solidFill>
@@ -12254,7 +11607,7 @@
                     <a:p>
                       <a:pPr algn="ctr"/>
                       <a:r>
-                        <a:rPr sz="1000" dirty="0">
+                        <a:rPr sz="1000">
                           <a:solidFill>
                             <a:srgbClr val="1A1A2E"/>
                           </a:solidFill>
@@ -12269,11 +11622,6 @@
                     </a:solidFill>
                   </a:tcPr>
                 </a:tc>
-                <a:extLst>
-                  <a:ext uri="{0D108BD9-81ED-4DB2-BD59-A6C34878D82A}">
-                    <a16:rowId xmlns:a16="http://schemas.microsoft.com/office/drawing/2014/main" val="10003"/>
-                  </a:ext>
-                </a:extLst>
               </a:tr>
               <a:tr h="420624">
                 <a:tc>
@@ -12415,7 +11763,7 @@
                     <a:p>
                       <a:pPr algn="ctr"/>
                       <a:r>
-                        <a:rPr sz="1000" dirty="0">
+                        <a:rPr sz="1000">
                           <a:solidFill>
                             <a:srgbClr val="1A1A2E"/>
                           </a:solidFill>
@@ -12430,11 +11778,6 @@
                     </a:solidFill>
                   </a:tcPr>
                 </a:tc>
-                <a:extLst>
-                  <a:ext uri="{0D108BD9-81ED-4DB2-BD59-A6C34878D82A}">
-                    <a16:rowId xmlns:a16="http://schemas.microsoft.com/office/drawing/2014/main" val="10004"/>
-                  </a:ext>
-                </a:extLst>
               </a:tr>
             </a:tbl>
           </a:graphicData>
@@ -12464,124 +11807,12 @@
           <a:p>
             <a:pPr algn="l"/>
             <a:r>
-              <a:rPr sz="1300" b="1" i="0" dirty="0">
+              <a:rPr sz="1300" b="1" i="0">
                 <a:solidFill>
                   <a:srgbClr val="2E75B6"/>
                 </a:solidFill>
               </a:rPr>
-              <a:t>AEC </a:t>
-            </a:r>
-            <a:r>
-              <a:rPr sz="1300" b="1" i="0" dirty="0" err="1">
-                <a:solidFill>
-                  <a:srgbClr val="2E75B6"/>
-                </a:solidFill>
-              </a:rPr>
-              <a:t>특징</a:t>
-            </a:r>
-            <a:r>
-              <a:rPr sz="1300" b="1" i="0" dirty="0">
-                <a:solidFill>
-                  <a:srgbClr val="2E75B6"/>
-                </a:solidFill>
-              </a:rPr>
-              <a:t> </a:t>
-            </a:r>
-            <a:r>
-              <a:rPr sz="1300" b="1" i="0" dirty="0" err="1">
-                <a:solidFill>
-                  <a:srgbClr val="2E75B6"/>
-                </a:solidFill>
-              </a:rPr>
-              <a:t>추가</a:t>
-            </a:r>
-            <a:r>
-              <a:rPr sz="1300" b="1" i="0" dirty="0">
-                <a:solidFill>
-                  <a:srgbClr val="2E75B6"/>
-                </a:solidFill>
-              </a:rPr>
-              <a:t>(Case1→2)로 R² +2.8%p </a:t>
-            </a:r>
-            <a:r>
-              <a:rPr sz="1300" b="1" i="0" dirty="0" err="1">
-                <a:solidFill>
-                  <a:srgbClr val="2E75B6"/>
-                </a:solidFill>
-              </a:rPr>
-              <a:t>향상</a:t>
-            </a:r>
-            <a:r>
-              <a:rPr sz="1300" b="1" i="0" dirty="0">
-                <a:solidFill>
-                  <a:srgbClr val="2E75B6"/>
-                </a:solidFill>
-              </a:rPr>
-              <a:t>  |  CT </a:t>
-            </a:r>
-            <a:r>
-              <a:rPr sz="1300" b="1" i="0" dirty="0" err="1">
-                <a:solidFill>
-                  <a:srgbClr val="2E75B6"/>
-                </a:solidFill>
-              </a:rPr>
-              <a:t>모델명</a:t>
-            </a:r>
-            <a:r>
-              <a:rPr sz="1300" b="1" i="0" dirty="0">
-                <a:solidFill>
-                  <a:srgbClr val="2E75B6"/>
-                </a:solidFill>
-              </a:rPr>
-              <a:t>/</a:t>
-            </a:r>
-            <a:r>
-              <a:rPr sz="1300" b="1" i="0" dirty="0" err="1">
-                <a:solidFill>
-                  <a:srgbClr val="2E75B6"/>
-                </a:solidFill>
-              </a:rPr>
-              <a:t>kVp</a:t>
-            </a:r>
-            <a:r>
-              <a:rPr sz="1300" b="1" i="0" dirty="0">
-                <a:solidFill>
-                  <a:srgbClr val="2E75B6"/>
-                </a:solidFill>
-              </a:rPr>
-              <a:t> </a:t>
-            </a:r>
-            <a:r>
-              <a:rPr sz="1300" b="1" i="0" dirty="0" err="1">
-                <a:solidFill>
-                  <a:srgbClr val="2E75B6"/>
-                </a:solidFill>
-              </a:rPr>
-              <a:t>추가</a:t>
-            </a:r>
-            <a:r>
-              <a:rPr sz="1300" b="1" i="0" dirty="0">
-                <a:solidFill>
-                  <a:srgbClr val="2E75B6"/>
-                </a:solidFill>
-              </a:rPr>
-              <a:t>(Case2→3)로 </a:t>
-            </a:r>
-            <a:r>
-              <a:rPr sz="1300" b="1" i="0" dirty="0" err="1">
-                <a:solidFill>
-                  <a:srgbClr val="2E75B6"/>
-                </a:solidFill>
-              </a:rPr>
-              <a:t>추가</a:t>
-            </a:r>
-            <a:r>
-              <a:rPr sz="1300" b="1" i="0" dirty="0">
-                <a:solidFill>
-                  <a:srgbClr val="2E75B6"/>
-                </a:solidFill>
-              </a:rPr>
-              <a:t> +4.2%p</a:t>
+              <a:t>AEC 특징 추가(Case1→2)로 R² +5.3% 향상  |  CT 모델명/kVp 추가(Case2→3)로 추가 +7.7% 향상</a:t>
             </a:r>
           </a:p>
         </p:txBody>
@@ -12711,7 +11942,7 @@
 </file>
 
 <file path=ppt/slides/slide17.xml><?xml version="1.0" encoding="utf-8"?>
-<p:sld xmlns:a="http://schemas.openxmlformats.org/drawingml/2006/main" xmlns:r="http://schemas.openxmlformats.org/officeDocument/2006/relationships" xmlns:p="http://schemas.openxmlformats.org/presentationml/2006/main">
+<p:sld xmlns:a="http://schemas.openxmlformats.org/drawingml/2006/main" xmlns:p="http://schemas.openxmlformats.org/presentationml/2006/main" xmlns:r="http://schemas.openxmlformats.org/officeDocument/2006/relationships">
   <p:cSld>
     <p:spTree>
       <p:nvGrpSpPr>
@@ -12719,14 +11950,7 @@
         <p:cNvGrpSpPr/>
         <p:nvPr/>
       </p:nvGrpSpPr>
-      <p:grpSpPr>
-        <a:xfrm>
-          <a:off x="0" y="0"/>
-          <a:ext cx="0" cy="0"/>
-          <a:chOff x="0" y="0"/>
-          <a:chExt cx="0" cy="0"/>
-        </a:xfrm>
-      </p:grpSpPr>
+      <p:grpSpPr/>
       <p:sp>
         <p:nvSpPr>
           <p:cNvPr id="2" name="Rectangle 1"/>
@@ -12767,7 +11991,6 @@
           <a:lstStyle/>
           <a:p>
             <a:pPr algn="ctr"/>
-            <a:endParaRPr/>
           </a:p>
         </p:txBody>
       </p:sp>
@@ -12811,7 +12034,6 @@
           <a:lstStyle/>
           <a:p>
             <a:pPr algn="ctr"/>
-            <a:endParaRPr/>
           </a:p>
         </p:txBody>
       </p:sp>
@@ -12893,7 +12115,7 @@
         </p:nvGraphicFramePr>
         <p:xfrm>
           <a:off x="320040" y="1143000"/>
-          <a:ext cx="11521440" cy="2200656"/>
+          <a:ext cx="11521440" cy="2103120"/>
         </p:xfrm>
         <a:graphic>
           <a:graphicData uri="http://schemas.openxmlformats.org/drawingml/2006/table">
@@ -12902,55 +12124,13 @@
                 <a:tableStyleId>{5C22544A-7EE6-4342-B048-85BDC9FD1C3A}</a:tableStyleId>
               </a:tblPr>
               <a:tblGrid>
-                <a:gridCol w="1645920">
-                  <a:extLst>
-                    <a:ext uri="{9D8B030D-6E8A-4147-A177-3AD203B41FA5}">
-                      <a16:colId xmlns:a16="http://schemas.microsoft.com/office/drawing/2014/main" val="20000"/>
-                    </a:ext>
-                  </a:extLst>
-                </a:gridCol>
-                <a:gridCol w="1645920">
-                  <a:extLst>
-                    <a:ext uri="{9D8B030D-6E8A-4147-A177-3AD203B41FA5}">
-                      <a16:colId xmlns:a16="http://schemas.microsoft.com/office/drawing/2014/main" val="20001"/>
-                    </a:ext>
-                  </a:extLst>
-                </a:gridCol>
-                <a:gridCol w="1645920">
-                  <a:extLst>
-                    <a:ext uri="{9D8B030D-6E8A-4147-A177-3AD203B41FA5}">
-                      <a16:colId xmlns:a16="http://schemas.microsoft.com/office/drawing/2014/main" val="20002"/>
-                    </a:ext>
-                  </a:extLst>
-                </a:gridCol>
-                <a:gridCol w="1645920">
-                  <a:extLst>
-                    <a:ext uri="{9D8B030D-6E8A-4147-A177-3AD203B41FA5}">
-                      <a16:colId xmlns:a16="http://schemas.microsoft.com/office/drawing/2014/main" val="20003"/>
-                    </a:ext>
-                  </a:extLst>
-                </a:gridCol>
-                <a:gridCol w="1645920">
-                  <a:extLst>
-                    <a:ext uri="{9D8B030D-6E8A-4147-A177-3AD203B41FA5}">
-                      <a16:colId xmlns:a16="http://schemas.microsoft.com/office/drawing/2014/main" val="20004"/>
-                    </a:ext>
-                  </a:extLst>
-                </a:gridCol>
-                <a:gridCol w="1645920">
-                  <a:extLst>
-                    <a:ext uri="{9D8B030D-6E8A-4147-A177-3AD203B41FA5}">
-                      <a16:colId xmlns:a16="http://schemas.microsoft.com/office/drawing/2014/main" val="20005"/>
-                    </a:ext>
-                  </a:extLst>
-                </a:gridCol>
-                <a:gridCol w="1645920">
-                  <a:extLst>
-                    <a:ext uri="{9D8B030D-6E8A-4147-A177-3AD203B41FA5}">
-                      <a16:colId xmlns:a16="http://schemas.microsoft.com/office/drawing/2014/main" val="20006"/>
-                    </a:ext>
-                  </a:extLst>
-                </a:gridCol>
+                <a:gridCol w="1645920"/>
+                <a:gridCol w="1645920"/>
+                <a:gridCol w="1645920"/>
+                <a:gridCol w="1645920"/>
+                <a:gridCol w="1645920"/>
+                <a:gridCol w="1645920"/>
+                <a:gridCol w="1645920"/>
               </a:tblGrid>
               <a:tr h="420624">
                 <a:tc>
@@ -12960,7 +12140,7 @@
                     <a:p>
                       <a:pPr algn="ctr"/>
                       <a:r>
-                        <a:rPr sz="1000" b="1">
+                        <a:rPr b="1" sz="1000">
                           <a:solidFill>
                             <a:srgbClr val="FFFFFF"/>
                           </a:solidFill>
@@ -12982,7 +12162,7 @@
                     <a:p>
                       <a:pPr algn="ctr"/>
                       <a:r>
-                        <a:rPr sz="1000" b="1">
+                        <a:rPr b="1" sz="1000">
                           <a:solidFill>
                             <a:srgbClr val="FFFFFF"/>
                           </a:solidFill>
@@ -13009,7 +12189,7 @@
                     <a:p>
                       <a:pPr algn="ctr"/>
                       <a:r>
-                        <a:rPr sz="1000" b="1">
+                        <a:rPr b="1" sz="1000">
                           <a:solidFill>
                             <a:srgbClr val="FFFFFF"/>
                           </a:solidFill>
@@ -13036,7 +12216,7 @@
                     <a:p>
                       <a:pPr algn="ctr"/>
                       <a:r>
-                        <a:rPr sz="1000" b="1">
+                        <a:rPr b="1" sz="1000">
                           <a:solidFill>
                             <a:srgbClr val="FFFFFF"/>
                           </a:solidFill>
@@ -13063,7 +12243,7 @@
                     <a:p>
                       <a:pPr algn="ctr"/>
                       <a:r>
-                        <a:rPr sz="1000" b="1">
+                        <a:rPr b="1" sz="1000">
                           <a:solidFill>
                             <a:srgbClr val="FFFFFF"/>
                           </a:solidFill>
@@ -13090,7 +12270,7 @@
                     <a:p>
                       <a:pPr algn="ctr"/>
                       <a:r>
-                        <a:rPr sz="1000" b="1">
+                        <a:rPr b="1" sz="1000">
                           <a:solidFill>
                             <a:srgbClr val="FFFFFF"/>
                           </a:solidFill>
@@ -13112,7 +12292,7 @@
                     <a:p>
                       <a:pPr algn="ctr"/>
                       <a:r>
-                        <a:rPr sz="1000" b="1">
+                        <a:rPr b="1" sz="1000">
                           <a:solidFill>
                             <a:srgbClr val="FFFFFF"/>
                           </a:solidFill>
@@ -13127,11 +12307,6 @@
                     </a:solidFill>
                   </a:tcPr>
                 </a:tc>
-                <a:extLst>
-                  <a:ext uri="{0D108BD9-81ED-4DB2-BD59-A6C34878D82A}">
-                    <a16:rowId xmlns:a16="http://schemas.microsoft.com/office/drawing/2014/main" val="10000"/>
-                  </a:ext>
-                </a:extLst>
               </a:tr>
               <a:tr h="420624">
                 <a:tc>
@@ -13141,7 +12316,7 @@
                     <a:p>
                       <a:pPr algn="ctr"/>
                       <a:r>
-                        <a:rPr sz="1000" dirty="0">
+                        <a:rPr sz="1000">
                           <a:solidFill>
                             <a:srgbClr val="1A1A2E"/>
                           </a:solidFill>
@@ -13163,7 +12338,7 @@
                     <a:p>
                       <a:pPr algn="ctr"/>
                       <a:r>
-                        <a:rPr sz="1000" dirty="0">
+                        <a:rPr sz="1000">
                           <a:solidFill>
                             <a:srgbClr val="1A1A2E"/>
                           </a:solidFill>
@@ -13185,7 +12360,7 @@
                     <a:p>
                       <a:pPr algn="ctr"/>
                       <a:r>
-                        <a:rPr sz="1000" dirty="0">
+                        <a:rPr sz="1000">
                           <a:solidFill>
                             <a:srgbClr val="1A1A2E"/>
                           </a:solidFill>
@@ -13288,11 +12463,6 @@
                     </a:solidFill>
                   </a:tcPr>
                 </a:tc>
-                <a:extLst>
-                  <a:ext uri="{0D108BD9-81ED-4DB2-BD59-A6C34878D82A}">
-                    <a16:rowId xmlns:a16="http://schemas.microsoft.com/office/drawing/2014/main" val="10001"/>
-                  </a:ext>
-                </a:extLst>
               </a:tr>
               <a:tr h="420624">
                 <a:tc>
@@ -13324,7 +12494,7 @@
                     <a:p>
                       <a:pPr algn="ctr"/>
                       <a:r>
-                        <a:rPr sz="1000" dirty="0">
+                        <a:rPr sz="1000">
                           <a:solidFill>
                             <a:srgbClr val="1A1A2E"/>
                           </a:solidFill>
@@ -13346,7 +12516,7 @@
                     <a:p>
                       <a:pPr algn="ctr"/>
                       <a:r>
-                        <a:rPr sz="1000" dirty="0">
+                        <a:rPr sz="1000">
                           <a:solidFill>
                             <a:srgbClr val="1A1A2E"/>
                           </a:solidFill>
@@ -13368,7 +12538,7 @@
                     <a:p>
                       <a:pPr algn="ctr"/>
                       <a:r>
-                        <a:rPr sz="1000" dirty="0">
+                        <a:rPr sz="1000">
                           <a:solidFill>
                             <a:srgbClr val="1A1A2E"/>
                           </a:solidFill>
@@ -13449,11 +12619,6 @@
                     </a:solidFill>
                   </a:tcPr>
                 </a:tc>
-                <a:extLst>
-                  <a:ext uri="{0D108BD9-81ED-4DB2-BD59-A6C34878D82A}">
-                    <a16:rowId xmlns:a16="http://schemas.microsoft.com/office/drawing/2014/main" val="10002"/>
-                  </a:ext>
-                </a:extLst>
               </a:tr>
               <a:tr h="420624">
                 <a:tc>
@@ -13507,7 +12672,7 @@
                     <a:p>
                       <a:pPr algn="ctr"/>
                       <a:r>
-                        <a:rPr sz="1000" dirty="0">
+                        <a:rPr sz="1000">
                           <a:solidFill>
                             <a:srgbClr val="1A1A2E"/>
                           </a:solidFill>
@@ -13529,7 +12694,7 @@
                     <a:p>
                       <a:pPr algn="ctr"/>
                       <a:r>
-                        <a:rPr sz="1000" dirty="0">
+                        <a:rPr sz="1000">
                           <a:solidFill>
                             <a:srgbClr val="1A1A2E"/>
                           </a:solidFill>
@@ -13551,7 +12716,7 @@
                     <a:p>
                       <a:pPr algn="ctr"/>
                       <a:r>
-                        <a:rPr sz="1000" dirty="0">
+                        <a:rPr sz="1000">
                           <a:solidFill>
                             <a:srgbClr val="1A1A2E"/>
                           </a:solidFill>
@@ -13573,7 +12738,7 @@
                     <a:p>
                       <a:pPr algn="ctr"/>
                       <a:r>
-                        <a:rPr sz="1000" dirty="0">
+                        <a:rPr sz="1000">
                           <a:solidFill>
                             <a:srgbClr val="1A1A2E"/>
                           </a:solidFill>
@@ -13610,11 +12775,6 @@
                     </a:solidFill>
                   </a:tcPr>
                 </a:tc>
-                <a:extLst>
-                  <a:ext uri="{0D108BD9-81ED-4DB2-BD59-A6C34878D82A}">
-                    <a16:rowId xmlns:a16="http://schemas.microsoft.com/office/drawing/2014/main" val="10003"/>
-                  </a:ext>
-                </a:extLst>
               </a:tr>
               <a:tr h="420624">
                 <a:tc>
@@ -13712,7 +12872,7 @@
                     <a:p>
                       <a:pPr algn="ctr"/>
                       <a:r>
-                        <a:rPr sz="1000" dirty="0">
+                        <a:rPr sz="1000">
                           <a:solidFill>
                             <a:srgbClr val="1A1A2E"/>
                           </a:solidFill>
@@ -13734,34 +12894,13 @@
                     <a:p>
                       <a:pPr algn="ctr"/>
                       <a:r>
-                        <a:rPr sz="1000" dirty="0" err="1">
-                          <a:solidFill>
-                            <a:srgbClr val="1A1A2E"/>
-                          </a:solidFill>
-                        </a:rPr>
-                        <a:t>보정도</a:t>
-                      </a:r>
-                      <a:r>
-                        <a:rPr sz="1000" dirty="0">
-                          <a:solidFill>
-                            <a:srgbClr val="1A1A2E"/>
-                          </a:solidFill>
-                        </a:rPr>
-                        <a:t> </a:t>
-                      </a:r>
-                      <a:r>
-                        <a:rPr sz="1000" dirty="0" err="1">
-                          <a:solidFill>
-                            <a:srgbClr val="1A1A2E"/>
-                          </a:solidFill>
-                        </a:rPr>
-                        <a:t>개선</a:t>
-                      </a:r>
-                      <a:endParaRPr sz="1000" dirty="0">
-                        <a:solidFill>
-                          <a:srgbClr val="1A1A2E"/>
-                        </a:solidFill>
-                      </a:endParaRPr>
+                        <a:rPr sz="1000">
+                          <a:solidFill>
+                            <a:srgbClr val="1A1A2E"/>
+                          </a:solidFill>
+                        </a:rPr>
+                        <a:t>보정도 개선</a:t>
+                      </a:r>
                     </a:p>
                   </a:txBody>
                   <a:tcPr>
@@ -13777,34 +12916,13 @@
                     <a:p>
                       <a:pPr algn="ctr"/>
                       <a:r>
-                        <a:rPr sz="1000" dirty="0" err="1">
-                          <a:solidFill>
-                            <a:srgbClr val="1A1A2E"/>
-                          </a:solidFill>
-                        </a:rPr>
-                        <a:t>보정도</a:t>
-                      </a:r>
-                      <a:r>
-                        <a:rPr sz="1000" dirty="0">
-                          <a:solidFill>
-                            <a:srgbClr val="1A1A2E"/>
-                          </a:solidFill>
-                        </a:rPr>
-                        <a:t> </a:t>
-                      </a:r>
-                      <a:r>
-                        <a:rPr sz="1000" dirty="0" err="1">
-                          <a:solidFill>
-                            <a:srgbClr val="1A1A2E"/>
-                          </a:solidFill>
-                        </a:rPr>
-                        <a:t>양호</a:t>
-                      </a:r>
-                      <a:endParaRPr sz="1000" dirty="0">
-                        <a:solidFill>
-                          <a:srgbClr val="1A1A2E"/>
-                        </a:solidFill>
-                      </a:endParaRPr>
+                        <a:rPr sz="1000">
+                          <a:solidFill>
+                            <a:srgbClr val="1A1A2E"/>
+                          </a:solidFill>
+                        </a:rPr>
+                        <a:t>보정도 양호</a:t>
+                      </a:r>
                     </a:p>
                   </a:txBody>
                   <a:tcPr>
@@ -13813,11 +12931,6 @@
                     </a:solidFill>
                   </a:tcPr>
                 </a:tc>
-                <a:extLst>
-                  <a:ext uri="{0D108BD9-81ED-4DB2-BD59-A6C34878D82A}">
-                    <a16:rowId xmlns:a16="http://schemas.microsoft.com/office/drawing/2014/main" val="10004"/>
-                  </a:ext>
-                </a:extLst>
               </a:tr>
             </a:tbl>
           </a:graphicData>
@@ -13847,122 +12960,13 @@
           <a:p>
             <a:pPr algn="l"/>
             <a:r>
-              <a:rPr sz="1300" b="1" i="0" dirty="0">
+              <a:rPr sz="1300" b="1" i="0">
                 <a:solidFill>
                   <a:srgbClr val="2E75B6"/>
                 </a:solidFill>
               </a:rPr>
-              <a:t>AEC </a:t>
-            </a:r>
-            <a:r>
-              <a:rPr sz="1300" b="1" i="0" dirty="0" err="1">
-                <a:solidFill>
-                  <a:srgbClr val="2E75B6"/>
-                </a:solidFill>
-              </a:rPr>
-              <a:t>추가</a:t>
-            </a:r>
-            <a:r>
-              <a:rPr sz="1300" b="1" i="0" dirty="0">
-                <a:solidFill>
-                  <a:srgbClr val="2E75B6"/>
-                </a:solidFill>
-              </a:rPr>
-              <a:t>(Case1→2)로 AUC +4.0%p </a:t>
-            </a:r>
-            <a:r>
-              <a:rPr sz="1300" b="1" i="0" dirty="0" err="1">
-                <a:solidFill>
-                  <a:srgbClr val="2E75B6"/>
-                </a:solidFill>
-              </a:rPr>
-              <a:t>향상</a:t>
-            </a:r>
-            <a:r>
-              <a:rPr sz="1300" b="1" i="0" dirty="0">
-                <a:solidFill>
-                  <a:srgbClr val="2E75B6"/>
-                </a:solidFill>
-              </a:rPr>
-              <a:t>  |  CT </a:t>
-            </a:r>
-            <a:r>
-              <a:rPr sz="1300" b="1" i="0" dirty="0" err="1">
-                <a:solidFill>
-                  <a:srgbClr val="2E75B6"/>
-                </a:solidFill>
-              </a:rPr>
-              <a:t>모델명</a:t>
-            </a:r>
-            <a:r>
-              <a:rPr sz="1300" b="1" i="0" dirty="0">
-                <a:solidFill>
-                  <a:srgbClr val="2E75B6"/>
-                </a:solidFill>
-              </a:rPr>
-              <a:t>/</a:t>
-            </a:r>
-            <a:r>
-              <a:rPr sz="1300" b="1" i="0" dirty="0" err="1">
-                <a:solidFill>
-                  <a:srgbClr val="2E75B6"/>
-                </a:solidFill>
-              </a:rPr>
-              <a:t>kVp</a:t>
-            </a:r>
-            <a:r>
-              <a:rPr sz="1300" b="1" i="0" dirty="0">
-                <a:solidFill>
-                  <a:srgbClr val="2E75B6"/>
-                </a:solidFill>
-              </a:rPr>
-              <a:t> </a:t>
-            </a:r>
-            <a:r>
-              <a:rPr sz="1300" b="1" i="0" dirty="0" err="1">
-                <a:solidFill>
-                  <a:srgbClr val="2E75B6"/>
-                </a:solidFill>
-              </a:rPr>
-              <a:t>추가</a:t>
-            </a:r>
-            <a:r>
-              <a:rPr sz="1300" b="1" i="0" dirty="0">
-                <a:solidFill>
-                  <a:srgbClr val="2E75B6"/>
-                </a:solidFill>
-              </a:rPr>
-              <a:t>(Case2→3)로 +7.8%p </a:t>
-            </a:r>
-            <a:r>
-              <a:rPr sz="1300" b="1" i="0" dirty="0" err="1">
-                <a:solidFill>
-                  <a:srgbClr val="2E75B6"/>
-                </a:solidFill>
-              </a:rPr>
-              <a:t>추가</a:t>
-            </a:r>
-            <a:r>
-              <a:rPr sz="1300" b="1" i="0" dirty="0">
-                <a:solidFill>
-                  <a:srgbClr val="2E75B6"/>
-                </a:solidFill>
-              </a:rPr>
-              <a:t> </a:t>
-            </a:r>
-            <a:r>
-              <a:rPr sz="1300" b="1" i="0" dirty="0" err="1">
-                <a:solidFill>
-                  <a:srgbClr val="2E75B6"/>
-                </a:solidFill>
-              </a:rPr>
-              <a:t>개선</a:t>
-            </a:r>
-            <a:endParaRPr sz="1300" b="1" i="0" dirty="0">
-              <a:solidFill>
-                <a:srgbClr val="2E75B6"/>
-              </a:solidFill>
-            </a:endParaRPr>
+              <a:t>AEC 추가(Case1→2)로 AUC +6.6% 향상  |  CT 모델명/kVp 추가(Case2→3)로 +12.1% 추가 개선</a:t>
+            </a:r>
           </a:p>
         </p:txBody>
       </p:sp>
@@ -14091,7 +13095,7 @@
 </file>
 
 <file path=ppt/slides/slide18.xml><?xml version="1.0" encoding="utf-8"?>
-<p:sld xmlns:a="http://schemas.openxmlformats.org/drawingml/2006/main" xmlns:r="http://schemas.openxmlformats.org/officeDocument/2006/relationships" xmlns:p="http://schemas.openxmlformats.org/presentationml/2006/main">
+<p:sld xmlns:a="http://schemas.openxmlformats.org/drawingml/2006/main" xmlns:p="http://schemas.openxmlformats.org/presentationml/2006/main" xmlns:r="http://schemas.openxmlformats.org/officeDocument/2006/relationships">
   <p:cSld>
     <p:spTree>
       <p:nvGrpSpPr>
@@ -14099,14 +13103,7 @@
         <p:cNvGrpSpPr/>
         <p:nvPr/>
       </p:nvGrpSpPr>
-      <p:grpSpPr>
-        <a:xfrm>
-          <a:off x="0" y="0"/>
-          <a:ext cx="0" cy="0"/>
-          <a:chOff x="0" y="0"/>
-          <a:chExt cx="0" cy="0"/>
-        </a:xfrm>
-      </p:grpSpPr>
+      <p:grpSpPr/>
       <p:sp>
         <p:nvSpPr>
           <p:cNvPr id="2" name="Rectangle 1"/>
@@ -14147,7 +13144,6 @@
           <a:lstStyle/>
           <a:p>
             <a:pPr algn="ctr"/>
-            <a:endParaRPr/>
           </a:p>
         </p:txBody>
       </p:sp>
@@ -14191,7 +13187,6 @@
           <a:lstStyle/>
           <a:p>
             <a:pPr algn="ctr"/>
-            <a:endParaRPr/>
           </a:p>
         </p:txBody>
       </p:sp>
@@ -14337,7 +13332,6 @@
           <a:lstStyle/>
           <a:p>
             <a:pPr algn="ctr"/>
-            <a:endParaRPr/>
           </a:p>
         </p:txBody>
       </p:sp>
@@ -14484,7 +13478,6 @@
           <a:lstStyle/>
           <a:p>
             <a:pPr algn="ctr"/>
-            <a:endParaRPr/>
           </a:p>
         </p:txBody>
       </p:sp>
@@ -14631,7 +13624,6 @@
           <a:lstStyle/>
           <a:p>
             <a:pPr algn="ctr"/>
-            <a:endParaRPr/>
           </a:p>
         </p:txBody>
       </p:sp>
@@ -14778,7 +13770,6 @@
           <a:lstStyle/>
           <a:p>
             <a:pPr algn="ctr"/>
-            <a:endParaRPr/>
           </a:p>
         </p:txBody>
       </p:sp>
@@ -14904,41 +13895,11 @@
                 <a:tableStyleId>{5C22544A-7EE6-4342-B048-85BDC9FD1C3A}</a:tableStyleId>
               </a:tblPr>
               <a:tblGrid>
-                <a:gridCol w="2304288">
-                  <a:extLst>
-                    <a:ext uri="{9D8B030D-6E8A-4147-A177-3AD203B41FA5}">
-                      <a16:colId xmlns:a16="http://schemas.microsoft.com/office/drawing/2014/main" val="20000"/>
-                    </a:ext>
-                  </a:extLst>
-                </a:gridCol>
-                <a:gridCol w="2304288">
-                  <a:extLst>
-                    <a:ext uri="{9D8B030D-6E8A-4147-A177-3AD203B41FA5}">
-                      <a16:colId xmlns:a16="http://schemas.microsoft.com/office/drawing/2014/main" val="20001"/>
-                    </a:ext>
-                  </a:extLst>
-                </a:gridCol>
-                <a:gridCol w="2304288">
-                  <a:extLst>
-                    <a:ext uri="{9D8B030D-6E8A-4147-A177-3AD203B41FA5}">
-                      <a16:colId xmlns:a16="http://schemas.microsoft.com/office/drawing/2014/main" val="20002"/>
-                    </a:ext>
-                  </a:extLst>
-                </a:gridCol>
-                <a:gridCol w="2304288">
-                  <a:extLst>
-                    <a:ext uri="{9D8B030D-6E8A-4147-A177-3AD203B41FA5}">
-                      <a16:colId xmlns:a16="http://schemas.microsoft.com/office/drawing/2014/main" val="20003"/>
-                    </a:ext>
-                  </a:extLst>
-                </a:gridCol>
-                <a:gridCol w="2304288">
-                  <a:extLst>
-                    <a:ext uri="{9D8B030D-6E8A-4147-A177-3AD203B41FA5}">
-                      <a16:colId xmlns:a16="http://schemas.microsoft.com/office/drawing/2014/main" val="20004"/>
-                    </a:ext>
-                  </a:extLst>
-                </a:gridCol>
+                <a:gridCol w="2304288"/>
+                <a:gridCol w="2304288"/>
+                <a:gridCol w="2304288"/>
+                <a:gridCol w="2304288"/>
+                <a:gridCol w="2304288"/>
               </a:tblGrid>
               <a:tr h="420624">
                 <a:tc>
@@ -14948,7 +13909,7 @@
                     <a:p>
                       <a:pPr algn="ctr"/>
                       <a:r>
-                        <a:rPr sz="1000" b="1">
+                        <a:rPr b="1" sz="1000">
                           <a:solidFill>
                             <a:srgbClr val="FFFFFF"/>
                           </a:solidFill>
@@ -14970,7 +13931,7 @@
                     <a:p>
                       <a:pPr algn="ctr"/>
                       <a:r>
-                        <a:rPr sz="1000" b="1">
+                        <a:rPr b="1" sz="1000">
                           <a:solidFill>
                             <a:srgbClr val="FFFFFF"/>
                           </a:solidFill>
@@ -14997,7 +13958,7 @@
                     <a:p>
                       <a:pPr algn="ctr"/>
                       <a:r>
-                        <a:rPr sz="1000" b="1">
+                        <a:rPr b="1" sz="1000">
                           <a:solidFill>
                             <a:srgbClr val="FFFFFF"/>
                           </a:solidFill>
@@ -15024,7 +13985,7 @@
                     <a:p>
                       <a:pPr algn="ctr"/>
                       <a:r>
-                        <a:rPr sz="1000" b="1">
+                        <a:rPr b="1" sz="1000">
                           <a:solidFill>
                             <a:srgbClr val="FFFFFF"/>
                           </a:solidFill>
@@ -15046,7 +14007,7 @@
                     <a:p>
                       <a:pPr algn="ctr"/>
                       <a:r>
-                        <a:rPr sz="1000" b="1">
+                        <a:rPr b="1" sz="1000">
                           <a:solidFill>
                             <a:srgbClr val="FFFFFF"/>
                           </a:solidFill>
@@ -15061,11 +14022,6 @@
                     </a:solidFill>
                   </a:tcPr>
                 </a:tc>
-                <a:extLst>
-                  <a:ext uri="{0D108BD9-81ED-4DB2-BD59-A6C34878D82A}">
-                    <a16:rowId xmlns:a16="http://schemas.microsoft.com/office/drawing/2014/main" val="10000"/>
-                  </a:ext>
-                </a:extLst>
               </a:tr>
               <a:tr h="420624">
                 <a:tc>
@@ -15178,11 +14134,6 @@
                     </a:solidFill>
                   </a:tcPr>
                 </a:tc>
-                <a:extLst>
-                  <a:ext uri="{0D108BD9-81ED-4DB2-BD59-A6C34878D82A}">
-                    <a16:rowId xmlns:a16="http://schemas.microsoft.com/office/drawing/2014/main" val="10001"/>
-                  </a:ext>
-                </a:extLst>
               </a:tr>
               <a:tr h="420624">
                 <a:tc>
@@ -15295,11 +14246,6 @@
                     </a:solidFill>
                   </a:tcPr>
                 </a:tc>
-                <a:extLst>
-                  <a:ext uri="{0D108BD9-81ED-4DB2-BD59-A6C34878D82A}">
-                    <a16:rowId xmlns:a16="http://schemas.microsoft.com/office/drawing/2014/main" val="10002"/>
-                  </a:ext>
-                </a:extLst>
               </a:tr>
               <a:tr h="420624">
                 <a:tc>
@@ -15412,11 +14358,6 @@
                     </a:solidFill>
                   </a:tcPr>
                 </a:tc>
-                <a:extLst>
-                  <a:ext uri="{0D108BD9-81ED-4DB2-BD59-A6C34878D82A}">
-                    <a16:rowId xmlns:a16="http://schemas.microsoft.com/office/drawing/2014/main" val="10003"/>
-                  </a:ext>
-                </a:extLst>
               </a:tr>
               <a:tr h="420624">
                 <a:tc>
@@ -15529,11 +14470,6 @@
                     </a:solidFill>
                   </a:tcPr>
                 </a:tc>
-                <a:extLst>
-                  <a:ext uri="{0D108BD9-81ED-4DB2-BD59-A6C34878D82A}">
-                    <a16:rowId xmlns:a16="http://schemas.microsoft.com/office/drawing/2014/main" val="10004"/>
-                  </a:ext>
-                </a:extLst>
               </a:tr>
             </a:tbl>
           </a:graphicData>
@@ -15579,7 +14515,6 @@
           <a:lstStyle/>
           <a:p>
             <a:pPr algn="ctr"/>
-            <a:endParaRPr/>
           </a:p>
         </p:txBody>
       </p:sp>
@@ -15626,7 +14561,7 @@
 </file>
 
 <file path=ppt/slides/slide19.xml><?xml version="1.0" encoding="utf-8"?>
-<p:sld xmlns:a="http://schemas.openxmlformats.org/drawingml/2006/main" xmlns:r="http://schemas.openxmlformats.org/officeDocument/2006/relationships" xmlns:p="http://schemas.openxmlformats.org/presentationml/2006/main">
+<p:sld xmlns:a="http://schemas.openxmlformats.org/drawingml/2006/main" xmlns:p="http://schemas.openxmlformats.org/presentationml/2006/main" xmlns:r="http://schemas.openxmlformats.org/officeDocument/2006/relationships">
   <p:cSld>
     <p:spTree>
       <p:nvGrpSpPr>
@@ -15634,14 +14569,7 @@
         <p:cNvGrpSpPr/>
         <p:nvPr/>
       </p:nvGrpSpPr>
-      <p:grpSpPr>
-        <a:xfrm>
-          <a:off x="0" y="0"/>
-          <a:ext cx="0" cy="0"/>
-          <a:chOff x="0" y="0"/>
-          <a:chExt cx="0" cy="0"/>
-        </a:xfrm>
-      </p:grpSpPr>
+      <p:grpSpPr/>
       <p:sp>
         <p:nvSpPr>
           <p:cNvPr id="2" name="Rectangle 1"/>
@@ -15682,7 +14610,6 @@
           <a:lstStyle/>
           <a:p>
             <a:pPr algn="ctr"/>
-            <a:endParaRPr/>
           </a:p>
         </p:txBody>
       </p:sp>
@@ -15726,7 +14653,6 @@
           <a:lstStyle/>
           <a:p>
             <a:pPr algn="ctr"/>
-            <a:endParaRPr/>
           </a:p>
         </p:txBody>
       </p:sp>
@@ -15851,20 +14777,8 @@
                 <a:tableStyleId>{5C22544A-7EE6-4342-B048-85BDC9FD1C3A}</a:tableStyleId>
               </a:tblPr>
               <a:tblGrid>
-                <a:gridCol w="2880360">
-                  <a:extLst>
-                    <a:ext uri="{9D8B030D-6E8A-4147-A177-3AD203B41FA5}">
-                      <a16:colId xmlns:a16="http://schemas.microsoft.com/office/drawing/2014/main" val="20000"/>
-                    </a:ext>
-                  </a:extLst>
-                </a:gridCol>
-                <a:gridCol w="2880360">
-                  <a:extLst>
-                    <a:ext uri="{9D8B030D-6E8A-4147-A177-3AD203B41FA5}">
-                      <a16:colId xmlns:a16="http://schemas.microsoft.com/office/drawing/2014/main" val="20001"/>
-                    </a:ext>
-                  </a:extLst>
-                </a:gridCol>
+                <a:gridCol w="2880360"/>
+                <a:gridCol w="2880360"/>
               </a:tblGrid>
               <a:tr h="431074">
                 <a:tc>
@@ -15874,7 +14788,7 @@
                     <a:p>
                       <a:pPr algn="ctr"/>
                       <a:r>
-                        <a:rPr sz="1000" b="1">
+                        <a:rPr b="1" sz="1000">
                           <a:solidFill>
                             <a:srgbClr val="FFFFFF"/>
                           </a:solidFill>
@@ -15896,7 +14810,7 @@
                     <a:p>
                       <a:pPr algn="ctr"/>
                       <a:r>
-                        <a:rPr sz="1000" b="1">
+                        <a:rPr b="1" sz="1000">
                           <a:solidFill>
                             <a:srgbClr val="FFFFFF"/>
                           </a:solidFill>
@@ -15911,11 +14825,6 @@
                     </a:solidFill>
                   </a:tcPr>
                 </a:tc>
-                <a:extLst>
-                  <a:ext uri="{0D108BD9-81ED-4DB2-BD59-A6C34878D82A}">
-                    <a16:rowId xmlns:a16="http://schemas.microsoft.com/office/drawing/2014/main" val="10000"/>
-                  </a:ext>
-                </a:extLst>
               </a:tr>
               <a:tr h="431074">
                 <a:tc>
@@ -15962,11 +14871,6 @@
                     </a:solidFill>
                   </a:tcPr>
                 </a:tc>
-                <a:extLst>
-                  <a:ext uri="{0D108BD9-81ED-4DB2-BD59-A6C34878D82A}">
-                    <a16:rowId xmlns:a16="http://schemas.microsoft.com/office/drawing/2014/main" val="10001"/>
-                  </a:ext>
-                </a:extLst>
               </a:tr>
               <a:tr h="431074">
                 <a:tc>
@@ -16013,11 +14917,6 @@
                     </a:solidFill>
                   </a:tcPr>
                 </a:tc>
-                <a:extLst>
-                  <a:ext uri="{0D108BD9-81ED-4DB2-BD59-A6C34878D82A}">
-                    <a16:rowId xmlns:a16="http://schemas.microsoft.com/office/drawing/2014/main" val="10002"/>
-                  </a:ext>
-                </a:extLst>
               </a:tr>
               <a:tr h="431074">
                 <a:tc>
@@ -16064,11 +14963,6 @@
                     </a:solidFill>
                   </a:tcPr>
                 </a:tc>
-                <a:extLst>
-                  <a:ext uri="{0D108BD9-81ED-4DB2-BD59-A6C34878D82A}">
-                    <a16:rowId xmlns:a16="http://schemas.microsoft.com/office/drawing/2014/main" val="10003"/>
-                  </a:ext>
-                </a:extLst>
               </a:tr>
               <a:tr h="431074">
                 <a:tc>
@@ -16115,11 +15009,6 @@
                     </a:solidFill>
                   </a:tcPr>
                 </a:tc>
-                <a:extLst>
-                  <a:ext uri="{0D108BD9-81ED-4DB2-BD59-A6C34878D82A}">
-                    <a16:rowId xmlns:a16="http://schemas.microsoft.com/office/drawing/2014/main" val="10004"/>
-                  </a:ext>
-                </a:extLst>
               </a:tr>
               <a:tr h="431074">
                 <a:tc>
@@ -16166,11 +15055,6 @@
                     </a:solidFill>
                   </a:tcPr>
                 </a:tc>
-                <a:extLst>
-                  <a:ext uri="{0D108BD9-81ED-4DB2-BD59-A6C34878D82A}">
-                    <a16:rowId xmlns:a16="http://schemas.microsoft.com/office/drawing/2014/main" val="10005"/>
-                  </a:ext>
-                </a:extLst>
               </a:tr>
               <a:tr h="431076">
                 <a:tc>
@@ -16217,11 +15101,6 @@
                     </a:solidFill>
                   </a:tcPr>
                 </a:tc>
-                <a:extLst>
-                  <a:ext uri="{0D108BD9-81ED-4DB2-BD59-A6C34878D82A}">
-                    <a16:rowId xmlns:a16="http://schemas.microsoft.com/office/drawing/2014/main" val="10006"/>
-                  </a:ext>
-                </a:extLst>
               </a:tr>
             </a:tbl>
           </a:graphicData>
@@ -16280,20 +15159,8 @@
                 <a:tableStyleId>{5C22544A-7EE6-4342-B048-85BDC9FD1C3A}</a:tableStyleId>
               </a:tblPr>
               <a:tblGrid>
-                <a:gridCol w="2825496">
-                  <a:extLst>
-                    <a:ext uri="{9D8B030D-6E8A-4147-A177-3AD203B41FA5}">
-                      <a16:colId xmlns:a16="http://schemas.microsoft.com/office/drawing/2014/main" val="20000"/>
-                    </a:ext>
-                  </a:extLst>
-                </a:gridCol>
-                <a:gridCol w="2825496">
-                  <a:extLst>
-                    <a:ext uri="{9D8B030D-6E8A-4147-A177-3AD203B41FA5}">
-                      <a16:colId xmlns:a16="http://schemas.microsoft.com/office/drawing/2014/main" val="20001"/>
-                    </a:ext>
-                  </a:extLst>
-                </a:gridCol>
+                <a:gridCol w="2825496"/>
+                <a:gridCol w="2825496"/>
               </a:tblGrid>
               <a:tr h="422910">
                 <a:tc>
@@ -16303,7 +15170,7 @@
                     <a:p>
                       <a:pPr algn="ctr"/>
                       <a:r>
-                        <a:rPr sz="1000" b="1">
+                        <a:rPr b="1" sz="1000">
                           <a:solidFill>
                             <a:srgbClr val="FFFFFF"/>
                           </a:solidFill>
@@ -16325,7 +15192,7 @@
                     <a:p>
                       <a:pPr algn="ctr"/>
                       <a:r>
-                        <a:rPr sz="1000" b="1">
+                        <a:rPr b="1" sz="1000">
                           <a:solidFill>
                             <a:srgbClr val="FFFFFF"/>
                           </a:solidFill>
@@ -16340,11 +15207,6 @@
                     </a:solidFill>
                   </a:tcPr>
                 </a:tc>
-                <a:extLst>
-                  <a:ext uri="{0D108BD9-81ED-4DB2-BD59-A6C34878D82A}">
-                    <a16:rowId xmlns:a16="http://schemas.microsoft.com/office/drawing/2014/main" val="10000"/>
-                  </a:ext>
-                </a:extLst>
               </a:tr>
               <a:tr h="422910">
                 <a:tc>
@@ -16391,11 +15253,6 @@
                     </a:solidFill>
                   </a:tcPr>
                 </a:tc>
-                <a:extLst>
-                  <a:ext uri="{0D108BD9-81ED-4DB2-BD59-A6C34878D82A}">
-                    <a16:rowId xmlns:a16="http://schemas.microsoft.com/office/drawing/2014/main" val="10001"/>
-                  </a:ext>
-                </a:extLst>
               </a:tr>
               <a:tr h="422910">
                 <a:tc>
@@ -16442,11 +15299,6 @@
                     </a:solidFill>
                   </a:tcPr>
                 </a:tc>
-                <a:extLst>
-                  <a:ext uri="{0D108BD9-81ED-4DB2-BD59-A6C34878D82A}">
-                    <a16:rowId xmlns:a16="http://schemas.microsoft.com/office/drawing/2014/main" val="10002"/>
-                  </a:ext>
-                </a:extLst>
               </a:tr>
               <a:tr h="422910">
                 <a:tc>
@@ -16493,11 +15345,6 @@
                     </a:solidFill>
                   </a:tcPr>
                 </a:tc>
-                <a:extLst>
-                  <a:ext uri="{0D108BD9-81ED-4DB2-BD59-A6C34878D82A}">
-                    <a16:rowId xmlns:a16="http://schemas.microsoft.com/office/drawing/2014/main" val="10003"/>
-                  </a:ext>
-                </a:extLst>
               </a:tr>
               <a:tr h="422910">
                 <a:tc>
@@ -16544,11 +15391,6 @@
                     </a:solidFill>
                   </a:tcPr>
                 </a:tc>
-                <a:extLst>
-                  <a:ext uri="{0D108BD9-81ED-4DB2-BD59-A6C34878D82A}">
-                    <a16:rowId xmlns:a16="http://schemas.microsoft.com/office/drawing/2014/main" val="10004"/>
-                  </a:ext>
-                </a:extLst>
               </a:tr>
               <a:tr h="422910">
                 <a:tc>
@@ -16595,11 +15437,6 @@
                     </a:solidFill>
                   </a:tcPr>
                 </a:tc>
-                <a:extLst>
-                  <a:ext uri="{0D108BD9-81ED-4DB2-BD59-A6C34878D82A}">
-                    <a16:rowId xmlns:a16="http://schemas.microsoft.com/office/drawing/2014/main" val="10005"/>
-                  </a:ext>
-                </a:extLst>
               </a:tr>
               <a:tr h="422910">
                 <a:tc>
@@ -16646,11 +15483,6 @@
                     </a:solidFill>
                   </a:tcPr>
                 </a:tc>
-                <a:extLst>
-                  <a:ext uri="{0D108BD9-81ED-4DB2-BD59-A6C34878D82A}">
-                    <a16:rowId xmlns:a16="http://schemas.microsoft.com/office/drawing/2014/main" val="10006"/>
-                  </a:ext>
-                </a:extLst>
               </a:tr>
               <a:tr h="422910">
                 <a:tc>
@@ -16697,11 +15529,6 @@
                     </a:solidFill>
                   </a:tcPr>
                 </a:tc>
-                <a:extLst>
-                  <a:ext uri="{0D108BD9-81ED-4DB2-BD59-A6C34878D82A}">
-                    <a16:rowId xmlns:a16="http://schemas.microsoft.com/office/drawing/2014/main" val="10007"/>
-                  </a:ext>
-                </a:extLst>
               </a:tr>
             </a:tbl>
           </a:graphicData>
@@ -16747,7 +15574,6 @@
           <a:lstStyle/>
           <a:p>
             <a:pPr algn="ctr"/>
-            <a:endParaRPr/>
           </a:p>
         </p:txBody>
       </p:sp>
@@ -16861,7 +15687,6 @@
           <a:lstStyle/>
           <a:p>
             <a:pPr algn="ctr"/>
-            <a:endParaRPr/>
           </a:p>
         </p:txBody>
       </p:sp>
@@ -16944,7 +15769,7 @@
 </file>
 
 <file path=ppt/slides/slide2.xml><?xml version="1.0" encoding="utf-8"?>
-<p:sld xmlns:a="http://schemas.openxmlformats.org/drawingml/2006/main" xmlns:r="http://schemas.openxmlformats.org/officeDocument/2006/relationships" xmlns:p="http://schemas.openxmlformats.org/presentationml/2006/main">
+<p:sld xmlns:a="http://schemas.openxmlformats.org/drawingml/2006/main" xmlns:p="http://schemas.openxmlformats.org/presentationml/2006/main" xmlns:r="http://schemas.openxmlformats.org/officeDocument/2006/relationships">
   <p:cSld>
     <p:spTree>
       <p:nvGrpSpPr>
@@ -16952,14 +15777,7 @@
         <p:cNvGrpSpPr/>
         <p:nvPr/>
       </p:nvGrpSpPr>
-      <p:grpSpPr>
-        <a:xfrm>
-          <a:off x="0" y="0"/>
-          <a:ext cx="0" cy="0"/>
-          <a:chOff x="0" y="0"/>
-          <a:chExt cx="0" cy="0"/>
-        </a:xfrm>
-      </p:grpSpPr>
+      <p:grpSpPr/>
       <p:sp>
         <p:nvSpPr>
           <p:cNvPr id="2" name="Rectangle 1"/>
@@ -17000,7 +15818,6 @@
           <a:lstStyle/>
           <a:p>
             <a:pPr algn="ctr"/>
-            <a:endParaRPr/>
           </a:p>
         </p:txBody>
       </p:sp>
@@ -17044,7 +15861,6 @@
           <a:lstStyle/>
           <a:p>
             <a:pPr algn="ctr"/>
-            <a:endParaRPr/>
           </a:p>
         </p:txBody>
       </p:sp>
@@ -17156,7 +15972,6 @@
           <a:lstStyle/>
           <a:p>
             <a:pPr algn="ctr"/>
-            <a:endParaRPr/>
           </a:p>
         </p:txBody>
       </p:sp>
@@ -17302,7 +16117,6 @@
           <a:lstStyle/>
           <a:p>
             <a:pPr algn="ctr"/>
-            <a:endParaRPr/>
           </a:p>
         </p:txBody>
       </p:sp>
@@ -17448,7 +16262,6 @@
           <a:lstStyle/>
           <a:p>
             <a:pPr algn="ctr"/>
-            <a:endParaRPr/>
           </a:p>
         </p:txBody>
       </p:sp>
@@ -17594,7 +16407,6 @@
           <a:lstStyle/>
           <a:p>
             <a:pPr algn="ctr"/>
-            <a:endParaRPr/>
           </a:p>
         </p:txBody>
       </p:sp>
@@ -17740,7 +16552,6 @@
           <a:lstStyle/>
           <a:p>
             <a:pPr algn="ctr"/>
-            <a:endParaRPr/>
           </a:p>
         </p:txBody>
       </p:sp>
@@ -17886,7 +16697,6 @@
           <a:lstStyle/>
           <a:p>
             <a:pPr algn="ctr"/>
-            <a:endParaRPr/>
           </a:p>
         </p:txBody>
       </p:sp>
@@ -18032,7 +16842,6 @@
           <a:lstStyle/>
           <a:p>
             <a:pPr algn="ctr"/>
-            <a:endParaRPr/>
           </a:p>
         </p:txBody>
       </p:sp>
@@ -18147,7 +16956,7 @@
 </file>
 
 <file path=ppt/slides/slide20.xml><?xml version="1.0" encoding="utf-8"?>
-<p:sld xmlns:a="http://schemas.openxmlformats.org/drawingml/2006/main" xmlns:r="http://schemas.openxmlformats.org/officeDocument/2006/relationships" xmlns:p="http://schemas.openxmlformats.org/presentationml/2006/main">
+<p:sld xmlns:a="http://schemas.openxmlformats.org/drawingml/2006/main" xmlns:p="http://schemas.openxmlformats.org/presentationml/2006/main" xmlns:r="http://schemas.openxmlformats.org/officeDocument/2006/relationships">
   <p:cSld>
     <p:spTree>
       <p:nvGrpSpPr>
@@ -18155,14 +16964,7 @@
         <p:cNvGrpSpPr/>
         <p:nvPr/>
       </p:nvGrpSpPr>
-      <p:grpSpPr>
-        <a:xfrm>
-          <a:off x="0" y="0"/>
-          <a:ext cx="0" cy="0"/>
-          <a:chOff x="0" y="0"/>
-          <a:chExt cx="0" cy="0"/>
-        </a:xfrm>
-      </p:grpSpPr>
+      <p:grpSpPr/>
       <p:sp>
         <p:nvSpPr>
           <p:cNvPr id="2" name="Rectangle 1"/>
@@ -18203,7 +17005,6 @@
           <a:lstStyle/>
           <a:p>
             <a:pPr algn="ctr"/>
-            <a:endParaRPr/>
           </a:p>
         </p:txBody>
       </p:sp>
@@ -18247,7 +17048,6 @@
           <a:lstStyle/>
           <a:p>
             <a:pPr algn="ctr"/>
-            <a:endParaRPr/>
           </a:p>
         </p:txBody>
       </p:sp>
@@ -18359,7 +17159,6 @@
           <a:lstStyle/>
           <a:p>
             <a:pPr algn="ctr"/>
-            <a:endParaRPr/>
           </a:p>
         </p:txBody>
       </p:sp>
@@ -18403,7 +17202,6 @@
           <a:lstStyle/>
           <a:p>
             <a:pPr algn="ctr"/>
-            <a:endParaRPr/>
           </a:p>
         </p:txBody>
       </p:sp>
@@ -18516,7 +17314,6 @@
           <a:lstStyle/>
           <a:p>
             <a:pPr algn="ctr"/>
-            <a:endParaRPr/>
           </a:p>
         </p:txBody>
       </p:sp>
@@ -18560,7 +17357,6 @@
           <a:lstStyle/>
           <a:p>
             <a:pPr algn="ctr"/>
-            <a:endParaRPr/>
           </a:p>
         </p:txBody>
       </p:sp>
@@ -18674,7 +17470,6 @@
           <a:lstStyle/>
           <a:p>
             <a:pPr algn="ctr"/>
-            <a:endParaRPr/>
           </a:p>
         </p:txBody>
       </p:sp>
@@ -18718,7 +17513,6 @@
           <a:lstStyle/>
           <a:p>
             <a:pPr algn="ctr"/>
-            <a:endParaRPr/>
           </a:p>
         </p:txBody>
       </p:sp>
@@ -18831,7 +17625,6 @@
           <a:lstStyle/>
           <a:p>
             <a:pPr algn="ctr"/>
-            <a:endParaRPr/>
           </a:p>
         </p:txBody>
       </p:sp>
@@ -18875,7 +17668,6 @@
           <a:lstStyle/>
           <a:p>
             <a:pPr algn="ctr"/>
-            <a:endParaRPr/>
           </a:p>
         </p:txBody>
       </p:sp>
@@ -18992,7 +17784,7 @@
 </file>
 
 <file path=ppt/slides/slide21.xml><?xml version="1.0" encoding="utf-8"?>
-<p:sld xmlns:a="http://schemas.openxmlformats.org/drawingml/2006/main" xmlns:r="http://schemas.openxmlformats.org/officeDocument/2006/relationships" xmlns:p="http://schemas.openxmlformats.org/presentationml/2006/main">
+<p:sld xmlns:a="http://schemas.openxmlformats.org/drawingml/2006/main" xmlns:p="http://schemas.openxmlformats.org/presentationml/2006/main" xmlns:r="http://schemas.openxmlformats.org/officeDocument/2006/relationships">
   <p:cSld>
     <p:spTree>
       <p:nvGrpSpPr>
@@ -19000,14 +17792,7 @@
         <p:cNvGrpSpPr/>
         <p:nvPr/>
       </p:nvGrpSpPr>
-      <p:grpSpPr>
-        <a:xfrm>
-          <a:off x="0" y="0"/>
-          <a:ext cx="0" cy="0"/>
-          <a:chOff x="0" y="0"/>
-          <a:chExt cx="0" cy="0"/>
-        </a:xfrm>
-      </p:grpSpPr>
+      <p:grpSpPr/>
       <p:sp>
         <p:nvSpPr>
           <p:cNvPr id="2" name="Rectangle 1"/>
@@ -19048,7 +17833,6 @@
           <a:lstStyle/>
           <a:p>
             <a:pPr algn="ctr"/>
-            <a:endParaRPr/>
           </a:p>
         </p:txBody>
       </p:sp>
@@ -19092,7 +17876,6 @@
           <a:lstStyle/>
           <a:p>
             <a:pPr algn="ctr"/>
-            <a:endParaRPr/>
           </a:p>
         </p:txBody>
       </p:sp>
@@ -19206,7 +17989,6 @@
           <a:lstStyle/>
           <a:p>
             <a:pPr algn="ctr"/>
-            <a:endParaRPr/>
           </a:p>
         </p:txBody>
       </p:sp>
@@ -19422,7 +18204,6 @@
           <a:lstStyle/>
           <a:p>
             <a:pPr algn="ctr"/>
-            <a:endParaRPr/>
           </a:p>
         </p:txBody>
       </p:sp>
@@ -19670,7 +18451,6 @@
           <a:lstStyle/>
           <a:p>
             <a:pPr algn="ctr"/>
-            <a:endParaRPr/>
           </a:p>
         </p:txBody>
       </p:sp>
@@ -19752,7 +18532,7 @@
 </file>
 
 <file path=ppt/slides/slide3.xml><?xml version="1.0" encoding="utf-8"?>
-<p:sld xmlns:a="http://schemas.openxmlformats.org/drawingml/2006/main" xmlns:r="http://schemas.openxmlformats.org/officeDocument/2006/relationships" xmlns:p="http://schemas.openxmlformats.org/presentationml/2006/main">
+<p:sld xmlns:a="http://schemas.openxmlformats.org/drawingml/2006/main" xmlns:p="http://schemas.openxmlformats.org/presentationml/2006/main" xmlns:r="http://schemas.openxmlformats.org/officeDocument/2006/relationships">
   <p:cSld>
     <p:spTree>
       <p:nvGrpSpPr>
@@ -19760,14 +18540,7 @@
         <p:cNvGrpSpPr/>
         <p:nvPr/>
       </p:nvGrpSpPr>
-      <p:grpSpPr>
-        <a:xfrm>
-          <a:off x="0" y="0"/>
-          <a:ext cx="0" cy="0"/>
-          <a:chOff x="0" y="0"/>
-          <a:chExt cx="0" cy="0"/>
-        </a:xfrm>
-      </p:grpSpPr>
+      <p:grpSpPr/>
       <p:sp>
         <p:nvSpPr>
           <p:cNvPr id="2" name="Rectangle 1"/>
@@ -19808,7 +18581,6 @@
           <a:lstStyle/>
           <a:p>
             <a:pPr algn="ctr"/>
-            <a:endParaRPr/>
           </a:p>
         </p:txBody>
       </p:sp>
@@ -19852,7 +18624,6 @@
           <a:lstStyle/>
           <a:p>
             <a:pPr algn="ctr"/>
-            <a:endParaRPr/>
           </a:p>
         </p:txBody>
       </p:sp>
@@ -19964,7 +18735,6 @@
           <a:lstStyle/>
           <a:p>
             <a:pPr algn="ctr"/>
-            <a:endParaRPr/>
           </a:p>
         </p:txBody>
       </p:sp>
@@ -20078,7 +18848,6 @@
           <a:lstStyle/>
           <a:p>
             <a:pPr algn="ctr"/>
-            <a:endParaRPr/>
           </a:p>
         </p:txBody>
       </p:sp>
@@ -20227,7 +18996,6 @@
           <a:lstStyle/>
           <a:p>
             <a:pPr algn="ctr"/>
-            <a:endParaRPr/>
           </a:p>
         </p:txBody>
       </p:sp>
@@ -20376,7 +19144,6 @@
           <a:lstStyle/>
           <a:p>
             <a:pPr algn="ctr"/>
-            <a:endParaRPr/>
           </a:p>
         </p:txBody>
       </p:sp>
@@ -20561,7 +19328,7 @@
         </p:nvGraphicFramePr>
         <p:xfrm>
           <a:off x="320040" y="4800600"/>
-          <a:ext cx="11521440" cy="1981200"/>
+          <a:ext cx="11521440" cy="1828800"/>
         </p:xfrm>
         <a:graphic>
           <a:graphicData uri="http://schemas.openxmlformats.org/drawingml/2006/table">
@@ -20570,27 +19337,9 @@
                 <a:tableStyleId>{5C22544A-7EE6-4342-B048-85BDC9FD1C3A}</a:tableStyleId>
               </a:tblPr>
               <a:tblGrid>
-                <a:gridCol w="3840480">
-                  <a:extLst>
-                    <a:ext uri="{9D8B030D-6E8A-4147-A177-3AD203B41FA5}">
-                      <a16:colId xmlns:a16="http://schemas.microsoft.com/office/drawing/2014/main" val="20000"/>
-                    </a:ext>
-                  </a:extLst>
-                </a:gridCol>
-                <a:gridCol w="3840480">
-                  <a:extLst>
-                    <a:ext uri="{9D8B030D-6E8A-4147-A177-3AD203B41FA5}">
-                      <a16:colId xmlns:a16="http://schemas.microsoft.com/office/drawing/2014/main" val="20001"/>
-                    </a:ext>
-                  </a:extLst>
-                </a:gridCol>
-                <a:gridCol w="3840480">
-                  <a:extLst>
-                    <a:ext uri="{9D8B030D-6E8A-4147-A177-3AD203B41FA5}">
-                      <a16:colId xmlns:a16="http://schemas.microsoft.com/office/drawing/2014/main" val="20002"/>
-                    </a:ext>
-                  </a:extLst>
-                </a:gridCol>
+                <a:gridCol w="3840480"/>
+                <a:gridCol w="3840480"/>
+                <a:gridCol w="3840480"/>
               </a:tblGrid>
               <a:tr h="365760">
                 <a:tc>
@@ -20600,7 +19349,7 @@
                     <a:p>
                       <a:pPr algn="ctr"/>
                       <a:r>
-                        <a:rPr sz="1000" b="1">
+                        <a:rPr b="1" sz="1000">
                           <a:solidFill>
                             <a:srgbClr val="FFFFFF"/>
                           </a:solidFill>
@@ -20622,7 +19371,7 @@
                     <a:p>
                       <a:pPr algn="ctr"/>
                       <a:r>
-                        <a:rPr sz="1000" b="1">
+                        <a:rPr b="1" sz="1000">
                           <a:solidFill>
                             <a:srgbClr val="FFFFFF"/>
                           </a:solidFill>
@@ -20644,7 +19393,7 @@
                     <a:p>
                       <a:pPr algn="ctr"/>
                       <a:r>
-                        <a:rPr sz="1000" b="1">
+                        <a:rPr b="1" sz="1000">
                           <a:solidFill>
                             <a:srgbClr val="FFFFFF"/>
                           </a:solidFill>
@@ -20659,11 +19408,6 @@
                     </a:solidFill>
                   </a:tcPr>
                 </a:tc>
-                <a:extLst>
-                  <a:ext uri="{0D108BD9-81ED-4DB2-BD59-A6C34878D82A}">
-                    <a16:rowId xmlns:a16="http://schemas.microsoft.com/office/drawing/2014/main" val="10000"/>
-                  </a:ext>
-                </a:extLst>
               </a:tr>
               <a:tr h="365760">
                 <a:tc>
@@ -20737,11 +19481,6 @@
                     </a:solidFill>
                   </a:tcPr>
                 </a:tc>
-                <a:extLst>
-                  <a:ext uri="{0D108BD9-81ED-4DB2-BD59-A6C34878D82A}">
-                    <a16:rowId xmlns:a16="http://schemas.microsoft.com/office/drawing/2014/main" val="10001"/>
-                  </a:ext>
-                </a:extLst>
               </a:tr>
               <a:tr h="365760">
                 <a:tc>
@@ -20810,11 +19549,6 @@
                     </a:solidFill>
                   </a:tcPr>
                 </a:tc>
-                <a:extLst>
-                  <a:ext uri="{0D108BD9-81ED-4DB2-BD59-A6C34878D82A}">
-                    <a16:rowId xmlns:a16="http://schemas.microsoft.com/office/drawing/2014/main" val="10002"/>
-                  </a:ext>
-                </a:extLst>
               </a:tr>
               <a:tr h="365760">
                 <a:tc>
@@ -20883,11 +19617,6 @@
                     </a:solidFill>
                   </a:tcPr>
                 </a:tc>
-                <a:extLst>
-                  <a:ext uri="{0D108BD9-81ED-4DB2-BD59-A6C34878D82A}">
-                    <a16:rowId xmlns:a16="http://schemas.microsoft.com/office/drawing/2014/main" val="10003"/>
-                  </a:ext>
-                </a:extLst>
               </a:tr>
               <a:tr h="365760">
                 <a:tc>
@@ -20956,11 +19685,6 @@
                     </a:solidFill>
                   </a:tcPr>
                 </a:tc>
-                <a:extLst>
-                  <a:ext uri="{0D108BD9-81ED-4DB2-BD59-A6C34878D82A}">
-                    <a16:rowId xmlns:a16="http://schemas.microsoft.com/office/drawing/2014/main" val="10004"/>
-                  </a:ext>
-                </a:extLst>
               </a:tr>
             </a:tbl>
           </a:graphicData>
@@ -20975,7 +19699,7 @@
 </file>
 
 <file path=ppt/slides/slide4.xml><?xml version="1.0" encoding="utf-8"?>
-<p:sld xmlns:a="http://schemas.openxmlformats.org/drawingml/2006/main" xmlns:r="http://schemas.openxmlformats.org/officeDocument/2006/relationships" xmlns:p="http://schemas.openxmlformats.org/presentationml/2006/main">
+<p:sld xmlns:a="http://schemas.openxmlformats.org/drawingml/2006/main" xmlns:p="http://schemas.openxmlformats.org/presentationml/2006/main" xmlns:r="http://schemas.openxmlformats.org/officeDocument/2006/relationships">
   <p:cSld>
     <p:spTree>
       <p:nvGrpSpPr>
@@ -20983,14 +19707,7 @@
         <p:cNvGrpSpPr/>
         <p:nvPr/>
       </p:nvGrpSpPr>
-      <p:grpSpPr>
-        <a:xfrm>
-          <a:off x="0" y="0"/>
-          <a:ext cx="0" cy="0"/>
-          <a:chOff x="0" y="0"/>
-          <a:chExt cx="0" cy="0"/>
-        </a:xfrm>
-      </p:grpSpPr>
+      <p:grpSpPr/>
       <p:sp>
         <p:nvSpPr>
           <p:cNvPr id="2" name="Rectangle 1"/>
@@ -21031,7 +19748,6 @@
           <a:lstStyle/>
           <a:p>
             <a:pPr algn="ctr"/>
-            <a:endParaRPr/>
           </a:p>
         </p:txBody>
       </p:sp>
@@ -21075,7 +19791,6 @@
           <a:lstStyle/>
           <a:p>
             <a:pPr algn="ctr"/>
-            <a:endParaRPr/>
           </a:p>
         </p:txBody>
       </p:sp>
@@ -21189,7 +19904,6 @@
           <a:lstStyle/>
           <a:p>
             <a:pPr algn="ctr"/>
-            <a:endParaRPr/>
           </a:p>
         </p:txBody>
       </p:sp>
@@ -21303,7 +20017,6 @@
           <a:lstStyle/>
           <a:p>
             <a:pPr algn="ctr"/>
-            <a:endParaRPr/>
           </a:p>
         </p:txBody>
       </p:sp>
@@ -21365,7 +20078,7 @@
           <a:p>
             <a:pPr algn="l"/>
             <a:r>
-              <a:rPr sz="1600" b="1" i="0" dirty="0">
+              <a:rPr sz="1600" b="1" i="0">
                 <a:solidFill>
                   <a:srgbClr val="1A355E"/>
                 </a:solidFill>
@@ -21417,7 +20130,6 @@
           <a:lstStyle/>
           <a:p>
             <a:pPr algn="ctr"/>
-            <a:endParaRPr/>
           </a:p>
         </p:txBody>
       </p:sp>
@@ -21479,7 +20191,7 @@
           <a:p>
             <a:pPr algn="l"/>
             <a:r>
-              <a:rPr sz="1600" b="1" i="0" dirty="0">
+              <a:rPr sz="1600" b="1" i="0">
                 <a:solidFill>
                   <a:srgbClr val="1A355E"/>
                 </a:solidFill>
@@ -21531,7 +20243,6 @@
           <a:lstStyle/>
           <a:p>
             <a:pPr algn="ctr"/>
-            <a:endParaRPr/>
           </a:p>
         </p:txBody>
       </p:sp>
@@ -21593,28 +20304,12 @@
           <a:p>
             <a:pPr algn="l"/>
             <a:r>
-              <a:rPr sz="1600" b="1" i="0" dirty="0">
+              <a:rPr sz="1600" b="1" i="0">
                 <a:solidFill>
                   <a:srgbClr val="1A355E"/>
                 </a:solidFill>
               </a:rPr>
-              <a:t>46종  |  100 </a:t>
-            </a:r>
-            <a:r>
-              <a:rPr sz="1600" b="1" i="0" dirty="0" err="1">
-                <a:solidFill>
-                  <a:srgbClr val="1A355E"/>
-                </a:solidFill>
-              </a:rPr>
-              <a:t>kVp</a:t>
-            </a:r>
-            <a:r>
-              <a:rPr sz="1600" b="1" i="0" dirty="0">
-                <a:solidFill>
-                  <a:srgbClr val="1A355E"/>
-                </a:solidFill>
-              </a:rPr>
-              <a:t> (75.3%)</a:t>
+              <a:t>46종  |  100 kVp (75.3%)</a:t>
             </a:r>
           </a:p>
         </p:txBody>
@@ -21661,7 +20356,6 @@
           <a:lstStyle/>
           <a:p>
             <a:pPr algn="ctr"/>
-            <a:endParaRPr/>
           </a:p>
         </p:txBody>
       </p:sp>
@@ -21723,7 +20417,7 @@
           <a:p>
             <a:pPr algn="l"/>
             <a:r>
-              <a:rPr sz="1600" b="1" i="0" dirty="0">
+              <a:rPr sz="1600" b="1" i="0">
                 <a:solidFill>
                   <a:srgbClr val="1A355E"/>
                 </a:solidFill>
@@ -21775,7 +20469,6 @@
           <a:lstStyle/>
           <a:p>
             <a:pPr algn="ctr"/>
-            <a:endParaRPr/>
           </a:p>
         </p:txBody>
       </p:sp>
@@ -21837,7 +20530,7 @@
           <a:p>
             <a:pPr algn="l"/>
             <a:r>
-              <a:rPr sz="1600" b="1" i="0" dirty="0">
+              <a:rPr sz="1600" b="1" i="0">
                 <a:solidFill>
                   <a:srgbClr val="1A355E"/>
                 </a:solidFill>
@@ -21900,55 +20593,13 @@
                 <a:tableStyleId>{5C22544A-7EE6-4342-B048-85BDC9FD1C3A}</a:tableStyleId>
               </a:tblPr>
               <a:tblGrid>
-                <a:gridCol w="979714">
-                  <a:extLst>
-                    <a:ext uri="{9D8B030D-6E8A-4147-A177-3AD203B41FA5}">
-                      <a16:colId xmlns:a16="http://schemas.microsoft.com/office/drawing/2014/main" val="20000"/>
-                    </a:ext>
-                  </a:extLst>
-                </a:gridCol>
-                <a:gridCol w="979714">
-                  <a:extLst>
-                    <a:ext uri="{9D8B030D-6E8A-4147-A177-3AD203B41FA5}">
-                      <a16:colId xmlns:a16="http://schemas.microsoft.com/office/drawing/2014/main" val="20001"/>
-                    </a:ext>
-                  </a:extLst>
-                </a:gridCol>
-                <a:gridCol w="979714">
-                  <a:extLst>
-                    <a:ext uri="{9D8B030D-6E8A-4147-A177-3AD203B41FA5}">
-                      <a16:colId xmlns:a16="http://schemas.microsoft.com/office/drawing/2014/main" val="20002"/>
-                    </a:ext>
-                  </a:extLst>
-                </a:gridCol>
-                <a:gridCol w="979714">
-                  <a:extLst>
-                    <a:ext uri="{9D8B030D-6E8A-4147-A177-3AD203B41FA5}">
-                      <a16:colId xmlns:a16="http://schemas.microsoft.com/office/drawing/2014/main" val="20003"/>
-                    </a:ext>
-                  </a:extLst>
-                </a:gridCol>
-                <a:gridCol w="979714">
-                  <a:extLst>
-                    <a:ext uri="{9D8B030D-6E8A-4147-A177-3AD203B41FA5}">
-                      <a16:colId xmlns:a16="http://schemas.microsoft.com/office/drawing/2014/main" val="20004"/>
-                    </a:ext>
-                  </a:extLst>
-                </a:gridCol>
-                <a:gridCol w="979714">
-                  <a:extLst>
-                    <a:ext uri="{9D8B030D-6E8A-4147-A177-3AD203B41FA5}">
-                      <a16:colId xmlns:a16="http://schemas.microsoft.com/office/drawing/2014/main" val="20005"/>
-                    </a:ext>
-                  </a:extLst>
-                </a:gridCol>
-                <a:gridCol w="979714">
-                  <a:extLst>
-                    <a:ext uri="{9D8B030D-6E8A-4147-A177-3AD203B41FA5}">
-                      <a16:colId xmlns:a16="http://schemas.microsoft.com/office/drawing/2014/main" val="20006"/>
-                    </a:ext>
-                  </a:extLst>
-                </a:gridCol>
+                <a:gridCol w="979714"/>
+                <a:gridCol w="979714"/>
+                <a:gridCol w="979714"/>
+                <a:gridCol w="979714"/>
+                <a:gridCol w="979714"/>
+                <a:gridCol w="979714"/>
+                <a:gridCol w="979714"/>
               </a:tblGrid>
               <a:tr h="411480">
                 <a:tc>
@@ -21958,7 +20609,7 @@
                     <a:p>
                       <a:pPr algn="ctr"/>
                       <a:r>
-                        <a:rPr sz="1100" b="1">
+                        <a:rPr b="1" sz="1100">
                           <a:solidFill>
                             <a:srgbClr val="FFFFFF"/>
                           </a:solidFill>
@@ -21980,7 +20631,7 @@
                     <a:p>
                       <a:pPr algn="ctr"/>
                       <a:r>
-                        <a:rPr sz="1100" b="1">
+                        <a:rPr b="1" sz="1100">
                           <a:solidFill>
                             <a:srgbClr val="FFFFFF"/>
                           </a:solidFill>
@@ -22002,7 +20653,7 @@
                     <a:p>
                       <a:pPr algn="ctr"/>
                       <a:r>
-                        <a:rPr sz="1100" b="1">
+                        <a:rPr b="1" sz="1100">
                           <a:solidFill>
                             <a:srgbClr val="FFFFFF"/>
                           </a:solidFill>
@@ -22024,7 +20675,7 @@
                     <a:p>
                       <a:pPr algn="ctr"/>
                       <a:r>
-                        <a:rPr sz="1100" b="1">
+                        <a:rPr b="1" sz="1100">
                           <a:solidFill>
                             <a:srgbClr val="FFFFFF"/>
                           </a:solidFill>
@@ -22046,7 +20697,7 @@
                     <a:p>
                       <a:pPr algn="ctr"/>
                       <a:r>
-                        <a:rPr sz="1100" b="1">
+                        <a:rPr b="1" sz="1100">
                           <a:solidFill>
                             <a:srgbClr val="FFFFFF"/>
                           </a:solidFill>
@@ -22068,7 +20719,7 @@
                     <a:p>
                       <a:pPr algn="ctr"/>
                       <a:r>
-                        <a:rPr sz="1100" b="1">
+                        <a:rPr b="1" sz="1100">
                           <a:solidFill>
                             <a:srgbClr val="FFFFFF"/>
                           </a:solidFill>
@@ -22090,7 +20741,7 @@
                     <a:p>
                       <a:pPr algn="ctr"/>
                       <a:r>
-                        <a:rPr sz="1100" b="1">
+                        <a:rPr b="1" sz="1100">
                           <a:solidFill>
                             <a:srgbClr val="FFFFFF"/>
                           </a:solidFill>
@@ -22105,11 +20756,6 @@
                     </a:solidFill>
                   </a:tcPr>
                 </a:tc>
-                <a:extLst>
-                  <a:ext uri="{0D108BD9-81ED-4DB2-BD59-A6C34878D82A}">
-                    <a16:rowId xmlns:a16="http://schemas.microsoft.com/office/drawing/2014/main" val="10000"/>
-                  </a:ext>
-                </a:extLst>
               </a:tr>
               <a:tr h="411480">
                 <a:tc>
@@ -22141,7 +20787,7 @@
                     <a:p>
                       <a:pPr algn="ctr"/>
                       <a:r>
-                        <a:rPr sz="1100" dirty="0">
+                        <a:rPr sz="1100">
                           <a:solidFill>
                             <a:srgbClr val="1A1A2E"/>
                           </a:solidFill>
@@ -22163,7 +20809,7 @@
                     <a:p>
                       <a:pPr algn="ctr"/>
                       <a:r>
-                        <a:rPr sz="1100" dirty="0">
+                        <a:rPr sz="1100">
                           <a:solidFill>
                             <a:srgbClr val="1A1A2E"/>
                           </a:solidFill>
@@ -22185,7 +20831,7 @@
                     <a:p>
                       <a:pPr algn="ctr"/>
                       <a:r>
-                        <a:rPr sz="1100" dirty="0">
+                        <a:rPr sz="1100">
                           <a:solidFill>
                             <a:srgbClr val="1A1A2E"/>
                           </a:solidFill>
@@ -22207,7 +20853,7 @@
                     <a:p>
                       <a:pPr algn="ctr"/>
                       <a:r>
-                        <a:rPr sz="1100" dirty="0">
+                        <a:rPr sz="1100">
                           <a:solidFill>
                             <a:srgbClr val="1A1A2E"/>
                           </a:solidFill>
@@ -22229,7 +20875,7 @@
                     <a:p>
                       <a:pPr algn="ctr"/>
                       <a:r>
-                        <a:rPr sz="1100" dirty="0">
+                        <a:rPr sz="1100">
                           <a:solidFill>
                             <a:srgbClr val="1A1A2E"/>
                           </a:solidFill>
@@ -22251,7 +20897,7 @@
                     <a:p>
                       <a:pPr algn="ctr"/>
                       <a:r>
-                        <a:rPr sz="1100" dirty="0">
+                        <a:rPr sz="1100">
                           <a:solidFill>
                             <a:srgbClr val="1A1A2E"/>
                           </a:solidFill>
@@ -22266,11 +20912,6 @@
                     </a:solidFill>
                   </a:tcPr>
                 </a:tc>
-                <a:extLst>
-                  <a:ext uri="{0D108BD9-81ED-4DB2-BD59-A6C34878D82A}">
-                    <a16:rowId xmlns:a16="http://schemas.microsoft.com/office/drawing/2014/main" val="10001"/>
-                  </a:ext>
-                </a:extLst>
               </a:tr>
               <a:tr h="411480">
                 <a:tc>
@@ -22412,7 +21053,7 @@
                     <a:p>
                       <a:pPr algn="ctr"/>
                       <a:r>
-                        <a:rPr sz="1100" dirty="0">
+                        <a:rPr sz="1100">
                           <a:solidFill>
                             <a:srgbClr val="1A1A2E"/>
                           </a:solidFill>
@@ -22427,11 +21068,6 @@
                     </a:solidFill>
                   </a:tcPr>
                 </a:tc>
-                <a:extLst>
-                  <a:ext uri="{0D108BD9-81ED-4DB2-BD59-A6C34878D82A}">
-                    <a16:rowId xmlns:a16="http://schemas.microsoft.com/office/drawing/2014/main" val="10002"/>
-                  </a:ext>
-                </a:extLst>
               </a:tr>
             </a:tbl>
           </a:graphicData>
@@ -22477,7 +21113,6 @@
           <a:lstStyle/>
           <a:p>
             <a:pPr algn="ctr"/>
-            <a:endParaRPr/>
           </a:p>
         </p:txBody>
       </p:sp>
@@ -22539,78 +21174,14 @@
           <a:p>
             <a:pPr algn="l"/>
             <a:r>
-              <a:rPr sz="1200" b="0" i="0" dirty="0">
+              <a:rPr sz="1200" b="0" i="0">
                 <a:solidFill>
                   <a:srgbClr val="FFFFFF"/>
                 </a:solidFill>
               </a:rPr>
-              <a:t>• </a:t>
-            </a:r>
-            <a:r>
-              <a:rPr sz="1200" b="0" i="0" dirty="0" err="1">
-                <a:solidFill>
-                  <a:srgbClr val="FFFFFF"/>
-                </a:solidFill>
-              </a:rPr>
-              <a:t>남성</a:t>
-            </a:r>
-            <a:r>
-              <a:rPr sz="1200" b="0" i="0" dirty="0">
-                <a:solidFill>
-                  <a:srgbClr val="FFFFFF"/>
-                </a:solidFill>
-              </a:rPr>
-              <a:t>: TAMA &lt; 132 cm²  →  Low Muscle (1)
-• </a:t>
-            </a:r>
-            <a:r>
-              <a:rPr sz="1200" b="0" i="0" dirty="0" err="1">
-                <a:solidFill>
-                  <a:srgbClr val="FFFFFF"/>
-                </a:solidFill>
-              </a:rPr>
-              <a:t>여성</a:t>
-            </a:r>
-            <a:r>
-              <a:rPr sz="1200" b="0" i="0" dirty="0">
-                <a:solidFill>
-                  <a:srgbClr val="FFFFFF"/>
-                </a:solidFill>
-              </a:rPr>
-              <a:t>: TAMA &lt; 95 cm²  →  Low Muscle (1)
-• </a:t>
-            </a:r>
-            <a:r>
-              <a:rPr sz="1200" b="0" i="0" dirty="0" err="1">
-                <a:solidFill>
-                  <a:srgbClr val="FFFFFF"/>
-                </a:solidFill>
-              </a:rPr>
-              <a:t>양성</a:t>
-            </a:r>
-            <a:r>
-              <a:rPr sz="1200" b="0" i="0" dirty="0">
-                <a:solidFill>
-                  <a:srgbClr val="FFFFFF"/>
-                </a:solidFill>
-              </a:rPr>
-              <a:t> </a:t>
-            </a:r>
-            <a:r>
-              <a:rPr sz="1200" b="0" i="0" dirty="0" err="1">
-                <a:solidFill>
-                  <a:srgbClr val="FFFFFF"/>
-                </a:solidFill>
-              </a:rPr>
-              <a:t>비율</a:t>
-            </a:r>
-            <a:r>
-              <a:rPr sz="1200" b="0" i="0" dirty="0">
-                <a:solidFill>
-                  <a:srgbClr val="FFFFFF"/>
-                </a:solidFill>
-              </a:rPr>
-              <a:t>: 317 / 1,269 = 25.0 %</a:t>
+              <a:t>• 남성: TAMA &lt; 132 cm²  →  Low Muscle (1)
+• 여성: TAMA &lt; 95 cm²  →  Low Muscle (1)
+• 양성 비율: 317 / 1,269 = 25.0 %</a:t>
             </a:r>
           </a:p>
         </p:txBody>
@@ -22740,7 +21311,7 @@
 </file>
 
 <file path=ppt/slides/slide5.xml><?xml version="1.0" encoding="utf-8"?>
-<p:sld xmlns:a="http://schemas.openxmlformats.org/drawingml/2006/main" xmlns:r="http://schemas.openxmlformats.org/officeDocument/2006/relationships" xmlns:p="http://schemas.openxmlformats.org/presentationml/2006/main">
+<p:sld xmlns:a="http://schemas.openxmlformats.org/drawingml/2006/main" xmlns:p="http://schemas.openxmlformats.org/presentationml/2006/main" xmlns:r="http://schemas.openxmlformats.org/officeDocument/2006/relationships">
   <p:cSld>
     <p:spTree>
       <p:nvGrpSpPr>
@@ -22748,14 +21319,7 @@
         <p:cNvGrpSpPr/>
         <p:nvPr/>
       </p:nvGrpSpPr>
-      <p:grpSpPr>
-        <a:xfrm>
-          <a:off x="0" y="0"/>
-          <a:ext cx="0" cy="0"/>
-          <a:chOff x="0" y="0"/>
-          <a:chExt cx="0" cy="0"/>
-        </a:xfrm>
-      </p:grpSpPr>
+      <p:grpSpPr/>
       <p:sp>
         <p:nvSpPr>
           <p:cNvPr id="2" name="Rectangle 1"/>
@@ -22796,7 +21360,6 @@
           <a:lstStyle/>
           <a:p>
             <a:pPr algn="ctr"/>
-            <a:endParaRPr/>
           </a:p>
         </p:txBody>
       </p:sp>
@@ -22840,7 +21403,6 @@
           <a:lstStyle/>
           <a:p>
             <a:pPr algn="ctr"/>
-            <a:endParaRPr/>
           </a:p>
         </p:txBody>
       </p:sp>
@@ -22986,7 +21548,6 @@
           <a:lstStyle/>
           <a:p>
             <a:pPr algn="ctr"/>
-            <a:endParaRPr/>
           </a:p>
         </p:txBody>
       </p:sp>
@@ -23066,7 +21627,6 @@
           <a:lstStyle/>
           <a:p>
             <a:pPr algn="ctr"/>
-            <a:endParaRPr/>
           </a:p>
         </p:txBody>
       </p:sp>
@@ -23178,7 +21738,6 @@
           <a:lstStyle/>
           <a:p>
             <a:pPr algn="ctr"/>
-            <a:endParaRPr/>
           </a:p>
         </p:txBody>
       </p:sp>
@@ -23258,7 +21817,6 @@
           <a:lstStyle/>
           <a:p>
             <a:pPr algn="ctr"/>
-            <a:endParaRPr/>
           </a:p>
         </p:txBody>
       </p:sp>
@@ -23370,7 +21928,6 @@
           <a:lstStyle/>
           <a:p>
             <a:pPr algn="ctr"/>
-            <a:endParaRPr/>
           </a:p>
         </p:txBody>
       </p:sp>
@@ -23450,7 +22007,6 @@
           <a:lstStyle/>
           <a:p>
             <a:pPr algn="ctr"/>
-            <a:endParaRPr/>
           </a:p>
         </p:txBody>
       </p:sp>
@@ -23562,7 +22118,6 @@
           <a:lstStyle/>
           <a:p>
             <a:pPr algn="ctr"/>
-            <a:endParaRPr/>
           </a:p>
         </p:txBody>
       </p:sp>
@@ -23642,7 +22197,6 @@
           <a:lstStyle/>
           <a:p>
             <a:pPr algn="ctr"/>
-            <a:endParaRPr/>
           </a:p>
         </p:txBody>
       </p:sp>
@@ -23754,7 +22308,6 @@
           <a:lstStyle/>
           <a:p>
             <a:pPr algn="ctr"/>
-            <a:endParaRPr/>
           </a:p>
         </p:txBody>
       </p:sp>
@@ -23834,7 +22387,6 @@
           <a:lstStyle/>
           <a:p>
             <a:pPr algn="ctr"/>
-            <a:endParaRPr/>
           </a:p>
         </p:txBody>
       </p:sp>
@@ -23912,7 +22464,6 @@
           <a:lstStyle/>
           <a:p>
             <a:pPr algn="ctr"/>
-            <a:endParaRPr/>
           </a:p>
         </p:txBody>
       </p:sp>
@@ -23959,7 +22510,7 @@
 </file>
 
 <file path=ppt/slides/slide6.xml><?xml version="1.0" encoding="utf-8"?>
-<p:sld xmlns:a="http://schemas.openxmlformats.org/drawingml/2006/main" xmlns:r="http://schemas.openxmlformats.org/officeDocument/2006/relationships" xmlns:p="http://schemas.openxmlformats.org/presentationml/2006/main">
+<p:sld xmlns:a="http://schemas.openxmlformats.org/drawingml/2006/main" xmlns:p="http://schemas.openxmlformats.org/presentationml/2006/main" xmlns:r="http://schemas.openxmlformats.org/officeDocument/2006/relationships">
   <p:cSld>
     <p:spTree>
       <p:nvGrpSpPr>
@@ -23967,14 +22518,7 @@
         <p:cNvGrpSpPr/>
         <p:nvPr/>
       </p:nvGrpSpPr>
-      <p:grpSpPr>
-        <a:xfrm>
-          <a:off x="0" y="0"/>
-          <a:ext cx="0" cy="0"/>
-          <a:chOff x="0" y="0"/>
-          <a:chExt cx="0" cy="0"/>
-        </a:xfrm>
-      </p:grpSpPr>
+      <p:grpSpPr/>
       <p:sp>
         <p:nvSpPr>
           <p:cNvPr id="2" name="Rectangle 1"/>
@@ -24015,7 +22559,6 @@
           <a:lstStyle/>
           <a:p>
             <a:pPr algn="ctr"/>
-            <a:endParaRPr/>
           </a:p>
         </p:txBody>
       </p:sp>
@@ -24059,7 +22602,6 @@
           <a:lstStyle/>
           <a:p>
             <a:pPr algn="ctr"/>
-            <a:endParaRPr/>
           </a:p>
         </p:txBody>
       </p:sp>
@@ -24173,7 +22715,6 @@
           <a:lstStyle/>
           <a:p>
             <a:pPr algn="ctr"/>
-            <a:endParaRPr/>
           </a:p>
         </p:txBody>
       </p:sp>
@@ -24287,7 +22828,6 @@
           <a:lstStyle/>
           <a:p>
             <a:pPr algn="ctr"/>
-            <a:endParaRPr/>
           </a:p>
         </p:txBody>
       </p:sp>
@@ -24401,7 +22941,6 @@
           <a:lstStyle/>
           <a:p>
             <a:pPr algn="ctr"/>
-            <a:endParaRPr/>
           </a:p>
         </p:txBody>
       </p:sp>
@@ -24515,7 +23054,6 @@
           <a:lstStyle/>
           <a:p>
             <a:pPr algn="ctr"/>
-            <a:endParaRPr/>
           </a:p>
         </p:txBody>
       </p:sp>
@@ -24712,7 +23250,7 @@
 </file>
 
 <file path=ppt/slides/slide7.xml><?xml version="1.0" encoding="utf-8"?>
-<p:sld xmlns:a="http://schemas.openxmlformats.org/drawingml/2006/main" xmlns:r="http://schemas.openxmlformats.org/officeDocument/2006/relationships" xmlns:p="http://schemas.openxmlformats.org/presentationml/2006/main">
+<p:sld xmlns:a="http://schemas.openxmlformats.org/drawingml/2006/main" xmlns:p="http://schemas.openxmlformats.org/presentationml/2006/main" xmlns:r="http://schemas.openxmlformats.org/officeDocument/2006/relationships">
   <p:cSld>
     <p:spTree>
       <p:nvGrpSpPr>
@@ -24720,14 +23258,7 @@
         <p:cNvGrpSpPr/>
         <p:nvPr/>
       </p:nvGrpSpPr>
-      <p:grpSpPr>
-        <a:xfrm>
-          <a:off x="0" y="0"/>
-          <a:ext cx="0" cy="0"/>
-          <a:chOff x="0" y="0"/>
-          <a:chExt cx="0" cy="0"/>
-        </a:xfrm>
-      </p:grpSpPr>
+      <p:grpSpPr/>
       <p:sp>
         <p:nvSpPr>
           <p:cNvPr id="2" name="Rectangle 1"/>
@@ -24768,7 +23299,6 @@
           <a:lstStyle/>
           <a:p>
             <a:pPr algn="ctr"/>
-            <a:endParaRPr/>
           </a:p>
         </p:txBody>
       </p:sp>
@@ -24812,7 +23342,6 @@
           <a:lstStyle/>
           <a:p>
             <a:pPr algn="ctr"/>
-            <a:endParaRPr/>
           </a:p>
         </p:txBody>
       </p:sp>
@@ -24928,7 +23457,7 @@
         </p:nvGraphicFramePr>
         <p:xfrm>
           <a:off x="320040" y="1508760"/>
-          <a:ext cx="11521440" cy="2725784"/>
+          <a:ext cx="11521440" cy="2377440"/>
         </p:xfrm>
         <a:graphic>
           <a:graphicData uri="http://schemas.openxmlformats.org/drawingml/2006/table">
@@ -24937,41 +23466,11 @@
                 <a:tableStyleId>{5C22544A-7EE6-4342-B048-85BDC9FD1C3A}</a:tableStyleId>
               </a:tblPr>
               <a:tblGrid>
-                <a:gridCol w="2304288">
-                  <a:extLst>
-                    <a:ext uri="{9D8B030D-6E8A-4147-A177-3AD203B41FA5}">
-                      <a16:colId xmlns:a16="http://schemas.microsoft.com/office/drawing/2014/main" val="20000"/>
-                    </a:ext>
-                  </a:extLst>
-                </a:gridCol>
-                <a:gridCol w="2304288">
-                  <a:extLst>
-                    <a:ext uri="{9D8B030D-6E8A-4147-A177-3AD203B41FA5}">
-                      <a16:colId xmlns:a16="http://schemas.microsoft.com/office/drawing/2014/main" val="20001"/>
-                    </a:ext>
-                  </a:extLst>
-                </a:gridCol>
-                <a:gridCol w="2304288">
-                  <a:extLst>
-                    <a:ext uri="{9D8B030D-6E8A-4147-A177-3AD203B41FA5}">
-                      <a16:colId xmlns:a16="http://schemas.microsoft.com/office/drawing/2014/main" val="20002"/>
-                    </a:ext>
-                  </a:extLst>
-                </a:gridCol>
-                <a:gridCol w="2304288">
-                  <a:extLst>
-                    <a:ext uri="{9D8B030D-6E8A-4147-A177-3AD203B41FA5}">
-                      <a16:colId xmlns:a16="http://schemas.microsoft.com/office/drawing/2014/main" val="20003"/>
-                    </a:ext>
-                  </a:extLst>
-                </a:gridCol>
-                <a:gridCol w="2304288">
-                  <a:extLst>
-                    <a:ext uri="{9D8B030D-6E8A-4147-A177-3AD203B41FA5}">
-                      <a16:colId xmlns:a16="http://schemas.microsoft.com/office/drawing/2014/main" val="20004"/>
-                    </a:ext>
-                  </a:extLst>
-                </a:gridCol>
+                <a:gridCol w="2304288"/>
+                <a:gridCol w="2304288"/>
+                <a:gridCol w="2304288"/>
+                <a:gridCol w="2304288"/>
+                <a:gridCol w="2304288"/>
               </a:tblGrid>
               <a:tr h="339634">
                 <a:tc>
@@ -24981,7 +23480,7 @@
                     <a:p>
                       <a:pPr algn="ctr"/>
                       <a:r>
-                        <a:rPr sz="1100" b="1">
+                        <a:rPr b="1" sz="1100">
                           <a:solidFill>
                             <a:srgbClr val="FFFFFF"/>
                           </a:solidFill>
@@ -25003,7 +23502,7 @@
                     <a:p>
                       <a:pPr algn="ctr"/>
                       <a:r>
-                        <a:rPr sz="1100" b="1">
+                        <a:rPr b="1" sz="1100">
                           <a:solidFill>
                             <a:srgbClr val="FFFFFF"/>
                           </a:solidFill>
@@ -25025,7 +23524,7 @@
                     <a:p>
                       <a:pPr algn="ctr"/>
                       <a:r>
-                        <a:rPr sz="1100" b="1">
+                        <a:rPr b="1" sz="1100">
                           <a:solidFill>
                             <a:srgbClr val="FFFFFF"/>
                           </a:solidFill>
@@ -25047,7 +23546,7 @@
                     <a:p>
                       <a:pPr algn="ctr"/>
                       <a:r>
-                        <a:rPr sz="1100" b="1">
+                        <a:rPr b="1" sz="1100">
                           <a:solidFill>
                             <a:srgbClr val="FFFFFF"/>
                           </a:solidFill>
@@ -25069,7 +23568,7 @@
                     <a:p>
                       <a:pPr algn="ctr"/>
                       <a:r>
-                        <a:rPr sz="1100" b="1">
+                        <a:rPr b="1" sz="1100">
                           <a:solidFill>
                             <a:srgbClr val="FFFFFF"/>
                           </a:solidFill>
@@ -25084,11 +23583,6 @@
                     </a:solidFill>
                   </a:tcPr>
                 </a:tc>
-                <a:extLst>
-                  <a:ext uri="{0D108BD9-81ED-4DB2-BD59-A6C34878D82A}">
-                    <a16:rowId xmlns:a16="http://schemas.microsoft.com/office/drawing/2014/main" val="10000"/>
-                  </a:ext>
-                </a:extLst>
               </a:tr>
               <a:tr h="339634">
                 <a:tc>
@@ -25098,7 +23592,7 @@
                     <a:p>
                       <a:pPr algn="ctr"/>
                       <a:r>
-                        <a:rPr sz="1100" dirty="0">
+                        <a:rPr sz="1100">
                           <a:solidFill>
                             <a:srgbClr val="1A1A2E"/>
                           </a:solidFill>
@@ -25120,7 +23614,7 @@
                     <a:p>
                       <a:pPr algn="ctr"/>
                       <a:r>
-                        <a:rPr sz="1100" dirty="0">
+                        <a:rPr sz="1100">
                           <a:solidFill>
                             <a:srgbClr val="1A1A2E"/>
                           </a:solidFill>
@@ -25201,11 +23695,6 @@
                     </a:solidFill>
                   </a:tcPr>
                 </a:tc>
-                <a:extLst>
-                  <a:ext uri="{0D108BD9-81ED-4DB2-BD59-A6C34878D82A}">
-                    <a16:rowId xmlns:a16="http://schemas.microsoft.com/office/drawing/2014/main" val="10001"/>
-                  </a:ext>
-                </a:extLst>
               </a:tr>
               <a:tr h="339634">
                 <a:tc>
@@ -25237,7 +23726,7 @@
                     <a:p>
                       <a:pPr algn="ctr"/>
                       <a:r>
-                        <a:rPr sz="1100" dirty="0">
+                        <a:rPr sz="1100">
                           <a:solidFill>
                             <a:srgbClr val="1A1A2E"/>
                           </a:solidFill>
@@ -25259,66 +23748,13 @@
                     <a:p>
                       <a:pPr algn="ctr"/>
                       <a:r>
-                        <a:rPr sz="1100" dirty="0" err="1">
-                          <a:solidFill>
-                            <a:srgbClr val="1A1A2E"/>
-                          </a:solidFill>
-                        </a:rPr>
-                        <a:t>변동계수</a:t>
-                      </a:r>
-                      <a:r>
-                        <a:rPr sz="1100" dirty="0">
-                          <a:solidFill>
-                            <a:srgbClr val="1A1A2E"/>
-                          </a:solidFill>
-                        </a:rPr>
-                        <a:t>(std/mean) → </a:t>
-                      </a:r>
-                      <a:r>
-                        <a:rPr sz="1100" dirty="0" err="1">
-                          <a:solidFill>
-                            <a:srgbClr val="1A1A2E"/>
-                          </a:solidFill>
-                        </a:rPr>
-                        <a:t>체형</a:t>
-                      </a:r>
-                      <a:r>
-                        <a:rPr sz="1100" dirty="0">
-                          <a:solidFill>
-                            <a:srgbClr val="1A1A2E"/>
-                          </a:solidFill>
-                        </a:rPr>
-                        <a:t> </a:t>
-                      </a:r>
-                      <a:r>
-                        <a:rPr sz="1100" dirty="0" err="1">
-                          <a:solidFill>
-                            <a:srgbClr val="1A1A2E"/>
-                          </a:solidFill>
-                        </a:rPr>
-                        <a:t>불균일성</a:t>
-                      </a:r>
-                      <a:r>
-                        <a:rPr sz="1100" dirty="0">
-                          <a:solidFill>
-                            <a:srgbClr val="1A1A2E"/>
-                          </a:solidFill>
-                        </a:rPr>
-                        <a:t> </a:t>
-                      </a:r>
-                      <a:r>
-                        <a:rPr sz="1100" dirty="0" err="1">
-                          <a:solidFill>
-                            <a:srgbClr val="1A1A2E"/>
-                          </a:solidFill>
-                        </a:rPr>
-                        <a:t>반영</a:t>
-                      </a:r>
-                      <a:endParaRPr sz="1100" dirty="0">
-                        <a:solidFill>
-                          <a:srgbClr val="1A1A2E"/>
-                        </a:solidFill>
-                      </a:endParaRPr>
+                        <a:rPr sz="1100">
+                          <a:solidFill>
+                            <a:srgbClr val="1A1A2E"/>
+                          </a:solidFill>
+                        </a:rPr>
+                        <a:t>변동계수(std/mean) → 체형 불균일성 반영</a:t>
+                      </a:r>
                     </a:p>
                   </a:txBody>
                   <a:tcPr>
@@ -25371,11 +23807,6 @@
                     </a:solidFill>
                   </a:tcPr>
                 </a:tc>
-                <a:extLst>
-                  <a:ext uri="{0D108BD9-81ED-4DB2-BD59-A6C34878D82A}">
-                    <a16:rowId xmlns:a16="http://schemas.microsoft.com/office/drawing/2014/main" val="10002"/>
-                  </a:ext>
-                </a:extLst>
               </a:tr>
               <a:tr h="339634">
                 <a:tc>
@@ -25429,90 +23860,13 @@
                     <a:p>
                       <a:pPr algn="ctr"/>
                       <a:r>
-                        <a:rPr sz="1100" dirty="0">
-                          <a:solidFill>
-                            <a:srgbClr val="1A1A2E"/>
-                          </a:solidFill>
-                        </a:rPr>
-                        <a:t>AEC </a:t>
-                      </a:r>
-                      <a:r>
-                        <a:rPr sz="1100" dirty="0" err="1">
-                          <a:solidFill>
-                            <a:srgbClr val="1A1A2E"/>
-                          </a:solidFill>
-                        </a:rPr>
-                        <a:t>곡선</a:t>
-                      </a:r>
-                      <a:r>
-                        <a:rPr sz="1100" dirty="0">
-                          <a:solidFill>
-                            <a:srgbClr val="1A1A2E"/>
-                          </a:solidFill>
-                        </a:rPr>
-                        <a:t> </a:t>
-                      </a:r>
-                      <a:r>
-                        <a:rPr sz="1100" dirty="0" err="1">
-                          <a:solidFill>
-                            <a:srgbClr val="1A1A2E"/>
-                          </a:solidFill>
-                        </a:rPr>
-                        <a:t>비대칭성</a:t>
-                      </a:r>
-                      <a:r>
-                        <a:rPr sz="1100" dirty="0">
-                          <a:solidFill>
-                            <a:srgbClr val="1A1A2E"/>
-                          </a:solidFill>
-                        </a:rPr>
-                        <a:t> → </a:t>
-                      </a:r>
-                      <a:r>
-                        <a:rPr sz="1100" dirty="0" err="1">
-                          <a:solidFill>
-                            <a:srgbClr val="1A1A2E"/>
-                          </a:solidFill>
-                        </a:rPr>
-                        <a:t>체형</a:t>
-                      </a:r>
-                      <a:r>
-                        <a:rPr sz="1100" dirty="0">
-                          <a:solidFill>
-                            <a:srgbClr val="1A1A2E"/>
-                          </a:solidFill>
-                        </a:rPr>
-                        <a:t> </a:t>
-                      </a:r>
-                      <a:r>
-                        <a:rPr sz="1100" dirty="0" err="1">
-                          <a:solidFill>
-                            <a:srgbClr val="1A1A2E"/>
-                          </a:solidFill>
-                        </a:rPr>
-                        <a:t>분포</a:t>
-                      </a:r>
-                      <a:r>
-                        <a:rPr sz="1100" dirty="0">
-                          <a:solidFill>
-                            <a:srgbClr val="1A1A2E"/>
-                          </a:solidFill>
-                        </a:rPr>
-                        <a:t> </a:t>
-                      </a:r>
-                      <a:r>
-                        <a:rPr sz="1100" dirty="0" err="1">
-                          <a:solidFill>
-                            <a:srgbClr val="1A1A2E"/>
-                          </a:solidFill>
-                        </a:rPr>
-                        <a:t>특성</a:t>
-                      </a:r>
-                      <a:endParaRPr sz="1100" dirty="0">
-                        <a:solidFill>
-                          <a:srgbClr val="1A1A2E"/>
-                        </a:solidFill>
-                      </a:endParaRPr>
+                        <a:rPr sz="1100">
+                          <a:solidFill>
+                            <a:srgbClr val="1A1A2E"/>
+                          </a:solidFill>
+                        </a:rPr>
+                        <a:t>AEC 곡선 비대칭성 → 체형 분포 특성</a:t>
+                      </a:r>
                     </a:p>
                   </a:txBody>
                   <a:tcPr>
@@ -25528,7 +23882,7 @@
                     <a:p>
                       <a:pPr algn="ctr"/>
                       <a:r>
-                        <a:rPr sz="1100" dirty="0">
+                        <a:rPr sz="1100">
                           <a:solidFill>
                             <a:srgbClr val="1A1A2E"/>
                           </a:solidFill>
@@ -25565,11 +23919,6 @@
                     </a:solidFill>
                   </a:tcPr>
                 </a:tc>
-                <a:extLst>
-                  <a:ext uri="{0D108BD9-81ED-4DB2-BD59-A6C34878D82A}">
-                    <a16:rowId xmlns:a16="http://schemas.microsoft.com/office/drawing/2014/main" val="10003"/>
-                  </a:ext>
-                </a:extLst>
               </a:tr>
               <a:tr h="339634">
                 <a:tc>
@@ -25645,7 +23994,7 @@
                     <a:p>
                       <a:pPr algn="ctr"/>
                       <a:r>
-                        <a:rPr sz="1100" dirty="0">
+                        <a:rPr sz="1100">
                           <a:solidFill>
                             <a:srgbClr val="1A1A2E"/>
                           </a:solidFill>
@@ -25667,7 +24016,7 @@
                     <a:p>
                       <a:pPr algn="ctr"/>
                       <a:r>
-                        <a:rPr sz="1100" dirty="0">
+                        <a:rPr sz="1100">
                           <a:solidFill>
                             <a:srgbClr val="1A1A2E"/>
                           </a:solidFill>
@@ -25682,11 +24031,6 @@
                     </a:solidFill>
                   </a:tcPr>
                 </a:tc>
-                <a:extLst>
-                  <a:ext uri="{0D108BD9-81ED-4DB2-BD59-A6C34878D82A}">
-                    <a16:rowId xmlns:a16="http://schemas.microsoft.com/office/drawing/2014/main" val="10004"/>
-                  </a:ext>
-                </a:extLst>
               </a:tr>
               <a:tr h="339634">
                 <a:tc>
@@ -25784,26 +24128,13 @@
                     <a:p>
                       <a:pPr algn="ctr"/>
                       <a:r>
-                        <a:rPr sz="1100" dirty="0">
-                          <a:solidFill>
-                            <a:srgbClr val="1A1A2E"/>
-                          </a:solidFill>
-                        </a:rPr>
-                        <a:t>✗ </a:t>
-                      </a:r>
-                      <a:r>
-                        <a:rPr sz="1100" dirty="0" err="1">
-                          <a:solidFill>
-                            <a:srgbClr val="1A1A2E"/>
-                          </a:solidFill>
-                        </a:rPr>
-                        <a:t>제외</a:t>
-                      </a:r>
-                      <a:endParaRPr sz="1100" dirty="0">
-                        <a:solidFill>
-                          <a:srgbClr val="1A1A2E"/>
-                        </a:solidFill>
-                      </a:endParaRPr>
+                        <a:rPr sz="1100">
+                          <a:solidFill>
+                            <a:srgbClr val="1A1A2E"/>
+                          </a:solidFill>
+                        </a:rPr>
+                        <a:t>✗ 제외</a:t>
+                      </a:r>
                     </a:p>
                   </a:txBody>
                   <a:tcPr>
@@ -25812,11 +24143,6 @@
                     </a:solidFill>
                   </a:tcPr>
                 </a:tc>
-                <a:extLst>
-                  <a:ext uri="{0D108BD9-81ED-4DB2-BD59-A6C34878D82A}">
-                    <a16:rowId xmlns:a16="http://schemas.microsoft.com/office/drawing/2014/main" val="10005"/>
-                  </a:ext>
-                </a:extLst>
               </a:tr>
               <a:tr h="339636">
                 <a:tc>
@@ -25914,26 +24240,13 @@
                     <a:p>
                       <a:pPr algn="ctr"/>
                       <a:r>
-                        <a:rPr sz="1100" dirty="0">
-                          <a:solidFill>
-                            <a:srgbClr val="1A1A2E"/>
-                          </a:solidFill>
-                        </a:rPr>
-                        <a:t>✗ </a:t>
-                      </a:r>
-                      <a:r>
-                        <a:rPr sz="1100" dirty="0" err="1">
-                          <a:solidFill>
-                            <a:srgbClr val="1A1A2E"/>
-                          </a:solidFill>
-                        </a:rPr>
-                        <a:t>제외</a:t>
-                      </a:r>
-                      <a:endParaRPr sz="1100" dirty="0">
-                        <a:solidFill>
-                          <a:srgbClr val="1A1A2E"/>
-                        </a:solidFill>
-                      </a:endParaRPr>
+                        <a:rPr sz="1100">
+                          <a:solidFill>
+                            <a:srgbClr val="1A1A2E"/>
+                          </a:solidFill>
+                        </a:rPr>
+                        <a:t>✗ 제외</a:t>
+                      </a:r>
                     </a:p>
                   </a:txBody>
                   <a:tcPr>
@@ -25942,11 +24255,6 @@
                     </a:solidFill>
                   </a:tcPr>
                 </a:tc>
-                <a:extLst>
-                  <a:ext uri="{0D108BD9-81ED-4DB2-BD59-A6C34878D82A}">
-                    <a16:rowId xmlns:a16="http://schemas.microsoft.com/office/drawing/2014/main" val="10006"/>
-                  </a:ext>
-                </a:extLst>
               </a:tr>
             </a:tbl>
           </a:graphicData>
@@ -25976,138 +24284,13 @@
           <a:p>
             <a:pPr algn="l"/>
             <a:r>
-              <a:rPr sz="1200" b="0" i="1" dirty="0">
+              <a:rPr sz="1200" b="0" i="1">
                 <a:solidFill>
                   <a:srgbClr val="FF7F27"/>
                 </a:solidFill>
               </a:rPr>
-              <a:t>⚠  p25·AUC_normalized: </a:t>
-            </a:r>
-            <a:r>
-              <a:rPr sz="1200" b="0" i="1" dirty="0" err="1">
-                <a:solidFill>
-                  <a:srgbClr val="FF7F27"/>
-                </a:solidFill>
-              </a:rPr>
-              <a:t>mean과</a:t>
-            </a:r>
-            <a:r>
-              <a:rPr sz="1200" b="0" i="1" dirty="0">
-                <a:solidFill>
-                  <a:srgbClr val="FF7F27"/>
-                </a:solidFill>
-              </a:rPr>
-              <a:t> </a:t>
-            </a:r>
-            <a:r>
-              <a:rPr sz="1200" b="0" i="1" dirty="0" err="1">
-                <a:solidFill>
-                  <a:srgbClr val="FF7F27"/>
-                </a:solidFill>
-              </a:rPr>
-              <a:t>동일</a:t>
-            </a:r>
-            <a:r>
-              <a:rPr sz="1200" b="0" i="1" dirty="0">
-                <a:solidFill>
-                  <a:srgbClr val="FF7F27"/>
-                </a:solidFill>
-              </a:rPr>
-              <a:t> amplitude </a:t>
-            </a:r>
-            <a:r>
-              <a:rPr sz="1200" b="0" i="1" dirty="0" err="1">
-                <a:solidFill>
-                  <a:srgbClr val="FF7F27"/>
-                </a:solidFill>
-              </a:rPr>
-              <a:t>그룹</a:t>
-            </a:r>
-            <a:r>
-              <a:rPr sz="1200" b="0" i="1" dirty="0">
-                <a:solidFill>
-                  <a:srgbClr val="FF7F27"/>
-                </a:solidFill>
-              </a:rPr>
-              <a:t>(r≥0.88) → </a:t>
-            </a:r>
-            <a:r>
-              <a:rPr sz="1200" b="0" i="1" dirty="0" err="1">
-                <a:solidFill>
-                  <a:srgbClr val="FF7F27"/>
-                </a:solidFill>
-              </a:rPr>
-              <a:t>다중공선성</a:t>
-            </a:r>
-            <a:r>
-              <a:rPr sz="1200" b="0" i="1" dirty="0">
-                <a:solidFill>
-                  <a:srgbClr val="FF7F27"/>
-                </a:solidFill>
-              </a:rPr>
-              <a:t> </a:t>
-            </a:r>
-            <a:r>
-              <a:rPr sz="1200" b="0" i="1" dirty="0" err="1">
-                <a:solidFill>
-                  <a:srgbClr val="FF7F27"/>
-                </a:solidFill>
-              </a:rPr>
-              <a:t>제거</a:t>
-            </a:r>
-            <a:r>
-              <a:rPr sz="1200" b="0" i="1" dirty="0">
-                <a:solidFill>
-                  <a:srgbClr val="FF7F27"/>
-                </a:solidFill>
-              </a:rPr>
-              <a:t> / </a:t>
-            </a:r>
-            <a:r>
-              <a:rPr sz="1200" b="0" i="1" dirty="0" err="1">
-                <a:solidFill>
-                  <a:srgbClr val="FF7F27"/>
-                </a:solidFill>
-              </a:rPr>
-              <a:t>mean을</a:t>
-            </a:r>
-            <a:r>
-              <a:rPr sz="1200" b="0" i="1" dirty="0">
-                <a:solidFill>
-                  <a:srgbClr val="FF7F27"/>
-                </a:solidFill>
-              </a:rPr>
-              <a:t> </a:t>
-            </a:r>
-            <a:r>
-              <a:rPr sz="1200" b="0" i="1" dirty="0" err="1">
-                <a:solidFill>
-                  <a:srgbClr val="FF7F27"/>
-                </a:solidFill>
-              </a:rPr>
-              <a:t>대표로</a:t>
-            </a:r>
-            <a:r>
-              <a:rPr sz="1200" b="0" i="1" dirty="0">
-                <a:solidFill>
-                  <a:srgbClr val="FF7F27"/>
-                </a:solidFill>
-              </a:rPr>
-              <a:t> </a:t>
-            </a:r>
-            <a:r>
-              <a:rPr sz="1200" b="0" i="1" dirty="0" err="1">
-                <a:solidFill>
-                  <a:srgbClr val="FF7F27"/>
-                </a:solidFill>
-              </a:rPr>
-              <a:t>포함</a:t>
-            </a:r>
-            <a:endParaRPr sz="1200" b="0" i="1" dirty="0">
-              <a:solidFill>
-                <a:srgbClr val="FF7F27"/>
-              </a:solidFill>
-            </a:endParaRPr>
+              <a:t>⚠  p25·AUC_normalized: mean과 동일 amplitude 그룹(r≥0.88) → 다중공선성 제거 / mean을 대표로 포함</a:t>
+            </a:r>
           </a:p>
         </p:txBody>
       </p:sp>
@@ -26236,7 +24419,7 @@
 </file>
 
 <file path=ppt/slides/slide8.xml><?xml version="1.0" encoding="utf-8"?>
-<p:sld xmlns:a="http://schemas.openxmlformats.org/drawingml/2006/main" xmlns:r="http://schemas.openxmlformats.org/officeDocument/2006/relationships" xmlns:p="http://schemas.openxmlformats.org/presentationml/2006/main">
+<p:sld xmlns:a="http://schemas.openxmlformats.org/drawingml/2006/main" xmlns:p="http://schemas.openxmlformats.org/presentationml/2006/main" xmlns:r="http://schemas.openxmlformats.org/officeDocument/2006/relationships">
   <p:cSld>
     <p:spTree>
       <p:nvGrpSpPr>
@@ -26244,14 +24427,7 @@
         <p:cNvGrpSpPr/>
         <p:nvPr/>
       </p:nvGrpSpPr>
-      <p:grpSpPr>
-        <a:xfrm>
-          <a:off x="0" y="0"/>
-          <a:ext cx="0" cy="0"/>
-          <a:chOff x="0" y="0"/>
-          <a:chExt cx="0" cy="0"/>
-        </a:xfrm>
-      </p:grpSpPr>
+      <p:grpSpPr/>
       <p:sp>
         <p:nvSpPr>
           <p:cNvPr id="2" name="Rectangle 1"/>
@@ -26292,7 +24468,6 @@
           <a:lstStyle/>
           <a:p>
             <a:pPr algn="ctr"/>
-            <a:endParaRPr/>
           </a:p>
         </p:txBody>
       </p:sp>
@@ -26336,7 +24511,6 @@
           <a:lstStyle/>
           <a:p>
             <a:pPr algn="ctr"/>
-            <a:endParaRPr/>
           </a:p>
         </p:txBody>
       </p:sp>
@@ -26506,7 +24680,6 @@
           <a:lstStyle/>
           <a:p>
             <a:pPr algn="ctr"/>
-            <a:endParaRPr/>
           </a:p>
         </p:txBody>
       </p:sp>
@@ -26624,7 +24797,6 @@
           <a:lstStyle/>
           <a:p>
             <a:pPr algn="ctr"/>
-            <a:endParaRPr/>
           </a:p>
         </p:txBody>
       </p:sp>
@@ -26686,233 +24858,17 @@
           <a:p>
             <a:pPr algn="l"/>
             <a:r>
-              <a:rPr sz="1100" b="0" i="0" dirty="0" err="1">
+              <a:rPr sz="1100" b="0" i="0">
                 <a:solidFill>
                   <a:srgbClr val="1A1A2E"/>
                 </a:solidFill>
               </a:rPr>
-              <a:t>제외된</a:t>
-            </a:r>
-            <a:r>
-              <a:rPr sz="1100" b="0" i="0" dirty="0">
-                <a:solidFill>
-                  <a:srgbClr val="1A1A2E"/>
-                </a:solidFill>
-              </a:rPr>
-              <a:t> amplitude </a:t>
-            </a:r>
-            <a:r>
-              <a:rPr sz="1100" b="0" i="0" dirty="0" err="1">
-                <a:solidFill>
-                  <a:srgbClr val="1A1A2E"/>
-                </a:solidFill>
-              </a:rPr>
-              <a:t>그룹</a:t>
-            </a:r>
-            <a:r>
-              <a:rPr sz="1100" b="0" i="0" dirty="0">
-                <a:solidFill>
-                  <a:srgbClr val="1A1A2E"/>
-                </a:solidFill>
-              </a:rPr>
-              <a:t>:
-• p25: </a:t>
-            </a:r>
-            <a:r>
-              <a:rPr sz="1100" b="0" i="0" dirty="0" err="1">
-                <a:solidFill>
-                  <a:srgbClr val="1A1A2E"/>
-                </a:solidFill>
-              </a:rPr>
-              <a:t>제외</a:t>
-            </a:r>
-            <a:r>
-              <a:rPr sz="1100" b="0" i="0" dirty="0">
-                <a:solidFill>
-                  <a:srgbClr val="1A1A2E"/>
-                </a:solidFill>
-              </a:rPr>
-              <a:t> (amplitude </a:t>
-            </a:r>
-            <a:r>
-              <a:rPr sz="1100" b="0" i="0" dirty="0" err="1">
-                <a:solidFill>
-                  <a:srgbClr val="1A1A2E"/>
-                </a:solidFill>
-              </a:rPr>
-              <a:t>중복</a:t>
-            </a:r>
-            <a:r>
-              <a:rPr sz="1100" b="0" i="0" dirty="0">
-                <a:solidFill>
-                  <a:srgbClr val="1A1A2E"/>
-                </a:solidFill>
-              </a:rPr>
-              <a:t>)
-• </a:t>
-            </a:r>
-            <a:r>
-              <a:rPr sz="1100" b="0" i="0" dirty="0" err="1">
-                <a:solidFill>
-                  <a:srgbClr val="1A1A2E"/>
-                </a:solidFill>
-              </a:rPr>
-              <a:t>AUC_normalized</a:t>
-            </a:r>
-            <a:r>
-              <a:rPr sz="1100" b="0" i="0" dirty="0">
-                <a:solidFill>
-                  <a:srgbClr val="1A1A2E"/>
-                </a:solidFill>
-              </a:rPr>
-              <a:t>: </a:t>
-            </a:r>
-            <a:r>
-              <a:rPr sz="1100" b="0" i="0" dirty="0" err="1">
-                <a:solidFill>
-                  <a:srgbClr val="1A1A2E"/>
-                </a:solidFill>
-              </a:rPr>
-              <a:t>제외</a:t>
-            </a:r>
-            <a:r>
-              <a:rPr sz="1100" b="0" i="0" dirty="0">
-                <a:solidFill>
-                  <a:srgbClr val="1A1A2E"/>
-                </a:solidFill>
-              </a:rPr>
-              <a:t> (amplitude </a:t>
-            </a:r>
-            <a:r>
-              <a:rPr sz="1100" b="0" i="0" dirty="0" err="1">
-                <a:solidFill>
-                  <a:srgbClr val="1A1A2E"/>
-                </a:solidFill>
-              </a:rPr>
-              <a:t>중복</a:t>
-            </a:r>
-            <a:r>
-              <a:rPr sz="1100" b="0" i="0" dirty="0">
-                <a:solidFill>
-                  <a:srgbClr val="1A1A2E"/>
-                </a:solidFill>
-              </a:rPr>
-              <a:t>)
-• </a:t>
-            </a:r>
-            <a:r>
-              <a:rPr sz="1100" b="0" i="0" dirty="0" err="1">
-                <a:solidFill>
-                  <a:srgbClr val="1A1A2E"/>
-                </a:solidFill>
-              </a:rPr>
-              <a:t>peak_max_height</a:t>
-            </a:r>
-            <a:r>
-              <a:rPr sz="1100" b="0" i="0" dirty="0">
-                <a:solidFill>
-                  <a:srgbClr val="1A1A2E"/>
-                </a:solidFill>
-              </a:rPr>
-              <a:t>: </a:t>
-            </a:r>
-            <a:r>
-              <a:rPr sz="1100" b="0" i="0" dirty="0" err="1">
-                <a:solidFill>
-                  <a:srgbClr val="1A1A2E"/>
-                </a:solidFill>
-              </a:rPr>
-              <a:t>제외</a:t>
-            </a:r>
-            <a:r>
-              <a:rPr sz="1100" b="0" i="0" dirty="0">
-                <a:solidFill>
-                  <a:srgbClr val="1A1A2E"/>
-                </a:solidFill>
-              </a:rPr>
-              <a:t> (amplitude </a:t>
-            </a:r>
-            <a:r>
-              <a:rPr sz="1100" b="0" i="0" dirty="0" err="1">
-                <a:solidFill>
-                  <a:srgbClr val="1A1A2E"/>
-                </a:solidFill>
-              </a:rPr>
-              <a:t>중복</a:t>
-            </a:r>
-            <a:r>
-              <a:rPr sz="1100" b="0" i="0" dirty="0">
-                <a:solidFill>
-                  <a:srgbClr val="1A1A2E"/>
-                </a:solidFill>
-              </a:rPr>
-              <a:t>)
-</a:t>
-            </a:r>
-            <a:r>
-              <a:rPr sz="1100" b="0" i="0" dirty="0" err="1">
-                <a:solidFill>
-                  <a:srgbClr val="1A1A2E"/>
-                </a:solidFill>
-              </a:rPr>
-              <a:t>선택</a:t>
-            </a:r>
-            <a:r>
-              <a:rPr sz="1100" b="0" i="0" dirty="0">
-                <a:solidFill>
-                  <a:srgbClr val="1A1A2E"/>
-                </a:solidFill>
-              </a:rPr>
-              <a:t> </a:t>
-            </a:r>
-            <a:r>
-              <a:rPr sz="1100" b="0" i="0" dirty="0" err="1">
-                <a:solidFill>
-                  <a:srgbClr val="1A1A2E"/>
-                </a:solidFill>
-              </a:rPr>
-              <a:t>대표</a:t>
-            </a:r>
-            <a:r>
-              <a:rPr sz="1100" b="0" i="0" dirty="0">
-                <a:solidFill>
-                  <a:srgbClr val="1A1A2E"/>
-                </a:solidFill>
-              </a:rPr>
-              <a:t>: mean
-(VIF </a:t>
-            </a:r>
-            <a:r>
-              <a:rPr sz="1100" b="0" i="0" dirty="0" err="1">
-                <a:solidFill>
-                  <a:srgbClr val="1A1A2E"/>
-                </a:solidFill>
-              </a:rPr>
-              <a:t>확인</a:t>
-            </a:r>
-            <a:r>
-              <a:rPr sz="1100" b="0" i="0" dirty="0">
-                <a:solidFill>
-                  <a:srgbClr val="1A1A2E"/>
-                </a:solidFill>
-              </a:rPr>
-              <a:t> 후 </a:t>
-            </a:r>
-            <a:r>
-              <a:rPr sz="1100" b="0" i="0" dirty="0" err="1">
-                <a:solidFill>
-                  <a:srgbClr val="1A1A2E"/>
-                </a:solidFill>
-              </a:rPr>
-              <a:t>포함</a:t>
-            </a:r>
-            <a:r>
-              <a:rPr sz="1100" b="0" i="0" dirty="0">
-                <a:solidFill>
-                  <a:srgbClr val="1A1A2E"/>
-                </a:solidFill>
-              </a:rPr>
-              <a:t>)</a:t>
+              <a:t>제외된 amplitude 그룹:
+• p25: 제외 (amplitude 중복)
+• AUC_normalized: 제외 (amplitude 중복)
+• peak_max_height: 제외 (amplitude 중복)
+선택 대표: mean
+(VIF 확인 후 포함)</a:t>
             </a:r>
           </a:p>
         </p:txBody>
@@ -26926,7 +24882,7 @@
 </file>
 
 <file path=ppt/slides/slide9.xml><?xml version="1.0" encoding="utf-8"?>
-<p:sld xmlns:a="http://schemas.openxmlformats.org/drawingml/2006/main" xmlns:r="http://schemas.openxmlformats.org/officeDocument/2006/relationships" xmlns:p="http://schemas.openxmlformats.org/presentationml/2006/main">
+<p:sld xmlns:a="http://schemas.openxmlformats.org/drawingml/2006/main" xmlns:p="http://schemas.openxmlformats.org/presentationml/2006/main" xmlns:r="http://schemas.openxmlformats.org/officeDocument/2006/relationships">
   <p:cSld>
     <p:spTree>
       <p:nvGrpSpPr>
@@ -26934,14 +24890,7 @@
         <p:cNvGrpSpPr/>
         <p:nvPr/>
       </p:nvGrpSpPr>
-      <p:grpSpPr>
-        <a:xfrm>
-          <a:off x="0" y="0"/>
-          <a:ext cx="0" cy="0"/>
-          <a:chOff x="0" y="0"/>
-          <a:chExt cx="0" cy="0"/>
-        </a:xfrm>
-      </p:grpSpPr>
+      <p:grpSpPr/>
       <p:sp>
         <p:nvSpPr>
           <p:cNvPr id="2" name="Rectangle 1"/>
@@ -26982,7 +24931,6 @@
           <a:lstStyle/>
           <a:p>
             <a:pPr algn="ctr"/>
-            <a:endParaRPr/>
           </a:p>
         </p:txBody>
       </p:sp>
@@ -27026,7 +24974,6 @@
           <a:lstStyle/>
           <a:p>
             <a:pPr algn="ctr"/>
-            <a:endParaRPr/>
           </a:p>
         </p:txBody>
       </p:sp>
@@ -27142,7 +25089,7 @@
         </p:nvGraphicFramePr>
         <p:xfrm>
           <a:off x="320040" y="1508760"/>
-          <a:ext cx="5486400" cy="1962912"/>
+          <a:ext cx="5486400" cy="1920240"/>
         </p:xfrm>
         <a:graphic>
           <a:graphicData uri="http://schemas.openxmlformats.org/drawingml/2006/table">
@@ -27151,20 +25098,8 @@
                 <a:tableStyleId>{5C22544A-7EE6-4342-B048-85BDC9FD1C3A}</a:tableStyleId>
               </a:tblPr>
               <a:tblGrid>
-                <a:gridCol w="2743200">
-                  <a:extLst>
-                    <a:ext uri="{9D8B030D-6E8A-4147-A177-3AD203B41FA5}">
-                      <a16:colId xmlns:a16="http://schemas.microsoft.com/office/drawing/2014/main" val="20000"/>
-                    </a:ext>
-                  </a:extLst>
-                </a:gridCol>
-                <a:gridCol w="2743200">
-                  <a:extLst>
-                    <a:ext uri="{9D8B030D-6E8A-4147-A177-3AD203B41FA5}">
-                      <a16:colId xmlns:a16="http://schemas.microsoft.com/office/drawing/2014/main" val="20001"/>
-                    </a:ext>
-                  </a:extLst>
-                </a:gridCol>
+                <a:gridCol w="2743200"/>
+                <a:gridCol w="2743200"/>
               </a:tblGrid>
               <a:tr h="384048">
                 <a:tc>
@@ -27174,7 +25109,7 @@
                     <a:p>
                       <a:pPr algn="ctr"/>
                       <a:r>
-                        <a:rPr sz="1100" b="1">
+                        <a:rPr b="1" sz="1100">
                           <a:solidFill>
                             <a:srgbClr val="FFFFFF"/>
                           </a:solidFill>
@@ -27196,7 +25131,7 @@
                     <a:p>
                       <a:pPr algn="ctr"/>
                       <a:r>
-                        <a:rPr sz="1100" b="1">
+                        <a:rPr b="1" sz="1100">
                           <a:solidFill>
                             <a:srgbClr val="FFFFFF"/>
                           </a:solidFill>
@@ -27211,11 +25146,6 @@
                     </a:solidFill>
                   </a:tcPr>
                 </a:tc>
-                <a:extLst>
-                  <a:ext uri="{0D108BD9-81ED-4DB2-BD59-A6C34878D82A}">
-                    <a16:rowId xmlns:a16="http://schemas.microsoft.com/office/drawing/2014/main" val="10000"/>
-                  </a:ext>
-                </a:extLst>
               </a:tr>
               <a:tr h="384048">
                 <a:tc>
@@ -27262,11 +25192,6 @@
                     </a:solidFill>
                   </a:tcPr>
                 </a:tc>
-                <a:extLst>
-                  <a:ext uri="{0D108BD9-81ED-4DB2-BD59-A6C34878D82A}">
-                    <a16:rowId xmlns:a16="http://schemas.microsoft.com/office/drawing/2014/main" val="10001"/>
-                  </a:ext>
-                </a:extLst>
               </a:tr>
               <a:tr h="384048">
                 <a:tc>
@@ -27313,11 +25238,6 @@
                     </a:solidFill>
                   </a:tcPr>
                 </a:tc>
-                <a:extLst>
-                  <a:ext uri="{0D108BD9-81ED-4DB2-BD59-A6C34878D82A}">
-                    <a16:rowId xmlns:a16="http://schemas.microsoft.com/office/drawing/2014/main" val="10002"/>
-                  </a:ext>
-                </a:extLst>
               </a:tr>
               <a:tr h="384048">
                 <a:tc>
@@ -27364,11 +25284,6 @@
                     </a:solidFill>
                   </a:tcPr>
                 </a:tc>
-                <a:extLst>
-                  <a:ext uri="{0D108BD9-81ED-4DB2-BD59-A6C34878D82A}">
-                    <a16:rowId xmlns:a16="http://schemas.microsoft.com/office/drawing/2014/main" val="10003"/>
-                  </a:ext>
-                </a:extLst>
               </a:tr>
               <a:tr h="384048">
                 <a:tc>
@@ -27415,11 +25330,6 @@
                     </a:solidFill>
                   </a:tcPr>
                 </a:tc>
-                <a:extLst>
-                  <a:ext uri="{0D108BD9-81ED-4DB2-BD59-A6C34878D82A}">
-                    <a16:rowId xmlns:a16="http://schemas.microsoft.com/office/drawing/2014/main" val="10004"/>
-                  </a:ext>
-                </a:extLst>
               </a:tr>
             </a:tbl>
           </a:graphicData>
@@ -27501,7 +25411,6 @@
           <a:lstStyle/>
           <a:p>
             <a:pPr algn="ctr"/>
-            <a:endParaRPr/>
           </a:p>
         </p:txBody>
       </p:sp>
@@ -27616,7 +25525,6 @@
           <a:lstStyle/>
           <a:p>
             <a:pPr algn="ctr"/>
-            <a:endParaRPr/>
           </a:p>
         </p:txBody>
       </p:sp>
@@ -27742,20 +25650,8 @@
                 <a:tableStyleId>{5C22544A-7EE6-4342-B048-85BDC9FD1C3A}</a:tableStyleId>
               </a:tblPr>
               <a:tblGrid>
-                <a:gridCol w="5760720">
-                  <a:extLst>
-                    <a:ext uri="{9D8B030D-6E8A-4147-A177-3AD203B41FA5}">
-                      <a16:colId xmlns:a16="http://schemas.microsoft.com/office/drawing/2014/main" val="20000"/>
-                    </a:ext>
-                  </a:extLst>
-                </a:gridCol>
-                <a:gridCol w="5760720">
-                  <a:extLst>
-                    <a:ext uri="{9D8B030D-6E8A-4147-A177-3AD203B41FA5}">
-                      <a16:colId xmlns:a16="http://schemas.microsoft.com/office/drawing/2014/main" val="20001"/>
-                    </a:ext>
-                  </a:extLst>
-                </a:gridCol>
+                <a:gridCol w="5760720"/>
+                <a:gridCol w="5760720"/>
               </a:tblGrid>
               <a:tr h="384048">
                 <a:tc>
@@ -27765,7 +25661,7 @@
                     <a:p>
                       <a:pPr algn="ctr"/>
                       <a:r>
-                        <a:rPr sz="1100" b="1">
+                        <a:rPr b="1" sz="1100">
                           <a:solidFill>
                             <a:srgbClr val="FFFFFF"/>
                           </a:solidFill>
@@ -27787,7 +25683,7 @@
                     <a:p>
                       <a:pPr algn="ctr"/>
                       <a:r>
-                        <a:rPr sz="1100" b="1">
+                        <a:rPr b="1" sz="1100">
                           <a:solidFill>
                             <a:srgbClr val="FFFFFF"/>
                           </a:solidFill>
@@ -27802,11 +25698,6 @@
                     </a:solidFill>
                   </a:tcPr>
                 </a:tc>
-                <a:extLst>
-                  <a:ext uri="{0D108BD9-81ED-4DB2-BD59-A6C34878D82A}">
-                    <a16:rowId xmlns:a16="http://schemas.microsoft.com/office/drawing/2014/main" val="10000"/>
-                  </a:ext>
-                </a:extLst>
               </a:tr>
               <a:tr h="384048">
                 <a:tc>
@@ -27853,11 +25744,6 @@
                     </a:solidFill>
                   </a:tcPr>
                 </a:tc>
-                <a:extLst>
-                  <a:ext uri="{0D108BD9-81ED-4DB2-BD59-A6C34878D82A}">
-                    <a16:rowId xmlns:a16="http://schemas.microsoft.com/office/drawing/2014/main" val="10001"/>
-                  </a:ext>
-                </a:extLst>
               </a:tr>
               <a:tr h="384048">
                 <a:tc>
@@ -27904,11 +25790,6 @@
                     </a:solidFill>
                   </a:tcPr>
                 </a:tc>
-                <a:extLst>
-                  <a:ext uri="{0D108BD9-81ED-4DB2-BD59-A6C34878D82A}">
-                    <a16:rowId xmlns:a16="http://schemas.microsoft.com/office/drawing/2014/main" val="10002"/>
-                  </a:ext>
-                </a:extLst>
               </a:tr>
               <a:tr h="384048">
                 <a:tc>
@@ -27955,11 +25836,6 @@
                     </a:solidFill>
                   </a:tcPr>
                 </a:tc>
-                <a:extLst>
-                  <a:ext uri="{0D108BD9-81ED-4DB2-BD59-A6C34878D82A}">
-                    <a16:rowId xmlns:a16="http://schemas.microsoft.com/office/drawing/2014/main" val="10003"/>
-                  </a:ext>
-                </a:extLst>
               </a:tr>
               <a:tr h="384048">
                 <a:tc>
@@ -28006,11 +25882,6 @@
                     </a:solidFill>
                   </a:tcPr>
                 </a:tc>
-                <a:extLst>
-                  <a:ext uri="{0D108BD9-81ED-4DB2-BD59-A6C34878D82A}">
-                    <a16:rowId xmlns:a16="http://schemas.microsoft.com/office/drawing/2014/main" val="10004"/>
-                  </a:ext>
-                </a:extLst>
               </a:tr>
             </a:tbl>
           </a:graphicData>
